--- a/slides/Influenza_Microbiome_ML_Overview.pptx
+++ b/slides/Influenza_Microbiome_ML_Overview.pptx
@@ -3778,7 +3778,7 @@
                 <a:ea typeface="Calibri" pitchFamily="34" charset="-122"/>
                 <a:cs typeface="Calibri" pitchFamily="34" charset="-120"/>
               </a:rPr>
-              <a:t>260 wild ducks  ·  70 microbial features  ·  6 models compared</a:t>
+              <a:t>260 wild ducks  ·  70 microbial features  ·  17 models compared</a:t>
             </a:r>
             <a:endParaRPr lang="en-US" sz="1300" dirty="0"/>
           </a:p>
@@ -23458,7 +23458,7 @@
                 <a:ea typeface="Calibri" pitchFamily="34" charset="-122"/>
                 <a:cs typeface="Calibri" pitchFamily="34" charset="-120"/>
               </a:rPr>
-              <a:t>Nested cross-validation with all preprocessing fitted inside training folds; six models compared on identical splits; three independent feature-ranking methods cross-checked against each other.</a:t>
+              <a:t>Nested cross-validation with all preprocessing fitted inside training folds; seventeen models compared on identical splits; three independent feature-ranking methods cross-checked against each other.</a:t>
             </a:r>
             <a:endParaRPr lang="en-US" sz="1200" dirty="0"/>
           </a:p>

--- a/slides/Influenza_Microbiome_ML_Overview.pptx
+++ b/slides/Influenza_Microbiome_ML_Overview.pptx
@@ -7200,7 +7200,7 @@
                 <a:ea typeface="Georgia" pitchFamily="34" charset="-122"/>
                 <a:cs typeface="Georgia" pitchFamily="34" charset="-120"/>
               </a:rPr>
-              <a:t>Seventeen Models on Identical Folds</a:t>
+              <a:t>Seventeen Models, Four of Them Tied</a:t>
             </a:r>
             <a:endParaRPr lang="en-US" sz="3000" dirty="0"/>
           </a:p>
@@ -9130,7 +9130,7 @@
                         <a:buNone/>
                       </a:pPr>
                       <a:r>
-                        <a:rPr lang="en-US" sz="1000" dirty="0">
+                        <a:rPr lang="en-US" sz="1150" b="1" dirty="0">
                           <a:solidFill>
                             <a:srgbClr val="16252C"/>
                           </a:solidFill>
@@ -9140,7 +9140,7 @@
                         </a:rPr>
                         <a:t>Ensemble (soft-vote)</a:t>
                       </a:r>
-                      <a:endParaRPr lang="en-US" sz="1000" dirty="0">
+                      <a:endParaRPr lang="en-US" sz="1150" dirty="0">
                         <a:latin typeface="Calibri" charset="0"/>
                         <a:ea typeface="Calibri" charset="0"/>
                         <a:cs typeface="Calibri" charset="0"/>
@@ -9184,6 +9184,9 @@
                       <a:headEnd type="none" w="med" len="med"/>
                       <a:tailEnd type="none" w="med" len="med"/>
                     </a:lnB>
+                    <a:solidFill>
+                      <a:srgbClr val="E4F0F0"/>
+                    </a:solidFill>
                   </a:tcPr>
                 </a:tc>
                 <a:tc>
@@ -9195,7 +9198,7 @@
                         <a:buNone/>
                       </a:pPr>
                       <a:r>
-                        <a:rPr lang="en-US" sz="1000" dirty="0">
+                        <a:rPr lang="en-US" sz="1150" b="1" dirty="0">
                           <a:solidFill>
                             <a:srgbClr val="16252C"/>
                           </a:solidFill>
@@ -9205,7 +9208,7 @@
                         </a:rPr>
                         <a:t>0.766</a:t>
                       </a:r>
-                      <a:endParaRPr lang="en-US" sz="1000" dirty="0">
+                      <a:endParaRPr lang="en-US" sz="1150" dirty="0">
                         <a:latin typeface="Calibri" charset="0"/>
                         <a:ea typeface="Calibri" charset="0"/>
                         <a:cs typeface="Calibri" charset="0"/>
@@ -9249,6 +9252,9 @@
                       <a:headEnd type="none" w="med" len="med"/>
                       <a:tailEnd type="none" w="med" len="med"/>
                     </a:lnB>
+                    <a:solidFill>
+                      <a:srgbClr val="E4F0F0"/>
+                    </a:solidFill>
                   </a:tcPr>
                 </a:tc>
                 <a:tc>
@@ -9260,7 +9266,7 @@
                         <a:buNone/>
                       </a:pPr>
                       <a:r>
-                        <a:rPr lang="en-US" sz="1000" dirty="0">
+                        <a:rPr lang="en-US" sz="1150" b="1" dirty="0">
                           <a:solidFill>
                             <a:srgbClr val="16252C"/>
                           </a:solidFill>
@@ -9270,7 +9276,7 @@
                         </a:rPr>
                         <a:t>0.756</a:t>
                       </a:r>
-                      <a:endParaRPr lang="en-US" sz="1000" dirty="0">
+                      <a:endParaRPr lang="en-US" sz="1150" dirty="0">
                         <a:latin typeface="Calibri" charset="0"/>
                         <a:ea typeface="Calibri" charset="0"/>
                         <a:cs typeface="Calibri" charset="0"/>
@@ -9314,6 +9320,9 @@
                       <a:headEnd type="none" w="med" len="med"/>
                       <a:tailEnd type="none" w="med" len="med"/>
                     </a:lnB>
+                    <a:solidFill>
+                      <a:srgbClr val="E4F0F0"/>
+                    </a:solidFill>
                   </a:tcPr>
                 </a:tc>
                 <a:tc>
@@ -9325,7 +9334,7 @@
                         <a:buNone/>
                       </a:pPr>
                       <a:r>
-                        <a:rPr lang="en-US" sz="1000" dirty="0">
+                        <a:rPr lang="en-US" sz="1150" b="1" dirty="0">
                           <a:solidFill>
                             <a:srgbClr val="16252C"/>
                           </a:solidFill>
@@ -9335,7 +9344,7 @@
                         </a:rPr>
                         <a:t>0.836</a:t>
                       </a:r>
-                      <a:endParaRPr lang="en-US" sz="1000" dirty="0">
+                      <a:endParaRPr lang="en-US" sz="1150" dirty="0">
                         <a:latin typeface="Calibri" charset="0"/>
                         <a:ea typeface="Calibri" charset="0"/>
                         <a:cs typeface="Calibri" charset="0"/>
@@ -9379,6 +9388,9 @@
                       <a:headEnd type="none" w="med" len="med"/>
                       <a:tailEnd type="none" w="med" len="med"/>
                     </a:lnB>
+                    <a:solidFill>
+                      <a:srgbClr val="E4F0F0"/>
+                    </a:solidFill>
                   </a:tcPr>
                 </a:tc>
                 <a:tc>
@@ -9390,7 +9402,7 @@
                         <a:buNone/>
                       </a:pPr>
                       <a:r>
-                        <a:rPr lang="en-US" sz="1000" dirty="0">
+                        <a:rPr lang="en-US" sz="1150" b="1" dirty="0">
                           <a:solidFill>
                             <a:srgbClr val="16252C"/>
                           </a:solidFill>
@@ -9400,7 +9412,7 @@
                         </a:rPr>
                         <a:t>0.873</a:t>
                       </a:r>
-                      <a:endParaRPr lang="en-US" sz="1000" dirty="0">
+                      <a:endParaRPr lang="en-US" sz="1150" dirty="0">
                         <a:latin typeface="Calibri" charset="0"/>
                         <a:ea typeface="Calibri" charset="0"/>
                         <a:cs typeface="Calibri" charset="0"/>
@@ -9444,6 +9456,9 @@
                       <a:headEnd type="none" w="med" len="med"/>
                       <a:tailEnd type="none" w="med" len="med"/>
                     </a:lnB>
+                    <a:solidFill>
+                      <a:srgbClr val="E4F0F0"/>
+                    </a:solidFill>
                   </a:tcPr>
                 </a:tc>
                 <a:tc>
@@ -9455,7 +9470,7 @@
                         <a:buNone/>
                       </a:pPr>
                       <a:r>
-                        <a:rPr lang="en-US" sz="1000" dirty="0">
+                        <a:rPr lang="en-US" sz="1150" b="1" dirty="0">
                           <a:solidFill>
                             <a:srgbClr val="16252C"/>
                           </a:solidFill>
@@ -9465,7 +9480,7 @@
                         </a:rPr>
                         <a:t>0.818</a:t>
                       </a:r>
-                      <a:endParaRPr lang="en-US" sz="1000" dirty="0">
+                      <a:endParaRPr lang="en-US" sz="1150" dirty="0">
                         <a:latin typeface="Calibri" charset="0"/>
                         <a:ea typeface="Calibri" charset="0"/>
                         <a:cs typeface="Calibri" charset="0"/>
@@ -9509,6 +9524,9 @@
                       <a:headEnd type="none" w="med" len="med"/>
                       <a:tailEnd type="none" w="med" len="med"/>
                     </a:lnB>
+                    <a:solidFill>
+                      <a:srgbClr val="E4F0F0"/>
+                    </a:solidFill>
                   </a:tcPr>
                 </a:tc>
                 <a:tc>
@@ -9520,7 +9538,7 @@
                         <a:buNone/>
                       </a:pPr>
                       <a:r>
-                        <a:rPr lang="en-US" sz="1000" dirty="0">
+                        <a:rPr lang="en-US" sz="1150" b="1" dirty="0">
                           <a:solidFill>
                             <a:srgbClr val="16252C"/>
                           </a:solidFill>
@@ -9530,7 +9548,7 @@
                         </a:rPr>
                         <a:t>0.694</a:t>
                       </a:r>
-                      <a:endParaRPr lang="en-US" sz="1000" dirty="0">
+                      <a:endParaRPr lang="en-US" sz="1150" dirty="0">
                         <a:latin typeface="Calibri" charset="0"/>
                         <a:ea typeface="Calibri" charset="0"/>
                         <a:cs typeface="Calibri" charset="0"/>
@@ -9574,6 +9592,9 @@
                       <a:headEnd type="none" w="med" len="med"/>
                       <a:tailEnd type="none" w="med" len="med"/>
                     </a:lnB>
+                    <a:solidFill>
+                      <a:srgbClr val="E4F0F0"/>
+                    </a:solidFill>
                   </a:tcPr>
                 </a:tc>
                 <a:tc>
@@ -9585,7 +9606,7 @@
                         <a:buNone/>
                       </a:pPr>
                       <a:r>
-                        <a:rPr lang="en-US" sz="1000" dirty="0">
+                        <a:rPr lang="en-US" sz="1150" b="1" dirty="0">
                           <a:solidFill>
                             <a:srgbClr val="16252C"/>
                           </a:solidFill>
@@ -9595,7 +9616,7 @@
                         </a:rPr>
                         <a:t>0.802</a:t>
                       </a:r>
-                      <a:endParaRPr lang="en-US" sz="1000" dirty="0">
+                      <a:endParaRPr lang="en-US" sz="1150" dirty="0">
                         <a:latin typeface="Calibri" charset="0"/>
                         <a:ea typeface="Calibri" charset="0"/>
                         <a:cs typeface="Calibri" charset="0"/>
@@ -9639,6 +9660,9 @@
                       <a:headEnd type="none" w="med" len="med"/>
                       <a:tailEnd type="none" w="med" len="med"/>
                     </a:lnB>
+                    <a:solidFill>
+                      <a:srgbClr val="E4F0F0"/>
+                    </a:solidFill>
                   </a:tcPr>
                 </a:tc>
                 <a:tc>
@@ -9650,7 +9674,7 @@
                         <a:buNone/>
                       </a:pPr>
                       <a:r>
-                        <a:rPr lang="en-US" sz="1000" dirty="0">
+                        <a:rPr lang="en-US" sz="1150" b="1" dirty="0">
                           <a:solidFill>
                             <a:srgbClr val="16252C"/>
                           </a:solidFill>
@@ -9660,7 +9684,7 @@
                         </a:rPr>
                         <a:t>0.521</a:t>
                       </a:r>
-                      <a:endParaRPr lang="en-US" sz="1000" dirty="0">
+                      <a:endParaRPr lang="en-US" sz="1150" dirty="0">
                         <a:latin typeface="Calibri" charset="0"/>
                         <a:ea typeface="Calibri" charset="0"/>
                         <a:cs typeface="Calibri" charset="0"/>
@@ -9704,6 +9728,9 @@
                       <a:headEnd type="none" w="med" len="med"/>
                       <a:tailEnd type="none" w="med" len="med"/>
                     </a:lnB>
+                    <a:solidFill>
+                      <a:srgbClr val="E4F0F0"/>
+                    </a:solidFill>
                   </a:tcPr>
                 </a:tc>
               </a:tr>
@@ -9717,7 +9744,7 @@
                         <a:buNone/>
                       </a:pPr>
                       <a:r>
-                        <a:rPr lang="en-US" sz="1000" dirty="0">
+                        <a:rPr lang="en-US" sz="1150" b="1" dirty="0">
                           <a:solidFill>
                             <a:srgbClr val="16252C"/>
                           </a:solidFill>
@@ -9727,7 +9754,7 @@
                         </a:rPr>
                         <a:t>SVM-poly</a:t>
                       </a:r>
-                      <a:endParaRPr lang="en-US" sz="1000" dirty="0">
+                      <a:endParaRPr lang="en-US" sz="1150" dirty="0">
                         <a:latin typeface="Calibri" charset="0"/>
                         <a:ea typeface="Calibri" charset="0"/>
                         <a:cs typeface="Calibri" charset="0"/>
@@ -9771,6 +9798,9 @@
                       <a:headEnd type="none" w="med" len="med"/>
                       <a:tailEnd type="none" w="med" len="med"/>
                     </a:lnB>
+                    <a:solidFill>
+                      <a:srgbClr val="E4F0F0"/>
+                    </a:solidFill>
                   </a:tcPr>
                 </a:tc>
                 <a:tc>
@@ -9782,7 +9812,7 @@
                         <a:buNone/>
                       </a:pPr>
                       <a:r>
-                        <a:rPr lang="en-US" sz="1000" dirty="0">
+                        <a:rPr lang="en-US" sz="1150" b="1" dirty="0">
                           <a:solidFill>
                             <a:srgbClr val="16252C"/>
                           </a:solidFill>
@@ -9792,7 +9822,7 @@
                         </a:rPr>
                         <a:t>0.748</a:t>
                       </a:r>
-                      <a:endParaRPr lang="en-US" sz="1000" dirty="0">
+                      <a:endParaRPr lang="en-US" sz="1150" dirty="0">
                         <a:latin typeface="Calibri" charset="0"/>
                         <a:ea typeface="Calibri" charset="0"/>
                         <a:cs typeface="Calibri" charset="0"/>
@@ -9836,6 +9866,9 @@
                       <a:headEnd type="none" w="med" len="med"/>
                       <a:tailEnd type="none" w="med" len="med"/>
                     </a:lnB>
+                    <a:solidFill>
+                      <a:srgbClr val="E4F0F0"/>
+                    </a:solidFill>
                   </a:tcPr>
                 </a:tc>
                 <a:tc>
@@ -9847,7 +9880,7 @@
                         <a:buNone/>
                       </a:pPr>
                       <a:r>
-                        <a:rPr lang="en-US" sz="1000" dirty="0">
+                        <a:rPr lang="en-US" sz="1150" b="1" dirty="0">
                           <a:solidFill>
                             <a:srgbClr val="16252C"/>
                           </a:solidFill>
@@ -9857,7 +9890,7 @@
                         </a:rPr>
                         <a:t>0.728</a:t>
                       </a:r>
-                      <a:endParaRPr lang="en-US" sz="1000" dirty="0">
+                      <a:endParaRPr lang="en-US" sz="1150" dirty="0">
                         <a:latin typeface="Calibri" charset="0"/>
                         <a:ea typeface="Calibri" charset="0"/>
                         <a:cs typeface="Calibri" charset="0"/>
@@ -9901,6 +9934,9 @@
                       <a:headEnd type="none" w="med" len="med"/>
                       <a:tailEnd type="none" w="med" len="med"/>
                     </a:lnB>
+                    <a:solidFill>
+                      <a:srgbClr val="E4F0F0"/>
+                    </a:solidFill>
                   </a:tcPr>
                 </a:tc>
                 <a:tc>
@@ -9912,7 +9948,7 @@
                         <a:buNone/>
                       </a:pPr>
                       <a:r>
-                        <a:rPr lang="en-US" sz="1000" dirty="0">
+                        <a:rPr lang="en-US" sz="1150" b="1" dirty="0">
                           <a:solidFill>
                             <a:srgbClr val="16252C"/>
                           </a:solidFill>
@@ -9922,7 +9958,7 @@
                         </a:rPr>
                         <a:t>0.834</a:t>
                       </a:r>
-                      <a:endParaRPr lang="en-US" sz="1000" dirty="0">
+                      <a:endParaRPr lang="en-US" sz="1150" dirty="0">
                         <a:latin typeface="Calibri" charset="0"/>
                         <a:ea typeface="Calibri" charset="0"/>
                         <a:cs typeface="Calibri" charset="0"/>
@@ -9966,6 +10002,9 @@
                       <a:headEnd type="none" w="med" len="med"/>
                       <a:tailEnd type="none" w="med" len="med"/>
                     </a:lnB>
+                    <a:solidFill>
+                      <a:srgbClr val="E4F0F0"/>
+                    </a:solidFill>
                   </a:tcPr>
                 </a:tc>
                 <a:tc>
@@ -9977,7 +10016,7 @@
                         <a:buNone/>
                       </a:pPr>
                       <a:r>
-                        <a:rPr lang="en-US" sz="1000" dirty="0">
+                        <a:rPr lang="en-US" sz="1150" b="1" dirty="0">
                           <a:solidFill>
                             <a:srgbClr val="16252C"/>
                           </a:solidFill>
@@ -9987,7 +10026,7 @@
                         </a:rPr>
                         <a:t>0.861</a:t>
                       </a:r>
-                      <a:endParaRPr lang="en-US" sz="1000" dirty="0">
+                      <a:endParaRPr lang="en-US" sz="1150" dirty="0">
                         <a:latin typeface="Calibri" charset="0"/>
                         <a:ea typeface="Calibri" charset="0"/>
                         <a:cs typeface="Calibri" charset="0"/>
@@ -10031,6 +10070,9 @@
                       <a:headEnd type="none" w="med" len="med"/>
                       <a:tailEnd type="none" w="med" len="med"/>
                     </a:lnB>
+                    <a:solidFill>
+                      <a:srgbClr val="E4F0F0"/>
+                    </a:solidFill>
                   </a:tcPr>
                 </a:tc>
                 <a:tc>
@@ -10042,7 +10084,7 @@
                         <a:buNone/>
                       </a:pPr>
                       <a:r>
-                        <a:rPr lang="en-US" sz="1000" dirty="0">
+                        <a:rPr lang="en-US" sz="1150" b="1" dirty="0">
                           <a:solidFill>
                             <a:srgbClr val="16252C"/>
                           </a:solidFill>
@@ -10052,7 +10094,7 @@
                         </a:rPr>
                         <a:t>0.853</a:t>
                       </a:r>
-                      <a:endParaRPr lang="en-US" sz="1000" dirty="0">
+                      <a:endParaRPr lang="en-US" sz="1150" dirty="0">
                         <a:latin typeface="Calibri" charset="0"/>
                         <a:ea typeface="Calibri" charset="0"/>
                         <a:cs typeface="Calibri" charset="0"/>
@@ -10096,6 +10138,9 @@
                       <a:headEnd type="none" w="med" len="med"/>
                       <a:tailEnd type="none" w="med" len="med"/>
                     </a:lnB>
+                    <a:solidFill>
+                      <a:srgbClr val="E4F0F0"/>
+                    </a:solidFill>
                   </a:tcPr>
                 </a:tc>
                 <a:tc>
@@ -10107,7 +10152,7 @@
                         <a:buNone/>
                       </a:pPr>
                       <a:r>
-                        <a:rPr lang="en-US" sz="1000" dirty="0">
+                        <a:rPr lang="en-US" sz="1150" b="1" dirty="0">
                           <a:solidFill>
                             <a:srgbClr val="16252C"/>
                           </a:solidFill>
@@ -10117,7 +10162,7 @@
                         </a:rPr>
                         <a:t>0.604</a:t>
                       </a:r>
-                      <a:endParaRPr lang="en-US" sz="1000" dirty="0">
+                      <a:endParaRPr lang="en-US" sz="1150" dirty="0">
                         <a:latin typeface="Calibri" charset="0"/>
                         <a:ea typeface="Calibri" charset="0"/>
                         <a:cs typeface="Calibri" charset="0"/>
@@ -10161,6 +10206,9 @@
                       <a:headEnd type="none" w="med" len="med"/>
                       <a:tailEnd type="none" w="med" len="med"/>
                     </a:lnB>
+                    <a:solidFill>
+                      <a:srgbClr val="E4F0F0"/>
+                    </a:solidFill>
                   </a:tcPr>
                 </a:tc>
                 <a:tc>
@@ -10172,7 +10220,7 @@
                         <a:buNone/>
                       </a:pPr>
                       <a:r>
-                        <a:rPr lang="en-US" sz="1000" dirty="0">
+                        <a:rPr lang="en-US" sz="1150" b="1" dirty="0">
                           <a:solidFill>
                             <a:srgbClr val="16252C"/>
                           </a:solidFill>
@@ -10182,7 +10230,7 @@
                         </a:rPr>
                         <a:t>0.797</a:t>
                       </a:r>
-                      <a:endParaRPr lang="en-US" sz="1000" dirty="0">
+                      <a:endParaRPr lang="en-US" sz="1150" dirty="0">
                         <a:latin typeface="Calibri" charset="0"/>
                         <a:ea typeface="Calibri" charset="0"/>
                         <a:cs typeface="Calibri" charset="0"/>
@@ -10226,6 +10274,9 @@
                       <a:headEnd type="none" w="med" len="med"/>
                       <a:tailEnd type="none" w="med" len="med"/>
                     </a:lnB>
+                    <a:solidFill>
+                      <a:srgbClr val="E4F0F0"/>
+                    </a:solidFill>
                   </a:tcPr>
                 </a:tc>
                 <a:tc>
@@ -10237,7 +10288,7 @@
                         <a:buNone/>
                       </a:pPr>
                       <a:r>
-                        <a:rPr lang="en-US" sz="1000" dirty="0">
+                        <a:rPr lang="en-US" sz="1150" b="1" dirty="0">
                           <a:solidFill>
                             <a:srgbClr val="16252C"/>
                           </a:solidFill>
@@ -10247,7 +10298,7 @@
                         </a:rPr>
                         <a:t>0.481</a:t>
                       </a:r>
-                      <a:endParaRPr lang="en-US" sz="1000" dirty="0">
+                      <a:endParaRPr lang="en-US" sz="1150" dirty="0">
                         <a:latin typeface="Calibri" charset="0"/>
                         <a:ea typeface="Calibri" charset="0"/>
                         <a:cs typeface="Calibri" charset="0"/>
@@ -10291,6 +10342,9 @@
                       <a:headEnd type="none" w="med" len="med"/>
                       <a:tailEnd type="none" w="med" len="med"/>
                     </a:lnB>
+                    <a:solidFill>
+                      <a:srgbClr val="E4F0F0"/>
+                    </a:solidFill>
                   </a:tcPr>
                 </a:tc>
               </a:tr>
@@ -14440,7 +14494,7 @@
                 <a:ea typeface="Calibri" pitchFamily="34" charset="-122"/>
                 <a:cs typeface="Calibri" pitchFamily="34" charset="-120"/>
               </a:rPr>
-              <a:t>Top 10 of 17 models by ROC-AUC · full table in results/model_comparison_all16.csv</a:t>
+              <a:t>Top 10 of 17 by ROC-AUC · shading marks the tied leading group · full table in results/model_comparison_all16.csv</a:t>
             </a:r>
             <a:endParaRPr lang="en-US" sz="950" dirty="0"/>
           </a:p>
@@ -14526,7 +14580,7 @@
                 <a:ea typeface="Georgia" pitchFamily="34" charset="-122"/>
                 <a:cs typeface="Georgia" pitchFamily="34" charset="-120"/>
               </a:rPr>
-              <a:t>ExtraTrees scores highest — but does not become the primary model</a:t>
+              <a:t>Read the top block as one group, not as a ranking</a:t>
             </a:r>
             <a:endParaRPr lang="en-US" sz="1400" dirty="0"/>
           </a:p>
@@ -14568,7 +14622,7 @@
                 <a:ea typeface="Calibri" pitchFamily="34" charset="-122"/>
                 <a:cs typeface="Calibri" pitchFamily="34" charset="-120"/>
               </a:rPr>
-              <a:t>ExtraTrees leads on AUC, PR-AUC and MCC, but the lead is not significant (p=0.085) and it is a best-of-17 score. The next two slides settle the choice.</a:t>
+              <a:t>The first four rows cannot be told apart (next slide) — their order here is noise. Real separation starts at GP-RBF.</a:t>
             </a:r>
             <a:endParaRPr lang="en-US" sz="1100" dirty="0"/>
           </a:p>
@@ -14698,7 +14752,7 @@
                 <a:ea typeface="Georgia" pitchFamily="34" charset="-122"/>
                 <a:cs typeface="Georgia" pitchFamily="34" charset="-120"/>
               </a:rPr>
-              <a:t>Is the Gap Real? Paired Testing</a:t>
+              <a:t>AUC Cannot Settle the Model Choice</a:t>
             </a:r>
             <a:endParaRPr lang="en-US" sz="3000" dirty="0"/>
           </a:p>
@@ -14752,7 +14806,7 @@
         <p:spPr>
           <a:xfrm>
             <a:off x="548640" y="1298448"/>
-            <a:ext cx="6400800" cy="457200"/>
+            <a:ext cx="11064240" cy="502920"/>
           </a:xfrm>
           <a:prstGeom prst="rect">
             <a:avLst/>
@@ -14776,7 +14830,7 @@
                 <a:ea typeface="Calibri" pitchFamily="34" charset="-122"/>
                 <a:cs typeface="Calibri" pitchFamily="34" charset="-120"/>
               </a:rPr>
-              <a:t>Fold-to-fold SD is ±0.05, so comparing mean AUCs is not enough. We compare per-fold AUCs pairwise on the same 25 folds.</a:t>
+              <a:t>Comparing the best model against a clearly weaker one proves nothing. The question that matters is whether the leading models can be told apart at all. All 15 pairwise tests among the top six, on the same 25 folds:</a:t>
             </a:r>
             <a:endParaRPr lang="en-US" sz="1250" dirty="0"/>
           </a:p>
@@ -14797,225 +14851,22 @@
           </p:nvPr>
         </p:nvGraphicFramePr>
         <p:xfrm>
-          <a:off x="548640" y="1828800"/>
-          <a:ext cx="6400800" cy="914400"/>
+          <a:off x="548640" y="1965960"/>
+          <a:ext cx="11064240" cy="914400"/>
         </p:xfrm>
         <a:graphic>
           <a:graphicData uri="http://schemas.openxmlformats.org/drawingml/2006/table">
             <a:tbl>
               <a:tblPr/>
               <a:tblGrid>
-                <a:gridCol w="2377440"/>
-                <a:gridCol w="1005840"/>
-                <a:gridCol w="914400"/>
-                <a:gridCol w="1234440"/>
-                <a:gridCol w="868680"/>
+                <a:gridCol w="2286000"/>
+                <a:gridCol w="1755648"/>
+                <a:gridCol w="1755648"/>
+                <a:gridCol w="1755648"/>
+                <a:gridCol w="1755648"/>
+                <a:gridCol w="1755648"/>
               </a:tblGrid>
-              <a:tr h="457200">
-                <a:tc>
-                  <a:txBody>
-                    <a:bodyPr/>
-                    <a:lstStyle/>
-                    <a:p>
-                      <a:pPr algn="ctr" indent="0" marL="0">
-                        <a:buNone/>
-                      </a:pPr>
-                      <a:r>
-                        <a:rPr lang="en-US" sz="1100" b="1" dirty="0">
-                          <a:solidFill>
-                            <a:srgbClr val="FFFFFF"/>
-                          </a:solidFill>
-                          <a:latin typeface="Calibri" pitchFamily="34" charset="0"/>
-                          <a:ea typeface="Calibri" pitchFamily="34" charset="-122"/>
-                          <a:cs typeface="Calibri" pitchFamily="34" charset="-120"/>
-                        </a:rPr>
-                        <a:t>Comparison</a:t>
-                      </a:r>
-                      <a:endParaRPr lang="en-US" sz="1100" dirty="0">
-                        <a:latin typeface="Calibri" charset="0"/>
-                        <a:ea typeface="Calibri" charset="0"/>
-                        <a:cs typeface="Calibri" charset="0"/>
-                      </a:endParaRPr>
-                    </a:p>
-                  </a:txBody>
-                  <a:tcPr marL="91440" marR="91440" marT="45720" marB="45720" anchor="ctr">
-                    <a:lnL w="6350" cap="flat" cmpd="sng" algn="ctr">
-                      <a:solidFill>
-                        <a:srgbClr val="DDE5E8"/>
-                      </a:solidFill>
-                      <a:prstDash val="solid"/>
-                      <a:round/>
-                      <a:headEnd type="none" w="med" len="med"/>
-                      <a:tailEnd type="none" w="med" len="med"/>
-                    </a:lnL>
-                    <a:lnR w="6350" cap="flat" cmpd="sng" algn="ctr">
-                      <a:solidFill>
-                        <a:srgbClr val="DDE5E8"/>
-                      </a:solidFill>
-                      <a:prstDash val="solid"/>
-                      <a:round/>
-                      <a:headEnd type="none" w="med" len="med"/>
-                      <a:tailEnd type="none" w="med" len="med"/>
-                    </a:lnR>
-                    <a:lnT w="6350" cap="flat" cmpd="sng" algn="ctr">
-                      <a:solidFill>
-                        <a:srgbClr val="DDE5E8"/>
-                      </a:solidFill>
-                      <a:prstDash val="solid"/>
-                      <a:round/>
-                      <a:headEnd type="none" w="med" len="med"/>
-                      <a:tailEnd type="none" w="med" len="med"/>
-                    </a:lnT>
-                    <a:lnB w="6350" cap="flat" cmpd="sng" algn="ctr">
-                      <a:solidFill>
-                        <a:srgbClr val="DDE5E8"/>
-                      </a:solidFill>
-                      <a:prstDash val="solid"/>
-                      <a:round/>
-                      <a:headEnd type="none" w="med" len="med"/>
-                      <a:tailEnd type="none" w="med" len="med"/>
-                    </a:lnB>
-                    <a:solidFill>
-                      <a:srgbClr val="0B3C49"/>
-                    </a:solidFill>
-                  </a:tcPr>
-                </a:tc>
-                <a:tc>
-                  <a:txBody>
-                    <a:bodyPr/>
-                    <a:lstStyle/>
-                    <a:p>
-                      <a:pPr algn="ctr" indent="0" marL="0">
-                        <a:buNone/>
-                      </a:pPr>
-                      <a:r>
-                        <a:rPr lang="en-US" sz="1100" b="1" dirty="0">
-                          <a:solidFill>
-                            <a:srgbClr val="FFFFFF"/>
-                          </a:solidFill>
-                          <a:latin typeface="Calibri" pitchFamily="34" charset="0"/>
-                          <a:ea typeface="Calibri" pitchFamily="34" charset="-122"/>
-                          <a:cs typeface="Calibri" pitchFamily="34" charset="-120"/>
-                        </a:rPr>
-                        <a:t>Δ AUC</a:t>
-                      </a:r>
-                      <a:endParaRPr lang="en-US" sz="1100" dirty="0">
-                        <a:latin typeface="Calibri" charset="0"/>
-                        <a:ea typeface="Calibri" charset="0"/>
-                        <a:cs typeface="Calibri" charset="0"/>
-                      </a:endParaRPr>
-                    </a:p>
-                  </a:txBody>
-                  <a:tcPr marL="91440" marR="91440" marT="45720" marB="45720" anchor="ctr">
-                    <a:lnL w="6350" cap="flat" cmpd="sng" algn="ctr">
-                      <a:solidFill>
-                        <a:srgbClr val="DDE5E8"/>
-                      </a:solidFill>
-                      <a:prstDash val="solid"/>
-                      <a:round/>
-                      <a:headEnd type="none" w="med" len="med"/>
-                      <a:tailEnd type="none" w="med" len="med"/>
-                    </a:lnL>
-                    <a:lnR w="6350" cap="flat" cmpd="sng" algn="ctr">
-                      <a:solidFill>
-                        <a:srgbClr val="DDE5E8"/>
-                      </a:solidFill>
-                      <a:prstDash val="solid"/>
-                      <a:round/>
-                      <a:headEnd type="none" w="med" len="med"/>
-                      <a:tailEnd type="none" w="med" len="med"/>
-                    </a:lnR>
-                    <a:lnT w="6350" cap="flat" cmpd="sng" algn="ctr">
-                      <a:solidFill>
-                        <a:srgbClr val="DDE5E8"/>
-                      </a:solidFill>
-                      <a:prstDash val="solid"/>
-                      <a:round/>
-                      <a:headEnd type="none" w="med" len="med"/>
-                      <a:tailEnd type="none" w="med" len="med"/>
-                    </a:lnT>
-                    <a:lnB w="6350" cap="flat" cmpd="sng" algn="ctr">
-                      <a:solidFill>
-                        <a:srgbClr val="DDE5E8"/>
-                      </a:solidFill>
-                      <a:prstDash val="solid"/>
-                      <a:round/>
-                      <a:headEnd type="none" w="med" len="med"/>
-                      <a:tailEnd type="none" w="med" len="med"/>
-                    </a:lnB>
-                    <a:solidFill>
-                      <a:srgbClr val="0B3C49"/>
-                    </a:solidFill>
-                  </a:tcPr>
-                </a:tc>
-                <a:tc>
-                  <a:txBody>
-                    <a:bodyPr/>
-                    <a:lstStyle/>
-                    <a:p>
-                      <a:pPr algn="ctr" indent="0" marL="0">
-                        <a:buNone/>
-                      </a:pPr>
-                      <a:r>
-                        <a:rPr lang="en-US" sz="1100" b="1" dirty="0">
-                          <a:solidFill>
-                            <a:srgbClr val="FFFFFF"/>
-                          </a:solidFill>
-                          <a:latin typeface="Calibri" pitchFamily="34" charset="0"/>
-                          <a:ea typeface="Calibri" pitchFamily="34" charset="-122"/>
-                          <a:cs typeface="Calibri" pitchFamily="34" charset="-120"/>
-                        </a:rPr>
-                        <a:t>Won</a:t>
-                      </a:r>
-                      <a:endParaRPr lang="en-US" sz="1100" dirty="0">
-                        <a:latin typeface="Calibri" charset="0"/>
-                        <a:ea typeface="Calibri" charset="0"/>
-                        <a:cs typeface="Calibri" charset="0"/>
-                      </a:endParaRPr>
-                    </a:p>
-                  </a:txBody>
-                  <a:tcPr marL="91440" marR="91440" marT="45720" marB="45720" anchor="ctr">
-                    <a:lnL w="6350" cap="flat" cmpd="sng" algn="ctr">
-                      <a:solidFill>
-                        <a:srgbClr val="DDE5E8"/>
-                      </a:solidFill>
-                      <a:prstDash val="solid"/>
-                      <a:round/>
-                      <a:headEnd type="none" w="med" len="med"/>
-                      <a:tailEnd type="none" w="med" len="med"/>
-                    </a:lnL>
-                    <a:lnR w="6350" cap="flat" cmpd="sng" algn="ctr">
-                      <a:solidFill>
-                        <a:srgbClr val="DDE5E8"/>
-                      </a:solidFill>
-                      <a:prstDash val="solid"/>
-                      <a:round/>
-                      <a:headEnd type="none" w="med" len="med"/>
-                      <a:tailEnd type="none" w="med" len="med"/>
-                    </a:lnR>
-                    <a:lnT w="6350" cap="flat" cmpd="sng" algn="ctr">
-                      <a:solidFill>
-                        <a:srgbClr val="DDE5E8"/>
-                      </a:solidFill>
-                      <a:prstDash val="solid"/>
-                      <a:round/>
-                      <a:headEnd type="none" w="med" len="med"/>
-                      <a:tailEnd type="none" w="med" len="med"/>
-                    </a:lnT>
-                    <a:lnB w="6350" cap="flat" cmpd="sng" algn="ctr">
-                      <a:solidFill>
-                        <a:srgbClr val="DDE5E8"/>
-                      </a:solidFill>
-                      <a:prstDash val="solid"/>
-                      <a:round/>
-                      <a:headEnd type="none" w="med" len="med"/>
-                      <a:tailEnd type="none" w="med" len="med"/>
-                    </a:lnB>
-                    <a:solidFill>
-                      <a:srgbClr val="0B3C49"/>
-                    </a:solidFill>
-                  </a:tcPr>
-                </a:tc>
+              <a:tr h="384048">
                 <a:tc>
                   <a:txBody>
                     <a:bodyPr/>
@@ -15101,7 +14952,7 @@
                           <a:ea typeface="Calibri" pitchFamily="34" charset="-122"/>
                           <a:cs typeface="Calibri" pitchFamily="34" charset="-120"/>
                         </a:rPr>
-                        <a:t>t p</a:t>
+                        <a:t>SVM-RBF</a:t>
                       </a:r>
                       <a:endParaRPr lang="en-US" sz="1100" dirty="0">
                         <a:latin typeface="Calibri" charset="0"/>
@@ -15152,8 +15003,6 @@
                     </a:solidFill>
                   </a:tcPr>
                 </a:tc>
-              </a:tr>
-              <a:tr h="457200">
                 <a:tc>
                   <a:txBody>
                     <a:bodyPr/>
@@ -15163,7 +15012,281 @@
                         <a:buNone/>
                       </a:pPr>
                       <a:r>
-                        <a:rPr lang="en-US" sz="1050" dirty="0">
+                        <a:rPr lang="en-US" sz="1100" b="1" dirty="0">
+                          <a:solidFill>
+                            <a:srgbClr val="FFFFFF"/>
+                          </a:solidFill>
+                          <a:latin typeface="Calibri" pitchFamily="34" charset="0"/>
+                          <a:ea typeface="Calibri" pitchFamily="34" charset="-122"/>
+                          <a:cs typeface="Calibri" pitchFamily="34" charset="-120"/>
+                        </a:rPr>
+                        <a:t>Ensemble</a:t>
+                      </a:r>
+                      <a:endParaRPr lang="en-US" sz="1100" dirty="0">
+                        <a:latin typeface="Calibri" charset="0"/>
+                        <a:ea typeface="Calibri" charset="0"/>
+                        <a:cs typeface="Calibri" charset="0"/>
+                      </a:endParaRPr>
+                    </a:p>
+                  </a:txBody>
+                  <a:tcPr marL="91440" marR="91440" marT="45720" marB="45720" anchor="ctr">
+                    <a:lnL w="6350" cap="flat" cmpd="sng" algn="ctr">
+                      <a:solidFill>
+                        <a:srgbClr val="DDE5E8"/>
+                      </a:solidFill>
+                      <a:prstDash val="solid"/>
+                      <a:round/>
+                      <a:headEnd type="none" w="med" len="med"/>
+                      <a:tailEnd type="none" w="med" len="med"/>
+                    </a:lnL>
+                    <a:lnR w="6350" cap="flat" cmpd="sng" algn="ctr">
+                      <a:solidFill>
+                        <a:srgbClr val="DDE5E8"/>
+                      </a:solidFill>
+                      <a:prstDash val="solid"/>
+                      <a:round/>
+                      <a:headEnd type="none" w="med" len="med"/>
+                      <a:tailEnd type="none" w="med" len="med"/>
+                    </a:lnR>
+                    <a:lnT w="6350" cap="flat" cmpd="sng" algn="ctr">
+                      <a:solidFill>
+                        <a:srgbClr val="DDE5E8"/>
+                      </a:solidFill>
+                      <a:prstDash val="solid"/>
+                      <a:round/>
+                      <a:headEnd type="none" w="med" len="med"/>
+                      <a:tailEnd type="none" w="med" len="med"/>
+                    </a:lnT>
+                    <a:lnB w="6350" cap="flat" cmpd="sng" algn="ctr">
+                      <a:solidFill>
+                        <a:srgbClr val="DDE5E8"/>
+                      </a:solidFill>
+                      <a:prstDash val="solid"/>
+                      <a:round/>
+                      <a:headEnd type="none" w="med" len="med"/>
+                      <a:tailEnd type="none" w="med" len="med"/>
+                    </a:lnB>
+                    <a:solidFill>
+                      <a:srgbClr val="0B3C49"/>
+                    </a:solidFill>
+                  </a:tcPr>
+                </a:tc>
+                <a:tc>
+                  <a:txBody>
+                    <a:bodyPr/>
+                    <a:lstStyle/>
+                    <a:p>
+                      <a:pPr algn="ctr" indent="0" marL="0">
+                        <a:buNone/>
+                      </a:pPr>
+                      <a:r>
+                        <a:rPr lang="en-US" sz="1100" b="1" dirty="0">
+                          <a:solidFill>
+                            <a:srgbClr val="FFFFFF"/>
+                          </a:solidFill>
+                          <a:latin typeface="Calibri" pitchFamily="34" charset="0"/>
+                          <a:ea typeface="Calibri" pitchFamily="34" charset="-122"/>
+                          <a:cs typeface="Calibri" pitchFamily="34" charset="-120"/>
+                        </a:rPr>
+                        <a:t>SVM-poly</a:t>
+                      </a:r>
+                      <a:endParaRPr lang="en-US" sz="1100" dirty="0">
+                        <a:latin typeface="Calibri" charset="0"/>
+                        <a:ea typeface="Calibri" charset="0"/>
+                        <a:cs typeface="Calibri" charset="0"/>
+                      </a:endParaRPr>
+                    </a:p>
+                  </a:txBody>
+                  <a:tcPr marL="91440" marR="91440" marT="45720" marB="45720" anchor="ctr">
+                    <a:lnL w="6350" cap="flat" cmpd="sng" algn="ctr">
+                      <a:solidFill>
+                        <a:srgbClr val="DDE5E8"/>
+                      </a:solidFill>
+                      <a:prstDash val="solid"/>
+                      <a:round/>
+                      <a:headEnd type="none" w="med" len="med"/>
+                      <a:tailEnd type="none" w="med" len="med"/>
+                    </a:lnL>
+                    <a:lnR w="6350" cap="flat" cmpd="sng" algn="ctr">
+                      <a:solidFill>
+                        <a:srgbClr val="DDE5E8"/>
+                      </a:solidFill>
+                      <a:prstDash val="solid"/>
+                      <a:round/>
+                      <a:headEnd type="none" w="med" len="med"/>
+                      <a:tailEnd type="none" w="med" len="med"/>
+                    </a:lnR>
+                    <a:lnT w="6350" cap="flat" cmpd="sng" algn="ctr">
+                      <a:solidFill>
+                        <a:srgbClr val="DDE5E8"/>
+                      </a:solidFill>
+                      <a:prstDash val="solid"/>
+                      <a:round/>
+                      <a:headEnd type="none" w="med" len="med"/>
+                      <a:tailEnd type="none" w="med" len="med"/>
+                    </a:lnT>
+                    <a:lnB w="6350" cap="flat" cmpd="sng" algn="ctr">
+                      <a:solidFill>
+                        <a:srgbClr val="DDE5E8"/>
+                      </a:solidFill>
+                      <a:prstDash val="solid"/>
+                      <a:round/>
+                      <a:headEnd type="none" w="med" len="med"/>
+                      <a:tailEnd type="none" w="med" len="med"/>
+                    </a:lnB>
+                    <a:solidFill>
+                      <a:srgbClr val="0B3C49"/>
+                    </a:solidFill>
+                  </a:tcPr>
+                </a:tc>
+                <a:tc>
+                  <a:txBody>
+                    <a:bodyPr/>
+                    <a:lstStyle/>
+                    <a:p>
+                      <a:pPr algn="ctr" indent="0" marL="0">
+                        <a:buNone/>
+                      </a:pPr>
+                      <a:r>
+                        <a:rPr lang="en-US" sz="1100" b="1" dirty="0">
+                          <a:solidFill>
+                            <a:srgbClr val="FFFFFF"/>
+                          </a:solidFill>
+                          <a:latin typeface="Calibri" pitchFamily="34" charset="0"/>
+                          <a:ea typeface="Calibri" pitchFamily="34" charset="-122"/>
+                          <a:cs typeface="Calibri" pitchFamily="34" charset="-120"/>
+                        </a:rPr>
+                        <a:t>GP-RBF</a:t>
+                      </a:r>
+                      <a:endParaRPr lang="en-US" sz="1100" dirty="0">
+                        <a:latin typeface="Calibri" charset="0"/>
+                        <a:ea typeface="Calibri" charset="0"/>
+                        <a:cs typeface="Calibri" charset="0"/>
+                      </a:endParaRPr>
+                    </a:p>
+                  </a:txBody>
+                  <a:tcPr marL="91440" marR="91440" marT="45720" marB="45720" anchor="ctr">
+                    <a:lnL w="6350" cap="flat" cmpd="sng" algn="ctr">
+                      <a:solidFill>
+                        <a:srgbClr val="DDE5E8"/>
+                      </a:solidFill>
+                      <a:prstDash val="solid"/>
+                      <a:round/>
+                      <a:headEnd type="none" w="med" len="med"/>
+                      <a:tailEnd type="none" w="med" len="med"/>
+                    </a:lnL>
+                    <a:lnR w="6350" cap="flat" cmpd="sng" algn="ctr">
+                      <a:solidFill>
+                        <a:srgbClr val="DDE5E8"/>
+                      </a:solidFill>
+                      <a:prstDash val="solid"/>
+                      <a:round/>
+                      <a:headEnd type="none" w="med" len="med"/>
+                      <a:tailEnd type="none" w="med" len="med"/>
+                    </a:lnR>
+                    <a:lnT w="6350" cap="flat" cmpd="sng" algn="ctr">
+                      <a:solidFill>
+                        <a:srgbClr val="DDE5E8"/>
+                      </a:solidFill>
+                      <a:prstDash val="solid"/>
+                      <a:round/>
+                      <a:headEnd type="none" w="med" len="med"/>
+                      <a:tailEnd type="none" w="med" len="med"/>
+                    </a:lnT>
+                    <a:lnB w="6350" cap="flat" cmpd="sng" algn="ctr">
+                      <a:solidFill>
+                        <a:srgbClr val="DDE5E8"/>
+                      </a:solidFill>
+                      <a:prstDash val="solid"/>
+                      <a:round/>
+                      <a:headEnd type="none" w="med" len="med"/>
+                      <a:tailEnd type="none" w="med" len="med"/>
+                    </a:lnB>
+                    <a:solidFill>
+                      <a:srgbClr val="0B3C49"/>
+                    </a:solidFill>
+                  </a:tcPr>
+                </a:tc>
+                <a:tc>
+                  <a:txBody>
+                    <a:bodyPr/>
+                    <a:lstStyle/>
+                    <a:p>
+                      <a:pPr algn="ctr" indent="0" marL="0">
+                        <a:buNone/>
+                      </a:pPr>
+                      <a:r>
+                        <a:rPr lang="en-US" sz="1100" b="1" dirty="0">
+                          <a:solidFill>
+                            <a:srgbClr val="FFFFFF"/>
+                          </a:solidFill>
+                          <a:latin typeface="Calibri" pitchFamily="34" charset="0"/>
+                          <a:ea typeface="Calibri" pitchFamily="34" charset="-122"/>
+                          <a:cs typeface="Calibri" pitchFamily="34" charset="-120"/>
+                        </a:rPr>
+                        <a:t>GP-Matérn</a:t>
+                      </a:r>
+                      <a:endParaRPr lang="en-US" sz="1100" dirty="0">
+                        <a:latin typeface="Calibri" charset="0"/>
+                        <a:ea typeface="Calibri" charset="0"/>
+                        <a:cs typeface="Calibri" charset="0"/>
+                      </a:endParaRPr>
+                    </a:p>
+                  </a:txBody>
+                  <a:tcPr marL="91440" marR="91440" marT="45720" marB="45720" anchor="ctr">
+                    <a:lnL w="6350" cap="flat" cmpd="sng" algn="ctr">
+                      <a:solidFill>
+                        <a:srgbClr val="DDE5E8"/>
+                      </a:solidFill>
+                      <a:prstDash val="solid"/>
+                      <a:round/>
+                      <a:headEnd type="none" w="med" len="med"/>
+                      <a:tailEnd type="none" w="med" len="med"/>
+                    </a:lnL>
+                    <a:lnR w="6350" cap="flat" cmpd="sng" algn="ctr">
+                      <a:solidFill>
+                        <a:srgbClr val="DDE5E8"/>
+                      </a:solidFill>
+                      <a:prstDash val="solid"/>
+                      <a:round/>
+                      <a:headEnd type="none" w="med" len="med"/>
+                      <a:tailEnd type="none" w="med" len="med"/>
+                    </a:lnR>
+                    <a:lnT w="6350" cap="flat" cmpd="sng" algn="ctr">
+                      <a:solidFill>
+                        <a:srgbClr val="DDE5E8"/>
+                      </a:solidFill>
+                      <a:prstDash val="solid"/>
+                      <a:round/>
+                      <a:headEnd type="none" w="med" len="med"/>
+                      <a:tailEnd type="none" w="med" len="med"/>
+                    </a:lnT>
+                    <a:lnB w="6350" cap="flat" cmpd="sng" algn="ctr">
+                      <a:solidFill>
+                        <a:srgbClr val="DDE5E8"/>
+                      </a:solidFill>
+                      <a:prstDash val="solid"/>
+                      <a:round/>
+                      <a:headEnd type="none" w="med" len="med"/>
+                      <a:tailEnd type="none" w="med" len="med"/>
+                    </a:lnB>
+                    <a:solidFill>
+                      <a:srgbClr val="0B3C49"/>
+                    </a:solidFill>
+                  </a:tcPr>
+                </a:tc>
+              </a:tr>
+              <a:tr h="384048">
+                <a:tc>
+                  <a:txBody>
+                    <a:bodyPr/>
+                    <a:lstStyle/>
+                    <a:p>
+                      <a:pPr algn="l" indent="0" marL="0">
+                        <a:buNone/>
+                      </a:pPr>
+                      <a:r>
+                        <a:rPr lang="en-US" sz="1100" b="1" dirty="0">
                           <a:solidFill>
                             <a:srgbClr val="16252C"/>
                           </a:solidFill>
@@ -15171,9 +15294,9 @@
                           <a:ea typeface="Calibri" pitchFamily="34" charset="-122"/>
                           <a:cs typeface="Calibri" pitchFamily="34" charset="-120"/>
                         </a:rPr>
-                        <a:t>SVM-RBF vs RandomForest</a:t>
+                        <a:t>ExtraTrees</a:t>
                       </a:r>
-                      <a:endParaRPr lang="en-US" sz="1050" dirty="0">
+                      <a:endParaRPr lang="en-US" sz="1100" dirty="0">
                         <a:latin typeface="Calibri" charset="0"/>
                         <a:ea typeface="Calibri" charset="0"/>
                         <a:cs typeface="Calibri" charset="0"/>
@@ -15228,17 +15351,17 @@
                         <a:buNone/>
                       </a:pPr>
                       <a:r>
-                        <a:rPr lang="en-US" sz="1050" dirty="0">
+                        <a:rPr lang="en-US" sz="1100" dirty="0">
                           <a:solidFill>
-                            <a:srgbClr val="16252C"/>
+                            <a:srgbClr val="5F7580"/>
                           </a:solidFill>
                           <a:latin typeface="Calibri" pitchFamily="34" charset="0"/>
                           <a:ea typeface="Calibri" pitchFamily="34" charset="-122"/>
                           <a:cs typeface="Calibri" pitchFamily="34" charset="-120"/>
                         </a:rPr>
-                        <a:t>+0.029</a:t>
+                        <a:t>.085</a:t>
                       </a:r>
-                      <a:endParaRPr lang="en-US" sz="1050" dirty="0">
+                      <a:endParaRPr lang="en-US" sz="1100" dirty="0">
                         <a:latin typeface="Calibri" charset="0"/>
                         <a:ea typeface="Calibri" charset="0"/>
                         <a:cs typeface="Calibri" charset="0"/>
@@ -15282,6 +15405,9 @@
                       <a:headEnd type="none" w="med" len="med"/>
                       <a:tailEnd type="none" w="med" len="med"/>
                     </a:lnB>
+                    <a:solidFill>
+                      <a:srgbClr val="EDEDEA"/>
+                    </a:solidFill>
                   </a:tcPr>
                 </a:tc>
                 <a:tc>
@@ -15293,82 +15419,17 @@
                         <a:buNone/>
                       </a:pPr>
                       <a:r>
-                        <a:rPr lang="en-US" sz="1050" dirty="0">
+                        <a:rPr lang="en-US" sz="1100" b="1" dirty="0">
                           <a:solidFill>
-                            <a:srgbClr val="16252C"/>
+                            <a:srgbClr val="18707F"/>
                           </a:solidFill>
                           <a:latin typeface="Calibri" pitchFamily="34" charset="0"/>
                           <a:ea typeface="Calibri" pitchFamily="34" charset="-122"/>
                           <a:cs typeface="Calibri" pitchFamily="34" charset="-120"/>
                         </a:rPr>
-                        <a:t>17/25</a:t>
+                        <a:t>.005</a:t>
                       </a:r>
-                      <a:endParaRPr lang="en-US" sz="1050" dirty="0">
-                        <a:latin typeface="Calibri" charset="0"/>
-                        <a:ea typeface="Calibri" charset="0"/>
-                        <a:cs typeface="Calibri" charset="0"/>
-                      </a:endParaRPr>
-                    </a:p>
-                  </a:txBody>
-                  <a:tcPr marL="91440" marR="91440" marT="45720" marB="45720" anchor="ctr">
-                    <a:lnL w="6350" cap="flat" cmpd="sng" algn="ctr">
-                      <a:solidFill>
-                        <a:srgbClr val="DDE5E8"/>
-                      </a:solidFill>
-                      <a:prstDash val="solid"/>
-                      <a:round/>
-                      <a:headEnd type="none" w="med" len="med"/>
-                      <a:tailEnd type="none" w="med" len="med"/>
-                    </a:lnL>
-                    <a:lnR w="6350" cap="flat" cmpd="sng" algn="ctr">
-                      <a:solidFill>
-                        <a:srgbClr val="DDE5E8"/>
-                      </a:solidFill>
-                      <a:prstDash val="solid"/>
-                      <a:round/>
-                      <a:headEnd type="none" w="med" len="med"/>
-                      <a:tailEnd type="none" w="med" len="med"/>
-                    </a:lnR>
-                    <a:lnT w="6350" cap="flat" cmpd="sng" algn="ctr">
-                      <a:solidFill>
-                        <a:srgbClr val="DDE5E8"/>
-                      </a:solidFill>
-                      <a:prstDash val="solid"/>
-                      <a:round/>
-                      <a:headEnd type="none" w="med" len="med"/>
-                      <a:tailEnd type="none" w="med" len="med"/>
-                    </a:lnT>
-                    <a:lnB w="6350" cap="flat" cmpd="sng" algn="ctr">
-                      <a:solidFill>
-                        <a:srgbClr val="DDE5E8"/>
-                      </a:solidFill>
-                      <a:prstDash val="solid"/>
-                      <a:round/>
-                      <a:headEnd type="none" w="med" len="med"/>
-                      <a:tailEnd type="none" w="med" len="med"/>
-                    </a:lnB>
-                  </a:tcPr>
-                </a:tc>
-                <a:tc>
-                  <a:txBody>
-                    <a:bodyPr/>
-                    <a:lstStyle/>
-                    <a:p>
-                      <a:pPr algn="ctr" indent="0" marL="0">
-                        <a:buNone/>
-                      </a:pPr>
-                      <a:r>
-                        <a:rPr lang="en-US" sz="1150" b="1" dirty="0">
-                          <a:solidFill>
-                            <a:srgbClr val="16252C"/>
-                          </a:solidFill>
-                          <a:latin typeface="Calibri" pitchFamily="34" charset="0"/>
-                          <a:ea typeface="Calibri" pitchFamily="34" charset="-122"/>
-                          <a:cs typeface="Calibri" pitchFamily="34" charset="-120"/>
-                        </a:rPr>
-                        <a:t>0.021</a:t>
-                      </a:r>
-                      <a:endParaRPr lang="en-US" sz="1150" dirty="0">
+                      <a:endParaRPr lang="en-US" sz="1100" dirty="0">
                         <a:latin typeface="Calibri" charset="0"/>
                         <a:ea typeface="Calibri" charset="0"/>
                         <a:cs typeface="Calibri" charset="0"/>
@@ -15426,279 +15487,17 @@
                         <a:buNone/>
                       </a:pPr>
                       <a:r>
-                        <a:rPr lang="en-US" sz="1050" dirty="0">
+                        <a:rPr lang="en-US" sz="1100" b="1" dirty="0">
                           <a:solidFill>
-                            <a:srgbClr val="16252C"/>
+                            <a:srgbClr val="18707F"/>
                           </a:solidFill>
                           <a:latin typeface="Calibri" pitchFamily="34" charset="0"/>
                           <a:ea typeface="Calibri" pitchFamily="34" charset="-122"/>
                           <a:cs typeface="Calibri" pitchFamily="34" charset="-120"/>
                         </a:rPr>
-                        <a:t>0.013</a:t>
+                        <a:t>.003</a:t>
                       </a:r>
-                      <a:endParaRPr lang="en-US" sz="1050" dirty="0">
-                        <a:latin typeface="Calibri" charset="0"/>
-                        <a:ea typeface="Calibri" charset="0"/>
-                        <a:cs typeface="Calibri" charset="0"/>
-                      </a:endParaRPr>
-                    </a:p>
-                  </a:txBody>
-                  <a:tcPr marL="91440" marR="91440" marT="45720" marB="45720" anchor="ctr">
-                    <a:lnL w="6350" cap="flat" cmpd="sng" algn="ctr">
-                      <a:solidFill>
-                        <a:srgbClr val="DDE5E8"/>
-                      </a:solidFill>
-                      <a:prstDash val="solid"/>
-                      <a:round/>
-                      <a:headEnd type="none" w="med" len="med"/>
-                      <a:tailEnd type="none" w="med" len="med"/>
-                    </a:lnL>
-                    <a:lnR w="6350" cap="flat" cmpd="sng" algn="ctr">
-                      <a:solidFill>
-                        <a:srgbClr val="DDE5E8"/>
-                      </a:solidFill>
-                      <a:prstDash val="solid"/>
-                      <a:round/>
-                      <a:headEnd type="none" w="med" len="med"/>
-                      <a:tailEnd type="none" w="med" len="med"/>
-                    </a:lnR>
-                    <a:lnT w="6350" cap="flat" cmpd="sng" algn="ctr">
-                      <a:solidFill>
-                        <a:srgbClr val="DDE5E8"/>
-                      </a:solidFill>
-                      <a:prstDash val="solid"/>
-                      <a:round/>
-                      <a:headEnd type="none" w="med" len="med"/>
-                      <a:tailEnd type="none" w="med" len="med"/>
-                    </a:lnT>
-                    <a:lnB w="6350" cap="flat" cmpd="sng" algn="ctr">
-                      <a:solidFill>
-                        <a:srgbClr val="DDE5E8"/>
-                      </a:solidFill>
-                      <a:prstDash val="solid"/>
-                      <a:round/>
-                      <a:headEnd type="none" w="med" len="med"/>
-                      <a:tailEnd type="none" w="med" len="med"/>
-                    </a:lnB>
-                  </a:tcPr>
-                </a:tc>
-              </a:tr>
-              <a:tr h="457200">
-                <a:tc>
-                  <a:txBody>
-                    <a:bodyPr/>
-                    <a:lstStyle/>
-                    <a:p>
-                      <a:pPr algn="ctr" indent="0" marL="0">
-                        <a:buNone/>
-                      </a:pPr>
-                      <a:r>
-                        <a:rPr lang="en-US" sz="1050" dirty="0">
-                          <a:solidFill>
-                            <a:srgbClr val="16252C"/>
-                          </a:solidFill>
-                          <a:latin typeface="Calibri" pitchFamily="34" charset="0"/>
-                          <a:ea typeface="Calibri" pitchFamily="34" charset="-122"/>
-                          <a:cs typeface="Calibri" pitchFamily="34" charset="-120"/>
-                        </a:rPr>
-                        <a:t>SVM-RBF vs L1-LR</a:t>
-                      </a:r>
-                      <a:endParaRPr lang="en-US" sz="1050" dirty="0">
-                        <a:latin typeface="Calibri" charset="0"/>
-                        <a:ea typeface="Calibri" charset="0"/>
-                        <a:cs typeface="Calibri" charset="0"/>
-                      </a:endParaRPr>
-                    </a:p>
-                  </a:txBody>
-                  <a:tcPr marL="91440" marR="91440" marT="45720" marB="45720" anchor="ctr">
-                    <a:lnL w="6350" cap="flat" cmpd="sng" algn="ctr">
-                      <a:solidFill>
-                        <a:srgbClr val="DDE5E8"/>
-                      </a:solidFill>
-                      <a:prstDash val="solid"/>
-                      <a:round/>
-                      <a:headEnd type="none" w="med" len="med"/>
-                      <a:tailEnd type="none" w="med" len="med"/>
-                    </a:lnL>
-                    <a:lnR w="6350" cap="flat" cmpd="sng" algn="ctr">
-                      <a:solidFill>
-                        <a:srgbClr val="DDE5E8"/>
-                      </a:solidFill>
-                      <a:prstDash val="solid"/>
-                      <a:round/>
-                      <a:headEnd type="none" w="med" len="med"/>
-                      <a:tailEnd type="none" w="med" len="med"/>
-                    </a:lnR>
-                    <a:lnT w="6350" cap="flat" cmpd="sng" algn="ctr">
-                      <a:solidFill>
-                        <a:srgbClr val="DDE5E8"/>
-                      </a:solidFill>
-                      <a:prstDash val="solid"/>
-                      <a:round/>
-                      <a:headEnd type="none" w="med" len="med"/>
-                      <a:tailEnd type="none" w="med" len="med"/>
-                    </a:lnT>
-                    <a:lnB w="6350" cap="flat" cmpd="sng" algn="ctr">
-                      <a:solidFill>
-                        <a:srgbClr val="DDE5E8"/>
-                      </a:solidFill>
-                      <a:prstDash val="solid"/>
-                      <a:round/>
-                      <a:headEnd type="none" w="med" len="med"/>
-                      <a:tailEnd type="none" w="med" len="med"/>
-                    </a:lnB>
-                  </a:tcPr>
-                </a:tc>
-                <a:tc>
-                  <a:txBody>
-                    <a:bodyPr/>
-                    <a:lstStyle/>
-                    <a:p>
-                      <a:pPr algn="ctr" indent="0" marL="0">
-                        <a:buNone/>
-                      </a:pPr>
-                      <a:r>
-                        <a:rPr lang="en-US" sz="1050" dirty="0">
-                          <a:solidFill>
-                            <a:srgbClr val="16252C"/>
-                          </a:solidFill>
-                          <a:latin typeface="Calibri" pitchFamily="34" charset="0"/>
-                          <a:ea typeface="Calibri" pitchFamily="34" charset="-122"/>
-                          <a:cs typeface="Calibri" pitchFamily="34" charset="-120"/>
-                        </a:rPr>
-                        <a:t>+0.052</a:t>
-                      </a:r>
-                      <a:endParaRPr lang="en-US" sz="1050" dirty="0">
-                        <a:latin typeface="Calibri" charset="0"/>
-                        <a:ea typeface="Calibri" charset="0"/>
-                        <a:cs typeface="Calibri" charset="0"/>
-                      </a:endParaRPr>
-                    </a:p>
-                  </a:txBody>
-                  <a:tcPr marL="91440" marR="91440" marT="45720" marB="45720" anchor="ctr">
-                    <a:lnL w="6350" cap="flat" cmpd="sng" algn="ctr">
-                      <a:solidFill>
-                        <a:srgbClr val="DDE5E8"/>
-                      </a:solidFill>
-                      <a:prstDash val="solid"/>
-                      <a:round/>
-                      <a:headEnd type="none" w="med" len="med"/>
-                      <a:tailEnd type="none" w="med" len="med"/>
-                    </a:lnL>
-                    <a:lnR w="6350" cap="flat" cmpd="sng" algn="ctr">
-                      <a:solidFill>
-                        <a:srgbClr val="DDE5E8"/>
-                      </a:solidFill>
-                      <a:prstDash val="solid"/>
-                      <a:round/>
-                      <a:headEnd type="none" w="med" len="med"/>
-                      <a:tailEnd type="none" w="med" len="med"/>
-                    </a:lnR>
-                    <a:lnT w="6350" cap="flat" cmpd="sng" algn="ctr">
-                      <a:solidFill>
-                        <a:srgbClr val="DDE5E8"/>
-                      </a:solidFill>
-                      <a:prstDash val="solid"/>
-                      <a:round/>
-                      <a:headEnd type="none" w="med" len="med"/>
-                      <a:tailEnd type="none" w="med" len="med"/>
-                    </a:lnT>
-                    <a:lnB w="6350" cap="flat" cmpd="sng" algn="ctr">
-                      <a:solidFill>
-                        <a:srgbClr val="DDE5E8"/>
-                      </a:solidFill>
-                      <a:prstDash val="solid"/>
-                      <a:round/>
-                      <a:headEnd type="none" w="med" len="med"/>
-                      <a:tailEnd type="none" w="med" len="med"/>
-                    </a:lnB>
-                  </a:tcPr>
-                </a:tc>
-                <a:tc>
-                  <a:txBody>
-                    <a:bodyPr/>
-                    <a:lstStyle/>
-                    <a:p>
-                      <a:pPr algn="ctr" indent="0" marL="0">
-                        <a:buNone/>
-                      </a:pPr>
-                      <a:r>
-                        <a:rPr lang="en-US" sz="1050" dirty="0">
-                          <a:solidFill>
-                            <a:srgbClr val="16252C"/>
-                          </a:solidFill>
-                          <a:latin typeface="Calibri" pitchFamily="34" charset="0"/>
-                          <a:ea typeface="Calibri" pitchFamily="34" charset="-122"/>
-                          <a:cs typeface="Calibri" pitchFamily="34" charset="-120"/>
-                        </a:rPr>
-                        <a:t>21/25</a:t>
-                      </a:r>
-                      <a:endParaRPr lang="en-US" sz="1050" dirty="0">
-                        <a:latin typeface="Calibri" charset="0"/>
-                        <a:ea typeface="Calibri" charset="0"/>
-                        <a:cs typeface="Calibri" charset="0"/>
-                      </a:endParaRPr>
-                    </a:p>
-                  </a:txBody>
-                  <a:tcPr marL="91440" marR="91440" marT="45720" marB="45720" anchor="ctr">
-                    <a:lnL w="6350" cap="flat" cmpd="sng" algn="ctr">
-                      <a:solidFill>
-                        <a:srgbClr val="DDE5E8"/>
-                      </a:solidFill>
-                      <a:prstDash val="solid"/>
-                      <a:round/>
-                      <a:headEnd type="none" w="med" len="med"/>
-                      <a:tailEnd type="none" w="med" len="med"/>
-                    </a:lnL>
-                    <a:lnR w="6350" cap="flat" cmpd="sng" algn="ctr">
-                      <a:solidFill>
-                        <a:srgbClr val="DDE5E8"/>
-                      </a:solidFill>
-                      <a:prstDash val="solid"/>
-                      <a:round/>
-                      <a:headEnd type="none" w="med" len="med"/>
-                      <a:tailEnd type="none" w="med" len="med"/>
-                    </a:lnR>
-                    <a:lnT w="6350" cap="flat" cmpd="sng" algn="ctr">
-                      <a:solidFill>
-                        <a:srgbClr val="DDE5E8"/>
-                      </a:solidFill>
-                      <a:prstDash val="solid"/>
-                      <a:round/>
-                      <a:headEnd type="none" w="med" len="med"/>
-                      <a:tailEnd type="none" w="med" len="med"/>
-                    </a:lnT>
-                    <a:lnB w="6350" cap="flat" cmpd="sng" algn="ctr">
-                      <a:solidFill>
-                        <a:srgbClr val="DDE5E8"/>
-                      </a:solidFill>
-                      <a:prstDash val="solid"/>
-                      <a:round/>
-                      <a:headEnd type="none" w="med" len="med"/>
-                      <a:tailEnd type="none" w="med" len="med"/>
-                    </a:lnB>
-                  </a:tcPr>
-                </a:tc>
-                <a:tc>
-                  <a:txBody>
-                    <a:bodyPr/>
-                    <a:lstStyle/>
-                    <a:p>
-                      <a:pPr algn="ctr" indent="0" marL="0">
-                        <a:buNone/>
-                      </a:pPr>
-                      <a:r>
-                        <a:rPr lang="en-US" sz="1150" b="1" dirty="0">
-                          <a:solidFill>
-                            <a:srgbClr val="16252C"/>
-                          </a:solidFill>
-                          <a:latin typeface="Calibri" pitchFamily="34" charset="0"/>
-                          <a:ea typeface="Calibri" pitchFamily="34" charset="-122"/>
-                          <a:cs typeface="Calibri" pitchFamily="34" charset="-120"/>
-                        </a:rPr>
-                        <a:t>0.0002</a:t>
-                      </a:r>
-                      <a:endParaRPr lang="en-US" sz="1150" dirty="0">
+                      <a:endParaRPr lang="en-US" sz="1100" dirty="0">
                         <a:latin typeface="Calibri" charset="0"/>
                         <a:ea typeface="Calibri" charset="0"/>
                         <a:cs typeface="Calibri" charset="0"/>
@@ -15756,17 +15555,17 @@
                         <a:buNone/>
                       </a:pPr>
                       <a:r>
-                        <a:rPr lang="en-US" sz="1050" dirty="0">
+                        <a:rPr lang="en-US" sz="1100" b="1" dirty="0">
                           <a:solidFill>
-                            <a:srgbClr val="16252C"/>
+                            <a:srgbClr val="18707F"/>
                           </a:solidFill>
                           <a:latin typeface="Calibri" pitchFamily="34" charset="0"/>
                           <a:ea typeface="Calibri" pitchFamily="34" charset="-122"/>
                           <a:cs typeface="Calibri" pitchFamily="34" charset="-120"/>
                         </a:rPr>
-                        <a:t>&lt;0.0001</a:t>
+                        <a:t>.001</a:t>
                       </a:r>
-                      <a:endParaRPr lang="en-US" sz="1050" dirty="0">
+                      <a:endParaRPr lang="en-US" sz="1100" dirty="0">
                         <a:latin typeface="Calibri" charset="0"/>
                         <a:ea typeface="Calibri" charset="0"/>
                         <a:cs typeface="Calibri" charset="0"/>
@@ -15810,6 +15609,1595 @@
                       <a:headEnd type="none" w="med" len="med"/>
                       <a:tailEnd type="none" w="med" len="med"/>
                     </a:lnB>
+                    <a:solidFill>
+                      <a:srgbClr val="E4F0F0"/>
+                    </a:solidFill>
+                  </a:tcPr>
+                </a:tc>
+                <a:tc>
+                  <a:txBody>
+                    <a:bodyPr/>
+                    <a:lstStyle/>
+                    <a:p>
+                      <a:pPr algn="ctr" indent="0" marL="0">
+                        <a:buNone/>
+                      </a:pPr>
+                      <a:r>
+                        <a:rPr lang="en-US" sz="1100" b="1" dirty="0">
+                          <a:solidFill>
+                            <a:srgbClr val="18707F"/>
+                          </a:solidFill>
+                          <a:latin typeface="Calibri" pitchFamily="34" charset="0"/>
+                          <a:ea typeface="Calibri" pitchFamily="34" charset="-122"/>
+                          <a:cs typeface="Calibri" pitchFamily="34" charset="-120"/>
+                        </a:rPr>
+                        <a:t>.001</a:t>
+                      </a:r>
+                      <a:endParaRPr lang="en-US" sz="1100" dirty="0">
+                        <a:latin typeface="Calibri" charset="0"/>
+                        <a:ea typeface="Calibri" charset="0"/>
+                        <a:cs typeface="Calibri" charset="0"/>
+                      </a:endParaRPr>
+                    </a:p>
+                  </a:txBody>
+                  <a:tcPr marL="91440" marR="91440" marT="45720" marB="45720" anchor="ctr">
+                    <a:lnL w="6350" cap="flat" cmpd="sng" algn="ctr">
+                      <a:solidFill>
+                        <a:srgbClr val="DDE5E8"/>
+                      </a:solidFill>
+                      <a:prstDash val="solid"/>
+                      <a:round/>
+                      <a:headEnd type="none" w="med" len="med"/>
+                      <a:tailEnd type="none" w="med" len="med"/>
+                    </a:lnL>
+                    <a:lnR w="6350" cap="flat" cmpd="sng" algn="ctr">
+                      <a:solidFill>
+                        <a:srgbClr val="DDE5E8"/>
+                      </a:solidFill>
+                      <a:prstDash val="solid"/>
+                      <a:round/>
+                      <a:headEnd type="none" w="med" len="med"/>
+                      <a:tailEnd type="none" w="med" len="med"/>
+                    </a:lnR>
+                    <a:lnT w="6350" cap="flat" cmpd="sng" algn="ctr">
+                      <a:solidFill>
+                        <a:srgbClr val="DDE5E8"/>
+                      </a:solidFill>
+                      <a:prstDash val="solid"/>
+                      <a:round/>
+                      <a:headEnd type="none" w="med" len="med"/>
+                      <a:tailEnd type="none" w="med" len="med"/>
+                    </a:lnT>
+                    <a:lnB w="6350" cap="flat" cmpd="sng" algn="ctr">
+                      <a:solidFill>
+                        <a:srgbClr val="DDE5E8"/>
+                      </a:solidFill>
+                      <a:prstDash val="solid"/>
+                      <a:round/>
+                      <a:headEnd type="none" w="med" len="med"/>
+                      <a:tailEnd type="none" w="med" len="med"/>
+                    </a:lnB>
+                    <a:solidFill>
+                      <a:srgbClr val="E4F0F0"/>
+                    </a:solidFill>
+                  </a:tcPr>
+                </a:tc>
+              </a:tr>
+              <a:tr h="384048">
+                <a:tc>
+                  <a:txBody>
+                    <a:bodyPr/>
+                    <a:lstStyle/>
+                    <a:p>
+                      <a:pPr algn="l" indent="0" marL="0">
+                        <a:buNone/>
+                      </a:pPr>
+                      <a:r>
+                        <a:rPr lang="en-US" sz="1100" b="1" dirty="0">
+                          <a:solidFill>
+                            <a:srgbClr val="16252C"/>
+                          </a:solidFill>
+                          <a:latin typeface="Calibri" pitchFamily="34" charset="0"/>
+                          <a:ea typeface="Calibri" pitchFamily="34" charset="-122"/>
+                          <a:cs typeface="Calibri" pitchFamily="34" charset="-120"/>
+                        </a:rPr>
+                        <a:t>SVM-RBF</a:t>
+                      </a:r>
+                      <a:endParaRPr lang="en-US" sz="1100" dirty="0">
+                        <a:latin typeface="Calibri" charset="0"/>
+                        <a:ea typeface="Calibri" charset="0"/>
+                        <a:cs typeface="Calibri" charset="0"/>
+                      </a:endParaRPr>
+                    </a:p>
+                  </a:txBody>
+                  <a:tcPr marL="91440" marR="91440" marT="45720" marB="45720" anchor="ctr">
+                    <a:lnL w="6350" cap="flat" cmpd="sng" algn="ctr">
+                      <a:solidFill>
+                        <a:srgbClr val="DDE5E8"/>
+                      </a:solidFill>
+                      <a:prstDash val="solid"/>
+                      <a:round/>
+                      <a:headEnd type="none" w="med" len="med"/>
+                      <a:tailEnd type="none" w="med" len="med"/>
+                    </a:lnL>
+                    <a:lnR w="6350" cap="flat" cmpd="sng" algn="ctr">
+                      <a:solidFill>
+                        <a:srgbClr val="DDE5E8"/>
+                      </a:solidFill>
+                      <a:prstDash val="solid"/>
+                      <a:round/>
+                      <a:headEnd type="none" w="med" len="med"/>
+                      <a:tailEnd type="none" w="med" len="med"/>
+                    </a:lnR>
+                    <a:lnT w="6350" cap="flat" cmpd="sng" algn="ctr">
+                      <a:solidFill>
+                        <a:srgbClr val="DDE5E8"/>
+                      </a:solidFill>
+                      <a:prstDash val="solid"/>
+                      <a:round/>
+                      <a:headEnd type="none" w="med" len="med"/>
+                      <a:tailEnd type="none" w="med" len="med"/>
+                    </a:lnT>
+                    <a:lnB w="6350" cap="flat" cmpd="sng" algn="ctr">
+                      <a:solidFill>
+                        <a:srgbClr val="DDE5E8"/>
+                      </a:solidFill>
+                      <a:prstDash val="solid"/>
+                      <a:round/>
+                      <a:headEnd type="none" w="med" len="med"/>
+                      <a:tailEnd type="none" w="med" len="med"/>
+                    </a:lnB>
+                  </a:tcPr>
+                </a:tc>
+                <a:tc>
+                  <a:txBody>
+                    <a:bodyPr/>
+                    <a:lstStyle/>
+                    <a:p>
+                      <a:pPr algn="ctr" indent="0" marL="0">
+                        <a:buNone/>
+                      </a:pPr>
+                      <a:endParaRPr lang="en-US" sz="1100" dirty="0">
+                        <a:latin typeface="Calibri" charset="0"/>
+                        <a:ea typeface="Calibri" charset="0"/>
+                        <a:cs typeface="Calibri" charset="0"/>
+                      </a:endParaRPr>
+                    </a:p>
+                  </a:txBody>
+                  <a:tcPr marL="91440" marR="91440" marT="45720" marB="45720" anchor="ctr">
+                    <a:lnL w="6350" cap="flat" cmpd="sng" algn="ctr">
+                      <a:solidFill>
+                        <a:srgbClr val="DDE5E8"/>
+                      </a:solidFill>
+                      <a:prstDash val="solid"/>
+                      <a:round/>
+                      <a:headEnd type="none" w="med" len="med"/>
+                      <a:tailEnd type="none" w="med" len="med"/>
+                    </a:lnL>
+                    <a:lnR w="6350" cap="flat" cmpd="sng" algn="ctr">
+                      <a:solidFill>
+                        <a:srgbClr val="DDE5E8"/>
+                      </a:solidFill>
+                      <a:prstDash val="solid"/>
+                      <a:round/>
+                      <a:headEnd type="none" w="med" len="med"/>
+                      <a:tailEnd type="none" w="med" len="med"/>
+                    </a:lnR>
+                    <a:lnT w="6350" cap="flat" cmpd="sng" algn="ctr">
+                      <a:solidFill>
+                        <a:srgbClr val="DDE5E8"/>
+                      </a:solidFill>
+                      <a:prstDash val="solid"/>
+                      <a:round/>
+                      <a:headEnd type="none" w="med" len="med"/>
+                      <a:tailEnd type="none" w="med" len="med"/>
+                    </a:lnT>
+                    <a:lnB w="6350" cap="flat" cmpd="sng" algn="ctr">
+                      <a:solidFill>
+                        <a:srgbClr val="DDE5E8"/>
+                      </a:solidFill>
+                      <a:prstDash val="solid"/>
+                      <a:round/>
+                      <a:headEnd type="none" w="med" len="med"/>
+                      <a:tailEnd type="none" w="med" len="med"/>
+                    </a:lnB>
+                    <a:solidFill>
+                      <a:srgbClr val="F7F5F1"/>
+                    </a:solidFill>
+                  </a:tcPr>
+                </a:tc>
+                <a:tc>
+                  <a:txBody>
+                    <a:bodyPr/>
+                    <a:lstStyle/>
+                    <a:p>
+                      <a:pPr algn="ctr" indent="0" marL="0">
+                        <a:buNone/>
+                      </a:pPr>
+                      <a:r>
+                        <a:rPr lang="en-US" sz="1100" dirty="0">
+                          <a:solidFill>
+                            <a:srgbClr val="5F7580"/>
+                          </a:solidFill>
+                          <a:latin typeface="Calibri" pitchFamily="34" charset="0"/>
+                          <a:ea typeface="Calibri" pitchFamily="34" charset="-122"/>
+                          <a:cs typeface="Calibri" pitchFamily="34" charset="-120"/>
+                        </a:rPr>
+                        <a:t>.360</a:t>
+                      </a:r>
+                      <a:endParaRPr lang="en-US" sz="1100" dirty="0">
+                        <a:latin typeface="Calibri" charset="0"/>
+                        <a:ea typeface="Calibri" charset="0"/>
+                        <a:cs typeface="Calibri" charset="0"/>
+                      </a:endParaRPr>
+                    </a:p>
+                  </a:txBody>
+                  <a:tcPr marL="91440" marR="91440" marT="45720" marB="45720" anchor="ctr">
+                    <a:lnL w="6350" cap="flat" cmpd="sng" algn="ctr">
+                      <a:solidFill>
+                        <a:srgbClr val="DDE5E8"/>
+                      </a:solidFill>
+                      <a:prstDash val="solid"/>
+                      <a:round/>
+                      <a:headEnd type="none" w="med" len="med"/>
+                      <a:tailEnd type="none" w="med" len="med"/>
+                    </a:lnL>
+                    <a:lnR w="6350" cap="flat" cmpd="sng" algn="ctr">
+                      <a:solidFill>
+                        <a:srgbClr val="DDE5E8"/>
+                      </a:solidFill>
+                      <a:prstDash val="solid"/>
+                      <a:round/>
+                      <a:headEnd type="none" w="med" len="med"/>
+                      <a:tailEnd type="none" w="med" len="med"/>
+                    </a:lnR>
+                    <a:lnT w="6350" cap="flat" cmpd="sng" algn="ctr">
+                      <a:solidFill>
+                        <a:srgbClr val="DDE5E8"/>
+                      </a:solidFill>
+                      <a:prstDash val="solid"/>
+                      <a:round/>
+                      <a:headEnd type="none" w="med" len="med"/>
+                      <a:tailEnd type="none" w="med" len="med"/>
+                    </a:lnT>
+                    <a:lnB w="6350" cap="flat" cmpd="sng" algn="ctr">
+                      <a:solidFill>
+                        <a:srgbClr val="DDE5E8"/>
+                      </a:solidFill>
+                      <a:prstDash val="solid"/>
+                      <a:round/>
+                      <a:headEnd type="none" w="med" len="med"/>
+                      <a:tailEnd type="none" w="med" len="med"/>
+                    </a:lnB>
+                    <a:solidFill>
+                      <a:srgbClr val="EDEDEA"/>
+                    </a:solidFill>
+                  </a:tcPr>
+                </a:tc>
+                <a:tc>
+                  <a:txBody>
+                    <a:bodyPr/>
+                    <a:lstStyle/>
+                    <a:p>
+                      <a:pPr algn="ctr" indent="0" marL="0">
+                        <a:buNone/>
+                      </a:pPr>
+                      <a:r>
+                        <a:rPr lang="en-US" sz="1100" dirty="0">
+                          <a:solidFill>
+                            <a:srgbClr val="5F7580"/>
+                          </a:solidFill>
+                          <a:latin typeface="Calibri" pitchFamily="34" charset="0"/>
+                          <a:ea typeface="Calibri" pitchFamily="34" charset="-122"/>
+                          <a:cs typeface="Calibri" pitchFamily="34" charset="-120"/>
+                        </a:rPr>
+                        <a:t>.476</a:t>
+                      </a:r>
+                      <a:endParaRPr lang="en-US" sz="1100" dirty="0">
+                        <a:latin typeface="Calibri" charset="0"/>
+                        <a:ea typeface="Calibri" charset="0"/>
+                        <a:cs typeface="Calibri" charset="0"/>
+                      </a:endParaRPr>
+                    </a:p>
+                  </a:txBody>
+                  <a:tcPr marL="91440" marR="91440" marT="45720" marB="45720" anchor="ctr">
+                    <a:lnL w="6350" cap="flat" cmpd="sng" algn="ctr">
+                      <a:solidFill>
+                        <a:srgbClr val="DDE5E8"/>
+                      </a:solidFill>
+                      <a:prstDash val="solid"/>
+                      <a:round/>
+                      <a:headEnd type="none" w="med" len="med"/>
+                      <a:tailEnd type="none" w="med" len="med"/>
+                    </a:lnL>
+                    <a:lnR w="6350" cap="flat" cmpd="sng" algn="ctr">
+                      <a:solidFill>
+                        <a:srgbClr val="DDE5E8"/>
+                      </a:solidFill>
+                      <a:prstDash val="solid"/>
+                      <a:round/>
+                      <a:headEnd type="none" w="med" len="med"/>
+                      <a:tailEnd type="none" w="med" len="med"/>
+                    </a:lnR>
+                    <a:lnT w="6350" cap="flat" cmpd="sng" algn="ctr">
+                      <a:solidFill>
+                        <a:srgbClr val="DDE5E8"/>
+                      </a:solidFill>
+                      <a:prstDash val="solid"/>
+                      <a:round/>
+                      <a:headEnd type="none" w="med" len="med"/>
+                      <a:tailEnd type="none" w="med" len="med"/>
+                    </a:lnT>
+                    <a:lnB w="6350" cap="flat" cmpd="sng" algn="ctr">
+                      <a:solidFill>
+                        <a:srgbClr val="DDE5E8"/>
+                      </a:solidFill>
+                      <a:prstDash val="solid"/>
+                      <a:round/>
+                      <a:headEnd type="none" w="med" len="med"/>
+                      <a:tailEnd type="none" w="med" len="med"/>
+                    </a:lnB>
+                    <a:solidFill>
+                      <a:srgbClr val="EDEDEA"/>
+                    </a:solidFill>
+                  </a:tcPr>
+                </a:tc>
+                <a:tc>
+                  <a:txBody>
+                    <a:bodyPr/>
+                    <a:lstStyle/>
+                    <a:p>
+                      <a:pPr algn="ctr" indent="0" marL="0">
+                        <a:buNone/>
+                      </a:pPr>
+                      <a:r>
+                        <a:rPr lang="en-US" sz="1100" b="1" dirty="0">
+                          <a:solidFill>
+                            <a:srgbClr val="18707F"/>
+                          </a:solidFill>
+                          <a:latin typeface="Calibri" pitchFamily="34" charset="0"/>
+                          <a:ea typeface="Calibri" pitchFamily="34" charset="-122"/>
+                          <a:cs typeface="Calibri" pitchFamily="34" charset="-120"/>
+                        </a:rPr>
+                        <a:t>.003</a:t>
+                      </a:r>
+                      <a:endParaRPr lang="en-US" sz="1100" dirty="0">
+                        <a:latin typeface="Calibri" charset="0"/>
+                        <a:ea typeface="Calibri" charset="0"/>
+                        <a:cs typeface="Calibri" charset="0"/>
+                      </a:endParaRPr>
+                    </a:p>
+                  </a:txBody>
+                  <a:tcPr marL="91440" marR="91440" marT="45720" marB="45720" anchor="ctr">
+                    <a:lnL w="6350" cap="flat" cmpd="sng" algn="ctr">
+                      <a:solidFill>
+                        <a:srgbClr val="DDE5E8"/>
+                      </a:solidFill>
+                      <a:prstDash val="solid"/>
+                      <a:round/>
+                      <a:headEnd type="none" w="med" len="med"/>
+                      <a:tailEnd type="none" w="med" len="med"/>
+                    </a:lnL>
+                    <a:lnR w="6350" cap="flat" cmpd="sng" algn="ctr">
+                      <a:solidFill>
+                        <a:srgbClr val="DDE5E8"/>
+                      </a:solidFill>
+                      <a:prstDash val="solid"/>
+                      <a:round/>
+                      <a:headEnd type="none" w="med" len="med"/>
+                      <a:tailEnd type="none" w="med" len="med"/>
+                    </a:lnR>
+                    <a:lnT w="6350" cap="flat" cmpd="sng" algn="ctr">
+                      <a:solidFill>
+                        <a:srgbClr val="DDE5E8"/>
+                      </a:solidFill>
+                      <a:prstDash val="solid"/>
+                      <a:round/>
+                      <a:headEnd type="none" w="med" len="med"/>
+                      <a:tailEnd type="none" w="med" len="med"/>
+                    </a:lnT>
+                    <a:lnB w="6350" cap="flat" cmpd="sng" algn="ctr">
+                      <a:solidFill>
+                        <a:srgbClr val="DDE5E8"/>
+                      </a:solidFill>
+                      <a:prstDash val="solid"/>
+                      <a:round/>
+                      <a:headEnd type="none" w="med" len="med"/>
+                      <a:tailEnd type="none" w="med" len="med"/>
+                    </a:lnB>
+                    <a:solidFill>
+                      <a:srgbClr val="E4F0F0"/>
+                    </a:solidFill>
+                  </a:tcPr>
+                </a:tc>
+                <a:tc>
+                  <a:txBody>
+                    <a:bodyPr/>
+                    <a:lstStyle/>
+                    <a:p>
+                      <a:pPr algn="ctr" indent="0" marL="0">
+                        <a:buNone/>
+                      </a:pPr>
+                      <a:r>
+                        <a:rPr lang="en-US" sz="1100" b="1" dirty="0">
+                          <a:solidFill>
+                            <a:srgbClr val="18707F"/>
+                          </a:solidFill>
+                          <a:latin typeface="Calibri" pitchFamily="34" charset="0"/>
+                          <a:ea typeface="Calibri" pitchFamily="34" charset="-122"/>
+                          <a:cs typeface="Calibri" pitchFamily="34" charset="-120"/>
+                        </a:rPr>
+                        <a:t>.002</a:t>
+                      </a:r>
+                      <a:endParaRPr lang="en-US" sz="1100" dirty="0">
+                        <a:latin typeface="Calibri" charset="0"/>
+                        <a:ea typeface="Calibri" charset="0"/>
+                        <a:cs typeface="Calibri" charset="0"/>
+                      </a:endParaRPr>
+                    </a:p>
+                  </a:txBody>
+                  <a:tcPr marL="91440" marR="91440" marT="45720" marB="45720" anchor="ctr">
+                    <a:lnL w="6350" cap="flat" cmpd="sng" algn="ctr">
+                      <a:solidFill>
+                        <a:srgbClr val="DDE5E8"/>
+                      </a:solidFill>
+                      <a:prstDash val="solid"/>
+                      <a:round/>
+                      <a:headEnd type="none" w="med" len="med"/>
+                      <a:tailEnd type="none" w="med" len="med"/>
+                    </a:lnL>
+                    <a:lnR w="6350" cap="flat" cmpd="sng" algn="ctr">
+                      <a:solidFill>
+                        <a:srgbClr val="DDE5E8"/>
+                      </a:solidFill>
+                      <a:prstDash val="solid"/>
+                      <a:round/>
+                      <a:headEnd type="none" w="med" len="med"/>
+                      <a:tailEnd type="none" w="med" len="med"/>
+                    </a:lnR>
+                    <a:lnT w="6350" cap="flat" cmpd="sng" algn="ctr">
+                      <a:solidFill>
+                        <a:srgbClr val="DDE5E8"/>
+                      </a:solidFill>
+                      <a:prstDash val="solid"/>
+                      <a:round/>
+                      <a:headEnd type="none" w="med" len="med"/>
+                      <a:tailEnd type="none" w="med" len="med"/>
+                    </a:lnT>
+                    <a:lnB w="6350" cap="flat" cmpd="sng" algn="ctr">
+                      <a:solidFill>
+                        <a:srgbClr val="DDE5E8"/>
+                      </a:solidFill>
+                      <a:prstDash val="solid"/>
+                      <a:round/>
+                      <a:headEnd type="none" w="med" len="med"/>
+                      <a:tailEnd type="none" w="med" len="med"/>
+                    </a:lnB>
+                    <a:solidFill>
+                      <a:srgbClr val="E4F0F0"/>
+                    </a:solidFill>
+                  </a:tcPr>
+                </a:tc>
+              </a:tr>
+              <a:tr h="384048">
+                <a:tc>
+                  <a:txBody>
+                    <a:bodyPr/>
+                    <a:lstStyle/>
+                    <a:p>
+                      <a:pPr algn="l" indent="0" marL="0">
+                        <a:buNone/>
+                      </a:pPr>
+                      <a:r>
+                        <a:rPr lang="en-US" sz="1100" b="1" dirty="0">
+                          <a:solidFill>
+                            <a:srgbClr val="16252C"/>
+                          </a:solidFill>
+                          <a:latin typeface="Calibri" pitchFamily="34" charset="0"/>
+                          <a:ea typeface="Calibri" pitchFamily="34" charset="-122"/>
+                          <a:cs typeface="Calibri" pitchFamily="34" charset="-120"/>
+                        </a:rPr>
+                        <a:t>Ensemble</a:t>
+                      </a:r>
+                      <a:endParaRPr lang="en-US" sz="1100" dirty="0">
+                        <a:latin typeface="Calibri" charset="0"/>
+                        <a:ea typeface="Calibri" charset="0"/>
+                        <a:cs typeface="Calibri" charset="0"/>
+                      </a:endParaRPr>
+                    </a:p>
+                  </a:txBody>
+                  <a:tcPr marL="91440" marR="91440" marT="45720" marB="45720" anchor="ctr">
+                    <a:lnL w="6350" cap="flat" cmpd="sng" algn="ctr">
+                      <a:solidFill>
+                        <a:srgbClr val="DDE5E8"/>
+                      </a:solidFill>
+                      <a:prstDash val="solid"/>
+                      <a:round/>
+                      <a:headEnd type="none" w="med" len="med"/>
+                      <a:tailEnd type="none" w="med" len="med"/>
+                    </a:lnL>
+                    <a:lnR w="6350" cap="flat" cmpd="sng" algn="ctr">
+                      <a:solidFill>
+                        <a:srgbClr val="DDE5E8"/>
+                      </a:solidFill>
+                      <a:prstDash val="solid"/>
+                      <a:round/>
+                      <a:headEnd type="none" w="med" len="med"/>
+                      <a:tailEnd type="none" w="med" len="med"/>
+                    </a:lnR>
+                    <a:lnT w="6350" cap="flat" cmpd="sng" algn="ctr">
+                      <a:solidFill>
+                        <a:srgbClr val="DDE5E8"/>
+                      </a:solidFill>
+                      <a:prstDash val="solid"/>
+                      <a:round/>
+                      <a:headEnd type="none" w="med" len="med"/>
+                      <a:tailEnd type="none" w="med" len="med"/>
+                    </a:lnT>
+                    <a:lnB w="6350" cap="flat" cmpd="sng" algn="ctr">
+                      <a:solidFill>
+                        <a:srgbClr val="DDE5E8"/>
+                      </a:solidFill>
+                      <a:prstDash val="solid"/>
+                      <a:round/>
+                      <a:headEnd type="none" w="med" len="med"/>
+                      <a:tailEnd type="none" w="med" len="med"/>
+                    </a:lnB>
+                  </a:tcPr>
+                </a:tc>
+                <a:tc>
+                  <a:txBody>
+                    <a:bodyPr/>
+                    <a:lstStyle/>
+                    <a:p>
+                      <a:pPr algn="ctr" indent="0" marL="0">
+                        <a:buNone/>
+                      </a:pPr>
+                      <a:endParaRPr lang="en-US" sz="1100" dirty="0">
+                        <a:latin typeface="Calibri" charset="0"/>
+                        <a:ea typeface="Calibri" charset="0"/>
+                        <a:cs typeface="Calibri" charset="0"/>
+                      </a:endParaRPr>
+                    </a:p>
+                  </a:txBody>
+                  <a:tcPr marL="91440" marR="91440" marT="45720" marB="45720" anchor="ctr">
+                    <a:lnL w="6350" cap="flat" cmpd="sng" algn="ctr">
+                      <a:solidFill>
+                        <a:srgbClr val="DDE5E8"/>
+                      </a:solidFill>
+                      <a:prstDash val="solid"/>
+                      <a:round/>
+                      <a:headEnd type="none" w="med" len="med"/>
+                      <a:tailEnd type="none" w="med" len="med"/>
+                    </a:lnL>
+                    <a:lnR w="6350" cap="flat" cmpd="sng" algn="ctr">
+                      <a:solidFill>
+                        <a:srgbClr val="DDE5E8"/>
+                      </a:solidFill>
+                      <a:prstDash val="solid"/>
+                      <a:round/>
+                      <a:headEnd type="none" w="med" len="med"/>
+                      <a:tailEnd type="none" w="med" len="med"/>
+                    </a:lnR>
+                    <a:lnT w="6350" cap="flat" cmpd="sng" algn="ctr">
+                      <a:solidFill>
+                        <a:srgbClr val="DDE5E8"/>
+                      </a:solidFill>
+                      <a:prstDash val="solid"/>
+                      <a:round/>
+                      <a:headEnd type="none" w="med" len="med"/>
+                      <a:tailEnd type="none" w="med" len="med"/>
+                    </a:lnT>
+                    <a:lnB w="6350" cap="flat" cmpd="sng" algn="ctr">
+                      <a:solidFill>
+                        <a:srgbClr val="DDE5E8"/>
+                      </a:solidFill>
+                      <a:prstDash val="solid"/>
+                      <a:round/>
+                      <a:headEnd type="none" w="med" len="med"/>
+                      <a:tailEnd type="none" w="med" len="med"/>
+                    </a:lnB>
+                    <a:solidFill>
+                      <a:srgbClr val="F7F5F1"/>
+                    </a:solidFill>
+                  </a:tcPr>
+                </a:tc>
+                <a:tc>
+                  <a:txBody>
+                    <a:bodyPr/>
+                    <a:lstStyle/>
+                    <a:p>
+                      <a:pPr algn="ctr" indent="0" marL="0">
+                        <a:buNone/>
+                      </a:pPr>
+                      <a:endParaRPr lang="en-US" sz="1100" dirty="0">
+                        <a:latin typeface="Calibri" charset="0"/>
+                        <a:ea typeface="Calibri" charset="0"/>
+                        <a:cs typeface="Calibri" charset="0"/>
+                      </a:endParaRPr>
+                    </a:p>
+                  </a:txBody>
+                  <a:tcPr marL="91440" marR="91440" marT="45720" marB="45720" anchor="ctr">
+                    <a:lnL w="6350" cap="flat" cmpd="sng" algn="ctr">
+                      <a:solidFill>
+                        <a:srgbClr val="DDE5E8"/>
+                      </a:solidFill>
+                      <a:prstDash val="solid"/>
+                      <a:round/>
+                      <a:headEnd type="none" w="med" len="med"/>
+                      <a:tailEnd type="none" w="med" len="med"/>
+                    </a:lnL>
+                    <a:lnR w="6350" cap="flat" cmpd="sng" algn="ctr">
+                      <a:solidFill>
+                        <a:srgbClr val="DDE5E8"/>
+                      </a:solidFill>
+                      <a:prstDash val="solid"/>
+                      <a:round/>
+                      <a:headEnd type="none" w="med" len="med"/>
+                      <a:tailEnd type="none" w="med" len="med"/>
+                    </a:lnR>
+                    <a:lnT w="6350" cap="flat" cmpd="sng" algn="ctr">
+                      <a:solidFill>
+                        <a:srgbClr val="DDE5E8"/>
+                      </a:solidFill>
+                      <a:prstDash val="solid"/>
+                      <a:round/>
+                      <a:headEnd type="none" w="med" len="med"/>
+                      <a:tailEnd type="none" w="med" len="med"/>
+                    </a:lnT>
+                    <a:lnB w="6350" cap="flat" cmpd="sng" algn="ctr">
+                      <a:solidFill>
+                        <a:srgbClr val="DDE5E8"/>
+                      </a:solidFill>
+                      <a:prstDash val="solid"/>
+                      <a:round/>
+                      <a:headEnd type="none" w="med" len="med"/>
+                      <a:tailEnd type="none" w="med" len="med"/>
+                    </a:lnB>
+                    <a:solidFill>
+                      <a:srgbClr val="F7F5F1"/>
+                    </a:solidFill>
+                  </a:tcPr>
+                </a:tc>
+                <a:tc>
+                  <a:txBody>
+                    <a:bodyPr/>
+                    <a:lstStyle/>
+                    <a:p>
+                      <a:pPr algn="ctr" indent="0" marL="0">
+                        <a:buNone/>
+                      </a:pPr>
+                      <a:r>
+                        <a:rPr lang="en-US" sz="1100" dirty="0">
+                          <a:solidFill>
+                            <a:srgbClr val="5F7580"/>
+                          </a:solidFill>
+                          <a:latin typeface="Calibri" pitchFamily="34" charset="0"/>
+                          <a:ea typeface="Calibri" pitchFamily="34" charset="-122"/>
+                          <a:cs typeface="Calibri" pitchFamily="34" charset="-120"/>
+                        </a:rPr>
+                        <a:t>.609</a:t>
+                      </a:r>
+                      <a:endParaRPr lang="en-US" sz="1100" dirty="0">
+                        <a:latin typeface="Calibri" charset="0"/>
+                        <a:ea typeface="Calibri" charset="0"/>
+                        <a:cs typeface="Calibri" charset="0"/>
+                      </a:endParaRPr>
+                    </a:p>
+                  </a:txBody>
+                  <a:tcPr marL="91440" marR="91440" marT="45720" marB="45720" anchor="ctr">
+                    <a:lnL w="6350" cap="flat" cmpd="sng" algn="ctr">
+                      <a:solidFill>
+                        <a:srgbClr val="DDE5E8"/>
+                      </a:solidFill>
+                      <a:prstDash val="solid"/>
+                      <a:round/>
+                      <a:headEnd type="none" w="med" len="med"/>
+                      <a:tailEnd type="none" w="med" len="med"/>
+                    </a:lnL>
+                    <a:lnR w="6350" cap="flat" cmpd="sng" algn="ctr">
+                      <a:solidFill>
+                        <a:srgbClr val="DDE5E8"/>
+                      </a:solidFill>
+                      <a:prstDash val="solid"/>
+                      <a:round/>
+                      <a:headEnd type="none" w="med" len="med"/>
+                      <a:tailEnd type="none" w="med" len="med"/>
+                    </a:lnR>
+                    <a:lnT w="6350" cap="flat" cmpd="sng" algn="ctr">
+                      <a:solidFill>
+                        <a:srgbClr val="DDE5E8"/>
+                      </a:solidFill>
+                      <a:prstDash val="solid"/>
+                      <a:round/>
+                      <a:headEnd type="none" w="med" len="med"/>
+                      <a:tailEnd type="none" w="med" len="med"/>
+                    </a:lnT>
+                    <a:lnB w="6350" cap="flat" cmpd="sng" algn="ctr">
+                      <a:solidFill>
+                        <a:srgbClr val="DDE5E8"/>
+                      </a:solidFill>
+                      <a:prstDash val="solid"/>
+                      <a:round/>
+                      <a:headEnd type="none" w="med" len="med"/>
+                      <a:tailEnd type="none" w="med" len="med"/>
+                    </a:lnB>
+                    <a:solidFill>
+                      <a:srgbClr val="EDEDEA"/>
+                    </a:solidFill>
+                  </a:tcPr>
+                </a:tc>
+                <a:tc>
+                  <a:txBody>
+                    <a:bodyPr/>
+                    <a:lstStyle/>
+                    <a:p>
+                      <a:pPr algn="ctr" indent="0" marL="0">
+                        <a:buNone/>
+                      </a:pPr>
+                      <a:r>
+                        <a:rPr lang="en-US" sz="1100" b="1" dirty="0">
+                          <a:solidFill>
+                            <a:srgbClr val="18707F"/>
+                          </a:solidFill>
+                          <a:latin typeface="Calibri" pitchFamily="34" charset="0"/>
+                          <a:ea typeface="Calibri" pitchFamily="34" charset="-122"/>
+                          <a:cs typeface="Calibri" pitchFamily="34" charset="-120"/>
+                        </a:rPr>
+                        <a:t>.001</a:t>
+                      </a:r>
+                      <a:endParaRPr lang="en-US" sz="1100" dirty="0">
+                        <a:latin typeface="Calibri" charset="0"/>
+                        <a:ea typeface="Calibri" charset="0"/>
+                        <a:cs typeface="Calibri" charset="0"/>
+                      </a:endParaRPr>
+                    </a:p>
+                  </a:txBody>
+                  <a:tcPr marL="91440" marR="91440" marT="45720" marB="45720" anchor="ctr">
+                    <a:lnL w="6350" cap="flat" cmpd="sng" algn="ctr">
+                      <a:solidFill>
+                        <a:srgbClr val="DDE5E8"/>
+                      </a:solidFill>
+                      <a:prstDash val="solid"/>
+                      <a:round/>
+                      <a:headEnd type="none" w="med" len="med"/>
+                      <a:tailEnd type="none" w="med" len="med"/>
+                    </a:lnL>
+                    <a:lnR w="6350" cap="flat" cmpd="sng" algn="ctr">
+                      <a:solidFill>
+                        <a:srgbClr val="DDE5E8"/>
+                      </a:solidFill>
+                      <a:prstDash val="solid"/>
+                      <a:round/>
+                      <a:headEnd type="none" w="med" len="med"/>
+                      <a:tailEnd type="none" w="med" len="med"/>
+                    </a:lnR>
+                    <a:lnT w="6350" cap="flat" cmpd="sng" algn="ctr">
+                      <a:solidFill>
+                        <a:srgbClr val="DDE5E8"/>
+                      </a:solidFill>
+                      <a:prstDash val="solid"/>
+                      <a:round/>
+                      <a:headEnd type="none" w="med" len="med"/>
+                      <a:tailEnd type="none" w="med" len="med"/>
+                    </a:lnT>
+                    <a:lnB w="6350" cap="flat" cmpd="sng" algn="ctr">
+                      <a:solidFill>
+                        <a:srgbClr val="DDE5E8"/>
+                      </a:solidFill>
+                      <a:prstDash val="solid"/>
+                      <a:round/>
+                      <a:headEnd type="none" w="med" len="med"/>
+                      <a:tailEnd type="none" w="med" len="med"/>
+                    </a:lnB>
+                    <a:solidFill>
+                      <a:srgbClr val="E4F0F0"/>
+                    </a:solidFill>
+                  </a:tcPr>
+                </a:tc>
+                <a:tc>
+                  <a:txBody>
+                    <a:bodyPr/>
+                    <a:lstStyle/>
+                    <a:p>
+                      <a:pPr algn="ctr" indent="0" marL="0">
+                        <a:buNone/>
+                      </a:pPr>
+                      <a:r>
+                        <a:rPr lang="en-US" sz="1100" b="1" dirty="0">
+                          <a:solidFill>
+                            <a:srgbClr val="18707F"/>
+                          </a:solidFill>
+                          <a:latin typeface="Calibri" pitchFamily="34" charset="0"/>
+                          <a:ea typeface="Calibri" pitchFamily="34" charset="-122"/>
+                          <a:cs typeface="Calibri" pitchFamily="34" charset="-120"/>
+                        </a:rPr>
+                        <a:t>.000</a:t>
+                      </a:r>
+                      <a:endParaRPr lang="en-US" sz="1100" dirty="0">
+                        <a:latin typeface="Calibri" charset="0"/>
+                        <a:ea typeface="Calibri" charset="0"/>
+                        <a:cs typeface="Calibri" charset="0"/>
+                      </a:endParaRPr>
+                    </a:p>
+                  </a:txBody>
+                  <a:tcPr marL="91440" marR="91440" marT="45720" marB="45720" anchor="ctr">
+                    <a:lnL w="6350" cap="flat" cmpd="sng" algn="ctr">
+                      <a:solidFill>
+                        <a:srgbClr val="DDE5E8"/>
+                      </a:solidFill>
+                      <a:prstDash val="solid"/>
+                      <a:round/>
+                      <a:headEnd type="none" w="med" len="med"/>
+                      <a:tailEnd type="none" w="med" len="med"/>
+                    </a:lnL>
+                    <a:lnR w="6350" cap="flat" cmpd="sng" algn="ctr">
+                      <a:solidFill>
+                        <a:srgbClr val="DDE5E8"/>
+                      </a:solidFill>
+                      <a:prstDash val="solid"/>
+                      <a:round/>
+                      <a:headEnd type="none" w="med" len="med"/>
+                      <a:tailEnd type="none" w="med" len="med"/>
+                    </a:lnR>
+                    <a:lnT w="6350" cap="flat" cmpd="sng" algn="ctr">
+                      <a:solidFill>
+                        <a:srgbClr val="DDE5E8"/>
+                      </a:solidFill>
+                      <a:prstDash val="solid"/>
+                      <a:round/>
+                      <a:headEnd type="none" w="med" len="med"/>
+                      <a:tailEnd type="none" w="med" len="med"/>
+                    </a:lnT>
+                    <a:lnB w="6350" cap="flat" cmpd="sng" algn="ctr">
+                      <a:solidFill>
+                        <a:srgbClr val="DDE5E8"/>
+                      </a:solidFill>
+                      <a:prstDash val="solid"/>
+                      <a:round/>
+                      <a:headEnd type="none" w="med" len="med"/>
+                      <a:tailEnd type="none" w="med" len="med"/>
+                    </a:lnB>
+                    <a:solidFill>
+                      <a:srgbClr val="E4F0F0"/>
+                    </a:solidFill>
+                  </a:tcPr>
+                </a:tc>
+              </a:tr>
+              <a:tr h="384048">
+                <a:tc>
+                  <a:txBody>
+                    <a:bodyPr/>
+                    <a:lstStyle/>
+                    <a:p>
+                      <a:pPr algn="l" indent="0" marL="0">
+                        <a:buNone/>
+                      </a:pPr>
+                      <a:r>
+                        <a:rPr lang="en-US" sz="1100" b="1" dirty="0">
+                          <a:solidFill>
+                            <a:srgbClr val="16252C"/>
+                          </a:solidFill>
+                          <a:latin typeface="Calibri" pitchFamily="34" charset="0"/>
+                          <a:ea typeface="Calibri" pitchFamily="34" charset="-122"/>
+                          <a:cs typeface="Calibri" pitchFamily="34" charset="-120"/>
+                        </a:rPr>
+                        <a:t>SVM-poly</a:t>
+                      </a:r>
+                      <a:endParaRPr lang="en-US" sz="1100" dirty="0">
+                        <a:latin typeface="Calibri" charset="0"/>
+                        <a:ea typeface="Calibri" charset="0"/>
+                        <a:cs typeface="Calibri" charset="0"/>
+                      </a:endParaRPr>
+                    </a:p>
+                  </a:txBody>
+                  <a:tcPr marL="91440" marR="91440" marT="45720" marB="45720" anchor="ctr">
+                    <a:lnL w="6350" cap="flat" cmpd="sng" algn="ctr">
+                      <a:solidFill>
+                        <a:srgbClr val="DDE5E8"/>
+                      </a:solidFill>
+                      <a:prstDash val="solid"/>
+                      <a:round/>
+                      <a:headEnd type="none" w="med" len="med"/>
+                      <a:tailEnd type="none" w="med" len="med"/>
+                    </a:lnL>
+                    <a:lnR w="6350" cap="flat" cmpd="sng" algn="ctr">
+                      <a:solidFill>
+                        <a:srgbClr val="DDE5E8"/>
+                      </a:solidFill>
+                      <a:prstDash val="solid"/>
+                      <a:round/>
+                      <a:headEnd type="none" w="med" len="med"/>
+                      <a:tailEnd type="none" w="med" len="med"/>
+                    </a:lnR>
+                    <a:lnT w="6350" cap="flat" cmpd="sng" algn="ctr">
+                      <a:solidFill>
+                        <a:srgbClr val="DDE5E8"/>
+                      </a:solidFill>
+                      <a:prstDash val="solid"/>
+                      <a:round/>
+                      <a:headEnd type="none" w="med" len="med"/>
+                      <a:tailEnd type="none" w="med" len="med"/>
+                    </a:lnT>
+                    <a:lnB w="6350" cap="flat" cmpd="sng" algn="ctr">
+                      <a:solidFill>
+                        <a:srgbClr val="DDE5E8"/>
+                      </a:solidFill>
+                      <a:prstDash val="solid"/>
+                      <a:round/>
+                      <a:headEnd type="none" w="med" len="med"/>
+                      <a:tailEnd type="none" w="med" len="med"/>
+                    </a:lnB>
+                  </a:tcPr>
+                </a:tc>
+                <a:tc>
+                  <a:txBody>
+                    <a:bodyPr/>
+                    <a:lstStyle/>
+                    <a:p>
+                      <a:pPr algn="ctr" indent="0" marL="0">
+                        <a:buNone/>
+                      </a:pPr>
+                      <a:endParaRPr lang="en-US" sz="1100" dirty="0">
+                        <a:latin typeface="Calibri" charset="0"/>
+                        <a:ea typeface="Calibri" charset="0"/>
+                        <a:cs typeface="Calibri" charset="0"/>
+                      </a:endParaRPr>
+                    </a:p>
+                  </a:txBody>
+                  <a:tcPr marL="91440" marR="91440" marT="45720" marB="45720" anchor="ctr">
+                    <a:lnL w="6350" cap="flat" cmpd="sng" algn="ctr">
+                      <a:solidFill>
+                        <a:srgbClr val="DDE5E8"/>
+                      </a:solidFill>
+                      <a:prstDash val="solid"/>
+                      <a:round/>
+                      <a:headEnd type="none" w="med" len="med"/>
+                      <a:tailEnd type="none" w="med" len="med"/>
+                    </a:lnL>
+                    <a:lnR w="6350" cap="flat" cmpd="sng" algn="ctr">
+                      <a:solidFill>
+                        <a:srgbClr val="DDE5E8"/>
+                      </a:solidFill>
+                      <a:prstDash val="solid"/>
+                      <a:round/>
+                      <a:headEnd type="none" w="med" len="med"/>
+                      <a:tailEnd type="none" w="med" len="med"/>
+                    </a:lnR>
+                    <a:lnT w="6350" cap="flat" cmpd="sng" algn="ctr">
+                      <a:solidFill>
+                        <a:srgbClr val="DDE5E8"/>
+                      </a:solidFill>
+                      <a:prstDash val="solid"/>
+                      <a:round/>
+                      <a:headEnd type="none" w="med" len="med"/>
+                      <a:tailEnd type="none" w="med" len="med"/>
+                    </a:lnT>
+                    <a:lnB w="6350" cap="flat" cmpd="sng" algn="ctr">
+                      <a:solidFill>
+                        <a:srgbClr val="DDE5E8"/>
+                      </a:solidFill>
+                      <a:prstDash val="solid"/>
+                      <a:round/>
+                      <a:headEnd type="none" w="med" len="med"/>
+                      <a:tailEnd type="none" w="med" len="med"/>
+                    </a:lnB>
+                    <a:solidFill>
+                      <a:srgbClr val="F7F5F1"/>
+                    </a:solidFill>
+                  </a:tcPr>
+                </a:tc>
+                <a:tc>
+                  <a:txBody>
+                    <a:bodyPr/>
+                    <a:lstStyle/>
+                    <a:p>
+                      <a:pPr algn="ctr" indent="0" marL="0">
+                        <a:buNone/>
+                      </a:pPr>
+                      <a:endParaRPr lang="en-US" sz="1100" dirty="0">
+                        <a:latin typeface="Calibri" charset="0"/>
+                        <a:ea typeface="Calibri" charset="0"/>
+                        <a:cs typeface="Calibri" charset="0"/>
+                      </a:endParaRPr>
+                    </a:p>
+                  </a:txBody>
+                  <a:tcPr marL="91440" marR="91440" marT="45720" marB="45720" anchor="ctr">
+                    <a:lnL w="6350" cap="flat" cmpd="sng" algn="ctr">
+                      <a:solidFill>
+                        <a:srgbClr val="DDE5E8"/>
+                      </a:solidFill>
+                      <a:prstDash val="solid"/>
+                      <a:round/>
+                      <a:headEnd type="none" w="med" len="med"/>
+                      <a:tailEnd type="none" w="med" len="med"/>
+                    </a:lnL>
+                    <a:lnR w="6350" cap="flat" cmpd="sng" algn="ctr">
+                      <a:solidFill>
+                        <a:srgbClr val="DDE5E8"/>
+                      </a:solidFill>
+                      <a:prstDash val="solid"/>
+                      <a:round/>
+                      <a:headEnd type="none" w="med" len="med"/>
+                      <a:tailEnd type="none" w="med" len="med"/>
+                    </a:lnR>
+                    <a:lnT w="6350" cap="flat" cmpd="sng" algn="ctr">
+                      <a:solidFill>
+                        <a:srgbClr val="DDE5E8"/>
+                      </a:solidFill>
+                      <a:prstDash val="solid"/>
+                      <a:round/>
+                      <a:headEnd type="none" w="med" len="med"/>
+                      <a:tailEnd type="none" w="med" len="med"/>
+                    </a:lnT>
+                    <a:lnB w="6350" cap="flat" cmpd="sng" algn="ctr">
+                      <a:solidFill>
+                        <a:srgbClr val="DDE5E8"/>
+                      </a:solidFill>
+                      <a:prstDash val="solid"/>
+                      <a:round/>
+                      <a:headEnd type="none" w="med" len="med"/>
+                      <a:tailEnd type="none" w="med" len="med"/>
+                    </a:lnB>
+                    <a:solidFill>
+                      <a:srgbClr val="F7F5F1"/>
+                    </a:solidFill>
+                  </a:tcPr>
+                </a:tc>
+                <a:tc>
+                  <a:txBody>
+                    <a:bodyPr/>
+                    <a:lstStyle/>
+                    <a:p>
+                      <a:pPr algn="ctr" indent="0" marL="0">
+                        <a:buNone/>
+                      </a:pPr>
+                      <a:endParaRPr lang="en-US" sz="1100" dirty="0">
+                        <a:latin typeface="Calibri" charset="0"/>
+                        <a:ea typeface="Calibri" charset="0"/>
+                        <a:cs typeface="Calibri" charset="0"/>
+                      </a:endParaRPr>
+                    </a:p>
+                  </a:txBody>
+                  <a:tcPr marL="91440" marR="91440" marT="45720" marB="45720" anchor="ctr">
+                    <a:lnL w="6350" cap="flat" cmpd="sng" algn="ctr">
+                      <a:solidFill>
+                        <a:srgbClr val="DDE5E8"/>
+                      </a:solidFill>
+                      <a:prstDash val="solid"/>
+                      <a:round/>
+                      <a:headEnd type="none" w="med" len="med"/>
+                      <a:tailEnd type="none" w="med" len="med"/>
+                    </a:lnL>
+                    <a:lnR w="6350" cap="flat" cmpd="sng" algn="ctr">
+                      <a:solidFill>
+                        <a:srgbClr val="DDE5E8"/>
+                      </a:solidFill>
+                      <a:prstDash val="solid"/>
+                      <a:round/>
+                      <a:headEnd type="none" w="med" len="med"/>
+                      <a:tailEnd type="none" w="med" len="med"/>
+                    </a:lnR>
+                    <a:lnT w="6350" cap="flat" cmpd="sng" algn="ctr">
+                      <a:solidFill>
+                        <a:srgbClr val="DDE5E8"/>
+                      </a:solidFill>
+                      <a:prstDash val="solid"/>
+                      <a:round/>
+                      <a:headEnd type="none" w="med" len="med"/>
+                      <a:tailEnd type="none" w="med" len="med"/>
+                    </a:lnT>
+                    <a:lnB w="6350" cap="flat" cmpd="sng" algn="ctr">
+                      <a:solidFill>
+                        <a:srgbClr val="DDE5E8"/>
+                      </a:solidFill>
+                      <a:prstDash val="solid"/>
+                      <a:round/>
+                      <a:headEnd type="none" w="med" len="med"/>
+                      <a:tailEnd type="none" w="med" len="med"/>
+                    </a:lnB>
+                    <a:solidFill>
+                      <a:srgbClr val="F7F5F1"/>
+                    </a:solidFill>
+                  </a:tcPr>
+                </a:tc>
+                <a:tc>
+                  <a:txBody>
+                    <a:bodyPr/>
+                    <a:lstStyle/>
+                    <a:p>
+                      <a:pPr algn="ctr" indent="0" marL="0">
+                        <a:buNone/>
+                      </a:pPr>
+                      <a:r>
+                        <a:rPr lang="en-US" sz="1100" dirty="0">
+                          <a:solidFill>
+                            <a:srgbClr val="5F7580"/>
+                          </a:solidFill>
+                          <a:latin typeface="Calibri" pitchFamily="34" charset="0"/>
+                          <a:ea typeface="Calibri" pitchFamily="34" charset="-122"/>
+                          <a:cs typeface="Calibri" pitchFamily="34" charset="-120"/>
+                        </a:rPr>
+                        <a:t>.554</a:t>
+                      </a:r>
+                      <a:endParaRPr lang="en-US" sz="1100" dirty="0">
+                        <a:latin typeface="Calibri" charset="0"/>
+                        <a:ea typeface="Calibri" charset="0"/>
+                        <a:cs typeface="Calibri" charset="0"/>
+                      </a:endParaRPr>
+                    </a:p>
+                  </a:txBody>
+                  <a:tcPr marL="91440" marR="91440" marT="45720" marB="45720" anchor="ctr">
+                    <a:lnL w="6350" cap="flat" cmpd="sng" algn="ctr">
+                      <a:solidFill>
+                        <a:srgbClr val="DDE5E8"/>
+                      </a:solidFill>
+                      <a:prstDash val="solid"/>
+                      <a:round/>
+                      <a:headEnd type="none" w="med" len="med"/>
+                      <a:tailEnd type="none" w="med" len="med"/>
+                    </a:lnL>
+                    <a:lnR w="6350" cap="flat" cmpd="sng" algn="ctr">
+                      <a:solidFill>
+                        <a:srgbClr val="DDE5E8"/>
+                      </a:solidFill>
+                      <a:prstDash val="solid"/>
+                      <a:round/>
+                      <a:headEnd type="none" w="med" len="med"/>
+                      <a:tailEnd type="none" w="med" len="med"/>
+                    </a:lnR>
+                    <a:lnT w="6350" cap="flat" cmpd="sng" algn="ctr">
+                      <a:solidFill>
+                        <a:srgbClr val="DDE5E8"/>
+                      </a:solidFill>
+                      <a:prstDash val="solid"/>
+                      <a:round/>
+                      <a:headEnd type="none" w="med" len="med"/>
+                      <a:tailEnd type="none" w="med" len="med"/>
+                    </a:lnT>
+                    <a:lnB w="6350" cap="flat" cmpd="sng" algn="ctr">
+                      <a:solidFill>
+                        <a:srgbClr val="DDE5E8"/>
+                      </a:solidFill>
+                      <a:prstDash val="solid"/>
+                      <a:round/>
+                      <a:headEnd type="none" w="med" len="med"/>
+                      <a:tailEnd type="none" w="med" len="med"/>
+                    </a:lnB>
+                    <a:solidFill>
+                      <a:srgbClr val="EDEDEA"/>
+                    </a:solidFill>
+                  </a:tcPr>
+                </a:tc>
+                <a:tc>
+                  <a:txBody>
+                    <a:bodyPr/>
+                    <a:lstStyle/>
+                    <a:p>
+                      <a:pPr algn="ctr" indent="0" marL="0">
+                        <a:buNone/>
+                      </a:pPr>
+                      <a:r>
+                        <a:rPr lang="en-US" sz="1100" dirty="0">
+                          <a:solidFill>
+                            <a:srgbClr val="5F7580"/>
+                          </a:solidFill>
+                          <a:latin typeface="Calibri" pitchFamily="34" charset="0"/>
+                          <a:ea typeface="Calibri" pitchFamily="34" charset="-122"/>
+                          <a:cs typeface="Calibri" pitchFamily="34" charset="-120"/>
+                        </a:rPr>
+                        <a:t>.420</a:t>
+                      </a:r>
+                      <a:endParaRPr lang="en-US" sz="1100" dirty="0">
+                        <a:latin typeface="Calibri" charset="0"/>
+                        <a:ea typeface="Calibri" charset="0"/>
+                        <a:cs typeface="Calibri" charset="0"/>
+                      </a:endParaRPr>
+                    </a:p>
+                  </a:txBody>
+                  <a:tcPr marL="91440" marR="91440" marT="45720" marB="45720" anchor="ctr">
+                    <a:lnL w="6350" cap="flat" cmpd="sng" algn="ctr">
+                      <a:solidFill>
+                        <a:srgbClr val="DDE5E8"/>
+                      </a:solidFill>
+                      <a:prstDash val="solid"/>
+                      <a:round/>
+                      <a:headEnd type="none" w="med" len="med"/>
+                      <a:tailEnd type="none" w="med" len="med"/>
+                    </a:lnL>
+                    <a:lnR w="6350" cap="flat" cmpd="sng" algn="ctr">
+                      <a:solidFill>
+                        <a:srgbClr val="DDE5E8"/>
+                      </a:solidFill>
+                      <a:prstDash val="solid"/>
+                      <a:round/>
+                      <a:headEnd type="none" w="med" len="med"/>
+                      <a:tailEnd type="none" w="med" len="med"/>
+                    </a:lnR>
+                    <a:lnT w="6350" cap="flat" cmpd="sng" algn="ctr">
+                      <a:solidFill>
+                        <a:srgbClr val="DDE5E8"/>
+                      </a:solidFill>
+                      <a:prstDash val="solid"/>
+                      <a:round/>
+                      <a:headEnd type="none" w="med" len="med"/>
+                      <a:tailEnd type="none" w="med" len="med"/>
+                    </a:lnT>
+                    <a:lnB w="6350" cap="flat" cmpd="sng" algn="ctr">
+                      <a:solidFill>
+                        <a:srgbClr val="DDE5E8"/>
+                      </a:solidFill>
+                      <a:prstDash val="solid"/>
+                      <a:round/>
+                      <a:headEnd type="none" w="med" len="med"/>
+                      <a:tailEnd type="none" w="med" len="med"/>
+                    </a:lnB>
+                    <a:solidFill>
+                      <a:srgbClr val="EDEDEA"/>
+                    </a:solidFill>
+                  </a:tcPr>
+                </a:tc>
+              </a:tr>
+              <a:tr h="384048">
+                <a:tc>
+                  <a:txBody>
+                    <a:bodyPr/>
+                    <a:lstStyle/>
+                    <a:p>
+                      <a:pPr algn="l" indent="0" marL="0">
+                        <a:buNone/>
+                      </a:pPr>
+                      <a:r>
+                        <a:rPr lang="en-US" sz="1100" b="1" dirty="0">
+                          <a:solidFill>
+                            <a:srgbClr val="16252C"/>
+                          </a:solidFill>
+                          <a:latin typeface="Calibri" pitchFamily="34" charset="0"/>
+                          <a:ea typeface="Calibri" pitchFamily="34" charset="-122"/>
+                          <a:cs typeface="Calibri" pitchFamily="34" charset="-120"/>
+                        </a:rPr>
+                        <a:t>GP-RBF</a:t>
+                      </a:r>
+                      <a:endParaRPr lang="en-US" sz="1100" dirty="0">
+                        <a:latin typeface="Calibri" charset="0"/>
+                        <a:ea typeface="Calibri" charset="0"/>
+                        <a:cs typeface="Calibri" charset="0"/>
+                      </a:endParaRPr>
+                    </a:p>
+                  </a:txBody>
+                  <a:tcPr marL="91440" marR="91440" marT="45720" marB="45720" anchor="ctr">
+                    <a:lnL w="6350" cap="flat" cmpd="sng" algn="ctr">
+                      <a:solidFill>
+                        <a:srgbClr val="DDE5E8"/>
+                      </a:solidFill>
+                      <a:prstDash val="solid"/>
+                      <a:round/>
+                      <a:headEnd type="none" w="med" len="med"/>
+                      <a:tailEnd type="none" w="med" len="med"/>
+                    </a:lnL>
+                    <a:lnR w="6350" cap="flat" cmpd="sng" algn="ctr">
+                      <a:solidFill>
+                        <a:srgbClr val="DDE5E8"/>
+                      </a:solidFill>
+                      <a:prstDash val="solid"/>
+                      <a:round/>
+                      <a:headEnd type="none" w="med" len="med"/>
+                      <a:tailEnd type="none" w="med" len="med"/>
+                    </a:lnR>
+                    <a:lnT w="6350" cap="flat" cmpd="sng" algn="ctr">
+                      <a:solidFill>
+                        <a:srgbClr val="DDE5E8"/>
+                      </a:solidFill>
+                      <a:prstDash val="solid"/>
+                      <a:round/>
+                      <a:headEnd type="none" w="med" len="med"/>
+                      <a:tailEnd type="none" w="med" len="med"/>
+                    </a:lnT>
+                    <a:lnB w="6350" cap="flat" cmpd="sng" algn="ctr">
+                      <a:solidFill>
+                        <a:srgbClr val="DDE5E8"/>
+                      </a:solidFill>
+                      <a:prstDash val="solid"/>
+                      <a:round/>
+                      <a:headEnd type="none" w="med" len="med"/>
+                      <a:tailEnd type="none" w="med" len="med"/>
+                    </a:lnB>
+                  </a:tcPr>
+                </a:tc>
+                <a:tc>
+                  <a:txBody>
+                    <a:bodyPr/>
+                    <a:lstStyle/>
+                    <a:p>
+                      <a:pPr algn="ctr" indent="0" marL="0">
+                        <a:buNone/>
+                      </a:pPr>
+                      <a:endParaRPr lang="en-US" sz="1100" dirty="0">
+                        <a:latin typeface="Calibri" charset="0"/>
+                        <a:ea typeface="Calibri" charset="0"/>
+                        <a:cs typeface="Calibri" charset="0"/>
+                      </a:endParaRPr>
+                    </a:p>
+                  </a:txBody>
+                  <a:tcPr marL="91440" marR="91440" marT="45720" marB="45720" anchor="ctr">
+                    <a:lnL w="6350" cap="flat" cmpd="sng" algn="ctr">
+                      <a:solidFill>
+                        <a:srgbClr val="DDE5E8"/>
+                      </a:solidFill>
+                      <a:prstDash val="solid"/>
+                      <a:round/>
+                      <a:headEnd type="none" w="med" len="med"/>
+                      <a:tailEnd type="none" w="med" len="med"/>
+                    </a:lnL>
+                    <a:lnR w="6350" cap="flat" cmpd="sng" algn="ctr">
+                      <a:solidFill>
+                        <a:srgbClr val="DDE5E8"/>
+                      </a:solidFill>
+                      <a:prstDash val="solid"/>
+                      <a:round/>
+                      <a:headEnd type="none" w="med" len="med"/>
+                      <a:tailEnd type="none" w="med" len="med"/>
+                    </a:lnR>
+                    <a:lnT w="6350" cap="flat" cmpd="sng" algn="ctr">
+                      <a:solidFill>
+                        <a:srgbClr val="DDE5E8"/>
+                      </a:solidFill>
+                      <a:prstDash val="solid"/>
+                      <a:round/>
+                      <a:headEnd type="none" w="med" len="med"/>
+                      <a:tailEnd type="none" w="med" len="med"/>
+                    </a:lnT>
+                    <a:lnB w="6350" cap="flat" cmpd="sng" algn="ctr">
+                      <a:solidFill>
+                        <a:srgbClr val="DDE5E8"/>
+                      </a:solidFill>
+                      <a:prstDash val="solid"/>
+                      <a:round/>
+                      <a:headEnd type="none" w="med" len="med"/>
+                      <a:tailEnd type="none" w="med" len="med"/>
+                    </a:lnB>
+                    <a:solidFill>
+                      <a:srgbClr val="F7F5F1"/>
+                    </a:solidFill>
+                  </a:tcPr>
+                </a:tc>
+                <a:tc>
+                  <a:txBody>
+                    <a:bodyPr/>
+                    <a:lstStyle/>
+                    <a:p>
+                      <a:pPr algn="ctr" indent="0" marL="0">
+                        <a:buNone/>
+                      </a:pPr>
+                      <a:endParaRPr lang="en-US" sz="1100" dirty="0">
+                        <a:latin typeface="Calibri" charset="0"/>
+                        <a:ea typeface="Calibri" charset="0"/>
+                        <a:cs typeface="Calibri" charset="0"/>
+                      </a:endParaRPr>
+                    </a:p>
+                  </a:txBody>
+                  <a:tcPr marL="91440" marR="91440" marT="45720" marB="45720" anchor="ctr">
+                    <a:lnL w="6350" cap="flat" cmpd="sng" algn="ctr">
+                      <a:solidFill>
+                        <a:srgbClr val="DDE5E8"/>
+                      </a:solidFill>
+                      <a:prstDash val="solid"/>
+                      <a:round/>
+                      <a:headEnd type="none" w="med" len="med"/>
+                      <a:tailEnd type="none" w="med" len="med"/>
+                    </a:lnL>
+                    <a:lnR w="6350" cap="flat" cmpd="sng" algn="ctr">
+                      <a:solidFill>
+                        <a:srgbClr val="DDE5E8"/>
+                      </a:solidFill>
+                      <a:prstDash val="solid"/>
+                      <a:round/>
+                      <a:headEnd type="none" w="med" len="med"/>
+                      <a:tailEnd type="none" w="med" len="med"/>
+                    </a:lnR>
+                    <a:lnT w="6350" cap="flat" cmpd="sng" algn="ctr">
+                      <a:solidFill>
+                        <a:srgbClr val="DDE5E8"/>
+                      </a:solidFill>
+                      <a:prstDash val="solid"/>
+                      <a:round/>
+                      <a:headEnd type="none" w="med" len="med"/>
+                      <a:tailEnd type="none" w="med" len="med"/>
+                    </a:lnT>
+                    <a:lnB w="6350" cap="flat" cmpd="sng" algn="ctr">
+                      <a:solidFill>
+                        <a:srgbClr val="DDE5E8"/>
+                      </a:solidFill>
+                      <a:prstDash val="solid"/>
+                      <a:round/>
+                      <a:headEnd type="none" w="med" len="med"/>
+                      <a:tailEnd type="none" w="med" len="med"/>
+                    </a:lnB>
+                    <a:solidFill>
+                      <a:srgbClr val="F7F5F1"/>
+                    </a:solidFill>
+                  </a:tcPr>
+                </a:tc>
+                <a:tc>
+                  <a:txBody>
+                    <a:bodyPr/>
+                    <a:lstStyle/>
+                    <a:p>
+                      <a:pPr algn="ctr" indent="0" marL="0">
+                        <a:buNone/>
+                      </a:pPr>
+                      <a:endParaRPr lang="en-US" sz="1100" dirty="0">
+                        <a:latin typeface="Calibri" charset="0"/>
+                        <a:ea typeface="Calibri" charset="0"/>
+                        <a:cs typeface="Calibri" charset="0"/>
+                      </a:endParaRPr>
+                    </a:p>
+                  </a:txBody>
+                  <a:tcPr marL="91440" marR="91440" marT="45720" marB="45720" anchor="ctr">
+                    <a:lnL w="6350" cap="flat" cmpd="sng" algn="ctr">
+                      <a:solidFill>
+                        <a:srgbClr val="DDE5E8"/>
+                      </a:solidFill>
+                      <a:prstDash val="solid"/>
+                      <a:round/>
+                      <a:headEnd type="none" w="med" len="med"/>
+                      <a:tailEnd type="none" w="med" len="med"/>
+                    </a:lnL>
+                    <a:lnR w="6350" cap="flat" cmpd="sng" algn="ctr">
+                      <a:solidFill>
+                        <a:srgbClr val="DDE5E8"/>
+                      </a:solidFill>
+                      <a:prstDash val="solid"/>
+                      <a:round/>
+                      <a:headEnd type="none" w="med" len="med"/>
+                      <a:tailEnd type="none" w="med" len="med"/>
+                    </a:lnR>
+                    <a:lnT w="6350" cap="flat" cmpd="sng" algn="ctr">
+                      <a:solidFill>
+                        <a:srgbClr val="DDE5E8"/>
+                      </a:solidFill>
+                      <a:prstDash val="solid"/>
+                      <a:round/>
+                      <a:headEnd type="none" w="med" len="med"/>
+                      <a:tailEnd type="none" w="med" len="med"/>
+                    </a:lnT>
+                    <a:lnB w="6350" cap="flat" cmpd="sng" algn="ctr">
+                      <a:solidFill>
+                        <a:srgbClr val="DDE5E8"/>
+                      </a:solidFill>
+                      <a:prstDash val="solid"/>
+                      <a:round/>
+                      <a:headEnd type="none" w="med" len="med"/>
+                      <a:tailEnd type="none" w="med" len="med"/>
+                    </a:lnB>
+                    <a:solidFill>
+                      <a:srgbClr val="F7F5F1"/>
+                    </a:solidFill>
+                  </a:tcPr>
+                </a:tc>
+                <a:tc>
+                  <a:txBody>
+                    <a:bodyPr/>
+                    <a:lstStyle/>
+                    <a:p>
+                      <a:pPr algn="ctr" indent="0" marL="0">
+                        <a:buNone/>
+                      </a:pPr>
+                      <a:endParaRPr lang="en-US" sz="1100" dirty="0">
+                        <a:latin typeface="Calibri" charset="0"/>
+                        <a:ea typeface="Calibri" charset="0"/>
+                        <a:cs typeface="Calibri" charset="0"/>
+                      </a:endParaRPr>
+                    </a:p>
+                  </a:txBody>
+                  <a:tcPr marL="91440" marR="91440" marT="45720" marB="45720" anchor="ctr">
+                    <a:lnL w="6350" cap="flat" cmpd="sng" algn="ctr">
+                      <a:solidFill>
+                        <a:srgbClr val="DDE5E8"/>
+                      </a:solidFill>
+                      <a:prstDash val="solid"/>
+                      <a:round/>
+                      <a:headEnd type="none" w="med" len="med"/>
+                      <a:tailEnd type="none" w="med" len="med"/>
+                    </a:lnL>
+                    <a:lnR w="6350" cap="flat" cmpd="sng" algn="ctr">
+                      <a:solidFill>
+                        <a:srgbClr val="DDE5E8"/>
+                      </a:solidFill>
+                      <a:prstDash val="solid"/>
+                      <a:round/>
+                      <a:headEnd type="none" w="med" len="med"/>
+                      <a:tailEnd type="none" w="med" len="med"/>
+                    </a:lnR>
+                    <a:lnT w="6350" cap="flat" cmpd="sng" algn="ctr">
+                      <a:solidFill>
+                        <a:srgbClr val="DDE5E8"/>
+                      </a:solidFill>
+                      <a:prstDash val="solid"/>
+                      <a:round/>
+                      <a:headEnd type="none" w="med" len="med"/>
+                      <a:tailEnd type="none" w="med" len="med"/>
+                    </a:lnT>
+                    <a:lnB w="6350" cap="flat" cmpd="sng" algn="ctr">
+                      <a:solidFill>
+                        <a:srgbClr val="DDE5E8"/>
+                      </a:solidFill>
+                      <a:prstDash val="solid"/>
+                      <a:round/>
+                      <a:headEnd type="none" w="med" len="med"/>
+                      <a:tailEnd type="none" w="med" len="med"/>
+                    </a:lnB>
+                    <a:solidFill>
+                      <a:srgbClr val="F7F5F1"/>
+                    </a:solidFill>
+                  </a:tcPr>
+                </a:tc>
+                <a:tc>
+                  <a:txBody>
+                    <a:bodyPr/>
+                    <a:lstStyle/>
+                    <a:p>
+                      <a:pPr algn="ctr" indent="0" marL="0">
+                        <a:buNone/>
+                      </a:pPr>
+                      <a:r>
+                        <a:rPr lang="en-US" sz="1100" dirty="0">
+                          <a:solidFill>
+                            <a:srgbClr val="5F7580"/>
+                          </a:solidFill>
+                          <a:latin typeface="Calibri" pitchFamily="34" charset="0"/>
+                          <a:ea typeface="Calibri" pitchFamily="34" charset="-122"/>
+                          <a:cs typeface="Calibri" pitchFamily="34" charset="-120"/>
+                        </a:rPr>
+                        <a:t>.051</a:t>
+                      </a:r>
+                      <a:endParaRPr lang="en-US" sz="1100" dirty="0">
+                        <a:latin typeface="Calibri" charset="0"/>
+                        <a:ea typeface="Calibri" charset="0"/>
+                        <a:cs typeface="Calibri" charset="0"/>
+                      </a:endParaRPr>
+                    </a:p>
+                  </a:txBody>
+                  <a:tcPr marL="91440" marR="91440" marT="45720" marB="45720" anchor="ctr">
+                    <a:lnL w="6350" cap="flat" cmpd="sng" algn="ctr">
+                      <a:solidFill>
+                        <a:srgbClr val="DDE5E8"/>
+                      </a:solidFill>
+                      <a:prstDash val="solid"/>
+                      <a:round/>
+                      <a:headEnd type="none" w="med" len="med"/>
+                      <a:tailEnd type="none" w="med" len="med"/>
+                    </a:lnL>
+                    <a:lnR w="6350" cap="flat" cmpd="sng" algn="ctr">
+                      <a:solidFill>
+                        <a:srgbClr val="DDE5E8"/>
+                      </a:solidFill>
+                      <a:prstDash val="solid"/>
+                      <a:round/>
+                      <a:headEnd type="none" w="med" len="med"/>
+                      <a:tailEnd type="none" w="med" len="med"/>
+                    </a:lnR>
+                    <a:lnT w="6350" cap="flat" cmpd="sng" algn="ctr">
+                      <a:solidFill>
+                        <a:srgbClr val="DDE5E8"/>
+                      </a:solidFill>
+                      <a:prstDash val="solid"/>
+                      <a:round/>
+                      <a:headEnd type="none" w="med" len="med"/>
+                      <a:tailEnd type="none" w="med" len="med"/>
+                    </a:lnT>
+                    <a:lnB w="6350" cap="flat" cmpd="sng" algn="ctr">
+                      <a:solidFill>
+                        <a:srgbClr val="DDE5E8"/>
+                      </a:solidFill>
+                      <a:prstDash val="solid"/>
+                      <a:round/>
+                      <a:headEnd type="none" w="med" len="med"/>
+                      <a:tailEnd type="none" w="med" len="med"/>
+                    </a:lnB>
+                    <a:solidFill>
+                      <a:srgbClr val="EDEDEA"/>
+                    </a:solidFill>
                   </a:tcPr>
                 </a:tc>
               </a:tr>
@@ -15817,40 +17205,36 @@
           </a:graphicData>
         </a:graphic>
       </p:graphicFrame>
-      <p:pic>
-        <p:nvPicPr>
-          <p:cNvPr id="8" name="Image 0" descr="/mnt/d/claude-code-project/group-corparation/Christina-project/slides/img/roc6.png">    </p:cNvPr>
-          <p:cNvPicPr>
-            <a:picLocks noChangeAspect="1"/>
-          </p:cNvPicPr>
-          <p:nvPr/>
-        </p:nvPicPr>
-        <p:blipFill>
-          <a:blip r:embed="rId1"/>
-          <a:stretch>
-            <a:fillRect/>
-          </a:stretch>
-        </p:blipFill>
-        <p:spPr>
-          <a:xfrm>
-            <a:off x="7452360" y="1481328"/>
-            <a:ext cx="4069080" cy="3282696"/>
-          </a:xfrm>
-          <a:prstGeom prst="rect">
-            <a:avLst/>
-          </a:prstGeom>
-        </p:spPr>
-      </p:pic>
-      <p:sp>
-        <p:nvSpPr>
-          <p:cNvPr id="9" name="Text 5"/>
-          <p:cNvSpPr/>
-          <p:nvPr/>
-        </p:nvSpPr>
-        <p:spPr>
-          <a:xfrm>
-            <a:off x="7452360" y="4791456"/>
-            <a:ext cx="4069080" cy="502920"/>
+      <p:sp>
+        <p:nvSpPr>
+          <p:cNvPr id="8" name="Shape 5"/>
+          <p:cNvSpPr/>
+          <p:nvPr/>
+        </p:nvSpPr>
+        <p:spPr>
+          <a:xfrm>
+            <a:off x="548640" y="4407408"/>
+            <a:ext cx="182880" cy="182880"/>
+          </a:xfrm>
+          <a:prstGeom prst="rect">
+            <a:avLst/>
+          </a:prstGeom>
+          <a:solidFill>
+            <a:srgbClr val="EDEDEA"/>
+          </a:solidFill>
+          <a:ln/>
+        </p:spPr>
+      </p:sp>
+      <p:sp>
+        <p:nvSpPr>
+          <p:cNvPr id="9" name="Text 6"/>
+          <p:cNvSpPr/>
+          <p:nvPr/>
+        </p:nvSpPr>
+        <p:spPr>
+          <a:xfrm>
+            <a:off x="822960" y="4370832"/>
+            <a:ext cx="3840480" cy="274320"/>
           </a:xfrm>
           <a:prstGeom prst="rect">
             <a:avLst/>
@@ -15866,7 +17250,7 @@
               <a:buNone/>
             </a:pPr>
             <a:r>
-              <a:rPr lang="en-US" sz="900" i="1" dirty="0">
+              <a:rPr lang="en-US" sz="1000" dirty="0">
                 <a:solidFill>
                   <a:srgbClr val="5F7580"/>
                 </a:solidFill>
@@ -15874,28 +17258,87 @@
                 <a:ea typeface="Calibri" pitchFamily="34" charset="-122"/>
                 <a:cs typeface="Calibri" pitchFamily="34" charset="-120"/>
               </a:rPr>
-              <a:t>Out-of-fold ROC, single 5-fold split at fixed hyperparameters — not the nested-CV estimate in the table on the previous slide.</a:t>
+              <a:t>grey = indistinguishable (p ≥ 0.05)</a:t>
             </a:r>
-            <a:endParaRPr lang="en-US" sz="900" dirty="0"/>
+            <a:endParaRPr lang="en-US" sz="1000" dirty="0"/>
           </a:p>
         </p:txBody>
       </p:sp>
       <p:sp>
         <p:nvSpPr>
-          <p:cNvPr id="10" name="Shape 6"/>
-          <p:cNvSpPr/>
-          <p:nvPr/>
-        </p:nvSpPr>
-        <p:spPr>
-          <a:xfrm>
-            <a:off x="548640" y="3383280"/>
-            <a:ext cx="6400800" cy="1371600"/>
+          <p:cNvPr id="10" name="Shape 7"/>
+          <p:cNvSpPr/>
+          <p:nvPr/>
+        </p:nvSpPr>
+        <p:spPr>
+          <a:xfrm>
+            <a:off x="4480560" y="4407408"/>
+            <a:ext cx="182880" cy="182880"/>
           </a:xfrm>
           <a:prstGeom prst="rect">
             <a:avLst/>
           </a:prstGeom>
           <a:solidFill>
-            <a:srgbClr val="FFFFFF"/>
+            <a:srgbClr val="E4F0F0"/>
+          </a:solidFill>
+          <a:ln/>
+        </p:spPr>
+      </p:sp>
+      <p:sp>
+        <p:nvSpPr>
+          <p:cNvPr id="11" name="Text 8"/>
+          <p:cNvSpPr/>
+          <p:nvPr/>
+        </p:nvSpPr>
+        <p:spPr>
+          <a:xfrm>
+            <a:off x="4754880" y="4370832"/>
+            <a:ext cx="3657600" cy="274320"/>
+          </a:xfrm>
+          <a:prstGeom prst="rect">
+            <a:avLst/>
+          </a:prstGeom>
+          <a:noFill/>
+          <a:ln/>
+        </p:spPr>
+        <p:txBody>
+          <a:bodyPr wrap="square" lIns="0" tIns="0" rIns="0" bIns="0" rtlCol="0" anchor="ctr"/>
+          <a:lstStyle/>
+          <a:p>
+            <a:pPr indent="0" marL="0">
+              <a:buNone/>
+            </a:pPr>
+            <a:r>
+              <a:rPr lang="en-US" sz="1000" dirty="0">
+                <a:solidFill>
+                  <a:srgbClr val="5F7580"/>
+                </a:solidFill>
+                <a:latin typeface="Calibri" pitchFamily="34" charset="0"/>
+                <a:ea typeface="Calibri" pitchFamily="34" charset="-122"/>
+                <a:cs typeface="Calibri" pitchFamily="34" charset="-120"/>
+              </a:rPr>
+              <a:t>teal = distinguishable</a:t>
+            </a:r>
+            <a:endParaRPr lang="en-US" sz="1000" dirty="0"/>
+          </a:p>
+        </p:txBody>
+      </p:sp>
+      <p:sp>
+        <p:nvSpPr>
+          <p:cNvPr id="12" name="Shape 9"/>
+          <p:cNvSpPr/>
+          <p:nvPr/>
+        </p:nvSpPr>
+        <p:spPr>
+          <a:xfrm>
+            <a:off x="548640" y="4709160"/>
+            <a:ext cx="5394960" cy="1536192"/>
+          </a:xfrm>
+          <a:prstGeom prst="rect">
+            <a:avLst/>
+          </a:prstGeom>
+          <a:solidFill>
+            <a:srgbClr val="FBEDE7"/>
           </a:solidFill>
           <a:ln/>
           <a:effectLst>
@@ -15909,34 +17352,34 @@
       </p:sp>
       <p:sp>
         <p:nvSpPr>
-          <p:cNvPr id="11" name="Shape 7"/>
-          <p:cNvSpPr/>
-          <p:nvPr/>
-        </p:nvSpPr>
-        <p:spPr>
-          <a:xfrm>
-            <a:off x="548640" y="3383280"/>
-            <a:ext cx="68580" cy="1371600"/>
+          <p:cNvPr id="13" name="Shape 10"/>
+          <p:cNvSpPr/>
+          <p:nvPr/>
+        </p:nvSpPr>
+        <p:spPr>
+          <a:xfrm>
+            <a:off x="548640" y="4709160"/>
+            <a:ext cx="68580" cy="1536192"/>
           </a:xfrm>
           <a:prstGeom prst="rect">
             <a:avLst/>
           </a:prstGeom>
           <a:solidFill>
-            <a:srgbClr val="8FB996"/>
+            <a:srgbClr val="D2603A"/>
           </a:solidFill>
           <a:ln/>
         </p:spPr>
       </p:sp>
       <p:sp>
         <p:nvSpPr>
-          <p:cNvPr id="12" name="Text 8"/>
-          <p:cNvSpPr/>
-          <p:nvPr/>
-        </p:nvSpPr>
-        <p:spPr>
-          <a:xfrm>
-            <a:off x="804672" y="3529584"/>
-            <a:ext cx="5943600" cy="329184"/>
+          <p:cNvPr id="14" name="Text 11"/>
+          <p:cNvSpPr/>
+          <p:nvPr/>
+        </p:nvSpPr>
+        <p:spPr>
+          <a:xfrm>
+            <a:off x="804672" y="4855464"/>
+            <a:ext cx="4937760" cy="329184"/>
           </a:xfrm>
           <a:prstGeom prst="rect">
             <a:avLst/>
@@ -15960,7 +17403,7 @@
                 <a:ea typeface="Georgia" pitchFamily="34" charset="-122"/>
                 <a:cs typeface="Georgia" pitchFamily="34" charset="-120"/>
               </a:rPr>
-              <a:t>Verdict</a:t>
+              <a:t>The top four are a statistical tie</a:t>
             </a:r>
             <a:endParaRPr lang="en-US" sz="1400" dirty="0"/>
           </a:p>
@@ -15968,14 +17411,14 @@
       </p:sp>
       <p:sp>
         <p:nvSpPr>
-          <p:cNvPr id="13" name="Text 9"/>
-          <p:cNvSpPr/>
-          <p:nvPr/>
-        </p:nvSpPr>
-        <p:spPr>
-          <a:xfrm>
-            <a:off x="804672" y="3913632"/>
-            <a:ext cx="5943600" cy="713232"/>
+          <p:cNvPr id="15" name="Text 12"/>
+          <p:cNvSpPr/>
+          <p:nvPr/>
+        </p:nvSpPr>
+        <p:spPr>
+          <a:xfrm>
+            <a:off x="804672" y="5239512"/>
+            <a:ext cx="4937760" cy="877824"/>
           </a:xfrm>
           <a:prstGeom prst="rect">
             <a:avLst/>
@@ -15994,7 +17437,164 @@
               <a:buNone/>
             </a:pPr>
             <a:r>
-              <a:rPr lang="en-US" sz="1150" dirty="0">
+              <a:rPr lang="en-US" sz="1100" dirty="0">
+                <a:solidFill>
+                  <a:srgbClr val="7A2E14"/>
+                </a:solidFill>
+                <a:latin typeface="Calibri" pitchFamily="34" charset="0"/>
+                <a:ea typeface="Calibri" pitchFamily="34" charset="-122"/>
+                <a:cs typeface="Calibri" pitchFamily="34" charset="-120"/>
+              </a:rPr>
+              <a:t>ExtraTrees, SVM-RBF, the ensemble and SVM-poly cannot be separated from one another on this data. Their AUCs span 0.834–0.859, well inside the ±0.04–0.06 fold-to-fold spread.</a:t>
+            </a:r>
+            <a:endParaRPr lang="en-US" sz="1100" dirty="0"/>
+          </a:p>
+          <a:p>
+            <a:pPr indent="0" marL="0">
+              <a:lnSpc>
+                <a:spcPct val="112000"/>
+              </a:lnSpc>
+              <a:buNone/>
+            </a:pPr>
+            <a:endParaRPr lang="en-US" sz="1100" dirty="0"/>
+          </a:p>
+          <a:p>
+            <a:pPr indent="0" marL="0">
+              <a:lnSpc>
+                <a:spcPct val="112000"/>
+              </a:lnSpc>
+              <a:buNone/>
+            </a:pPr>
+            <a:r>
+              <a:rPr lang="en-US" sz="1100" dirty="0">
+                <a:solidFill>
+                  <a:srgbClr val="7A2E14"/>
+                </a:solidFill>
+                <a:latin typeface="Calibri" pitchFamily="34" charset="0"/>
+                <a:ea typeface="Calibri" pitchFamily="34" charset="-122"/>
+                <a:cs typeface="Calibri" pitchFamily="34" charset="-120"/>
+              </a:rPr>
+              <a:t>Ranking them is reading noise.</a:t>
+            </a:r>
+            <a:endParaRPr lang="en-US" sz="1100" dirty="0"/>
+          </a:p>
+        </p:txBody>
+      </p:sp>
+      <p:sp>
+        <p:nvSpPr>
+          <p:cNvPr id="16" name="Shape 13"/>
+          <p:cNvSpPr/>
+          <p:nvPr/>
+        </p:nvSpPr>
+        <p:spPr>
+          <a:xfrm>
+            <a:off x="6217920" y="4709160"/>
+            <a:ext cx="5394960" cy="1536192"/>
+          </a:xfrm>
+          <a:prstGeom prst="rect">
+            <a:avLst/>
+          </a:prstGeom>
+          <a:solidFill>
+            <a:srgbClr val="FFFFFF"/>
+          </a:solidFill>
+          <a:ln/>
+          <a:effectLst>
+            <a:outerShdw sx="100000" sy="100000" kx="0" ky="0" algn="bl" rotWithShape="0" blurRad="101600" dist="25400" dir="8100000">
+              <a:srgbClr val="000000">
+                <a:alpha val="10000"/>
+              </a:srgbClr>
+            </a:outerShdw>
+          </a:effectLst>
+        </p:spPr>
+      </p:sp>
+      <p:sp>
+        <p:nvSpPr>
+          <p:cNvPr id="17" name="Shape 14"/>
+          <p:cNvSpPr/>
+          <p:nvPr/>
+        </p:nvSpPr>
+        <p:spPr>
+          <a:xfrm>
+            <a:off x="6217920" y="4709160"/>
+            <a:ext cx="68580" cy="1536192"/>
+          </a:xfrm>
+          <a:prstGeom prst="rect">
+            <a:avLst/>
+          </a:prstGeom>
+          <a:solidFill>
+            <a:srgbClr val="8FB996"/>
+          </a:solidFill>
+          <a:ln/>
+        </p:spPr>
+      </p:sp>
+      <p:sp>
+        <p:nvSpPr>
+          <p:cNvPr id="18" name="Text 15"/>
+          <p:cNvSpPr/>
+          <p:nvPr/>
+        </p:nvSpPr>
+        <p:spPr>
+          <a:xfrm>
+            <a:off x="6473952" y="4855464"/>
+            <a:ext cx="4937760" cy="329184"/>
+          </a:xfrm>
+          <a:prstGeom prst="rect">
+            <a:avLst/>
+          </a:prstGeom>
+          <a:noFill/>
+          <a:ln/>
+        </p:spPr>
+        <p:txBody>
+          <a:bodyPr wrap="square" lIns="0" tIns="0" rIns="0" bIns="0" rtlCol="0" anchor="t"/>
+          <a:lstStyle/>
+          <a:p>
+            <a:pPr indent="0" marL="0">
+              <a:buNone/>
+            </a:pPr>
+            <a:r>
+              <a:rPr lang="en-US" sz="1400" b="1" dirty="0">
+                <a:solidFill>
+                  <a:srgbClr val="16252C"/>
+                </a:solidFill>
+                <a:latin typeface="Georgia" pitchFamily="34" charset="0"/>
+                <a:ea typeface="Georgia" pitchFamily="34" charset="-122"/>
+                <a:cs typeface="Georgia" pitchFamily="34" charset="-120"/>
+              </a:rPr>
+              <a:t>So the choice must rest on something else</a:t>
+            </a:r>
+            <a:endParaRPr lang="en-US" sz="1400" dirty="0"/>
+          </a:p>
+        </p:txBody>
+      </p:sp>
+      <p:sp>
+        <p:nvSpPr>
+          <p:cNvPr id="19" name="Text 16"/>
+          <p:cNvSpPr/>
+          <p:nvPr/>
+        </p:nvSpPr>
+        <p:spPr>
+          <a:xfrm>
+            <a:off x="6473952" y="5239512"/>
+            <a:ext cx="4937760" cy="877824"/>
+          </a:xfrm>
+          <a:prstGeom prst="rect">
+            <a:avLst/>
+          </a:prstGeom>
+          <a:noFill/>
+          <a:ln/>
+        </p:spPr>
+        <p:txBody>
+          <a:bodyPr wrap="square" lIns="0" tIns="0" rIns="0" bIns="0" rtlCol="0" anchor="t"/>
+          <a:lstStyle/>
+          <a:p>
+            <a:pPr indent="0" marL="0">
+              <a:lnSpc>
+                <a:spcPct val="112000"/>
+              </a:lnSpc>
+              <a:buNone/>
+            </a:pPr>
+            <a:r>
+              <a:rPr lang="en-US" sz="1100" dirty="0">
                 <a:solidFill>
                   <a:srgbClr val="5F7580"/>
                 </a:solidFill>
@@ -16002,68 +17602,38 @@
                 <a:ea typeface="Calibri" pitchFamily="34" charset="-122"/>
                 <a:cs typeface="Calibri" pitchFamily="34" charset="-120"/>
               </a:rPr>
-              <a:t>SVM-RBF significantly beats every model except ExtraTrees, whose +0.020 lead reaches only p=0.085 on 14/25 folds. That alone would not settle the choice — the stratified test on the next slide does.</a:t>
+              <a:t>Two grounds remain: error structure at the operating threshold (specificity 0.703 for SVM-RBF vs 0.620 for ExtraTrees) and robustness where the signal is weak.</a:t>
             </a:r>
-            <a:endParaRPr lang="en-US" sz="1150" dirty="0"/>
+            <a:endParaRPr lang="en-US" sz="1100" dirty="0"/>
           </a:p>
-        </p:txBody>
-      </p:sp>
-      <p:sp>
-        <p:nvSpPr>
-          <p:cNvPr id="14" name="Shape 10"/>
-          <p:cNvSpPr/>
-          <p:nvPr/>
-        </p:nvSpPr>
-        <p:spPr>
-          <a:xfrm>
-            <a:off x="548640" y="5394960"/>
-            <a:ext cx="11064240" cy="822960"/>
-          </a:xfrm>
-          <a:prstGeom prst="rect">
-            <a:avLst/>
-          </a:prstGeom>
-          <a:solidFill>
-            <a:srgbClr val="0B3C49"/>
-          </a:solidFill>
-          <a:ln/>
-        </p:spPr>
-      </p:sp>
-      <p:sp>
-        <p:nvSpPr>
-          <p:cNvPr id="15" name="Text 11"/>
-          <p:cNvSpPr/>
-          <p:nvPr/>
-        </p:nvSpPr>
-        <p:spPr>
-          <a:xfrm>
-            <a:off x="868680" y="5596128"/>
-            <a:ext cx="10515600" cy="457200"/>
-          </a:xfrm>
-          <a:prstGeom prst="rect">
-            <a:avLst/>
-          </a:prstGeom>
-          <a:noFill/>
-          <a:ln/>
-        </p:spPr>
-        <p:txBody>
-          <a:bodyPr wrap="square" lIns="0" tIns="0" rIns="0" bIns="0" rtlCol="0" anchor="ctr"/>
-          <a:lstStyle/>
           <a:p>
             <a:pPr indent="0" marL="0">
+              <a:lnSpc>
+                <a:spcPct val="112000"/>
+              </a:lnSpc>
+              <a:buNone/>
+            </a:pPr>
+            <a:endParaRPr lang="en-US" sz="1100" dirty="0"/>
+          </a:p>
+          <a:p>
+            <a:pPr indent="0" marL="0">
+              <a:lnSpc>
+                <a:spcPct val="112000"/>
+              </a:lnSpc>
               <a:buNone/>
             </a:pPr>
             <a:r>
-              <a:rPr lang="en-US" sz="1400" i="1" dirty="0">
+              <a:rPr lang="en-US" sz="1100" dirty="0">
                 <a:solidFill>
-                  <a:srgbClr val="8FB996"/>
+                  <a:srgbClr val="5F7580"/>
                 </a:solidFill>
                 <a:latin typeface="Calibri" pitchFamily="34" charset="0"/>
                 <a:ea typeface="Calibri" pitchFamily="34" charset="-122"/>
                 <a:cs typeface="Calibri" pitchFamily="34" charset="-120"/>
               </a:rPr>
-              <a:t>SVM-linear reaches only 0.766 — the kernel is what wins, not the SVM. This is the first hint of real nonlinear structure.</a:t>
+              <a:t>The next slide is the test that actually decides.</a:t>
             </a:r>
-            <a:endParaRPr lang="en-US" sz="1400" dirty="0"/>
+            <a:endParaRPr lang="en-US" sz="1100" dirty="0"/>
           </a:p>
         </p:txBody>
       </p:sp>
@@ -34431,7 +36001,36 @@
                 <a:ea typeface="Calibri" pitchFamily="34" charset="-122"/>
                 <a:cs typeface="Calibri" pitchFamily="34" charset="-120"/>
               </a:rPr>
-              <a:t>A 0.073 gap between two models that differ only in the kernel. The nonlinearity, not the margin formulation, is what earns the performance.</a:t>
+              <a:t>Δ = +0.073, winning 25 of 25 folds, Wilcoxon p = 1e-5.</a:t>
+            </a:r>
+            <a:endParaRPr lang="en-US" sz="1200" dirty="0"/>
+          </a:p>
+          <a:p>
+            <a:pPr indent="0" marL="0">
+              <a:lnSpc>
+                <a:spcPct val="112000"/>
+              </a:lnSpc>
+              <a:buNone/>
+            </a:pPr>
+            <a:endParaRPr lang="en-US" sz="1200" dirty="0"/>
+          </a:p>
+          <a:p>
+            <a:pPr indent="0" marL="0">
+              <a:lnSpc>
+                <a:spcPct val="112000"/>
+              </a:lnSpc>
+              <a:buNone/>
+            </a:pPr>
+            <a:r>
+              <a:rPr lang="en-US" sz="1200" dirty="0">
+                <a:solidFill>
+                  <a:srgbClr val="5F7580"/>
+                </a:solidFill>
+                <a:latin typeface="Calibri" pitchFamily="34" charset="0"/>
+                <a:ea typeface="Calibri" pitchFamily="34" charset="-122"/>
+                <a:cs typeface="Calibri" pitchFamily="34" charset="-120"/>
+              </a:rPr>
+              <a:t>A controlled comparison — same model family, only the kernel differs — and the most decisive test in this deck.</a:t>
             </a:r>
             <a:endParaRPr lang="en-US" sz="1200" dirty="0"/>
           </a:p>
@@ -34717,6 +36316,35 @@
                 <a:cs typeface="Calibri" pitchFamily="34" charset="-120"/>
               </a:rPr>
               <a:t>This is consistent with what is known about gut communities: taxa act through consortia and metabolic cross-feeding rather than in isolation. A single genus rarely determines an immune phenotype on its own.</a:t>
+            </a:r>
+            <a:endParaRPr lang="en-US" sz="1200" dirty="0"/>
+          </a:p>
+          <a:p>
+            <a:pPr indent="0" marL="0">
+              <a:lnSpc>
+                <a:spcPct val="112000"/>
+              </a:lnSpc>
+              <a:buNone/>
+            </a:pPr>
+            <a:endParaRPr lang="en-US" sz="1200" dirty="0"/>
+          </a:p>
+          <a:p>
+            <a:pPr indent="0" marL="0">
+              <a:lnSpc>
+                <a:spcPct val="112000"/>
+              </a:lnSpc>
+              <a:buNone/>
+            </a:pPr>
+            <a:r>
+              <a:rPr lang="en-US" sz="1200" dirty="0">
+                <a:solidFill>
+                  <a:srgbClr val="5F7580"/>
+                </a:solidFill>
+                <a:latin typeface="Calibri" pitchFamily="34" charset="0"/>
+                <a:ea typeface="Calibri" pitchFamily="34" charset="-122"/>
+                <a:cs typeface="Calibri" pitchFamily="34" charset="-120"/>
+              </a:rPr>
+              <a:t>Note the contrast with the model comparison: there, nothing separated the leaders. Here, one controlled change separates cleanly on every fold.</a:t>
             </a:r>
             <a:endParaRPr lang="en-US" sz="1200" dirty="0"/>
           </a:p>

--- a/slides/Influenza_Microbiome_ML_Overview.pptx
+++ b/slides/Influenza_Microbiome_ML_Overview.pptx
@@ -7201,7 +7201,7 @@
                 <a:ea typeface="Georgia" pitchFamily="34" charset="-122"/>
                 <a:cs typeface="Georgia" pitchFamily="34" charset="-120"/>
               </a:rPr>
-              <a:t>Seventeen Models, Four of Them Tied</a:t>
+              <a:t>Seventeen Models, No Consistent Ranking</a:t>
             </a:r>
             <a:endParaRPr lang="en-US" sz="3000" dirty="0"/>
           </a:p>
@@ -14495,7 +14495,7 @@
                 <a:ea typeface="Calibri" pitchFamily="34" charset="-122"/>
                 <a:cs typeface="Calibri" pitchFamily="34" charset="-120"/>
               </a:rPr>
-              <a:t>Top 10 of 17 by ROC-AUC · shading marks the tied leading group · full table in results/model_comparison_all16.csv</a:t>
+              <a:t>Top 10 of 17 by ROC-AUC · shading marks the leading group · full table in results/model_comparison_all16.csv</a:t>
             </a:r>
             <a:endParaRPr lang="en-US" sz="950" dirty="0"/>
           </a:p>
@@ -14581,7 +14581,7 @@
                 <a:ea typeface="Georgia" pitchFamily="34" charset="-122"/>
                 <a:cs typeface="Georgia" pitchFamily="34" charset="-120"/>
               </a:rPr>
-              <a:t>Read the top block as one group, not as a ranking</a:t>
+              <a:t>Read the top block as a group, not as a ranking</a:t>
             </a:r>
             <a:endParaRPr lang="en-US" sz="1400" dirty="0"/>
           </a:p>
@@ -14623,7 +14623,7 @@
                 <a:ea typeface="Calibri" pitchFamily="34" charset="-122"/>
                 <a:cs typeface="Calibri" pitchFamily="34" charset="-120"/>
               </a:rPr>
-              <a:t>The first four rows cannot be told apart (next slide) — their order here is noise. Real separation starts at GP-RBF.</a:t>
+              <a:t>The two leaders cannot be told apart, and three of these four are mutually indistinguishable (next slide). Their order here is largely noise; real separation starts at GP-RBF.</a:t>
             </a:r>
             <a:endParaRPr lang="en-US" sz="1100" dirty="0"/>
           </a:p>
@@ -17214,8 +17214,8 @@
         </p:nvSpPr>
         <p:spPr>
           <a:xfrm>
-            <a:off x="548640" y="4407408"/>
-            <a:ext cx="182880" cy="182880"/>
+            <a:off x="548640" y="4334256"/>
+            <a:ext cx="164592" cy="164592"/>
           </a:xfrm>
           <a:prstGeom prst="rect">
             <a:avLst/>
@@ -17234,8 +17234,8 @@
         </p:nvSpPr>
         <p:spPr>
           <a:xfrm>
-            <a:off x="822960" y="4370832"/>
-            <a:ext cx="3840480" cy="274320"/>
+            <a:off x="804672" y="4306824"/>
+            <a:ext cx="3840480" cy="237744"/>
           </a:xfrm>
           <a:prstGeom prst="rect">
             <a:avLst/>
@@ -17273,8 +17273,8 @@
         </p:nvSpPr>
         <p:spPr>
           <a:xfrm>
-            <a:off x="4480560" y="4407408"/>
-            <a:ext cx="182880" cy="182880"/>
+            <a:off x="4480560" y="4334256"/>
+            <a:ext cx="164592" cy="164592"/>
           </a:xfrm>
           <a:prstGeom prst="rect">
             <a:avLst/>
@@ -17293,8 +17293,8 @@
         </p:nvSpPr>
         <p:spPr>
           <a:xfrm>
-            <a:off x="4754880" y="4370832"/>
-            <a:ext cx="3657600" cy="274320"/>
+            <a:off x="4736592" y="4306824"/>
+            <a:ext cx="3657600" cy="237744"/>
           </a:xfrm>
           <a:prstGeom prst="rect">
             <a:avLst/>
@@ -17332,8 +17332,8 @@
         </p:nvSpPr>
         <p:spPr>
           <a:xfrm>
-            <a:off x="548640" y="4617720"/>
-            <a:ext cx="5394960" cy="1298448"/>
+            <a:off x="548640" y="4626864"/>
+            <a:ext cx="5394960" cy="1325880"/>
           </a:xfrm>
           <a:prstGeom prst="rect">
             <a:avLst/>
@@ -17359,8 +17359,8 @@
         </p:nvSpPr>
         <p:spPr>
           <a:xfrm>
-            <a:off x="548640" y="4617720"/>
-            <a:ext cx="68580" cy="1298448"/>
+            <a:off x="548640" y="4626864"/>
+            <a:ext cx="68580" cy="1325880"/>
           </a:xfrm>
           <a:prstGeom prst="rect">
             <a:avLst/>
@@ -17379,7 +17379,7 @@
         </p:nvSpPr>
         <p:spPr>
           <a:xfrm>
-            <a:off x="804672" y="4764024"/>
+            <a:off x="804672" y="4773168"/>
             <a:ext cx="4937760" cy="329184"/>
           </a:xfrm>
           <a:prstGeom prst="rect">
@@ -17404,7 +17404,7 @@
                 <a:ea typeface="Georgia" pitchFamily="34" charset="-122"/>
                 <a:cs typeface="Georgia" pitchFamily="34" charset="-120"/>
               </a:rPr>
-              <a:t>The top four are a statistical tie</a:t>
+              <a:t>Indistinguishability is not transitive</a:t>
             </a:r>
             <a:endParaRPr lang="en-US" sz="1400" dirty="0"/>
           </a:p>
@@ -17418,8 +17418,8 @@
         </p:nvSpPr>
         <p:spPr>
           <a:xfrm>
-            <a:off x="804672" y="5148072"/>
-            <a:ext cx="4937760" cy="640080"/>
+            <a:off x="804672" y="5157216"/>
+            <a:ext cx="4937760" cy="667512"/>
           </a:xfrm>
           <a:prstGeom prst="rect">
             <a:avLst/>
@@ -17446,7 +17446,7 @@
                 <a:ea typeface="Calibri" pitchFamily="34" charset="-122"/>
                 <a:cs typeface="Calibri" pitchFamily="34" charset="-120"/>
               </a:rPr>
-              <a:t>ExtraTrees, SVM-RBF, the ensemble and SVM-poly cannot be separated from one another on this data. Their AUCs span 0.834–0.859, well inside the ±0.04–0.06 fold-to-fold spread.</a:t>
+              <a:t>ExtraTrees vs SVM-RBF: p = 0.085. SVM-RBF, ensemble and SVM-poly: mutually not separable (p = 0.360–0.609). Yet ExtraTrees does separate from those two.</a:t>
             </a:r>
             <a:endParaRPr lang="en-US" sz="1100" dirty="0"/>
           </a:p>
@@ -17475,7 +17475,7 @@
                 <a:ea typeface="Calibri" pitchFamily="34" charset="-122"/>
                 <a:cs typeface="Calibri" pitchFamily="34" charset="-120"/>
               </a:rPr>
-              <a:t>Ranking them is reading noise.</a:t>
+              <a:t>No consistent ranking exists among the leaders.</a:t>
             </a:r>
             <a:endParaRPr lang="en-US" sz="1100" dirty="0"/>
           </a:p>
@@ -17489,8 +17489,8 @@
         </p:nvSpPr>
         <p:spPr>
           <a:xfrm>
-            <a:off x="6217920" y="4617720"/>
-            <a:ext cx="5394960" cy="1298448"/>
+            <a:off x="6217920" y="4626864"/>
+            <a:ext cx="5394960" cy="1325880"/>
           </a:xfrm>
           <a:prstGeom prst="rect">
             <a:avLst/>
@@ -17516,8 +17516,8 @@
         </p:nvSpPr>
         <p:spPr>
           <a:xfrm>
-            <a:off x="6217920" y="4617720"/>
-            <a:ext cx="68580" cy="1298448"/>
+            <a:off x="6217920" y="4626864"/>
+            <a:ext cx="68580" cy="1325880"/>
           </a:xfrm>
           <a:prstGeom prst="rect">
             <a:avLst/>
@@ -17536,7 +17536,7 @@
         </p:nvSpPr>
         <p:spPr>
           <a:xfrm>
-            <a:off x="6473952" y="4764024"/>
+            <a:off x="6473952" y="4773168"/>
             <a:ext cx="4937760" cy="329184"/>
           </a:xfrm>
           <a:prstGeom prst="rect">
@@ -17575,8 +17575,8 @@
         </p:nvSpPr>
         <p:spPr>
           <a:xfrm>
-            <a:off x="6473952" y="5148072"/>
-            <a:ext cx="4937760" cy="640080"/>
+            <a:off x="6473952" y="5157216"/>
+            <a:ext cx="4937760" cy="667512"/>
           </a:xfrm>
           <a:prstGeom prst="rect">
             <a:avLst/>
@@ -17646,8 +17646,8 @@
         </p:nvSpPr>
         <p:spPr>
           <a:xfrm>
-            <a:off x="548640" y="6016752"/>
-            <a:ext cx="11064240" cy="320040"/>
+            <a:off x="548640" y="6035040"/>
+            <a:ext cx="10607040" cy="292608"/>
           </a:xfrm>
           <a:prstGeom prst="rect">
             <a:avLst/>
@@ -17663,7 +17663,7 @@
               <a:buNone/>
             </a:pPr>
             <a:r>
-              <a:rPr lang="en-US" sz="950" i="1" dirty="0">
+              <a:rPr lang="en-US" sz="900" i="1" dirty="0">
                 <a:solidFill>
                   <a:srgbClr val="5F7580"/>
                 </a:solidFill>
@@ -17671,9 +17671,9 @@
                 <a:ea typeface="Calibri" pitchFamily="34" charset="-122"/>
                 <a:cs typeface="Calibri" pitchFamily="34" charset="-120"/>
               </a:rPr>
-              <a:t>Hyperparameter robustness: the SVM-RBF grid was expanded to C ∈ [0.01, 500] and gamma ∈ [1e-4, 0.1] + scale. 0 of 15 folds selected a boundary value and AUC was unchanged (0.838 vs 0.839); the whole surface spans only 0.73–0.81. Full surface in results/svm_hyperparam_surface.csv.</a:t>
+              <a:t>Hyperparameter robustness: grid expanded to C ∈ [0.01, 500], gamma ∈ [1e-4, 0.1] + scale. 0 of 15 folds hit a boundary; AUC unchanged (0.838 vs 0.839); surface spans only 0.73–0.81.</a:t>
             </a:r>
-            <a:endParaRPr lang="en-US" sz="950" dirty="0"/>
+            <a:endParaRPr lang="en-US" sz="900" dirty="0"/>
           </a:p>
         </p:txBody>
       </p:sp>

--- a/slides/Influenza_Microbiome_ML_Overview.pptx
+++ b/slides/Influenza_Microbiome_ML_Overview.pptx
@@ -34,9 +34,10 @@
     <p:sldId id="282" r:id="rId28"/>
     <p:sldId id="283" r:id="rId29"/>
     <p:sldId id="284" r:id="rId30"/>
+    <p:sldId id="285" r:id="rId31"/>
   </p:sldIdLst>
   <p:notesMasterIdLst>
-    <p:notesMasterId r:id="rId31"/>
+    <p:notesMasterId r:id="rId32"/>
   </p:notesMasterIdLst>
   <p:sldSz cx="12192000" cy="6858000"/>
   <p:notesSz cx="6858000" cy="12192000"/>
@@ -2490,6 +2491,94 @@
             <a:fld id="{F7021451-1387-4CA6-816F-3879F97B5CBC}" type="slidenum">
               <a:rPr lang="en-US"/>
               <a:t>3</a:t>
+            </a:fld>
+            <a:endParaRPr lang="en-US"/>
+          </a:p>
+        </p:txBody>
+      </p:sp>
+    </p:spTree>
+    <p:extLst>
+      <p:ext uri="{BB962C8B-B14F-4D97-AF65-F5344CB8AC3E}">
+        <p14:creationId xmlns:p14="http://schemas.microsoft.com/office/powerpoint/2010/main" val="1024086991"/>
+      </p:ext>
+    </p:extLst>
+  </p:cSld>
+  <p:clrMapOvr>
+    <a:masterClrMapping/>
+  </p:clrMapOvr>
+</p:notes>
+</file>
+
+<file path=ppt/notesSlides/notesSlide30.xml><?xml version="1.0" encoding="utf-8"?>
+<p:notes xmlns:a="http://schemas.openxmlformats.org/drawingml/2006/main" xmlns:r="http://schemas.openxmlformats.org/officeDocument/2006/relationships" xmlns:p="http://schemas.openxmlformats.org/presentationml/2006/main">
+  <p:cSld>
+    <p:spTree>
+      <p:nvGrpSpPr>
+        <p:cNvPr id="1" name=""/>
+        <p:cNvGrpSpPr/>
+        <p:nvPr/>
+      </p:nvGrpSpPr>
+      <p:grpSpPr>
+        <a:xfrm>
+          <a:off x="0" y="0"/>
+          <a:ext cx="0" cy="0"/>
+          <a:chOff x="0" y="0"/>
+          <a:chExt cx="0" cy="0"/>
+        </a:xfrm>
+      </p:grpSpPr>
+      <p:sp>
+        <p:nvSpPr>
+          <p:cNvPr id="2" name="Slide Image Placeholder 1"/>
+          <p:cNvSpPr>
+            <a:spLocks noGrp="1" noRot="1" noChangeAspect="1"/>
+          </p:cNvSpPr>
+          <p:nvPr>
+            <p:ph type="sldImg"/>
+          </p:nvPr>
+        </p:nvSpPr>
+        <p:spPr/>
+      </p:sp>
+      <p:sp>
+        <p:nvSpPr>
+          <p:cNvPr id="3" name="Notes Placeholder 2"/>
+          <p:cNvSpPr>
+            <a:spLocks noGrp="1"/>
+          </p:cNvSpPr>
+          <p:nvPr>
+            <p:ph type="body" idx="1"/>
+          </p:nvPr>
+        </p:nvSpPr>
+        <p:spPr/>
+        <p:txBody>
+          <a:bodyPr/>
+          <a:lstStyle/>
+          <a:p>
+            <a:r>
+              <a:rPr lang="en-US" dirty="0"/>
+              <a:t/>
+            </a:r>
+            <a:endParaRPr lang="en-US" dirty="0"/>
+          </a:p>
+        </p:txBody>
+      </p:sp>
+      <p:sp>
+        <p:nvSpPr>
+          <p:cNvPr id="4" name="Slide Number Placeholder 3"/>
+          <p:cNvSpPr>
+            <a:spLocks noGrp="1"/>
+          </p:cNvSpPr>
+          <p:nvPr>
+            <p:ph type="sldNum" sz="quarter" idx="10"/>
+          </p:nvPr>
+        </p:nvSpPr>
+        <p:spPr/>
+        <p:txBody>
+          <a:bodyPr/>
+          <a:lstStyle/>
+          <a:p>
+            <a:fld id="{F7021451-1387-4CA6-816F-3879F97B5CBC}" type="slidenum">
+              <a:rPr lang="en-US"/>
+              <a:t>30</a:t>
             </a:fld>
             <a:endParaRPr lang="en-US"/>
           </a:p>
@@ -27199,6 +27288,2139 @@
     <p:bg>
       <p:bgPr>
         <a:solidFill>
+          <a:srgbClr val="FCFAF6"/>
+        </a:solidFill>
+      </p:bgPr>
+    </p:bg>
+    <p:spTree>
+      <p:nvGrpSpPr>
+        <p:cNvPr id="1" name=""/>
+        <p:cNvGrpSpPr/>
+        <p:nvPr/>
+      </p:nvGrpSpPr>
+      <p:grpSpPr>
+        <a:xfrm>
+          <a:off x="0" y="0"/>
+          <a:ext cx="0" cy="0"/>
+          <a:chOff x="0" y="0"/>
+          <a:chExt cx="0" cy="0"/>
+        </a:xfrm>
+      </p:grpSpPr>
+      <p:sp>
+        <p:nvSpPr>
+          <p:cNvPr id="2" name="Shape 0"/>
+          <p:cNvSpPr/>
+          <p:nvPr/>
+        </p:nvSpPr>
+        <p:spPr>
+          <a:xfrm>
+            <a:off x="0" y="0"/>
+            <a:ext cx="12191695" cy="54864"/>
+          </a:xfrm>
+          <a:prstGeom prst="rect">
+            <a:avLst/>
+          </a:prstGeom>
+          <a:solidFill>
+            <a:srgbClr val="18707F"/>
+          </a:solidFill>
+          <a:ln/>
+        </p:spPr>
+      </p:sp>
+      <p:sp>
+        <p:nvSpPr>
+          <p:cNvPr id="3" name="Text 1"/>
+          <p:cNvSpPr/>
+          <p:nvPr/>
+        </p:nvSpPr>
+        <p:spPr>
+          <a:xfrm>
+            <a:off x="548640" y="310896"/>
+            <a:ext cx="7315200" cy="256032"/>
+          </a:xfrm>
+          <a:prstGeom prst="rect">
+            <a:avLst/>
+          </a:prstGeom>
+          <a:noFill/>
+          <a:ln/>
+        </p:spPr>
+        <p:txBody>
+          <a:bodyPr wrap="square" lIns="0" tIns="0" rIns="0" bIns="0" rtlCol="0" anchor="ctr"/>
+          <a:lstStyle/>
+          <a:p>
+            <a:pPr indent="0" marL="0">
+              <a:buNone/>
+            </a:pPr>
+            <a:r>
+              <a:rPr lang="en-US" sz="1100" b="1" spc="200" kern="0" dirty="0">
+                <a:solidFill>
+                  <a:srgbClr val="18707F"/>
+                </a:solidFill>
+                <a:latin typeface="Calibri" pitchFamily="34" charset="0"/>
+                <a:ea typeface="Calibri" pitchFamily="34" charset="-122"/>
+                <a:cs typeface="Calibri" pitchFamily="34" charset="-120"/>
+              </a:rPr>
+              <a:t>VALIDITY · SENSITIVITY</a:t>
+            </a:r>
+            <a:endParaRPr lang="en-US" sz="1100" dirty="0"/>
+          </a:p>
+        </p:txBody>
+      </p:sp>
+      <p:sp>
+        <p:nvSpPr>
+          <p:cNvPr id="4" name="Text 2"/>
+          <p:cNvSpPr/>
+          <p:nvPr/>
+        </p:nvSpPr>
+        <p:spPr>
+          <a:xfrm>
+            <a:off x="548640" y="566928"/>
+            <a:ext cx="11064240" cy="685800"/>
+          </a:xfrm>
+          <a:prstGeom prst="rect">
+            <a:avLst/>
+          </a:prstGeom>
+          <a:noFill/>
+          <a:ln/>
+        </p:spPr>
+        <p:txBody>
+          <a:bodyPr wrap="square" lIns="0" tIns="0" rIns="0" bIns="0" rtlCol="0" anchor="ctr"/>
+          <a:lstStyle/>
+          <a:p>
+            <a:pPr indent="0" marL="0">
+              <a:buNone/>
+            </a:pPr>
+            <a:r>
+              <a:rPr lang="en-US" sz="3000" b="1" dirty="0">
+                <a:solidFill>
+                  <a:srgbClr val="16252C"/>
+                </a:solidFill>
+                <a:latin typeface="Georgia" pitchFamily="34" charset="0"/>
+                <a:ea typeface="Georgia" pitchFamily="34" charset="-122"/>
+                <a:cs typeface="Georgia" pitchFamily="34" charset="-120"/>
+              </a:rPr>
+              <a:t>What If We Simply Drop the Confounded Months?</a:t>
+            </a:r>
+            <a:endParaRPr lang="en-US" sz="3000" dirty="0"/>
+          </a:p>
+        </p:txBody>
+      </p:sp>
+      <p:sp>
+        <p:nvSpPr>
+          <p:cNvPr id="5" name="Text 3"/>
+          <p:cNvSpPr/>
+          <p:nvPr/>
+        </p:nvSpPr>
+        <p:spPr>
+          <a:xfrm>
+            <a:off x="11430000" y="6355080"/>
+            <a:ext cx="411480" cy="274320"/>
+          </a:xfrm>
+          <a:prstGeom prst="rect">
+            <a:avLst/>
+          </a:prstGeom>
+          <a:noFill/>
+          <a:ln/>
+        </p:spPr>
+        <p:txBody>
+          <a:bodyPr wrap="square" lIns="0" tIns="0" rIns="0" bIns="0" rtlCol="0" anchor="ctr"/>
+          <a:lstStyle/>
+          <a:p>
+            <a:pPr algn="r" indent="0" marL="0">
+              <a:buNone/>
+            </a:pPr>
+            <a:r>
+              <a:rPr lang="en-US" sz="1000" dirty="0">
+                <a:solidFill>
+                  <a:srgbClr val="5F7580"/>
+                </a:solidFill>
+                <a:latin typeface="Calibri" pitchFamily="34" charset="0"/>
+                <a:ea typeface="Calibri" pitchFamily="34" charset="-122"/>
+                <a:cs typeface="Calibri" pitchFamily="34" charset="-120"/>
+              </a:rPr>
+              <a:t>22</a:t>
+            </a:r>
+            <a:endParaRPr lang="en-US" sz="1000" dirty="0"/>
+          </a:p>
+        </p:txBody>
+      </p:sp>
+      <p:sp>
+        <p:nvSpPr>
+          <p:cNvPr id="6" name="Text 4"/>
+          <p:cNvSpPr/>
+          <p:nvPr/>
+        </p:nvSpPr>
+        <p:spPr>
+          <a:xfrm>
+            <a:off x="548640" y="1298448"/>
+            <a:ext cx="11064240" cy="457200"/>
+          </a:xfrm>
+          <a:prstGeom prst="rect">
+            <a:avLst/>
+          </a:prstGeom>
+          <a:noFill/>
+          <a:ln/>
+        </p:spPr>
+        <p:txBody>
+          <a:bodyPr wrap="square" lIns="0" tIns="0" rIns="0" bIns="0" rtlCol="0" anchor="t"/>
+          <a:lstStyle/>
+          <a:p>
+            <a:pPr indent="0" marL="0">
+              <a:buNone/>
+            </a:pPr>
+            <a:r>
+              <a:rPr lang="en-US" sz="1250" dirty="0">
+                <a:solidFill>
+                  <a:srgbClr val="5F7580"/>
+                </a:solidFill>
+                <a:latin typeface="Calibri" pitchFamily="34" charset="0"/>
+                <a:ea typeface="Calibri" pitchFamily="34" charset="-122"/>
+                <a:cs typeface="Calibri" pitchFamily="34" charset="-120"/>
+              </a:rPr>
+              <a:t>November–December is 100% positive and January 90% negative. On those 95 samples a model scores well by learning the month, not the microbiome. Excluding them (n = 260 → 165):</a:t>
+            </a:r>
+            <a:endParaRPr lang="en-US" sz="1250" dirty="0"/>
+          </a:p>
+        </p:txBody>
+      </p:sp>
+      <p:graphicFrame>
+        <p:nvGraphicFramePr>
+          <p:cNvPr id="23" name="Table 0"/>
+          <p:cNvGraphicFramePr>
+            <a:graphicFrameLocks noGrp="1"/>
+          </p:cNvGraphicFramePr>
+          <p:nvPr>
+            <p:extLst>
+              <p:ext uri="{D42A27DB-BD31-4B8C-83A1-F6EECF244321}">
+                <p14:modId xmlns:p14="http://schemas.microsoft.com/office/powerpoint/2010/main" val="1579011935"/>
+              </p:ext>
+            </p:extLst>
+          </p:nvPr>
+        </p:nvGraphicFramePr>
+        <p:xfrm>
+          <a:off x="548640" y="1828800"/>
+          <a:ext cx="6309360" cy="914400"/>
+        </p:xfrm>
+        <a:graphic>
+          <a:graphicData uri="http://schemas.openxmlformats.org/drawingml/2006/table">
+            <a:tbl>
+              <a:tblPr/>
+              <a:tblGrid>
+                <a:gridCol w="2468880"/>
+                <a:gridCol w="1280160"/>
+                <a:gridCol w="1371600"/>
+                <a:gridCol w="1188720"/>
+              </a:tblGrid>
+              <a:tr h="402336">
+                <a:tc>
+                  <a:txBody>
+                    <a:bodyPr/>
+                    <a:lstStyle/>
+                    <a:p>
+                      <a:pPr algn="ctr" indent="0" marL="0">
+                        <a:buNone/>
+                      </a:pPr>
+                      <a:r>
+                        <a:rPr lang="en-US" sz="1100" b="1" dirty="0">
+                          <a:solidFill>
+                            <a:srgbClr val="FFFFFF"/>
+                          </a:solidFill>
+                          <a:latin typeface="Calibri" pitchFamily="34" charset="0"/>
+                          <a:ea typeface="Calibri" pitchFamily="34" charset="-122"/>
+                          <a:cs typeface="Calibri" pitchFamily="34" charset="-120"/>
+                        </a:rPr>
+                        <a:t>Feature set</a:t>
+                      </a:r>
+                      <a:endParaRPr lang="en-US" sz="1100" dirty="0">
+                        <a:latin typeface="Calibri" charset="0"/>
+                        <a:ea typeface="Calibri" charset="0"/>
+                        <a:cs typeface="Calibri" charset="0"/>
+                      </a:endParaRPr>
+                    </a:p>
+                  </a:txBody>
+                  <a:tcPr marL="91440" marR="91440" marT="45720" marB="45720" anchor="ctr">
+                    <a:lnL w="6350" cap="flat" cmpd="sng" algn="ctr">
+                      <a:solidFill>
+                        <a:srgbClr val="DDE5E8"/>
+                      </a:solidFill>
+                      <a:prstDash val="solid"/>
+                      <a:round/>
+                      <a:headEnd type="none" w="med" len="med"/>
+                      <a:tailEnd type="none" w="med" len="med"/>
+                    </a:lnL>
+                    <a:lnR w="6350" cap="flat" cmpd="sng" algn="ctr">
+                      <a:solidFill>
+                        <a:srgbClr val="DDE5E8"/>
+                      </a:solidFill>
+                      <a:prstDash val="solid"/>
+                      <a:round/>
+                      <a:headEnd type="none" w="med" len="med"/>
+                      <a:tailEnd type="none" w="med" len="med"/>
+                    </a:lnR>
+                    <a:lnT w="6350" cap="flat" cmpd="sng" algn="ctr">
+                      <a:solidFill>
+                        <a:srgbClr val="DDE5E8"/>
+                      </a:solidFill>
+                      <a:prstDash val="solid"/>
+                      <a:round/>
+                      <a:headEnd type="none" w="med" len="med"/>
+                      <a:tailEnd type="none" w="med" len="med"/>
+                    </a:lnT>
+                    <a:lnB w="6350" cap="flat" cmpd="sng" algn="ctr">
+                      <a:solidFill>
+                        <a:srgbClr val="DDE5E8"/>
+                      </a:solidFill>
+                      <a:prstDash val="solid"/>
+                      <a:round/>
+                      <a:headEnd type="none" w="med" len="med"/>
+                      <a:tailEnd type="none" w="med" len="med"/>
+                    </a:lnB>
+                    <a:solidFill>
+                      <a:srgbClr val="0B3C49"/>
+                    </a:solidFill>
+                  </a:tcPr>
+                </a:tc>
+                <a:tc>
+                  <a:txBody>
+                    <a:bodyPr/>
+                    <a:lstStyle/>
+                    <a:p>
+                      <a:pPr algn="ctr" indent="0" marL="0">
+                        <a:buNone/>
+                      </a:pPr>
+                      <a:r>
+                        <a:rPr lang="en-US" sz="1100" b="1" dirty="0">
+                          <a:solidFill>
+                            <a:srgbClr val="FFFFFF"/>
+                          </a:solidFill>
+                          <a:latin typeface="Calibri" pitchFamily="34" charset="0"/>
+                          <a:ea typeface="Calibri" pitchFamily="34" charset="-122"/>
+                          <a:cs typeface="Calibri" pitchFamily="34" charset="-120"/>
+                        </a:rPr>
+                        <a:t>Full n=260</a:t>
+                      </a:r>
+                      <a:endParaRPr lang="en-US" sz="1100" dirty="0">
+                        <a:latin typeface="Calibri" charset="0"/>
+                        <a:ea typeface="Calibri" charset="0"/>
+                        <a:cs typeface="Calibri" charset="0"/>
+                      </a:endParaRPr>
+                    </a:p>
+                  </a:txBody>
+                  <a:tcPr marL="91440" marR="91440" marT="45720" marB="45720" anchor="ctr">
+                    <a:lnL w="6350" cap="flat" cmpd="sng" algn="ctr">
+                      <a:solidFill>
+                        <a:srgbClr val="DDE5E8"/>
+                      </a:solidFill>
+                      <a:prstDash val="solid"/>
+                      <a:round/>
+                      <a:headEnd type="none" w="med" len="med"/>
+                      <a:tailEnd type="none" w="med" len="med"/>
+                    </a:lnL>
+                    <a:lnR w="6350" cap="flat" cmpd="sng" algn="ctr">
+                      <a:solidFill>
+                        <a:srgbClr val="DDE5E8"/>
+                      </a:solidFill>
+                      <a:prstDash val="solid"/>
+                      <a:round/>
+                      <a:headEnd type="none" w="med" len="med"/>
+                      <a:tailEnd type="none" w="med" len="med"/>
+                    </a:lnR>
+                    <a:lnT w="6350" cap="flat" cmpd="sng" algn="ctr">
+                      <a:solidFill>
+                        <a:srgbClr val="DDE5E8"/>
+                      </a:solidFill>
+                      <a:prstDash val="solid"/>
+                      <a:round/>
+                      <a:headEnd type="none" w="med" len="med"/>
+                      <a:tailEnd type="none" w="med" len="med"/>
+                    </a:lnT>
+                    <a:lnB w="6350" cap="flat" cmpd="sng" algn="ctr">
+                      <a:solidFill>
+                        <a:srgbClr val="DDE5E8"/>
+                      </a:solidFill>
+                      <a:prstDash val="solid"/>
+                      <a:round/>
+                      <a:headEnd type="none" w="med" len="med"/>
+                      <a:tailEnd type="none" w="med" len="med"/>
+                    </a:lnB>
+                    <a:solidFill>
+                      <a:srgbClr val="0B3C49"/>
+                    </a:solidFill>
+                  </a:tcPr>
+                </a:tc>
+                <a:tc>
+                  <a:txBody>
+                    <a:bodyPr/>
+                    <a:lstStyle/>
+                    <a:p>
+                      <a:pPr algn="ctr" indent="0" marL="0">
+                        <a:buNone/>
+                      </a:pPr>
+                      <a:r>
+                        <a:rPr lang="en-US" sz="1100" b="1" dirty="0">
+                          <a:solidFill>
+                            <a:srgbClr val="FFFFFF"/>
+                          </a:solidFill>
+                          <a:latin typeface="Calibri" pitchFamily="34" charset="0"/>
+                          <a:ea typeface="Calibri" pitchFamily="34" charset="-122"/>
+                          <a:cs typeface="Calibri" pitchFamily="34" charset="-120"/>
+                        </a:rPr>
+                        <a:t>Subset n=165</a:t>
+                      </a:r>
+                      <a:endParaRPr lang="en-US" sz="1100" dirty="0">
+                        <a:latin typeface="Calibri" charset="0"/>
+                        <a:ea typeface="Calibri" charset="0"/>
+                        <a:cs typeface="Calibri" charset="0"/>
+                      </a:endParaRPr>
+                    </a:p>
+                  </a:txBody>
+                  <a:tcPr marL="91440" marR="91440" marT="45720" marB="45720" anchor="ctr">
+                    <a:lnL w="6350" cap="flat" cmpd="sng" algn="ctr">
+                      <a:solidFill>
+                        <a:srgbClr val="DDE5E8"/>
+                      </a:solidFill>
+                      <a:prstDash val="solid"/>
+                      <a:round/>
+                      <a:headEnd type="none" w="med" len="med"/>
+                      <a:tailEnd type="none" w="med" len="med"/>
+                    </a:lnL>
+                    <a:lnR w="6350" cap="flat" cmpd="sng" algn="ctr">
+                      <a:solidFill>
+                        <a:srgbClr val="DDE5E8"/>
+                      </a:solidFill>
+                      <a:prstDash val="solid"/>
+                      <a:round/>
+                      <a:headEnd type="none" w="med" len="med"/>
+                      <a:tailEnd type="none" w="med" len="med"/>
+                    </a:lnR>
+                    <a:lnT w="6350" cap="flat" cmpd="sng" algn="ctr">
+                      <a:solidFill>
+                        <a:srgbClr val="DDE5E8"/>
+                      </a:solidFill>
+                      <a:prstDash val="solid"/>
+                      <a:round/>
+                      <a:headEnd type="none" w="med" len="med"/>
+                      <a:tailEnd type="none" w="med" len="med"/>
+                    </a:lnT>
+                    <a:lnB w="6350" cap="flat" cmpd="sng" algn="ctr">
+                      <a:solidFill>
+                        <a:srgbClr val="DDE5E8"/>
+                      </a:solidFill>
+                      <a:prstDash val="solid"/>
+                      <a:round/>
+                      <a:headEnd type="none" w="med" len="med"/>
+                      <a:tailEnd type="none" w="med" len="med"/>
+                    </a:lnB>
+                    <a:solidFill>
+                      <a:srgbClr val="0B3C49"/>
+                    </a:solidFill>
+                  </a:tcPr>
+                </a:tc>
+                <a:tc>
+                  <a:txBody>
+                    <a:bodyPr/>
+                    <a:lstStyle/>
+                    <a:p>
+                      <a:pPr algn="ctr" indent="0" marL="0">
+                        <a:buNone/>
+                      </a:pPr>
+                      <a:r>
+                        <a:rPr lang="en-US" sz="1100" b="1" dirty="0">
+                          <a:solidFill>
+                            <a:srgbClr val="FFFFFF"/>
+                          </a:solidFill>
+                          <a:latin typeface="Calibri" pitchFamily="34" charset="0"/>
+                          <a:ea typeface="Calibri" pitchFamily="34" charset="-122"/>
+                          <a:cs typeface="Calibri" pitchFamily="34" charset="-120"/>
+                        </a:rPr>
+                        <a:t>Change</a:t>
+                      </a:r>
+                      <a:endParaRPr lang="en-US" sz="1100" dirty="0">
+                        <a:latin typeface="Calibri" charset="0"/>
+                        <a:ea typeface="Calibri" charset="0"/>
+                        <a:cs typeface="Calibri" charset="0"/>
+                      </a:endParaRPr>
+                    </a:p>
+                  </a:txBody>
+                  <a:tcPr marL="91440" marR="91440" marT="45720" marB="45720" anchor="ctr">
+                    <a:lnL w="6350" cap="flat" cmpd="sng" algn="ctr">
+                      <a:solidFill>
+                        <a:srgbClr val="DDE5E8"/>
+                      </a:solidFill>
+                      <a:prstDash val="solid"/>
+                      <a:round/>
+                      <a:headEnd type="none" w="med" len="med"/>
+                      <a:tailEnd type="none" w="med" len="med"/>
+                    </a:lnL>
+                    <a:lnR w="6350" cap="flat" cmpd="sng" algn="ctr">
+                      <a:solidFill>
+                        <a:srgbClr val="DDE5E8"/>
+                      </a:solidFill>
+                      <a:prstDash val="solid"/>
+                      <a:round/>
+                      <a:headEnd type="none" w="med" len="med"/>
+                      <a:tailEnd type="none" w="med" len="med"/>
+                    </a:lnR>
+                    <a:lnT w="6350" cap="flat" cmpd="sng" algn="ctr">
+                      <a:solidFill>
+                        <a:srgbClr val="DDE5E8"/>
+                      </a:solidFill>
+                      <a:prstDash val="solid"/>
+                      <a:round/>
+                      <a:headEnd type="none" w="med" len="med"/>
+                      <a:tailEnd type="none" w="med" len="med"/>
+                    </a:lnT>
+                    <a:lnB w="6350" cap="flat" cmpd="sng" algn="ctr">
+                      <a:solidFill>
+                        <a:srgbClr val="DDE5E8"/>
+                      </a:solidFill>
+                      <a:prstDash val="solid"/>
+                      <a:round/>
+                      <a:headEnd type="none" w="med" len="med"/>
+                      <a:tailEnd type="none" w="med" len="med"/>
+                    </a:lnB>
+                    <a:solidFill>
+                      <a:srgbClr val="0B3C49"/>
+                    </a:solidFill>
+                  </a:tcPr>
+                </a:tc>
+              </a:tr>
+              <a:tr h="402336">
+                <a:tc>
+                  <a:txBody>
+                    <a:bodyPr/>
+                    <a:lstStyle/>
+                    <a:p>
+                      <a:pPr algn="ctr" indent="0" marL="0">
+                        <a:buNone/>
+                      </a:pPr>
+                      <a:r>
+                        <a:rPr lang="en-US" sz="1100" dirty="0">
+                          <a:solidFill>
+                            <a:srgbClr val="16252C"/>
+                          </a:solidFill>
+                          <a:latin typeface="Calibri" pitchFamily="34" charset="0"/>
+                          <a:ea typeface="Calibri" pitchFamily="34" charset="-122"/>
+                          <a:cs typeface="Calibri" pitchFamily="34" charset="-120"/>
+                        </a:rPr>
+                        <a:t>Covariates only</a:t>
+                      </a:r>
+                      <a:endParaRPr lang="en-US" sz="1100" dirty="0">
+                        <a:latin typeface="Calibri" charset="0"/>
+                        <a:ea typeface="Calibri" charset="0"/>
+                        <a:cs typeface="Calibri" charset="0"/>
+                      </a:endParaRPr>
+                    </a:p>
+                  </a:txBody>
+                  <a:tcPr marL="91440" marR="91440" marT="45720" marB="45720" anchor="ctr">
+                    <a:lnL w="6350" cap="flat" cmpd="sng" algn="ctr">
+                      <a:solidFill>
+                        <a:srgbClr val="DDE5E8"/>
+                      </a:solidFill>
+                      <a:prstDash val="solid"/>
+                      <a:round/>
+                      <a:headEnd type="none" w="med" len="med"/>
+                      <a:tailEnd type="none" w="med" len="med"/>
+                    </a:lnL>
+                    <a:lnR w="6350" cap="flat" cmpd="sng" algn="ctr">
+                      <a:solidFill>
+                        <a:srgbClr val="DDE5E8"/>
+                      </a:solidFill>
+                      <a:prstDash val="solid"/>
+                      <a:round/>
+                      <a:headEnd type="none" w="med" len="med"/>
+                      <a:tailEnd type="none" w="med" len="med"/>
+                    </a:lnR>
+                    <a:lnT w="6350" cap="flat" cmpd="sng" algn="ctr">
+                      <a:solidFill>
+                        <a:srgbClr val="DDE5E8"/>
+                      </a:solidFill>
+                      <a:prstDash val="solid"/>
+                      <a:round/>
+                      <a:headEnd type="none" w="med" len="med"/>
+                      <a:tailEnd type="none" w="med" len="med"/>
+                    </a:lnT>
+                    <a:lnB w="6350" cap="flat" cmpd="sng" algn="ctr">
+                      <a:solidFill>
+                        <a:srgbClr val="DDE5E8"/>
+                      </a:solidFill>
+                      <a:prstDash val="solid"/>
+                      <a:round/>
+                      <a:headEnd type="none" w="med" len="med"/>
+                      <a:tailEnd type="none" w="med" len="med"/>
+                    </a:lnB>
+                  </a:tcPr>
+                </a:tc>
+                <a:tc>
+                  <a:txBody>
+                    <a:bodyPr/>
+                    <a:lstStyle/>
+                    <a:p>
+                      <a:pPr algn="ctr" indent="0" marL="0">
+                        <a:buNone/>
+                      </a:pPr>
+                      <a:r>
+                        <a:rPr lang="en-US" sz="1100" dirty="0">
+                          <a:solidFill>
+                            <a:srgbClr val="16252C"/>
+                          </a:solidFill>
+                          <a:latin typeface="Calibri" pitchFamily="34" charset="0"/>
+                          <a:ea typeface="Calibri" pitchFamily="34" charset="-122"/>
+                          <a:cs typeface="Calibri" pitchFamily="34" charset="-120"/>
+                        </a:rPr>
+                        <a:t>0.881</a:t>
+                      </a:r>
+                      <a:endParaRPr lang="en-US" sz="1100" dirty="0">
+                        <a:latin typeface="Calibri" charset="0"/>
+                        <a:ea typeface="Calibri" charset="0"/>
+                        <a:cs typeface="Calibri" charset="0"/>
+                      </a:endParaRPr>
+                    </a:p>
+                  </a:txBody>
+                  <a:tcPr marL="91440" marR="91440" marT="45720" marB="45720" anchor="ctr">
+                    <a:lnL w="6350" cap="flat" cmpd="sng" algn="ctr">
+                      <a:solidFill>
+                        <a:srgbClr val="DDE5E8"/>
+                      </a:solidFill>
+                      <a:prstDash val="solid"/>
+                      <a:round/>
+                      <a:headEnd type="none" w="med" len="med"/>
+                      <a:tailEnd type="none" w="med" len="med"/>
+                    </a:lnL>
+                    <a:lnR w="6350" cap="flat" cmpd="sng" algn="ctr">
+                      <a:solidFill>
+                        <a:srgbClr val="DDE5E8"/>
+                      </a:solidFill>
+                      <a:prstDash val="solid"/>
+                      <a:round/>
+                      <a:headEnd type="none" w="med" len="med"/>
+                      <a:tailEnd type="none" w="med" len="med"/>
+                    </a:lnR>
+                    <a:lnT w="6350" cap="flat" cmpd="sng" algn="ctr">
+                      <a:solidFill>
+                        <a:srgbClr val="DDE5E8"/>
+                      </a:solidFill>
+                      <a:prstDash val="solid"/>
+                      <a:round/>
+                      <a:headEnd type="none" w="med" len="med"/>
+                      <a:tailEnd type="none" w="med" len="med"/>
+                    </a:lnT>
+                    <a:lnB w="6350" cap="flat" cmpd="sng" algn="ctr">
+                      <a:solidFill>
+                        <a:srgbClr val="DDE5E8"/>
+                      </a:solidFill>
+                      <a:prstDash val="solid"/>
+                      <a:round/>
+                      <a:headEnd type="none" w="med" len="med"/>
+                      <a:tailEnd type="none" w="med" len="med"/>
+                    </a:lnB>
+                  </a:tcPr>
+                </a:tc>
+                <a:tc>
+                  <a:txBody>
+                    <a:bodyPr/>
+                    <a:lstStyle/>
+                    <a:p>
+                      <a:pPr algn="ctr" indent="0" marL="0">
+                        <a:buNone/>
+                      </a:pPr>
+                      <a:r>
+                        <a:rPr lang="en-US" sz="1100" dirty="0">
+                          <a:solidFill>
+                            <a:srgbClr val="16252C"/>
+                          </a:solidFill>
+                          <a:latin typeface="Calibri" pitchFamily="34" charset="0"/>
+                          <a:ea typeface="Calibri" pitchFamily="34" charset="-122"/>
+                          <a:cs typeface="Calibri" pitchFamily="34" charset="-120"/>
+                        </a:rPr>
+                        <a:t>0.774</a:t>
+                      </a:r>
+                      <a:endParaRPr lang="en-US" sz="1100" dirty="0">
+                        <a:latin typeface="Calibri" charset="0"/>
+                        <a:ea typeface="Calibri" charset="0"/>
+                        <a:cs typeface="Calibri" charset="0"/>
+                      </a:endParaRPr>
+                    </a:p>
+                  </a:txBody>
+                  <a:tcPr marL="91440" marR="91440" marT="45720" marB="45720" anchor="ctr">
+                    <a:lnL w="6350" cap="flat" cmpd="sng" algn="ctr">
+                      <a:solidFill>
+                        <a:srgbClr val="DDE5E8"/>
+                      </a:solidFill>
+                      <a:prstDash val="solid"/>
+                      <a:round/>
+                      <a:headEnd type="none" w="med" len="med"/>
+                      <a:tailEnd type="none" w="med" len="med"/>
+                    </a:lnL>
+                    <a:lnR w="6350" cap="flat" cmpd="sng" algn="ctr">
+                      <a:solidFill>
+                        <a:srgbClr val="DDE5E8"/>
+                      </a:solidFill>
+                      <a:prstDash val="solid"/>
+                      <a:round/>
+                      <a:headEnd type="none" w="med" len="med"/>
+                      <a:tailEnd type="none" w="med" len="med"/>
+                    </a:lnR>
+                    <a:lnT w="6350" cap="flat" cmpd="sng" algn="ctr">
+                      <a:solidFill>
+                        <a:srgbClr val="DDE5E8"/>
+                      </a:solidFill>
+                      <a:prstDash val="solid"/>
+                      <a:round/>
+                      <a:headEnd type="none" w="med" len="med"/>
+                      <a:tailEnd type="none" w="med" len="med"/>
+                    </a:lnT>
+                    <a:lnB w="6350" cap="flat" cmpd="sng" algn="ctr">
+                      <a:solidFill>
+                        <a:srgbClr val="DDE5E8"/>
+                      </a:solidFill>
+                      <a:prstDash val="solid"/>
+                      <a:round/>
+                      <a:headEnd type="none" w="med" len="med"/>
+                      <a:tailEnd type="none" w="med" len="med"/>
+                    </a:lnB>
+                  </a:tcPr>
+                </a:tc>
+                <a:tc>
+                  <a:txBody>
+                    <a:bodyPr/>
+                    <a:lstStyle/>
+                    <a:p>
+                      <a:pPr algn="ctr" indent="0" marL="0">
+                        <a:buNone/>
+                      </a:pPr>
+                      <a:r>
+                        <a:rPr lang="en-US" sz="1100" dirty="0">
+                          <a:solidFill>
+                            <a:srgbClr val="5F7580"/>
+                          </a:solidFill>
+                          <a:latin typeface="Calibri" pitchFamily="34" charset="0"/>
+                          <a:ea typeface="Calibri" pitchFamily="34" charset="-122"/>
+                          <a:cs typeface="Calibri" pitchFamily="34" charset="-120"/>
+                        </a:rPr>
+                        <a:t>−0.107</a:t>
+                      </a:r>
+                      <a:endParaRPr lang="en-US" sz="1100" dirty="0">
+                        <a:latin typeface="Calibri" charset="0"/>
+                        <a:ea typeface="Calibri" charset="0"/>
+                        <a:cs typeface="Calibri" charset="0"/>
+                      </a:endParaRPr>
+                    </a:p>
+                  </a:txBody>
+                  <a:tcPr marL="91440" marR="91440" marT="45720" marB="45720" anchor="ctr">
+                    <a:lnL w="6350" cap="flat" cmpd="sng" algn="ctr">
+                      <a:solidFill>
+                        <a:srgbClr val="DDE5E8"/>
+                      </a:solidFill>
+                      <a:prstDash val="solid"/>
+                      <a:round/>
+                      <a:headEnd type="none" w="med" len="med"/>
+                      <a:tailEnd type="none" w="med" len="med"/>
+                    </a:lnL>
+                    <a:lnR w="6350" cap="flat" cmpd="sng" algn="ctr">
+                      <a:solidFill>
+                        <a:srgbClr val="DDE5E8"/>
+                      </a:solidFill>
+                      <a:prstDash val="solid"/>
+                      <a:round/>
+                      <a:headEnd type="none" w="med" len="med"/>
+                      <a:tailEnd type="none" w="med" len="med"/>
+                    </a:lnR>
+                    <a:lnT w="6350" cap="flat" cmpd="sng" algn="ctr">
+                      <a:solidFill>
+                        <a:srgbClr val="DDE5E8"/>
+                      </a:solidFill>
+                      <a:prstDash val="solid"/>
+                      <a:round/>
+                      <a:headEnd type="none" w="med" len="med"/>
+                      <a:tailEnd type="none" w="med" len="med"/>
+                    </a:lnT>
+                    <a:lnB w="6350" cap="flat" cmpd="sng" algn="ctr">
+                      <a:solidFill>
+                        <a:srgbClr val="DDE5E8"/>
+                      </a:solidFill>
+                      <a:prstDash val="solid"/>
+                      <a:round/>
+                      <a:headEnd type="none" w="med" len="med"/>
+                      <a:tailEnd type="none" w="med" len="med"/>
+                    </a:lnB>
+                  </a:tcPr>
+                </a:tc>
+              </a:tr>
+              <a:tr h="402336">
+                <a:tc>
+                  <a:txBody>
+                    <a:bodyPr/>
+                    <a:lstStyle/>
+                    <a:p>
+                      <a:pPr algn="ctr" indent="0" marL="0">
+                        <a:buNone/>
+                      </a:pPr>
+                      <a:r>
+                        <a:rPr lang="en-US" sz="1100" dirty="0">
+                          <a:solidFill>
+                            <a:srgbClr val="16252C"/>
+                          </a:solidFill>
+                          <a:latin typeface="Calibri" pitchFamily="34" charset="0"/>
+                          <a:ea typeface="Calibri" pitchFamily="34" charset="-122"/>
+                          <a:cs typeface="Calibri" pitchFamily="34" charset="-120"/>
+                        </a:rPr>
+                        <a:t>Microbiome only</a:t>
+                      </a:r>
+                      <a:endParaRPr lang="en-US" sz="1100" dirty="0">
+                        <a:latin typeface="Calibri" charset="0"/>
+                        <a:ea typeface="Calibri" charset="0"/>
+                        <a:cs typeface="Calibri" charset="0"/>
+                      </a:endParaRPr>
+                    </a:p>
+                  </a:txBody>
+                  <a:tcPr marL="91440" marR="91440" marT="45720" marB="45720" anchor="ctr">
+                    <a:lnL w="6350" cap="flat" cmpd="sng" algn="ctr">
+                      <a:solidFill>
+                        <a:srgbClr val="DDE5E8"/>
+                      </a:solidFill>
+                      <a:prstDash val="solid"/>
+                      <a:round/>
+                      <a:headEnd type="none" w="med" len="med"/>
+                      <a:tailEnd type="none" w="med" len="med"/>
+                    </a:lnL>
+                    <a:lnR w="6350" cap="flat" cmpd="sng" algn="ctr">
+                      <a:solidFill>
+                        <a:srgbClr val="DDE5E8"/>
+                      </a:solidFill>
+                      <a:prstDash val="solid"/>
+                      <a:round/>
+                      <a:headEnd type="none" w="med" len="med"/>
+                      <a:tailEnd type="none" w="med" len="med"/>
+                    </a:lnR>
+                    <a:lnT w="6350" cap="flat" cmpd="sng" algn="ctr">
+                      <a:solidFill>
+                        <a:srgbClr val="DDE5E8"/>
+                      </a:solidFill>
+                      <a:prstDash val="solid"/>
+                      <a:round/>
+                      <a:headEnd type="none" w="med" len="med"/>
+                      <a:tailEnd type="none" w="med" len="med"/>
+                    </a:lnT>
+                    <a:lnB w="6350" cap="flat" cmpd="sng" algn="ctr">
+                      <a:solidFill>
+                        <a:srgbClr val="DDE5E8"/>
+                      </a:solidFill>
+                      <a:prstDash val="solid"/>
+                      <a:round/>
+                      <a:headEnd type="none" w="med" len="med"/>
+                      <a:tailEnd type="none" w="med" len="med"/>
+                    </a:lnB>
+                  </a:tcPr>
+                </a:tc>
+                <a:tc>
+                  <a:txBody>
+                    <a:bodyPr/>
+                    <a:lstStyle/>
+                    <a:p>
+                      <a:pPr algn="ctr" indent="0" marL="0">
+                        <a:buNone/>
+                      </a:pPr>
+                      <a:r>
+                        <a:rPr lang="en-US" sz="1100" dirty="0">
+                          <a:solidFill>
+                            <a:srgbClr val="16252C"/>
+                          </a:solidFill>
+                          <a:latin typeface="Calibri" pitchFamily="34" charset="0"/>
+                          <a:ea typeface="Calibri" pitchFamily="34" charset="-122"/>
+                          <a:cs typeface="Calibri" pitchFamily="34" charset="-120"/>
+                        </a:rPr>
+                        <a:t>0.766</a:t>
+                      </a:r>
+                      <a:endParaRPr lang="en-US" sz="1100" dirty="0">
+                        <a:latin typeface="Calibri" charset="0"/>
+                        <a:ea typeface="Calibri" charset="0"/>
+                        <a:cs typeface="Calibri" charset="0"/>
+                      </a:endParaRPr>
+                    </a:p>
+                  </a:txBody>
+                  <a:tcPr marL="91440" marR="91440" marT="45720" marB="45720" anchor="ctr">
+                    <a:lnL w="6350" cap="flat" cmpd="sng" algn="ctr">
+                      <a:solidFill>
+                        <a:srgbClr val="DDE5E8"/>
+                      </a:solidFill>
+                      <a:prstDash val="solid"/>
+                      <a:round/>
+                      <a:headEnd type="none" w="med" len="med"/>
+                      <a:tailEnd type="none" w="med" len="med"/>
+                    </a:lnL>
+                    <a:lnR w="6350" cap="flat" cmpd="sng" algn="ctr">
+                      <a:solidFill>
+                        <a:srgbClr val="DDE5E8"/>
+                      </a:solidFill>
+                      <a:prstDash val="solid"/>
+                      <a:round/>
+                      <a:headEnd type="none" w="med" len="med"/>
+                      <a:tailEnd type="none" w="med" len="med"/>
+                    </a:lnR>
+                    <a:lnT w="6350" cap="flat" cmpd="sng" algn="ctr">
+                      <a:solidFill>
+                        <a:srgbClr val="DDE5E8"/>
+                      </a:solidFill>
+                      <a:prstDash val="solid"/>
+                      <a:round/>
+                      <a:headEnd type="none" w="med" len="med"/>
+                      <a:tailEnd type="none" w="med" len="med"/>
+                    </a:lnT>
+                    <a:lnB w="6350" cap="flat" cmpd="sng" algn="ctr">
+                      <a:solidFill>
+                        <a:srgbClr val="DDE5E8"/>
+                      </a:solidFill>
+                      <a:prstDash val="solid"/>
+                      <a:round/>
+                      <a:headEnd type="none" w="med" len="med"/>
+                      <a:tailEnd type="none" w="med" len="med"/>
+                    </a:lnB>
+                  </a:tcPr>
+                </a:tc>
+                <a:tc>
+                  <a:txBody>
+                    <a:bodyPr/>
+                    <a:lstStyle/>
+                    <a:p>
+                      <a:pPr algn="ctr" indent="0" marL="0">
+                        <a:buNone/>
+                      </a:pPr>
+                      <a:r>
+                        <a:rPr lang="en-US" sz="1100" b="1" dirty="0">
+                          <a:solidFill>
+                            <a:srgbClr val="16252C"/>
+                          </a:solidFill>
+                          <a:latin typeface="Calibri" pitchFamily="34" charset="0"/>
+                          <a:ea typeface="Calibri" pitchFamily="34" charset="-122"/>
+                          <a:cs typeface="Calibri" pitchFamily="34" charset="-120"/>
+                        </a:rPr>
+                        <a:t>0.933</a:t>
+                      </a:r>
+                      <a:endParaRPr lang="en-US" sz="1100" dirty="0">
+                        <a:latin typeface="Calibri" charset="0"/>
+                        <a:ea typeface="Calibri" charset="0"/>
+                        <a:cs typeface="Calibri" charset="0"/>
+                      </a:endParaRPr>
+                    </a:p>
+                  </a:txBody>
+                  <a:tcPr marL="91440" marR="91440" marT="45720" marB="45720" anchor="ctr">
+                    <a:lnL w="6350" cap="flat" cmpd="sng" algn="ctr">
+                      <a:solidFill>
+                        <a:srgbClr val="DDE5E8"/>
+                      </a:solidFill>
+                      <a:prstDash val="solid"/>
+                      <a:round/>
+                      <a:headEnd type="none" w="med" len="med"/>
+                      <a:tailEnd type="none" w="med" len="med"/>
+                    </a:lnL>
+                    <a:lnR w="6350" cap="flat" cmpd="sng" algn="ctr">
+                      <a:solidFill>
+                        <a:srgbClr val="DDE5E8"/>
+                      </a:solidFill>
+                      <a:prstDash val="solid"/>
+                      <a:round/>
+                      <a:headEnd type="none" w="med" len="med"/>
+                      <a:tailEnd type="none" w="med" len="med"/>
+                    </a:lnR>
+                    <a:lnT w="6350" cap="flat" cmpd="sng" algn="ctr">
+                      <a:solidFill>
+                        <a:srgbClr val="DDE5E8"/>
+                      </a:solidFill>
+                      <a:prstDash val="solid"/>
+                      <a:round/>
+                      <a:headEnd type="none" w="med" len="med"/>
+                      <a:tailEnd type="none" w="med" len="med"/>
+                    </a:lnT>
+                    <a:lnB w="6350" cap="flat" cmpd="sng" algn="ctr">
+                      <a:solidFill>
+                        <a:srgbClr val="DDE5E8"/>
+                      </a:solidFill>
+                      <a:prstDash val="solid"/>
+                      <a:round/>
+                      <a:headEnd type="none" w="med" len="med"/>
+                      <a:tailEnd type="none" w="med" len="med"/>
+                    </a:lnB>
+                  </a:tcPr>
+                </a:tc>
+                <a:tc>
+                  <a:txBody>
+                    <a:bodyPr/>
+                    <a:lstStyle/>
+                    <a:p>
+                      <a:pPr algn="ctr" indent="0" marL="0">
+                        <a:buNone/>
+                      </a:pPr>
+                      <a:r>
+                        <a:rPr lang="en-US" sz="1100" b="1" dirty="0">
+                          <a:solidFill>
+                            <a:srgbClr val="8FB996"/>
+                          </a:solidFill>
+                          <a:latin typeface="Calibri" pitchFamily="34" charset="0"/>
+                          <a:ea typeface="Calibri" pitchFamily="34" charset="-122"/>
+                          <a:cs typeface="Calibri" pitchFamily="34" charset="-120"/>
+                        </a:rPr>
+                        <a:t>+0.168</a:t>
+                      </a:r>
+                      <a:endParaRPr lang="en-US" sz="1100" dirty="0">
+                        <a:latin typeface="Calibri" charset="0"/>
+                        <a:ea typeface="Calibri" charset="0"/>
+                        <a:cs typeface="Calibri" charset="0"/>
+                      </a:endParaRPr>
+                    </a:p>
+                  </a:txBody>
+                  <a:tcPr marL="91440" marR="91440" marT="45720" marB="45720" anchor="ctr">
+                    <a:lnL w="6350" cap="flat" cmpd="sng" algn="ctr">
+                      <a:solidFill>
+                        <a:srgbClr val="DDE5E8"/>
+                      </a:solidFill>
+                      <a:prstDash val="solid"/>
+                      <a:round/>
+                      <a:headEnd type="none" w="med" len="med"/>
+                      <a:tailEnd type="none" w="med" len="med"/>
+                    </a:lnL>
+                    <a:lnR w="6350" cap="flat" cmpd="sng" algn="ctr">
+                      <a:solidFill>
+                        <a:srgbClr val="DDE5E8"/>
+                      </a:solidFill>
+                      <a:prstDash val="solid"/>
+                      <a:round/>
+                      <a:headEnd type="none" w="med" len="med"/>
+                      <a:tailEnd type="none" w="med" len="med"/>
+                    </a:lnR>
+                    <a:lnT w="6350" cap="flat" cmpd="sng" algn="ctr">
+                      <a:solidFill>
+                        <a:srgbClr val="DDE5E8"/>
+                      </a:solidFill>
+                      <a:prstDash val="solid"/>
+                      <a:round/>
+                      <a:headEnd type="none" w="med" len="med"/>
+                      <a:tailEnd type="none" w="med" len="med"/>
+                    </a:lnT>
+                    <a:lnB w="6350" cap="flat" cmpd="sng" algn="ctr">
+                      <a:solidFill>
+                        <a:srgbClr val="DDE5E8"/>
+                      </a:solidFill>
+                      <a:prstDash val="solid"/>
+                      <a:round/>
+                      <a:headEnd type="none" w="med" len="med"/>
+                      <a:tailEnd type="none" w="med" len="med"/>
+                    </a:lnB>
+                  </a:tcPr>
+                </a:tc>
+              </a:tr>
+              <a:tr h="402336">
+                <a:tc>
+                  <a:txBody>
+                    <a:bodyPr/>
+                    <a:lstStyle/>
+                    <a:p>
+                      <a:pPr algn="ctr" indent="0" marL="0">
+                        <a:buNone/>
+                      </a:pPr>
+                      <a:r>
+                        <a:rPr lang="en-US" sz="1100" dirty="0">
+                          <a:solidFill>
+                            <a:srgbClr val="16252C"/>
+                          </a:solidFill>
+                          <a:latin typeface="Calibri" pitchFamily="34" charset="0"/>
+                          <a:ea typeface="Calibri" pitchFamily="34" charset="-122"/>
+                          <a:cs typeface="Calibri" pitchFamily="34" charset="-120"/>
+                        </a:rPr>
+                        <a:t>Microbiome + covariates</a:t>
+                      </a:r>
+                      <a:endParaRPr lang="en-US" sz="1100" dirty="0">
+                        <a:latin typeface="Calibri" charset="0"/>
+                        <a:ea typeface="Calibri" charset="0"/>
+                        <a:cs typeface="Calibri" charset="0"/>
+                      </a:endParaRPr>
+                    </a:p>
+                  </a:txBody>
+                  <a:tcPr marL="91440" marR="91440" marT="45720" marB="45720" anchor="ctr">
+                    <a:lnL w="6350" cap="flat" cmpd="sng" algn="ctr">
+                      <a:solidFill>
+                        <a:srgbClr val="DDE5E8"/>
+                      </a:solidFill>
+                      <a:prstDash val="solid"/>
+                      <a:round/>
+                      <a:headEnd type="none" w="med" len="med"/>
+                      <a:tailEnd type="none" w="med" len="med"/>
+                    </a:lnL>
+                    <a:lnR w="6350" cap="flat" cmpd="sng" algn="ctr">
+                      <a:solidFill>
+                        <a:srgbClr val="DDE5E8"/>
+                      </a:solidFill>
+                      <a:prstDash val="solid"/>
+                      <a:round/>
+                      <a:headEnd type="none" w="med" len="med"/>
+                      <a:tailEnd type="none" w="med" len="med"/>
+                    </a:lnR>
+                    <a:lnT w="6350" cap="flat" cmpd="sng" algn="ctr">
+                      <a:solidFill>
+                        <a:srgbClr val="DDE5E8"/>
+                      </a:solidFill>
+                      <a:prstDash val="solid"/>
+                      <a:round/>
+                      <a:headEnd type="none" w="med" len="med"/>
+                      <a:tailEnd type="none" w="med" len="med"/>
+                    </a:lnT>
+                    <a:lnB w="6350" cap="flat" cmpd="sng" algn="ctr">
+                      <a:solidFill>
+                        <a:srgbClr val="DDE5E8"/>
+                      </a:solidFill>
+                      <a:prstDash val="solid"/>
+                      <a:round/>
+                      <a:headEnd type="none" w="med" len="med"/>
+                      <a:tailEnd type="none" w="med" len="med"/>
+                    </a:lnB>
+                  </a:tcPr>
+                </a:tc>
+                <a:tc>
+                  <a:txBody>
+                    <a:bodyPr/>
+                    <a:lstStyle/>
+                    <a:p>
+                      <a:pPr algn="ctr" indent="0" marL="0">
+                        <a:buNone/>
+                      </a:pPr>
+                      <a:r>
+                        <a:rPr lang="en-US" sz="1100" dirty="0">
+                          <a:solidFill>
+                            <a:srgbClr val="16252C"/>
+                          </a:solidFill>
+                          <a:latin typeface="Calibri" pitchFamily="34" charset="0"/>
+                          <a:ea typeface="Calibri" pitchFamily="34" charset="-122"/>
+                          <a:cs typeface="Calibri" pitchFamily="34" charset="-120"/>
+                        </a:rPr>
+                        <a:t>0.924</a:t>
+                      </a:r>
+                      <a:endParaRPr lang="en-US" sz="1100" dirty="0">
+                        <a:latin typeface="Calibri" charset="0"/>
+                        <a:ea typeface="Calibri" charset="0"/>
+                        <a:cs typeface="Calibri" charset="0"/>
+                      </a:endParaRPr>
+                    </a:p>
+                  </a:txBody>
+                  <a:tcPr marL="91440" marR="91440" marT="45720" marB="45720" anchor="ctr">
+                    <a:lnL w="6350" cap="flat" cmpd="sng" algn="ctr">
+                      <a:solidFill>
+                        <a:srgbClr val="DDE5E8"/>
+                      </a:solidFill>
+                      <a:prstDash val="solid"/>
+                      <a:round/>
+                      <a:headEnd type="none" w="med" len="med"/>
+                      <a:tailEnd type="none" w="med" len="med"/>
+                    </a:lnL>
+                    <a:lnR w="6350" cap="flat" cmpd="sng" algn="ctr">
+                      <a:solidFill>
+                        <a:srgbClr val="DDE5E8"/>
+                      </a:solidFill>
+                      <a:prstDash val="solid"/>
+                      <a:round/>
+                      <a:headEnd type="none" w="med" len="med"/>
+                      <a:tailEnd type="none" w="med" len="med"/>
+                    </a:lnR>
+                    <a:lnT w="6350" cap="flat" cmpd="sng" algn="ctr">
+                      <a:solidFill>
+                        <a:srgbClr val="DDE5E8"/>
+                      </a:solidFill>
+                      <a:prstDash val="solid"/>
+                      <a:round/>
+                      <a:headEnd type="none" w="med" len="med"/>
+                      <a:tailEnd type="none" w="med" len="med"/>
+                    </a:lnT>
+                    <a:lnB w="6350" cap="flat" cmpd="sng" algn="ctr">
+                      <a:solidFill>
+                        <a:srgbClr val="DDE5E8"/>
+                      </a:solidFill>
+                      <a:prstDash val="solid"/>
+                      <a:round/>
+                      <a:headEnd type="none" w="med" len="med"/>
+                      <a:tailEnd type="none" w="med" len="med"/>
+                    </a:lnB>
+                  </a:tcPr>
+                </a:tc>
+                <a:tc>
+                  <a:txBody>
+                    <a:bodyPr/>
+                    <a:lstStyle/>
+                    <a:p>
+                      <a:pPr algn="ctr" indent="0" marL="0">
+                        <a:buNone/>
+                      </a:pPr>
+                      <a:r>
+                        <a:rPr lang="en-US" sz="1100" dirty="0">
+                          <a:solidFill>
+                            <a:srgbClr val="16252C"/>
+                          </a:solidFill>
+                          <a:latin typeface="Calibri" pitchFamily="34" charset="0"/>
+                          <a:ea typeface="Calibri" pitchFamily="34" charset="-122"/>
+                          <a:cs typeface="Calibri" pitchFamily="34" charset="-120"/>
+                        </a:rPr>
+                        <a:t>0.951</a:t>
+                      </a:r>
+                      <a:endParaRPr lang="en-US" sz="1100" dirty="0">
+                        <a:latin typeface="Calibri" charset="0"/>
+                        <a:ea typeface="Calibri" charset="0"/>
+                        <a:cs typeface="Calibri" charset="0"/>
+                      </a:endParaRPr>
+                    </a:p>
+                  </a:txBody>
+                  <a:tcPr marL="91440" marR="91440" marT="45720" marB="45720" anchor="ctr">
+                    <a:lnL w="6350" cap="flat" cmpd="sng" algn="ctr">
+                      <a:solidFill>
+                        <a:srgbClr val="DDE5E8"/>
+                      </a:solidFill>
+                      <a:prstDash val="solid"/>
+                      <a:round/>
+                      <a:headEnd type="none" w="med" len="med"/>
+                      <a:tailEnd type="none" w="med" len="med"/>
+                    </a:lnL>
+                    <a:lnR w="6350" cap="flat" cmpd="sng" algn="ctr">
+                      <a:solidFill>
+                        <a:srgbClr val="DDE5E8"/>
+                      </a:solidFill>
+                      <a:prstDash val="solid"/>
+                      <a:round/>
+                      <a:headEnd type="none" w="med" len="med"/>
+                      <a:tailEnd type="none" w="med" len="med"/>
+                    </a:lnR>
+                    <a:lnT w="6350" cap="flat" cmpd="sng" algn="ctr">
+                      <a:solidFill>
+                        <a:srgbClr val="DDE5E8"/>
+                      </a:solidFill>
+                      <a:prstDash val="solid"/>
+                      <a:round/>
+                      <a:headEnd type="none" w="med" len="med"/>
+                      <a:tailEnd type="none" w="med" len="med"/>
+                    </a:lnT>
+                    <a:lnB w="6350" cap="flat" cmpd="sng" algn="ctr">
+                      <a:solidFill>
+                        <a:srgbClr val="DDE5E8"/>
+                      </a:solidFill>
+                      <a:prstDash val="solid"/>
+                      <a:round/>
+                      <a:headEnd type="none" w="med" len="med"/>
+                      <a:tailEnd type="none" w="med" len="med"/>
+                    </a:lnB>
+                  </a:tcPr>
+                </a:tc>
+                <a:tc>
+                  <a:txBody>
+                    <a:bodyPr/>
+                    <a:lstStyle/>
+                    <a:p>
+                      <a:pPr algn="ctr" indent="0" marL="0">
+                        <a:buNone/>
+                      </a:pPr>
+                      <a:r>
+                        <a:rPr lang="en-US" sz="1100" dirty="0">
+                          <a:solidFill>
+                            <a:srgbClr val="8FB996"/>
+                          </a:solidFill>
+                          <a:latin typeface="Calibri" pitchFamily="34" charset="0"/>
+                          <a:ea typeface="Calibri" pitchFamily="34" charset="-122"/>
+                          <a:cs typeface="Calibri" pitchFamily="34" charset="-120"/>
+                        </a:rPr>
+                        <a:t>+0.027</a:t>
+                      </a:r>
+                      <a:endParaRPr lang="en-US" sz="1100" dirty="0">
+                        <a:latin typeface="Calibri" charset="0"/>
+                        <a:ea typeface="Calibri" charset="0"/>
+                        <a:cs typeface="Calibri" charset="0"/>
+                      </a:endParaRPr>
+                    </a:p>
+                  </a:txBody>
+                  <a:tcPr marL="91440" marR="91440" marT="45720" marB="45720" anchor="ctr">
+                    <a:lnL w="6350" cap="flat" cmpd="sng" algn="ctr">
+                      <a:solidFill>
+                        <a:srgbClr val="DDE5E8"/>
+                      </a:solidFill>
+                      <a:prstDash val="solid"/>
+                      <a:round/>
+                      <a:headEnd type="none" w="med" len="med"/>
+                      <a:tailEnd type="none" w="med" len="med"/>
+                    </a:lnL>
+                    <a:lnR w="6350" cap="flat" cmpd="sng" algn="ctr">
+                      <a:solidFill>
+                        <a:srgbClr val="DDE5E8"/>
+                      </a:solidFill>
+                      <a:prstDash val="solid"/>
+                      <a:round/>
+                      <a:headEnd type="none" w="med" len="med"/>
+                      <a:tailEnd type="none" w="med" len="med"/>
+                    </a:lnR>
+                    <a:lnT w="6350" cap="flat" cmpd="sng" algn="ctr">
+                      <a:solidFill>
+                        <a:srgbClr val="DDE5E8"/>
+                      </a:solidFill>
+                      <a:prstDash val="solid"/>
+                      <a:round/>
+                      <a:headEnd type="none" w="med" len="med"/>
+                      <a:tailEnd type="none" w="med" len="med"/>
+                    </a:lnT>
+                    <a:lnB w="6350" cap="flat" cmpd="sng" algn="ctr">
+                      <a:solidFill>
+                        <a:srgbClr val="DDE5E8"/>
+                      </a:solidFill>
+                      <a:prstDash val="solid"/>
+                      <a:round/>
+                      <a:headEnd type="none" w="med" len="med"/>
+                      <a:tailEnd type="none" w="med" len="med"/>
+                    </a:lnB>
+                  </a:tcPr>
+                </a:tc>
+              </a:tr>
+              <a:tr h="402336">
+                <a:tc>
+                  <a:txBody>
+                    <a:bodyPr/>
+                    <a:lstStyle/>
+                    <a:p>
+                      <a:pPr algn="ctr" indent="0" marL="0">
+                        <a:buNone/>
+                      </a:pPr>
+                      <a:r>
+                        <a:rPr lang="en-US" sz="1150" b="1" dirty="0">
+                          <a:solidFill>
+                            <a:srgbClr val="16252C"/>
+                          </a:solidFill>
+                          <a:latin typeface="Calibri" pitchFamily="34" charset="0"/>
+                          <a:ea typeface="Calibri" pitchFamily="34" charset="-122"/>
+                          <a:cs typeface="Calibri" pitchFamily="34" charset="-120"/>
+                        </a:rPr>
+                        <a:t>Independent contribution</a:t>
+                      </a:r>
+                      <a:endParaRPr lang="en-US" sz="1150" dirty="0">
+                        <a:latin typeface="Calibri" charset="0"/>
+                        <a:ea typeface="Calibri" charset="0"/>
+                        <a:cs typeface="Calibri" charset="0"/>
+                      </a:endParaRPr>
+                    </a:p>
+                  </a:txBody>
+                  <a:tcPr marL="91440" marR="91440" marT="45720" marB="45720" anchor="ctr">
+                    <a:lnL w="6350" cap="flat" cmpd="sng" algn="ctr">
+                      <a:solidFill>
+                        <a:srgbClr val="DDE5E8"/>
+                      </a:solidFill>
+                      <a:prstDash val="solid"/>
+                      <a:round/>
+                      <a:headEnd type="none" w="med" len="med"/>
+                      <a:tailEnd type="none" w="med" len="med"/>
+                    </a:lnL>
+                    <a:lnR w="6350" cap="flat" cmpd="sng" algn="ctr">
+                      <a:solidFill>
+                        <a:srgbClr val="DDE5E8"/>
+                      </a:solidFill>
+                      <a:prstDash val="solid"/>
+                      <a:round/>
+                      <a:headEnd type="none" w="med" len="med"/>
+                      <a:tailEnd type="none" w="med" len="med"/>
+                    </a:lnR>
+                    <a:lnT w="6350" cap="flat" cmpd="sng" algn="ctr">
+                      <a:solidFill>
+                        <a:srgbClr val="DDE5E8"/>
+                      </a:solidFill>
+                      <a:prstDash val="solid"/>
+                      <a:round/>
+                      <a:headEnd type="none" w="med" len="med"/>
+                      <a:tailEnd type="none" w="med" len="med"/>
+                    </a:lnT>
+                    <a:lnB w="6350" cap="flat" cmpd="sng" algn="ctr">
+                      <a:solidFill>
+                        <a:srgbClr val="DDE5E8"/>
+                      </a:solidFill>
+                      <a:prstDash val="solid"/>
+                      <a:round/>
+                      <a:headEnd type="none" w="med" len="med"/>
+                      <a:tailEnd type="none" w="med" len="med"/>
+                    </a:lnB>
+                    <a:solidFill>
+                      <a:srgbClr val="E4F0F0"/>
+                    </a:solidFill>
+                  </a:tcPr>
+                </a:tc>
+                <a:tc>
+                  <a:txBody>
+                    <a:bodyPr/>
+                    <a:lstStyle/>
+                    <a:p>
+                      <a:pPr algn="ctr" indent="0" marL="0">
+                        <a:buNone/>
+                      </a:pPr>
+                      <a:r>
+                        <a:rPr lang="en-US" sz="1150" b="1" dirty="0">
+                          <a:solidFill>
+                            <a:srgbClr val="16252C"/>
+                          </a:solidFill>
+                          <a:latin typeface="Calibri" pitchFamily="34" charset="0"/>
+                          <a:ea typeface="Calibri" pitchFamily="34" charset="-122"/>
+                          <a:cs typeface="Calibri" pitchFamily="34" charset="-120"/>
+                        </a:rPr>
+                        <a:t>+0.043</a:t>
+                      </a:r>
+                      <a:endParaRPr lang="en-US" sz="1150" dirty="0">
+                        <a:latin typeface="Calibri" charset="0"/>
+                        <a:ea typeface="Calibri" charset="0"/>
+                        <a:cs typeface="Calibri" charset="0"/>
+                      </a:endParaRPr>
+                    </a:p>
+                  </a:txBody>
+                  <a:tcPr marL="91440" marR="91440" marT="45720" marB="45720" anchor="ctr">
+                    <a:lnL w="6350" cap="flat" cmpd="sng" algn="ctr">
+                      <a:solidFill>
+                        <a:srgbClr val="DDE5E8"/>
+                      </a:solidFill>
+                      <a:prstDash val="solid"/>
+                      <a:round/>
+                      <a:headEnd type="none" w="med" len="med"/>
+                      <a:tailEnd type="none" w="med" len="med"/>
+                    </a:lnL>
+                    <a:lnR w="6350" cap="flat" cmpd="sng" algn="ctr">
+                      <a:solidFill>
+                        <a:srgbClr val="DDE5E8"/>
+                      </a:solidFill>
+                      <a:prstDash val="solid"/>
+                      <a:round/>
+                      <a:headEnd type="none" w="med" len="med"/>
+                      <a:tailEnd type="none" w="med" len="med"/>
+                    </a:lnR>
+                    <a:lnT w="6350" cap="flat" cmpd="sng" algn="ctr">
+                      <a:solidFill>
+                        <a:srgbClr val="DDE5E8"/>
+                      </a:solidFill>
+                      <a:prstDash val="solid"/>
+                      <a:round/>
+                      <a:headEnd type="none" w="med" len="med"/>
+                      <a:tailEnd type="none" w="med" len="med"/>
+                    </a:lnT>
+                    <a:lnB w="6350" cap="flat" cmpd="sng" algn="ctr">
+                      <a:solidFill>
+                        <a:srgbClr val="DDE5E8"/>
+                      </a:solidFill>
+                      <a:prstDash val="solid"/>
+                      <a:round/>
+                      <a:headEnd type="none" w="med" len="med"/>
+                      <a:tailEnd type="none" w="med" len="med"/>
+                    </a:lnB>
+                    <a:solidFill>
+                      <a:srgbClr val="E4F0F0"/>
+                    </a:solidFill>
+                  </a:tcPr>
+                </a:tc>
+                <a:tc>
+                  <a:txBody>
+                    <a:bodyPr/>
+                    <a:lstStyle/>
+                    <a:p>
+                      <a:pPr algn="ctr" indent="0" marL="0">
+                        <a:buNone/>
+                      </a:pPr>
+                      <a:r>
+                        <a:rPr lang="en-US" sz="1150" b="1" dirty="0">
+                          <a:solidFill>
+                            <a:srgbClr val="16252C"/>
+                          </a:solidFill>
+                          <a:latin typeface="Calibri" pitchFamily="34" charset="0"/>
+                          <a:ea typeface="Calibri" pitchFamily="34" charset="-122"/>
+                          <a:cs typeface="Calibri" pitchFamily="34" charset="-120"/>
+                        </a:rPr>
+                        <a:t>+0.177</a:t>
+                      </a:r>
+                      <a:endParaRPr lang="en-US" sz="1150" dirty="0">
+                        <a:latin typeface="Calibri" charset="0"/>
+                        <a:ea typeface="Calibri" charset="0"/>
+                        <a:cs typeface="Calibri" charset="0"/>
+                      </a:endParaRPr>
+                    </a:p>
+                  </a:txBody>
+                  <a:tcPr marL="91440" marR="91440" marT="45720" marB="45720" anchor="ctr">
+                    <a:lnL w="6350" cap="flat" cmpd="sng" algn="ctr">
+                      <a:solidFill>
+                        <a:srgbClr val="DDE5E8"/>
+                      </a:solidFill>
+                      <a:prstDash val="solid"/>
+                      <a:round/>
+                      <a:headEnd type="none" w="med" len="med"/>
+                      <a:tailEnd type="none" w="med" len="med"/>
+                    </a:lnL>
+                    <a:lnR w="6350" cap="flat" cmpd="sng" algn="ctr">
+                      <a:solidFill>
+                        <a:srgbClr val="DDE5E8"/>
+                      </a:solidFill>
+                      <a:prstDash val="solid"/>
+                      <a:round/>
+                      <a:headEnd type="none" w="med" len="med"/>
+                      <a:tailEnd type="none" w="med" len="med"/>
+                    </a:lnR>
+                    <a:lnT w="6350" cap="flat" cmpd="sng" algn="ctr">
+                      <a:solidFill>
+                        <a:srgbClr val="DDE5E8"/>
+                      </a:solidFill>
+                      <a:prstDash val="solid"/>
+                      <a:round/>
+                      <a:headEnd type="none" w="med" len="med"/>
+                      <a:tailEnd type="none" w="med" len="med"/>
+                    </a:lnT>
+                    <a:lnB w="6350" cap="flat" cmpd="sng" algn="ctr">
+                      <a:solidFill>
+                        <a:srgbClr val="DDE5E8"/>
+                      </a:solidFill>
+                      <a:prstDash val="solid"/>
+                      <a:round/>
+                      <a:headEnd type="none" w="med" len="med"/>
+                      <a:tailEnd type="none" w="med" len="med"/>
+                    </a:lnB>
+                    <a:solidFill>
+                      <a:srgbClr val="E4F0F0"/>
+                    </a:solidFill>
+                  </a:tcPr>
+                </a:tc>
+                <a:tc>
+                  <a:txBody>
+                    <a:bodyPr/>
+                    <a:lstStyle/>
+                    <a:p>
+                      <a:pPr algn="ctr" indent="0" marL="0">
+                        <a:buNone/>
+                      </a:pPr>
+                      <a:r>
+                        <a:rPr lang="en-US" sz="1150" b="1" dirty="0">
+                          <a:solidFill>
+                            <a:srgbClr val="16252C"/>
+                          </a:solidFill>
+                          <a:latin typeface="Calibri" pitchFamily="34" charset="0"/>
+                          <a:ea typeface="Calibri" pitchFamily="34" charset="-122"/>
+                          <a:cs typeface="Calibri" pitchFamily="34" charset="-120"/>
+                        </a:rPr>
+                        <a:t>×4</a:t>
+                      </a:r>
+                      <a:endParaRPr lang="en-US" sz="1150" dirty="0">
+                        <a:latin typeface="Calibri" charset="0"/>
+                        <a:ea typeface="Calibri" charset="0"/>
+                        <a:cs typeface="Calibri" charset="0"/>
+                      </a:endParaRPr>
+                    </a:p>
+                  </a:txBody>
+                  <a:tcPr marL="91440" marR="91440" marT="45720" marB="45720" anchor="ctr">
+                    <a:lnL w="6350" cap="flat" cmpd="sng" algn="ctr">
+                      <a:solidFill>
+                        <a:srgbClr val="DDE5E8"/>
+                      </a:solidFill>
+                      <a:prstDash val="solid"/>
+                      <a:round/>
+                      <a:headEnd type="none" w="med" len="med"/>
+                      <a:tailEnd type="none" w="med" len="med"/>
+                    </a:lnL>
+                    <a:lnR w="6350" cap="flat" cmpd="sng" algn="ctr">
+                      <a:solidFill>
+                        <a:srgbClr val="DDE5E8"/>
+                      </a:solidFill>
+                      <a:prstDash val="solid"/>
+                      <a:round/>
+                      <a:headEnd type="none" w="med" len="med"/>
+                      <a:tailEnd type="none" w="med" len="med"/>
+                    </a:lnR>
+                    <a:lnT w="6350" cap="flat" cmpd="sng" algn="ctr">
+                      <a:solidFill>
+                        <a:srgbClr val="DDE5E8"/>
+                      </a:solidFill>
+                      <a:prstDash val="solid"/>
+                      <a:round/>
+                      <a:headEnd type="none" w="med" len="med"/>
+                      <a:tailEnd type="none" w="med" len="med"/>
+                    </a:lnT>
+                    <a:lnB w="6350" cap="flat" cmpd="sng" algn="ctr">
+                      <a:solidFill>
+                        <a:srgbClr val="DDE5E8"/>
+                      </a:solidFill>
+                      <a:prstDash val="solid"/>
+                      <a:round/>
+                      <a:headEnd type="none" w="med" len="med"/>
+                      <a:tailEnd type="none" w="med" len="med"/>
+                    </a:lnB>
+                    <a:solidFill>
+                      <a:srgbClr val="E4F0F0"/>
+                    </a:solidFill>
+                  </a:tcPr>
+                </a:tc>
+              </a:tr>
+            </a:tbl>
+          </a:graphicData>
+        </a:graphic>
+      </p:graphicFrame>
+      <p:sp>
+        <p:nvSpPr>
+          <p:cNvPr id="8" name="Shape 5"/>
+          <p:cNvSpPr/>
+          <p:nvPr/>
+        </p:nvSpPr>
+        <p:spPr>
+          <a:xfrm>
+            <a:off x="7132320" y="1828800"/>
+            <a:ext cx="4480560" cy="2011680"/>
+          </a:xfrm>
+          <a:prstGeom prst="rect">
+            <a:avLst/>
+          </a:prstGeom>
+          <a:solidFill>
+            <a:srgbClr val="FFFFFF"/>
+          </a:solidFill>
+          <a:ln/>
+          <a:effectLst>
+            <a:outerShdw sx="100000" sy="100000" kx="0" ky="0" algn="bl" rotWithShape="0" blurRad="101600" dist="25400" dir="8100000">
+              <a:srgbClr val="000000">
+                <a:alpha val="10000"/>
+              </a:srgbClr>
+            </a:outerShdw>
+          </a:effectLst>
+        </p:spPr>
+      </p:sp>
+      <p:sp>
+        <p:nvSpPr>
+          <p:cNvPr id="9" name="Shape 6"/>
+          <p:cNvSpPr/>
+          <p:nvPr/>
+        </p:nvSpPr>
+        <p:spPr>
+          <a:xfrm>
+            <a:off x="7132320" y="1828800"/>
+            <a:ext cx="68580" cy="2011680"/>
+          </a:xfrm>
+          <a:prstGeom prst="rect">
+            <a:avLst/>
+          </a:prstGeom>
+          <a:solidFill>
+            <a:srgbClr val="8FB996"/>
+          </a:solidFill>
+          <a:ln/>
+        </p:spPr>
+      </p:sp>
+      <p:sp>
+        <p:nvSpPr>
+          <p:cNvPr id="10" name="Text 7"/>
+          <p:cNvSpPr/>
+          <p:nvPr/>
+        </p:nvSpPr>
+        <p:spPr>
+          <a:xfrm>
+            <a:off x="7388352" y="1975104"/>
+            <a:ext cx="4023360" cy="329184"/>
+          </a:xfrm>
+          <a:prstGeom prst="rect">
+            <a:avLst/>
+          </a:prstGeom>
+          <a:noFill/>
+          <a:ln/>
+        </p:spPr>
+        <p:txBody>
+          <a:bodyPr wrap="square" lIns="0" tIns="0" rIns="0" bIns="0" rtlCol="0" anchor="t"/>
+          <a:lstStyle/>
+          <a:p>
+            <a:pPr indent="0" marL="0">
+              <a:buNone/>
+            </a:pPr>
+            <a:r>
+              <a:rPr lang="en-US" sz="1400" b="1" dirty="0">
+                <a:solidFill>
+                  <a:srgbClr val="16252C"/>
+                </a:solidFill>
+                <a:latin typeface="Georgia" pitchFamily="34" charset="0"/>
+                <a:ea typeface="Georgia" pitchFamily="34" charset="-122"/>
+                <a:cs typeface="Georgia" pitchFamily="34" charset="-120"/>
+              </a:rPr>
+              <a:t>Deconfounding worked</a:t>
+            </a:r>
+            <a:endParaRPr lang="en-US" sz="1400" dirty="0"/>
+          </a:p>
+        </p:txBody>
+      </p:sp>
+      <p:sp>
+        <p:nvSpPr>
+          <p:cNvPr id="11" name="Text 8"/>
+          <p:cNvSpPr/>
+          <p:nvPr/>
+        </p:nvSpPr>
+        <p:spPr>
+          <a:xfrm>
+            <a:off x="7388352" y="2359152"/>
+            <a:ext cx="4023360" cy="1353312"/>
+          </a:xfrm>
+          <a:prstGeom prst="rect">
+            <a:avLst/>
+          </a:prstGeom>
+          <a:noFill/>
+          <a:ln/>
+        </p:spPr>
+        <p:txBody>
+          <a:bodyPr wrap="square" lIns="0" tIns="0" rIns="0" bIns="0" rtlCol="0" anchor="t"/>
+          <a:lstStyle/>
+          <a:p>
+            <a:pPr indent="0" marL="0">
+              <a:lnSpc>
+                <a:spcPct val="112000"/>
+              </a:lnSpc>
+              <a:buNone/>
+            </a:pPr>
+            <a:r>
+              <a:rPr lang="en-US" sz="1100" dirty="0">
+                <a:solidFill>
+                  <a:srgbClr val="5F7580"/>
+                </a:solidFill>
+                <a:latin typeface="Calibri" pitchFamily="34" charset="0"/>
+                <a:ea typeface="Calibri" pitchFamily="34" charset="-122"/>
+                <a:cs typeface="Calibri" pitchFamily="34" charset="-120"/>
+              </a:rPr>
+              <a:t>Predicting the label from month alone:</a:t>
+            </a:r>
+            <a:endParaRPr lang="en-US" sz="1100" dirty="0"/>
+          </a:p>
+          <a:p>
+            <a:pPr indent="0" marL="0">
+              <a:lnSpc>
+                <a:spcPct val="112000"/>
+              </a:lnSpc>
+              <a:buNone/>
+            </a:pPr>
+            <a:endParaRPr lang="en-US" sz="1100" dirty="0"/>
+          </a:p>
+          <a:p>
+            <a:pPr indent="0" marL="0">
+              <a:lnSpc>
+                <a:spcPct val="112000"/>
+              </a:lnSpc>
+              <a:buNone/>
+            </a:pPr>
+            <a:r>
+              <a:rPr lang="en-US" sz="1100" dirty="0">
+                <a:solidFill>
+                  <a:srgbClr val="5F7580"/>
+                </a:solidFill>
+                <a:latin typeface="Calibri" pitchFamily="34" charset="0"/>
+                <a:ea typeface="Calibri" pitchFamily="34" charset="-122"/>
+                <a:cs typeface="Calibri" pitchFamily="34" charset="-120"/>
+              </a:rPr>
+              <a:t>   full cohort  AUC 0.775</a:t>
+            </a:r>
+            <a:endParaRPr lang="en-US" sz="1100" dirty="0"/>
+          </a:p>
+          <a:p>
+            <a:pPr indent="0" marL="0">
+              <a:lnSpc>
+                <a:spcPct val="112000"/>
+              </a:lnSpc>
+              <a:buNone/>
+            </a:pPr>
+            <a:r>
+              <a:rPr lang="en-US" sz="1100" dirty="0">
+                <a:solidFill>
+                  <a:srgbClr val="5F7580"/>
+                </a:solidFill>
+                <a:latin typeface="Calibri" pitchFamily="34" charset="0"/>
+                <a:ea typeface="Calibri" pitchFamily="34" charset="-122"/>
+                <a:cs typeface="Calibri" pitchFamily="34" charset="-120"/>
+              </a:rPr>
+              <a:t>   subset       AUC 0.426</a:t>
+            </a:r>
+            <a:endParaRPr lang="en-US" sz="1100" dirty="0"/>
+          </a:p>
+          <a:p>
+            <a:pPr indent="0" marL="0">
+              <a:lnSpc>
+                <a:spcPct val="112000"/>
+              </a:lnSpc>
+              <a:buNone/>
+            </a:pPr>
+            <a:endParaRPr lang="en-US" sz="1100" dirty="0"/>
+          </a:p>
+          <a:p>
+            <a:pPr indent="0" marL="0">
+              <a:lnSpc>
+                <a:spcPct val="112000"/>
+              </a:lnSpc>
+              <a:buNone/>
+            </a:pPr>
+            <a:r>
+              <a:rPr lang="en-US" sz="1100" dirty="0">
+                <a:solidFill>
+                  <a:srgbClr val="5F7580"/>
+                </a:solidFill>
+                <a:latin typeface="Calibri" pitchFamily="34" charset="0"/>
+                <a:ea typeface="Calibri" pitchFamily="34" charset="-122"/>
+                <a:cs typeface="Calibri" pitchFamily="34" charset="-120"/>
+              </a:rPr>
+              <a:t>Month is fully neutralised. Permutation test on the subset: p = 0.0099.</a:t>
+            </a:r>
+            <a:endParaRPr lang="en-US" sz="1100" dirty="0"/>
+          </a:p>
+        </p:txBody>
+      </p:sp>
+      <p:sp>
+        <p:nvSpPr>
+          <p:cNvPr id="12" name="Shape 9"/>
+          <p:cNvSpPr/>
+          <p:nvPr/>
+        </p:nvSpPr>
+        <p:spPr>
+          <a:xfrm>
+            <a:off x="548640" y="4069080"/>
+            <a:ext cx="5394960" cy="1783080"/>
+          </a:xfrm>
+          <a:prstGeom prst="rect">
+            <a:avLst/>
+          </a:prstGeom>
+          <a:solidFill>
+            <a:srgbClr val="FFFFFF"/>
+          </a:solidFill>
+          <a:ln/>
+          <a:effectLst>
+            <a:outerShdw sx="100000" sy="100000" kx="0" ky="0" algn="bl" rotWithShape="0" blurRad="101600" dist="25400" dir="8100000">
+              <a:srgbClr val="000000">
+                <a:alpha val="10000"/>
+              </a:srgbClr>
+            </a:outerShdw>
+          </a:effectLst>
+        </p:spPr>
+      </p:sp>
+      <p:sp>
+        <p:nvSpPr>
+          <p:cNvPr id="13" name="Shape 10"/>
+          <p:cNvSpPr/>
+          <p:nvPr/>
+        </p:nvSpPr>
+        <p:spPr>
+          <a:xfrm>
+            <a:off x="548640" y="4069080"/>
+            <a:ext cx="68580" cy="1783080"/>
+          </a:xfrm>
+          <a:prstGeom prst="rect">
+            <a:avLst/>
+          </a:prstGeom>
+          <a:solidFill>
+            <a:srgbClr val="18707F"/>
+          </a:solidFill>
+          <a:ln/>
+        </p:spPr>
+      </p:sp>
+      <p:sp>
+        <p:nvSpPr>
+          <p:cNvPr id="14" name="Text 11"/>
+          <p:cNvSpPr/>
+          <p:nvPr/>
+        </p:nvSpPr>
+        <p:spPr>
+          <a:xfrm>
+            <a:off x="804672" y="4215384"/>
+            <a:ext cx="4937760" cy="329184"/>
+          </a:xfrm>
+          <a:prstGeom prst="rect">
+            <a:avLst/>
+          </a:prstGeom>
+          <a:noFill/>
+          <a:ln/>
+        </p:spPr>
+        <p:txBody>
+          <a:bodyPr wrap="square" lIns="0" tIns="0" rIns="0" bIns="0" rtlCol="0" anchor="t"/>
+          <a:lstStyle/>
+          <a:p>
+            <a:pPr indent="0" marL="0">
+              <a:buNone/>
+            </a:pPr>
+            <a:r>
+              <a:rPr lang="en-US" sz="1400" b="1" dirty="0">
+                <a:solidFill>
+                  <a:srgbClr val="16252C"/>
+                </a:solidFill>
+                <a:latin typeface="Georgia" pitchFamily="34" charset="0"/>
+                <a:ea typeface="Georgia" pitchFamily="34" charset="-122"/>
+                <a:cs typeface="Georgia" pitchFamily="34" charset="-120"/>
+              </a:rPr>
+              <a:t>The biomarkers get stronger, not different</a:t>
+            </a:r>
+            <a:endParaRPr lang="en-US" sz="1400" dirty="0"/>
+          </a:p>
+        </p:txBody>
+      </p:sp>
+      <p:sp>
+        <p:nvSpPr>
+          <p:cNvPr id="15" name="Text 12"/>
+          <p:cNvSpPr/>
+          <p:nvPr/>
+        </p:nvSpPr>
+        <p:spPr>
+          <a:xfrm>
+            <a:off x="804672" y="4599432"/>
+            <a:ext cx="4937760" cy="1124712"/>
+          </a:xfrm>
+          <a:prstGeom prst="rect">
+            <a:avLst/>
+          </a:prstGeom>
+          <a:noFill/>
+          <a:ln/>
+        </p:spPr>
+        <p:txBody>
+          <a:bodyPr wrap="square" lIns="0" tIns="0" rIns="0" bIns="0" rtlCol="0" anchor="t"/>
+          <a:lstStyle/>
+          <a:p>
+            <a:pPr indent="0" marL="0">
+              <a:lnSpc>
+                <a:spcPct val="112000"/>
+              </a:lnSpc>
+              <a:buNone/>
+            </a:pPr>
+            <a:r>
+              <a:rPr lang="en-US" sz="1100" dirty="0">
+                <a:solidFill>
+                  <a:srgbClr val="5F7580"/>
+                </a:solidFill>
+                <a:latin typeface="Calibri" pitchFamily="34" charset="0"/>
+                <a:ea typeface="Calibri" pitchFamily="34" charset="-122"/>
+                <a:cs typeface="Calibri" pitchFamily="34" charset="-120"/>
+              </a:rPr>
+              <a:t>Significant taxa 19/70 → 34/65; Spearman ρ = 0.879 on t-statistics; 18 significant in both.</a:t>
+            </a:r>
+            <a:endParaRPr lang="en-US" sz="1100" dirty="0"/>
+          </a:p>
+          <a:p>
+            <a:pPr indent="0" marL="0">
+              <a:lnSpc>
+                <a:spcPct val="112000"/>
+              </a:lnSpc>
+              <a:buNone/>
+            </a:pPr>
+            <a:endParaRPr lang="en-US" sz="1100" dirty="0"/>
+          </a:p>
+          <a:p>
+            <a:pPr indent="0" marL="0">
+              <a:lnSpc>
+                <a:spcPct val="112000"/>
+              </a:lnSpc>
+              <a:buNone/>
+            </a:pPr>
+            <a:r>
+              <a:rPr lang="en-US" sz="1100" dirty="0">
+                <a:solidFill>
+                  <a:srgbClr val="5F7580"/>
+                </a:solidFill>
+                <a:latin typeface="Calibri" pitchFamily="34" charset="0"/>
+                <a:ea typeface="Calibri" pitchFamily="34" charset="-122"/>
+                <a:cs typeface="Calibri" pitchFamily="34" charset="-120"/>
+              </a:rPr>
+              <a:t>Veillonella (FDR 3.7e-29) and Prevotella — the two that collinearity had pushed out of the nine-taxon panel — are now the strongest hits.</a:t>
+            </a:r>
+            <a:endParaRPr lang="en-US" sz="1100" dirty="0"/>
+          </a:p>
+        </p:txBody>
+      </p:sp>
+      <p:sp>
+        <p:nvSpPr>
+          <p:cNvPr id="16" name="Shape 13"/>
+          <p:cNvSpPr/>
+          <p:nvPr/>
+        </p:nvSpPr>
+        <p:spPr>
+          <a:xfrm>
+            <a:off x="6217920" y="4069080"/>
+            <a:ext cx="5394960" cy="1783080"/>
+          </a:xfrm>
+          <a:prstGeom prst="rect">
+            <a:avLst/>
+          </a:prstGeom>
+          <a:solidFill>
+            <a:srgbClr val="FBEDE7"/>
+          </a:solidFill>
+          <a:ln/>
+          <a:effectLst>
+            <a:outerShdw sx="100000" sy="100000" kx="0" ky="0" algn="bl" rotWithShape="0" blurRad="101600" dist="25400" dir="8100000">
+              <a:srgbClr val="000000">
+                <a:alpha val="10000"/>
+              </a:srgbClr>
+            </a:outerShdw>
+          </a:effectLst>
+        </p:spPr>
+      </p:sp>
+      <p:sp>
+        <p:nvSpPr>
+          <p:cNvPr id="17" name="Shape 14"/>
+          <p:cNvSpPr/>
+          <p:nvPr/>
+        </p:nvSpPr>
+        <p:spPr>
+          <a:xfrm>
+            <a:off x="6217920" y="4069080"/>
+            <a:ext cx="68580" cy="1783080"/>
+          </a:xfrm>
+          <a:prstGeom prst="rect">
+            <a:avLst/>
+          </a:prstGeom>
+          <a:solidFill>
+            <a:srgbClr val="D2603A"/>
+          </a:solidFill>
+          <a:ln/>
+        </p:spPr>
+      </p:sp>
+      <p:sp>
+        <p:nvSpPr>
+          <p:cNvPr id="18" name="Text 15"/>
+          <p:cNvSpPr/>
+          <p:nvPr/>
+        </p:nvSpPr>
+        <p:spPr>
+          <a:xfrm>
+            <a:off x="6473952" y="4215384"/>
+            <a:ext cx="4937760" cy="329184"/>
+          </a:xfrm>
+          <a:prstGeom prst="rect">
+            <a:avLst/>
+          </a:prstGeom>
+          <a:noFill/>
+          <a:ln/>
+        </p:spPr>
+        <p:txBody>
+          <a:bodyPr wrap="square" lIns="0" tIns="0" rIns="0" bIns="0" rtlCol="0" anchor="t"/>
+          <a:lstStyle/>
+          <a:p>
+            <a:pPr indent="0" marL="0">
+              <a:buNone/>
+            </a:pPr>
+            <a:r>
+              <a:rPr lang="en-US" sz="1400" b="1" dirty="0">
+                <a:solidFill>
+                  <a:srgbClr val="16252C"/>
+                </a:solidFill>
+                <a:latin typeface="Georgia" pitchFamily="34" charset="0"/>
+                <a:ea typeface="Georgia" pitchFamily="34" charset="-122"/>
+                <a:cs typeface="Georgia" pitchFamily="34" charset="-120"/>
+              </a:rPr>
+              <a:t>But this is a sensitivity analysis, not the result</a:t>
+            </a:r>
+            <a:endParaRPr lang="en-US" sz="1400" dirty="0"/>
+          </a:p>
+        </p:txBody>
+      </p:sp>
+      <p:sp>
+        <p:nvSpPr>
+          <p:cNvPr id="19" name="Text 16"/>
+          <p:cNvSpPr/>
+          <p:nvPr/>
+        </p:nvSpPr>
+        <p:spPr>
+          <a:xfrm>
+            <a:off x="6473952" y="4599432"/>
+            <a:ext cx="4937760" cy="1124712"/>
+          </a:xfrm>
+          <a:prstGeom prst="rect">
+            <a:avLst/>
+          </a:prstGeom>
+          <a:noFill/>
+          <a:ln/>
+        </p:spPr>
+        <p:txBody>
+          <a:bodyPr wrap="square" lIns="0" tIns="0" rIns="0" bIns="0" rtlCol="0" anchor="t"/>
+          <a:lstStyle/>
+          <a:p>
+            <a:pPr indent="0" marL="0">
+              <a:lnSpc>
+                <a:spcPct val="112000"/>
+              </a:lnSpc>
+              <a:buNone/>
+            </a:pPr>
+            <a:r>
+              <a:rPr lang="en-US" sz="1100" dirty="0">
+                <a:solidFill>
+                  <a:srgbClr val="7A2E14"/>
+                </a:solidFill>
+                <a:latin typeface="Calibri" pitchFamily="34" charset="0"/>
+                <a:ea typeface="Calibri" pitchFamily="34" charset="-122"/>
+                <a:cs typeface="Calibri" pitchFamily="34" charset="-120"/>
+              </a:rPr>
+              <a:t>The 95 excluded samples are also the hardest to classify (Jan+Oct stratum: AUC 0.668), so the two AUCs are not comparable.</a:t>
+            </a:r>
+            <a:endParaRPr lang="en-US" sz="1100" dirty="0"/>
+          </a:p>
+          <a:p>
+            <a:pPr indent="0" marL="0">
+              <a:lnSpc>
+                <a:spcPct val="112000"/>
+              </a:lnSpc>
+              <a:buNone/>
+            </a:pPr>
+            <a:endParaRPr lang="en-US" sz="1100" dirty="0"/>
+          </a:p>
+          <a:p>
+            <a:pPr indent="0" marL="0">
+              <a:lnSpc>
+                <a:spcPct val="112000"/>
+              </a:lnSpc>
+              <a:buNone/>
+            </a:pPr>
+            <a:r>
+              <a:rPr lang="en-US" sz="1100" dirty="0">
+                <a:solidFill>
+                  <a:srgbClr val="7A2E14"/>
+                </a:solidFill>
+                <a:latin typeface="Calibri" pitchFamily="34" charset="0"/>
+                <a:ea typeface="Calibri" pitchFamily="34" charset="-122"/>
+                <a:cs typeface="Calibri" pitchFamily="34" charset="-120"/>
+              </a:rPr>
+              <a:t>And spatial confounding is untouched: site → label AUC 0.740, microbiome → site AUC 0.753.</a:t>
+            </a:r>
+            <a:endParaRPr lang="en-US" sz="1100" dirty="0"/>
+          </a:p>
+        </p:txBody>
+      </p:sp>
+      <p:sp>
+        <p:nvSpPr>
+          <p:cNvPr id="20" name="Text 17"/>
+          <p:cNvSpPr/>
+          <p:nvPr/>
+        </p:nvSpPr>
+        <p:spPr>
+          <a:xfrm>
+            <a:off x="548640" y="5943600"/>
+            <a:ext cx="10607040" cy="274320"/>
+          </a:xfrm>
+          <a:prstGeom prst="rect">
+            <a:avLst/>
+          </a:prstGeom>
+          <a:noFill/>
+          <a:ln/>
+        </p:spPr>
+        <p:txBody>
+          <a:bodyPr wrap="square" lIns="0" tIns="0" rIns="0" bIns="0" rtlCol="0" anchor="ctr"/>
+          <a:lstStyle/>
+          <a:p>
+            <a:pPr indent="0" marL="0">
+              <a:buNone/>
+            </a:pPr>
+            <a:r>
+              <a:rPr lang="en-US" sz="1050" i="1" dirty="0">
+                <a:solidFill>
+                  <a:srgbClr val="5F7580"/>
+                </a:solidFill>
+                <a:latin typeface="Calibri" pitchFamily="34" charset="0"/>
+                <a:ea typeface="Calibri" pitchFamily="34" charset="-122"/>
+                <a:cs typeface="Calibri" pitchFamily="34" charset="-120"/>
+              </a:rPr>
+              <a:t>Read as a bracket on the microbiome's independent information: conservatively +0.043, +0.177 once temporal confounding is removed.</a:t>
+            </a:r>
+            <a:endParaRPr lang="en-US" sz="1050" dirty="0"/>
+          </a:p>
+        </p:txBody>
+      </p:sp>
+    </p:spTree>
+  </p:cSld>
+  <p:clrMapOvr>
+    <a:masterClrMapping/>
+  </p:clrMapOvr>
+</p:sld>
+</file>
+
+<file path=ppt/slides/slide23.xml><?xml version="1.0" encoding="utf-8"?>
+<p:sld xmlns:a="http://schemas.openxmlformats.org/drawingml/2006/main" xmlns:r="http://schemas.openxmlformats.org/officeDocument/2006/relationships" xmlns:p="http://schemas.openxmlformats.org/presentationml/2006/main">
+  <p:cSld name="Slide 23">
+    <p:bg>
+      <p:bgPr>
+        <a:solidFill>
           <a:srgbClr val="0B3C49"/>
         </a:solidFill>
       </p:bgPr>
@@ -27362,9 +29584,9 @@
 </p:sld>
 </file>
 
-<file path=ppt/slides/slide23.xml><?xml version="1.0" encoding="utf-8"?>
+<file path=ppt/slides/slide24.xml><?xml version="1.0" encoding="utf-8"?>
 <p:sld xmlns:a="http://schemas.openxmlformats.org/drawingml/2006/main" xmlns:r="http://schemas.openxmlformats.org/officeDocument/2006/relationships" xmlns:p="http://schemas.openxmlformats.org/presentationml/2006/main">
-  <p:cSld name="Slide 23">
+  <p:cSld name="Slide 24">
     <p:bg>
       <p:bgPr>
         <a:solidFill>
@@ -27517,7 +29739,7 @@
                 <a:ea typeface="Calibri" pitchFamily="34" charset="-122"/>
                 <a:cs typeface="Calibri" pitchFamily="34" charset="-120"/>
               </a:rPr>
-              <a:t>23</a:t>
+              <a:t>24</a:t>
             </a:r>
             <a:endParaRPr lang="en-US" sz="1000" dirty="0"/>
           </a:p>
@@ -27564,7 +29786,7 @@
       </p:sp>
       <p:graphicFrame>
         <p:nvGraphicFramePr>
-          <p:cNvPr id="24" name="Table 0"/>
+          <p:cNvPr id="25" name="Table 0"/>
           <p:cNvGraphicFramePr>
             <a:graphicFrameLocks noGrp="1"/>
           </p:cNvGraphicFramePr>
@@ -31296,9 +33518,9 @@
 </p:sld>
 </file>
 
-<file path=ppt/slides/slide24.xml><?xml version="1.0" encoding="utf-8"?>
+<file path=ppt/slides/slide25.xml><?xml version="1.0" encoding="utf-8"?>
 <p:sld xmlns:a="http://schemas.openxmlformats.org/drawingml/2006/main" xmlns:r="http://schemas.openxmlformats.org/officeDocument/2006/relationships" xmlns:p="http://schemas.openxmlformats.org/presentationml/2006/main">
-  <p:cSld name="Slide 24">
+  <p:cSld name="Slide 25">
     <p:bg>
       <p:bgPr>
         <a:solidFill>
@@ -31451,7 +33673,7 @@
                 <a:ea typeface="Calibri" pitchFamily="34" charset="-122"/>
                 <a:cs typeface="Calibri" pitchFamily="34" charset="-120"/>
               </a:rPr>
-              <a:t>24</a:t>
+              <a:t>25</a:t>
             </a:r>
             <a:endParaRPr lang="en-US" sz="1000" dirty="0"/>
           </a:p>
@@ -32004,9 +34226,9 @@
 </p:sld>
 </file>
 
-<file path=ppt/slides/slide25.xml><?xml version="1.0" encoding="utf-8"?>
+<file path=ppt/slides/slide26.xml><?xml version="1.0" encoding="utf-8"?>
 <p:sld xmlns:a="http://schemas.openxmlformats.org/drawingml/2006/main" xmlns:r="http://schemas.openxmlformats.org/officeDocument/2006/relationships" xmlns:p="http://schemas.openxmlformats.org/presentationml/2006/main">
-  <p:cSld name="Slide 25">
+  <p:cSld name="Slide 26">
     <p:bg>
       <p:bgPr>
         <a:solidFill>
@@ -32159,7 +34381,7 @@
                 <a:ea typeface="Calibri" pitchFamily="34" charset="-122"/>
                 <a:cs typeface="Calibri" pitchFamily="34" charset="-120"/>
               </a:rPr>
-              <a:t>25</a:t>
+              <a:t>26</a:t>
             </a:r>
             <a:endParaRPr lang="en-US" sz="1000" dirty="0"/>
           </a:p>
@@ -32791,9 +35013,9 @@
 </p:sld>
 </file>
 
-<file path=ppt/slides/slide26.xml><?xml version="1.0" encoding="utf-8"?>
+<file path=ppt/slides/slide27.xml><?xml version="1.0" encoding="utf-8"?>
 <p:sld xmlns:a="http://schemas.openxmlformats.org/drawingml/2006/main" xmlns:r="http://schemas.openxmlformats.org/officeDocument/2006/relationships" xmlns:p="http://schemas.openxmlformats.org/presentationml/2006/main">
-  <p:cSld name="Slide 26">
+  <p:cSld name="Slide 27">
     <p:bg>
       <p:bgPr>
         <a:solidFill>
@@ -32907,7 +35129,7 @@
                 <a:ea typeface="Georgia" pitchFamily="34" charset="-122"/>
                 <a:cs typeface="Georgia" pitchFamily="34" charset="-120"/>
               </a:rPr>
-              <a:t>Seven Known Limitations</a:t>
+              <a:t>Eight Known Limitations</a:t>
             </a:r>
             <a:endParaRPr lang="en-US" sz="3000" dirty="0"/>
           </a:p>
@@ -32946,7 +35168,7 @@
                 <a:ea typeface="Calibri" pitchFamily="34" charset="-122"/>
                 <a:cs typeface="Calibri" pitchFamily="34" charset="-120"/>
               </a:rPr>
-              <a:t>26</a:t>
+              <a:t>27</a:t>
             </a:r>
             <a:endParaRPr lang="en-US" sz="1000" dirty="0"/>
           </a:p>
@@ -33850,14 +36072,142 @@
       </p:sp>
       <p:sp>
         <p:nvSpPr>
-          <p:cNvPr id="34" name="Text 32"/>
-          <p:cNvSpPr/>
-          <p:nvPr/>
-        </p:nvSpPr>
-        <p:spPr>
-          <a:xfrm>
-            <a:off x="6263640" y="5029200"/>
-            <a:ext cx="5303520" cy="914400"/>
+          <p:cNvPr id="34" name="Shape 32"/>
+          <p:cNvSpPr/>
+          <p:nvPr/>
+        </p:nvSpPr>
+        <p:spPr>
+          <a:xfrm>
+            <a:off x="6263640" y="5020056"/>
+            <a:ext cx="5394960" cy="1078992"/>
+          </a:xfrm>
+          <a:prstGeom prst="rect">
+            <a:avLst/>
+          </a:prstGeom>
+          <a:solidFill>
+            <a:srgbClr val="FBEDE7"/>
+          </a:solidFill>
+          <a:ln/>
+          <a:effectLst>
+            <a:outerShdw sx="100000" sy="100000" kx="0" ky="0" algn="bl" rotWithShape="0" blurRad="101600" dist="25400" dir="8100000">
+              <a:srgbClr val="000000">
+                <a:alpha val="10000"/>
+              </a:srgbClr>
+            </a:outerShdw>
+          </a:effectLst>
+        </p:spPr>
+      </p:sp>
+      <p:sp>
+        <p:nvSpPr>
+          <p:cNvPr id="35" name="Shape 33"/>
+          <p:cNvSpPr/>
+          <p:nvPr/>
+        </p:nvSpPr>
+        <p:spPr>
+          <a:xfrm>
+            <a:off x="6263640" y="5020056"/>
+            <a:ext cx="68580" cy="1078992"/>
+          </a:xfrm>
+          <a:prstGeom prst="rect">
+            <a:avLst/>
+          </a:prstGeom>
+          <a:solidFill>
+            <a:srgbClr val="D2603A"/>
+          </a:solidFill>
+          <a:ln/>
+        </p:spPr>
+      </p:sp>
+      <p:sp>
+        <p:nvSpPr>
+          <p:cNvPr id="36" name="Text 34"/>
+          <p:cNvSpPr/>
+          <p:nvPr/>
+        </p:nvSpPr>
+        <p:spPr>
+          <a:xfrm>
+            <a:off x="6519672" y="5166360"/>
+            <a:ext cx="4937760" cy="329184"/>
+          </a:xfrm>
+          <a:prstGeom prst="rect">
+            <a:avLst/>
+          </a:prstGeom>
+          <a:noFill/>
+          <a:ln/>
+        </p:spPr>
+        <p:txBody>
+          <a:bodyPr wrap="square" lIns="0" tIns="0" rIns="0" bIns="0" rtlCol="0" anchor="t"/>
+          <a:lstStyle/>
+          <a:p>
+            <a:pPr indent="0" marL="0">
+              <a:buNone/>
+            </a:pPr>
+            <a:r>
+              <a:rPr lang="en-US" sz="1250" b="1" dirty="0">
+                <a:solidFill>
+                  <a:srgbClr val="16252C"/>
+                </a:solidFill>
+                <a:latin typeface="Georgia" pitchFamily="34" charset="0"/>
+                <a:ea typeface="Georgia" pitchFamily="34" charset="-122"/>
+                <a:cs typeface="Georgia" pitchFamily="34" charset="-120"/>
+              </a:rPr>
+              <a:t>8.  Spatial confounding is unresolved</a:t>
+            </a:r>
+            <a:endParaRPr lang="en-US" sz="1250" dirty="0"/>
+          </a:p>
+        </p:txBody>
+      </p:sp>
+      <p:sp>
+        <p:nvSpPr>
+          <p:cNvPr id="37" name="Text 35"/>
+          <p:cNvSpPr/>
+          <p:nvPr/>
+        </p:nvSpPr>
+        <p:spPr>
+          <a:xfrm>
+            <a:off x="6519672" y="5550408"/>
+            <a:ext cx="4937760" cy="420624"/>
+          </a:xfrm>
+          <a:prstGeom prst="rect">
+            <a:avLst/>
+          </a:prstGeom>
+          <a:noFill/>
+          <a:ln/>
+        </p:spPr>
+        <p:txBody>
+          <a:bodyPr wrap="square" lIns="0" tIns="0" rIns="0" bIns="0" rtlCol="0" anchor="t"/>
+          <a:lstStyle/>
+          <a:p>
+            <a:pPr indent="0" marL="0">
+              <a:lnSpc>
+                <a:spcPct val="112000"/>
+              </a:lnSpc>
+              <a:buNone/>
+            </a:pPr>
+            <a:r>
+              <a:rPr lang="en-US" sz="1050" dirty="0">
+                <a:solidFill>
+                  <a:srgbClr val="7A2E14"/>
+                </a:solidFill>
+                <a:latin typeface="Calibri" pitchFamily="34" charset="0"/>
+                <a:ea typeface="Calibri" pitchFamily="34" charset="-122"/>
+                <a:cs typeface="Calibri" pitchFamily="34" charset="-120"/>
+              </a:rPr>
+              <a:t>Even after dropping the confounded months: site → label AUC 0.740, microbiome → site 0.753. Site-stratified reanalysis is underpowered here.</a:t>
+            </a:r>
+            <a:endParaRPr lang="en-US" sz="1050" dirty="0"/>
+          </a:p>
+        </p:txBody>
+      </p:sp>
+      <p:sp>
+        <p:nvSpPr>
+          <p:cNvPr id="38" name="Text 36"/>
+          <p:cNvSpPr/>
+          <p:nvPr/>
+        </p:nvSpPr>
+        <p:spPr>
+          <a:xfrm>
+            <a:off x="548640" y="6309360"/>
+            <a:ext cx="11064240" cy="274320"/>
           </a:xfrm>
           <a:prstGeom prst="rect">
             <a:avLst/>
@@ -33884,899 +36234,6 @@
               <a:t>Stated in the README as written here — not softened for presentation.</a:t>
             </a:r>
             <a:endParaRPr lang="en-US" sz="1100" dirty="0"/>
-          </a:p>
-          <a:p>
-            <a:pPr indent="0" marL="0">
-              <a:buNone/>
-            </a:pPr>
-            <a:r>
-              <a:rPr lang="en-US" sz="1100" i="1" dirty="0">
-                <a:solidFill>
-                  <a:srgbClr val="5F7580"/>
-                </a:solidFill>
-                <a:latin typeface="Calibri" pitchFamily="34" charset="0"/>
-                <a:ea typeface="Calibri" pitchFamily="34" charset="-122"/>
-                <a:cs typeface="Calibri" pitchFamily="34" charset="-120"/>
-              </a:rPr>
-              <a:t>Item 7 is why ExtraTrees, despite the highest AUC, is not the primary model.</a:t>
-            </a:r>
-            <a:endParaRPr lang="en-US" sz="1100" dirty="0"/>
-          </a:p>
-        </p:txBody>
-      </p:sp>
-    </p:spTree>
-  </p:cSld>
-  <p:clrMapOvr>
-    <a:masterClrMapping/>
-  </p:clrMapOvr>
-</p:sld>
-</file>
-
-<file path=ppt/slides/slide27.xml><?xml version="1.0" encoding="utf-8"?>
-<p:sld xmlns:a="http://schemas.openxmlformats.org/drawingml/2006/main" xmlns:r="http://schemas.openxmlformats.org/officeDocument/2006/relationships" xmlns:p="http://schemas.openxmlformats.org/presentationml/2006/main">
-  <p:cSld name="Slide 27">
-    <p:bg>
-      <p:bgPr>
-        <a:solidFill>
-          <a:srgbClr val="FCFAF6"/>
-        </a:solidFill>
-      </p:bgPr>
-    </p:bg>
-    <p:spTree>
-      <p:nvGrpSpPr>
-        <p:cNvPr id="1" name=""/>
-        <p:cNvGrpSpPr/>
-        <p:nvPr/>
-      </p:nvGrpSpPr>
-      <p:grpSpPr>
-        <a:xfrm>
-          <a:off x="0" y="0"/>
-          <a:ext cx="0" cy="0"/>
-          <a:chOff x="0" y="0"/>
-          <a:chExt cx="0" cy="0"/>
-        </a:xfrm>
-      </p:grpSpPr>
-      <p:sp>
-        <p:nvSpPr>
-          <p:cNvPr id="2" name="Shape 0"/>
-          <p:cNvSpPr/>
-          <p:nvPr/>
-        </p:nvSpPr>
-        <p:spPr>
-          <a:xfrm>
-            <a:off x="0" y="0"/>
-            <a:ext cx="12191695" cy="54864"/>
-          </a:xfrm>
-          <a:prstGeom prst="rect">
-            <a:avLst/>
-          </a:prstGeom>
-          <a:solidFill>
-            <a:srgbClr val="18707F"/>
-          </a:solidFill>
-          <a:ln/>
-        </p:spPr>
-      </p:sp>
-      <p:sp>
-        <p:nvSpPr>
-          <p:cNvPr id="3" name="Text 1"/>
-          <p:cNvSpPr/>
-          <p:nvPr/>
-        </p:nvSpPr>
-        <p:spPr>
-          <a:xfrm>
-            <a:off x="548640" y="310896"/>
-            <a:ext cx="7315200" cy="256032"/>
-          </a:xfrm>
-          <a:prstGeom prst="rect">
-            <a:avLst/>
-          </a:prstGeom>
-          <a:noFill/>
-          <a:ln/>
-        </p:spPr>
-        <p:txBody>
-          <a:bodyPr wrap="square" lIns="0" tIns="0" rIns="0" bIns="0" rtlCol="0" anchor="ctr"/>
-          <a:lstStyle/>
-          <a:p>
-            <a:pPr indent="0" marL="0">
-              <a:buNone/>
-            </a:pPr>
-            <a:r>
-              <a:rPr lang="en-US" sz="1100" b="1" spc="200" kern="0" dirty="0">
-                <a:solidFill>
-                  <a:srgbClr val="18707F"/>
-                </a:solidFill>
-                <a:latin typeface="Calibri" pitchFamily="34" charset="0"/>
-                <a:ea typeface="Calibri" pitchFamily="34" charset="-122"/>
-                <a:cs typeface="Calibri" pitchFamily="34" charset="-120"/>
-              </a:rPr>
-              <a:t>SUMMARY</a:t>
-            </a:r>
-            <a:endParaRPr lang="en-US" sz="1100" dirty="0"/>
-          </a:p>
-        </p:txBody>
-      </p:sp>
-      <p:sp>
-        <p:nvSpPr>
-          <p:cNvPr id="4" name="Text 2"/>
-          <p:cNvSpPr/>
-          <p:nvPr/>
-        </p:nvSpPr>
-        <p:spPr>
-          <a:xfrm>
-            <a:off x="548640" y="566928"/>
-            <a:ext cx="11064240" cy="685800"/>
-          </a:xfrm>
-          <a:prstGeom prst="rect">
-            <a:avLst/>
-          </a:prstGeom>
-          <a:noFill/>
-          <a:ln/>
-        </p:spPr>
-        <p:txBody>
-          <a:bodyPr wrap="square" lIns="0" tIns="0" rIns="0" bIns="0" rtlCol="0" anchor="ctr"/>
-          <a:lstStyle/>
-          <a:p>
-            <a:pPr indent="0" marL="0">
-              <a:buNone/>
-            </a:pPr>
-            <a:r>
-              <a:rPr lang="en-US" sz="3000" b="1" dirty="0">
-                <a:solidFill>
-                  <a:srgbClr val="16252C"/>
-                </a:solidFill>
-                <a:latin typeface="Georgia" pitchFamily="34" charset="0"/>
-                <a:ea typeface="Georgia" pitchFamily="34" charset="-122"/>
-                <a:cs typeface="Georgia" pitchFamily="34" charset="-120"/>
-              </a:rPr>
-              <a:t>Conclusions</a:t>
-            </a:r>
-            <a:endParaRPr lang="en-US" sz="3000" dirty="0"/>
-          </a:p>
-        </p:txBody>
-      </p:sp>
-      <p:sp>
-        <p:nvSpPr>
-          <p:cNvPr id="5" name="Text 3"/>
-          <p:cNvSpPr/>
-          <p:nvPr/>
-        </p:nvSpPr>
-        <p:spPr>
-          <a:xfrm>
-            <a:off x="11430000" y="6355080"/>
-            <a:ext cx="411480" cy="274320"/>
-          </a:xfrm>
-          <a:prstGeom prst="rect">
-            <a:avLst/>
-          </a:prstGeom>
-          <a:noFill/>
-          <a:ln/>
-        </p:spPr>
-        <p:txBody>
-          <a:bodyPr wrap="square" lIns="0" tIns="0" rIns="0" bIns="0" rtlCol="0" anchor="ctr"/>
-          <a:lstStyle/>
-          <a:p>
-            <a:pPr algn="r" indent="0" marL="0">
-              <a:buNone/>
-            </a:pPr>
-            <a:r>
-              <a:rPr lang="en-US" sz="1000" dirty="0">
-                <a:solidFill>
-                  <a:srgbClr val="5F7580"/>
-                </a:solidFill>
-                <a:latin typeface="Calibri" pitchFamily="34" charset="0"/>
-                <a:ea typeface="Calibri" pitchFamily="34" charset="-122"/>
-                <a:cs typeface="Calibri" pitchFamily="34" charset="-120"/>
-              </a:rPr>
-              <a:t>27</a:t>
-            </a:r>
-            <a:endParaRPr lang="en-US" sz="1000" dirty="0"/>
-          </a:p>
-        </p:txBody>
-      </p:sp>
-      <p:sp>
-        <p:nvSpPr>
-          <p:cNvPr id="6" name="Shape 4"/>
-          <p:cNvSpPr/>
-          <p:nvPr/>
-        </p:nvSpPr>
-        <p:spPr>
-          <a:xfrm>
-            <a:off x="548640" y="1289304"/>
-            <a:ext cx="457200" cy="457200"/>
-          </a:xfrm>
-          <a:prstGeom prst="ellipse">
-            <a:avLst/>
-          </a:prstGeom>
-          <a:solidFill>
-            <a:srgbClr val="18707F"/>
-          </a:solidFill>
-          <a:ln/>
-        </p:spPr>
-      </p:sp>
-      <p:sp>
-        <p:nvSpPr>
-          <p:cNvPr id="7" name="Text 5"/>
-          <p:cNvSpPr/>
-          <p:nvPr/>
-        </p:nvSpPr>
-        <p:spPr>
-          <a:xfrm>
-            <a:off x="548640" y="1362456"/>
-            <a:ext cx="457200" cy="310896"/>
-          </a:xfrm>
-          <a:prstGeom prst="rect">
-            <a:avLst/>
-          </a:prstGeom>
-          <a:noFill/>
-          <a:ln/>
-        </p:spPr>
-        <p:txBody>
-          <a:bodyPr wrap="square" lIns="0" tIns="0" rIns="0" bIns="0" rtlCol="0" anchor="ctr"/>
-          <a:lstStyle/>
-          <a:p>
-            <a:pPr algn="ctr" indent="0" marL="0">
-              <a:buNone/>
-            </a:pPr>
-            <a:r>
-              <a:rPr lang="en-US" sz="1400" b="1" dirty="0">
-                <a:solidFill>
-                  <a:srgbClr val="FFFFFF"/>
-                </a:solidFill>
-                <a:latin typeface="Georgia" pitchFamily="34" charset="0"/>
-                <a:ea typeface="Georgia" pitchFamily="34" charset="-122"/>
-                <a:cs typeface="Georgia" pitchFamily="34" charset="-120"/>
-              </a:rPr>
-              <a:t>1</a:t>
-            </a:r>
-            <a:endParaRPr lang="en-US" sz="1400" dirty="0"/>
-          </a:p>
-        </p:txBody>
-      </p:sp>
-      <p:sp>
-        <p:nvSpPr>
-          <p:cNvPr id="8" name="Text 6"/>
-          <p:cNvSpPr/>
-          <p:nvPr/>
-        </p:nvSpPr>
-        <p:spPr>
-          <a:xfrm>
-            <a:off x="1188720" y="1252728"/>
-            <a:ext cx="10424160" cy="566928"/>
-          </a:xfrm>
-          <a:prstGeom prst="rect">
-            <a:avLst/>
-          </a:prstGeom>
-          <a:noFill/>
-          <a:ln/>
-        </p:spPr>
-        <p:txBody>
-          <a:bodyPr wrap="square" lIns="0" tIns="0" rIns="0" bIns="0" rtlCol="0" anchor="t"/>
-          <a:lstStyle/>
-          <a:p>
-            <a:pPr indent="0" marL="0">
-              <a:lnSpc>
-                <a:spcPct val="108000"/>
-              </a:lnSpc>
-              <a:buNone/>
-            </a:pPr>
-            <a:r>
-              <a:rPr lang="en-US" sz="1250" dirty="0">
-                <a:solidFill>
-                  <a:srgbClr val="16252C"/>
-                </a:solidFill>
-                <a:latin typeface="Calibri" pitchFamily="34" charset="0"/>
-                <a:ea typeface="Calibri" pitchFamily="34" charset="-122"/>
-                <a:cs typeface="Calibri" pitchFamily="34" charset="-120"/>
-              </a:rPr>
-              <a:t>Duck gut microbiota carry a real, reproducible signal for influenza infection status (permutation p = 0.0099).</a:t>
-            </a:r>
-            <a:endParaRPr lang="en-US" sz="1250" dirty="0"/>
-          </a:p>
-        </p:txBody>
-      </p:sp>
-      <p:sp>
-        <p:nvSpPr>
-          <p:cNvPr id="9" name="Shape 7"/>
-          <p:cNvSpPr/>
-          <p:nvPr/>
-        </p:nvSpPr>
-        <p:spPr>
-          <a:xfrm>
-            <a:off x="548640" y="2011680"/>
-            <a:ext cx="457200" cy="457200"/>
-          </a:xfrm>
-          <a:prstGeom prst="ellipse">
-            <a:avLst/>
-          </a:prstGeom>
-          <a:solidFill>
-            <a:srgbClr val="18707F"/>
-          </a:solidFill>
-          <a:ln/>
-        </p:spPr>
-      </p:sp>
-      <p:sp>
-        <p:nvSpPr>
-          <p:cNvPr id="10" name="Text 8"/>
-          <p:cNvSpPr/>
-          <p:nvPr/>
-        </p:nvSpPr>
-        <p:spPr>
-          <a:xfrm>
-            <a:off x="548640" y="2084832"/>
-            <a:ext cx="457200" cy="310896"/>
-          </a:xfrm>
-          <a:prstGeom prst="rect">
-            <a:avLst/>
-          </a:prstGeom>
-          <a:noFill/>
-          <a:ln/>
-        </p:spPr>
-        <p:txBody>
-          <a:bodyPr wrap="square" lIns="0" tIns="0" rIns="0" bIns="0" rtlCol="0" anchor="ctr"/>
-          <a:lstStyle/>
-          <a:p>
-            <a:pPr algn="ctr" indent="0" marL="0">
-              <a:buNone/>
-            </a:pPr>
-            <a:r>
-              <a:rPr lang="en-US" sz="1400" b="1" dirty="0">
-                <a:solidFill>
-                  <a:srgbClr val="FFFFFF"/>
-                </a:solidFill>
-                <a:latin typeface="Georgia" pitchFamily="34" charset="0"/>
-                <a:ea typeface="Georgia" pitchFamily="34" charset="-122"/>
-                <a:cs typeface="Georgia" pitchFamily="34" charset="-120"/>
-              </a:rPr>
-              <a:t>2</a:t>
-            </a:r>
-            <a:endParaRPr lang="en-US" sz="1400" dirty="0"/>
-          </a:p>
-        </p:txBody>
-      </p:sp>
-      <p:sp>
-        <p:nvSpPr>
-          <p:cNvPr id="11" name="Text 9"/>
-          <p:cNvSpPr/>
-          <p:nvPr/>
-        </p:nvSpPr>
-        <p:spPr>
-          <a:xfrm>
-            <a:off x="1188720" y="1975104"/>
-            <a:ext cx="10424160" cy="566928"/>
-          </a:xfrm>
-          <a:prstGeom prst="rect">
-            <a:avLst/>
-          </a:prstGeom>
-          <a:noFill/>
-          <a:ln/>
-        </p:spPr>
-        <p:txBody>
-          <a:bodyPr wrap="square" lIns="0" tIns="0" rIns="0" bIns="0" rtlCol="0" anchor="t"/>
-          <a:lstStyle/>
-          <a:p>
-            <a:pPr indent="0" marL="0">
-              <a:lnSpc>
-                <a:spcPct val="108000"/>
-              </a:lnSpc>
-              <a:buNone/>
-            </a:pPr>
-            <a:r>
-              <a:rPr lang="en-US" sz="1250" dirty="0">
-                <a:solidFill>
-                  <a:srgbClr val="16252C"/>
-                </a:solidFill>
-                <a:latin typeface="Calibri" pitchFamily="34" charset="0"/>
-                <a:ea typeface="Calibri" pitchFamily="34" charset="-122"/>
-                <a:cs typeface="Calibri" pitchFamily="34" charset="-120"/>
-              </a:rPr>
-              <a:t>SVM-RBF is the primary model — AUC 0.839, MCC 0.531 — significantly beating Random Forest (p = 0.021), XGBoost (p = 0.0016) and L1-LR (p &lt; 0.001) among 17 models compared.</a:t>
-            </a:r>
-            <a:endParaRPr lang="en-US" sz="1250" dirty="0"/>
-          </a:p>
-        </p:txBody>
-      </p:sp>
-      <p:sp>
-        <p:nvSpPr>
-          <p:cNvPr id="12" name="Shape 10"/>
-          <p:cNvSpPr/>
-          <p:nvPr/>
-        </p:nvSpPr>
-        <p:spPr>
-          <a:xfrm>
-            <a:off x="548640" y="2734056"/>
-            <a:ext cx="457200" cy="457200"/>
-          </a:xfrm>
-          <a:prstGeom prst="ellipse">
-            <a:avLst/>
-          </a:prstGeom>
-          <a:solidFill>
-            <a:srgbClr val="18707F"/>
-          </a:solidFill>
-          <a:ln/>
-        </p:spPr>
-      </p:sp>
-      <p:sp>
-        <p:nvSpPr>
-          <p:cNvPr id="13" name="Text 11"/>
-          <p:cNvSpPr/>
-          <p:nvPr/>
-        </p:nvSpPr>
-        <p:spPr>
-          <a:xfrm>
-            <a:off x="548640" y="2807208"/>
-            <a:ext cx="457200" cy="310896"/>
-          </a:xfrm>
-          <a:prstGeom prst="rect">
-            <a:avLst/>
-          </a:prstGeom>
-          <a:noFill/>
-          <a:ln/>
-        </p:spPr>
-        <p:txBody>
-          <a:bodyPr wrap="square" lIns="0" tIns="0" rIns="0" bIns="0" rtlCol="0" anchor="ctr"/>
-          <a:lstStyle/>
-          <a:p>
-            <a:pPr algn="ctr" indent="0" marL="0">
-              <a:buNone/>
-            </a:pPr>
-            <a:r>
-              <a:rPr lang="en-US" sz="1400" b="1" dirty="0">
-                <a:solidFill>
-                  <a:srgbClr val="FFFFFF"/>
-                </a:solidFill>
-                <a:latin typeface="Georgia" pitchFamily="34" charset="0"/>
-                <a:ea typeface="Georgia" pitchFamily="34" charset="-122"/>
-                <a:cs typeface="Georgia" pitchFamily="34" charset="-120"/>
-              </a:rPr>
-              <a:t>3</a:t>
-            </a:r>
-            <a:endParaRPr lang="en-US" sz="1400" dirty="0"/>
-          </a:p>
-        </p:txBody>
-      </p:sp>
-      <p:sp>
-        <p:nvSpPr>
-          <p:cNvPr id="14" name="Text 12"/>
-          <p:cNvSpPr/>
-          <p:nvPr/>
-        </p:nvSpPr>
-        <p:spPr>
-          <a:xfrm>
-            <a:off x="1188720" y="2697480"/>
-            <a:ext cx="10424160" cy="566928"/>
-          </a:xfrm>
-          <a:prstGeom prst="rect">
-            <a:avLst/>
-          </a:prstGeom>
-          <a:noFill/>
-          <a:ln/>
-        </p:spPr>
-        <p:txBody>
-          <a:bodyPr wrap="square" lIns="0" tIns="0" rIns="0" bIns="0" rtlCol="0" anchor="t"/>
-          <a:lstStyle/>
-          <a:p>
-            <a:pPr indent="0" marL="0">
-              <a:lnSpc>
-                <a:spcPct val="108000"/>
-              </a:lnSpc>
-              <a:buNone/>
-            </a:pPr>
-            <a:r>
-              <a:rPr lang="en-US" sz="1250" dirty="0">
-                <a:solidFill>
-                  <a:srgbClr val="16252C"/>
-                </a:solidFill>
-                <a:latin typeface="Calibri" pitchFamily="34" charset="0"/>
-                <a:ea typeface="Calibri" pitchFamily="34" charset="-122"/>
-                <a:cs typeface="Calibri" pitchFamily="34" charset="-120"/>
-              </a:rPr>
-              <a:t>The signal is partly nonlinear: the RBF kernel gains 0.073 AUC over a linear one, and several taxa act only in combination.</a:t>
-            </a:r>
-            <a:endParaRPr lang="en-US" sz="1250" dirty="0"/>
-          </a:p>
-        </p:txBody>
-      </p:sp>
-      <p:sp>
-        <p:nvSpPr>
-          <p:cNvPr id="15" name="Shape 13"/>
-          <p:cNvSpPr/>
-          <p:nvPr/>
-        </p:nvSpPr>
-        <p:spPr>
-          <a:xfrm>
-            <a:off x="548640" y="3456432"/>
-            <a:ext cx="457200" cy="457200"/>
-          </a:xfrm>
-          <a:prstGeom prst="ellipse">
-            <a:avLst/>
-          </a:prstGeom>
-          <a:solidFill>
-            <a:srgbClr val="18707F"/>
-          </a:solidFill>
-          <a:ln/>
-        </p:spPr>
-      </p:sp>
-      <p:sp>
-        <p:nvSpPr>
-          <p:cNvPr id="16" name="Text 14"/>
-          <p:cNvSpPr/>
-          <p:nvPr/>
-        </p:nvSpPr>
-        <p:spPr>
-          <a:xfrm>
-            <a:off x="548640" y="3529584"/>
-            <a:ext cx="457200" cy="310896"/>
-          </a:xfrm>
-          <a:prstGeom prst="rect">
-            <a:avLst/>
-          </a:prstGeom>
-          <a:noFill/>
-          <a:ln/>
-        </p:spPr>
-        <p:txBody>
-          <a:bodyPr wrap="square" lIns="0" tIns="0" rIns="0" bIns="0" rtlCol="0" anchor="ctr"/>
-          <a:lstStyle/>
-          <a:p>
-            <a:pPr algn="ctr" indent="0" marL="0">
-              <a:buNone/>
-            </a:pPr>
-            <a:r>
-              <a:rPr lang="en-US" sz="1400" b="1" dirty="0">
-                <a:solidFill>
-                  <a:srgbClr val="FFFFFF"/>
-                </a:solidFill>
-                <a:latin typeface="Georgia" pitchFamily="34" charset="0"/>
-                <a:ea typeface="Georgia" pitchFamily="34" charset="-122"/>
-                <a:cs typeface="Georgia" pitchFamily="34" charset="-120"/>
-              </a:rPr>
-              <a:t>4</a:t>
-            </a:r>
-            <a:endParaRPr lang="en-US" sz="1400" dirty="0"/>
-          </a:p>
-        </p:txBody>
-      </p:sp>
-      <p:sp>
-        <p:nvSpPr>
-          <p:cNvPr id="17" name="Text 15"/>
-          <p:cNvSpPr/>
-          <p:nvPr/>
-        </p:nvSpPr>
-        <p:spPr>
-          <a:xfrm>
-            <a:off x="1188720" y="3419856"/>
-            <a:ext cx="10424160" cy="566928"/>
-          </a:xfrm>
-          <a:prstGeom prst="rect">
-            <a:avLst/>
-          </a:prstGeom>
-          <a:noFill/>
-          <a:ln/>
-        </p:spPr>
-        <p:txBody>
-          <a:bodyPr wrap="square" lIns="0" tIns="0" rIns="0" bIns="0" rtlCol="0" anchor="t"/>
-          <a:lstStyle/>
-          <a:p>
-            <a:pPr indent="0" marL="0">
-              <a:lnSpc>
-                <a:spcPct val="108000"/>
-              </a:lnSpc>
-              <a:buNone/>
-            </a:pPr>
-            <a:r>
-              <a:rPr lang="en-US" sz="1250" dirty="0">
-                <a:solidFill>
-                  <a:srgbClr val="16252C"/>
-                </a:solidFill>
-                <a:latin typeface="Calibri" pitchFamily="34" charset="0"/>
-                <a:ea typeface="Calibri" pitchFamily="34" charset="-122"/>
-                <a:cs typeface="Calibri" pitchFamily="34" charset="-120"/>
-              </a:rPr>
-              <a:t>Nine taxa survive three independent selection methods; Candidatus Arthromitus (SFB) has independent immunological support.</a:t>
-            </a:r>
-            <a:endParaRPr lang="en-US" sz="1250" dirty="0"/>
-          </a:p>
-        </p:txBody>
-      </p:sp>
-      <p:sp>
-        <p:nvSpPr>
-          <p:cNvPr id="18" name="Shape 16"/>
-          <p:cNvSpPr/>
-          <p:nvPr/>
-        </p:nvSpPr>
-        <p:spPr>
-          <a:xfrm>
-            <a:off x="548640" y="4178808"/>
-            <a:ext cx="457200" cy="457200"/>
-          </a:xfrm>
-          <a:prstGeom prst="ellipse">
-            <a:avLst/>
-          </a:prstGeom>
-          <a:solidFill>
-            <a:srgbClr val="18707F"/>
-          </a:solidFill>
-          <a:ln/>
-        </p:spPr>
-      </p:sp>
-      <p:sp>
-        <p:nvSpPr>
-          <p:cNvPr id="19" name="Text 17"/>
-          <p:cNvSpPr/>
-          <p:nvPr/>
-        </p:nvSpPr>
-        <p:spPr>
-          <a:xfrm>
-            <a:off x="548640" y="4251960"/>
-            <a:ext cx="457200" cy="310896"/>
-          </a:xfrm>
-          <a:prstGeom prst="rect">
-            <a:avLst/>
-          </a:prstGeom>
-          <a:noFill/>
-          <a:ln/>
-        </p:spPr>
-        <p:txBody>
-          <a:bodyPr wrap="square" lIns="0" tIns="0" rIns="0" bIns="0" rtlCol="0" anchor="ctr"/>
-          <a:lstStyle/>
-          <a:p>
-            <a:pPr algn="ctr" indent="0" marL="0">
-              <a:buNone/>
-            </a:pPr>
-            <a:r>
-              <a:rPr lang="en-US" sz="1400" b="1" dirty="0">
-                <a:solidFill>
-                  <a:srgbClr val="FFFFFF"/>
-                </a:solidFill>
-                <a:latin typeface="Georgia" pitchFamily="34" charset="0"/>
-                <a:ea typeface="Georgia" pitchFamily="34" charset="-122"/>
-                <a:cs typeface="Georgia" pitchFamily="34" charset="-120"/>
-              </a:rPr>
-              <a:t>5</a:t>
-            </a:r>
-            <a:endParaRPr lang="en-US" sz="1400" dirty="0"/>
-          </a:p>
-        </p:txBody>
-      </p:sp>
-      <p:sp>
-        <p:nvSpPr>
-          <p:cNvPr id="20" name="Text 18"/>
-          <p:cNvSpPr/>
-          <p:nvPr/>
-        </p:nvSpPr>
-        <p:spPr>
-          <a:xfrm>
-            <a:off x="1188720" y="4142232"/>
-            <a:ext cx="10424160" cy="566928"/>
-          </a:xfrm>
-          <a:prstGeom prst="rect">
-            <a:avLst/>
-          </a:prstGeom>
-          <a:noFill/>
-          <a:ln/>
-        </p:spPr>
-        <p:txBody>
-          <a:bodyPr wrap="square" lIns="0" tIns="0" rIns="0" bIns="0" rtlCol="0" anchor="t"/>
-          <a:lstStyle/>
-          <a:p>
-            <a:pPr indent="0" marL="0">
-              <a:lnSpc>
-                <a:spcPct val="108000"/>
-              </a:lnSpc>
-              <a:buNone/>
-            </a:pPr>
-            <a:r>
-              <a:rPr lang="en-US" sz="1250" dirty="0">
-                <a:solidFill>
-                  <a:srgbClr val="16252C"/>
-                </a:solidFill>
-                <a:latin typeface="Calibri" pitchFamily="34" charset="0"/>
-                <a:ea typeface="Calibri" pitchFamily="34" charset="-122"/>
-                <a:cs typeface="Calibri" pitchFamily="34" charset="-120"/>
-              </a:rPr>
-              <a:t>Sampling season is a serious confounder (covariates alone: AUC 0.881), but stratified analysis shows it does not explain the signal away.</a:t>
-            </a:r>
-            <a:endParaRPr lang="en-US" sz="1250" dirty="0"/>
-          </a:p>
-        </p:txBody>
-      </p:sp>
-      <p:sp>
-        <p:nvSpPr>
-          <p:cNvPr id="21" name="Shape 19"/>
-          <p:cNvSpPr/>
-          <p:nvPr/>
-        </p:nvSpPr>
-        <p:spPr>
-          <a:xfrm>
-            <a:off x="548640" y="4901184"/>
-            <a:ext cx="457200" cy="457200"/>
-          </a:xfrm>
-          <a:prstGeom prst="ellipse">
-            <a:avLst/>
-          </a:prstGeom>
-          <a:solidFill>
-            <a:srgbClr val="D2603A"/>
-          </a:solidFill>
-          <a:ln/>
-        </p:spPr>
-      </p:sp>
-      <p:sp>
-        <p:nvSpPr>
-          <p:cNvPr id="22" name="Text 20"/>
-          <p:cNvSpPr/>
-          <p:nvPr/>
-        </p:nvSpPr>
-        <p:spPr>
-          <a:xfrm>
-            <a:off x="548640" y="4974336"/>
-            <a:ext cx="457200" cy="310896"/>
-          </a:xfrm>
-          <a:prstGeom prst="rect">
-            <a:avLst/>
-          </a:prstGeom>
-          <a:noFill/>
-          <a:ln/>
-        </p:spPr>
-        <p:txBody>
-          <a:bodyPr wrap="square" lIns="0" tIns="0" rIns="0" bIns="0" rtlCol="0" anchor="ctr"/>
-          <a:lstStyle/>
-          <a:p>
-            <a:pPr algn="ctr" indent="0" marL="0">
-              <a:buNone/>
-            </a:pPr>
-            <a:r>
-              <a:rPr lang="en-US" sz="1400" b="1" dirty="0">
-                <a:solidFill>
-                  <a:srgbClr val="FFFFFF"/>
-                </a:solidFill>
-                <a:latin typeface="Georgia" pitchFamily="34" charset="0"/>
-                <a:ea typeface="Georgia" pitchFamily="34" charset="-122"/>
-                <a:cs typeface="Georgia" pitchFamily="34" charset="-120"/>
-              </a:rPr>
-              <a:t>6</a:t>
-            </a:r>
-            <a:endParaRPr lang="en-US" sz="1400" dirty="0"/>
-          </a:p>
-        </p:txBody>
-      </p:sp>
-      <p:sp>
-        <p:nvSpPr>
-          <p:cNvPr id="23" name="Text 21"/>
-          <p:cNvSpPr/>
-          <p:nvPr/>
-        </p:nvSpPr>
-        <p:spPr>
-          <a:xfrm>
-            <a:off x="1188720" y="4864608"/>
-            <a:ext cx="10424160" cy="566928"/>
-          </a:xfrm>
-          <a:prstGeom prst="rect">
-            <a:avLst/>
-          </a:prstGeom>
-          <a:noFill/>
-          <a:ln/>
-        </p:spPr>
-        <p:txBody>
-          <a:bodyPr wrap="square" lIns="0" tIns="0" rIns="0" bIns="0" rtlCol="0" anchor="t"/>
-          <a:lstStyle/>
-          <a:p>
-            <a:pPr indent="0" marL="0">
-              <a:lnSpc>
-                <a:spcPct val="108000"/>
-              </a:lnSpc>
-              <a:buNone/>
-            </a:pPr>
-            <a:r>
-              <a:rPr lang="en-US" sz="1250" dirty="0">
-                <a:solidFill>
-                  <a:srgbClr val="16252C"/>
-                </a:solidFill>
-                <a:latin typeface="Calibri" pitchFamily="34" charset="0"/>
-                <a:ea typeface="Calibri" pitchFamily="34" charset="-122"/>
-                <a:cs typeface="Calibri" pitchFamily="34" charset="-120"/>
-              </a:rPr>
-              <a:t>ExtraTrees scores higher (AUC 0.859) but is worse on the weakest stratum (0.715 vs 0.774); its lead comes only from strata that were already easy.</a:t>
-            </a:r>
-            <a:endParaRPr lang="en-US" sz="1250" dirty="0"/>
-          </a:p>
-        </p:txBody>
-      </p:sp>
-      <p:sp>
-        <p:nvSpPr>
-          <p:cNvPr id="24" name="Shape 22"/>
-          <p:cNvSpPr/>
-          <p:nvPr/>
-        </p:nvSpPr>
-        <p:spPr>
-          <a:xfrm>
-            <a:off x="548640" y="5623560"/>
-            <a:ext cx="457200" cy="457200"/>
-          </a:xfrm>
-          <a:prstGeom prst="ellipse">
-            <a:avLst/>
-          </a:prstGeom>
-          <a:solidFill>
-            <a:srgbClr val="D2603A"/>
-          </a:solidFill>
-          <a:ln/>
-        </p:spPr>
-      </p:sp>
-      <p:sp>
-        <p:nvSpPr>
-          <p:cNvPr id="25" name="Text 23"/>
-          <p:cNvSpPr/>
-          <p:nvPr/>
-        </p:nvSpPr>
-        <p:spPr>
-          <a:xfrm>
-            <a:off x="548640" y="5696712"/>
-            <a:ext cx="457200" cy="310896"/>
-          </a:xfrm>
-          <a:prstGeom prst="rect">
-            <a:avLst/>
-          </a:prstGeom>
-          <a:noFill/>
-          <a:ln/>
-        </p:spPr>
-        <p:txBody>
-          <a:bodyPr wrap="square" lIns="0" tIns="0" rIns="0" bIns="0" rtlCol="0" anchor="ctr"/>
-          <a:lstStyle/>
-          <a:p>
-            <a:pPr algn="ctr" indent="0" marL="0">
-              <a:buNone/>
-            </a:pPr>
-            <a:r>
-              <a:rPr lang="en-US" sz="1400" b="1" dirty="0">
-                <a:solidFill>
-                  <a:srgbClr val="FFFFFF"/>
-                </a:solidFill>
-                <a:latin typeface="Georgia" pitchFamily="34" charset="0"/>
-                <a:ea typeface="Georgia" pitchFamily="34" charset="-122"/>
-                <a:cs typeface="Georgia" pitchFamily="34" charset="-120"/>
-              </a:rPr>
-              <a:t>7</a:t>
-            </a:r>
-            <a:endParaRPr lang="en-US" sz="1400" dirty="0"/>
-          </a:p>
-        </p:txBody>
-      </p:sp>
-      <p:sp>
-        <p:nvSpPr>
-          <p:cNvPr id="26" name="Text 24"/>
-          <p:cNvSpPr/>
-          <p:nvPr/>
-        </p:nvSpPr>
-        <p:spPr>
-          <a:xfrm>
-            <a:off x="1188720" y="5586984"/>
-            <a:ext cx="10424160" cy="566928"/>
-          </a:xfrm>
-          <a:prstGeom prst="rect">
-            <a:avLst/>
-          </a:prstGeom>
-          <a:noFill/>
-          <a:ln/>
-        </p:spPr>
-        <p:txBody>
-          <a:bodyPr wrap="square" lIns="0" tIns="0" rIns="0" bIns="0" rtlCol="0" anchor="t"/>
-          <a:lstStyle/>
-          <a:p>
-            <a:pPr indent="0" marL="0">
-              <a:lnSpc>
-                <a:spcPct val="108000"/>
-              </a:lnSpc>
-              <a:buNone/>
-            </a:pPr>
-            <a:r>
-              <a:rPr lang="en-US" sz="1250" dirty="0">
-                <a:solidFill>
-                  <a:srgbClr val="16252C"/>
-                </a:solidFill>
-                <a:latin typeface="Calibri" pitchFamily="34" charset="0"/>
-                <a:ea typeface="Calibri" pitchFamily="34" charset="-122"/>
-                <a:cs typeface="Calibri" pitchFamily="34" charset="-120"/>
-              </a:rPr>
-              <a:t>Conclusions apply to the UC Davis wild-duck cohort only; they do not transfer across hosts or studies.</a:t>
-            </a:r>
-            <a:endParaRPr lang="en-US" sz="1250" dirty="0"/>
           </a:p>
         </p:txBody>
       </p:sp>
@@ -34865,6 +36322,882 @@
                 <a:ea typeface="Calibri" pitchFamily="34" charset="-122"/>
                 <a:cs typeface="Calibri" pitchFamily="34" charset="-120"/>
               </a:rPr>
+              <a:t>SUMMARY</a:t>
+            </a:r>
+            <a:endParaRPr lang="en-US" sz="1100" dirty="0"/>
+          </a:p>
+        </p:txBody>
+      </p:sp>
+      <p:sp>
+        <p:nvSpPr>
+          <p:cNvPr id="4" name="Text 2"/>
+          <p:cNvSpPr/>
+          <p:nvPr/>
+        </p:nvSpPr>
+        <p:spPr>
+          <a:xfrm>
+            <a:off x="548640" y="566928"/>
+            <a:ext cx="11064240" cy="685800"/>
+          </a:xfrm>
+          <a:prstGeom prst="rect">
+            <a:avLst/>
+          </a:prstGeom>
+          <a:noFill/>
+          <a:ln/>
+        </p:spPr>
+        <p:txBody>
+          <a:bodyPr wrap="square" lIns="0" tIns="0" rIns="0" bIns="0" rtlCol="0" anchor="ctr"/>
+          <a:lstStyle/>
+          <a:p>
+            <a:pPr indent="0" marL="0">
+              <a:buNone/>
+            </a:pPr>
+            <a:r>
+              <a:rPr lang="en-US" sz="3000" b="1" dirty="0">
+                <a:solidFill>
+                  <a:srgbClr val="16252C"/>
+                </a:solidFill>
+                <a:latin typeface="Georgia" pitchFamily="34" charset="0"/>
+                <a:ea typeface="Georgia" pitchFamily="34" charset="-122"/>
+                <a:cs typeface="Georgia" pitchFamily="34" charset="-120"/>
+              </a:rPr>
+              <a:t>Conclusions</a:t>
+            </a:r>
+            <a:endParaRPr lang="en-US" sz="3000" dirty="0"/>
+          </a:p>
+        </p:txBody>
+      </p:sp>
+      <p:sp>
+        <p:nvSpPr>
+          <p:cNvPr id="5" name="Text 3"/>
+          <p:cNvSpPr/>
+          <p:nvPr/>
+        </p:nvSpPr>
+        <p:spPr>
+          <a:xfrm>
+            <a:off x="11430000" y="6355080"/>
+            <a:ext cx="411480" cy="274320"/>
+          </a:xfrm>
+          <a:prstGeom prst="rect">
+            <a:avLst/>
+          </a:prstGeom>
+          <a:noFill/>
+          <a:ln/>
+        </p:spPr>
+        <p:txBody>
+          <a:bodyPr wrap="square" lIns="0" tIns="0" rIns="0" bIns="0" rtlCol="0" anchor="ctr"/>
+          <a:lstStyle/>
+          <a:p>
+            <a:pPr algn="r" indent="0" marL="0">
+              <a:buNone/>
+            </a:pPr>
+            <a:r>
+              <a:rPr lang="en-US" sz="1000" dirty="0">
+                <a:solidFill>
+                  <a:srgbClr val="5F7580"/>
+                </a:solidFill>
+                <a:latin typeface="Calibri" pitchFamily="34" charset="0"/>
+                <a:ea typeface="Calibri" pitchFamily="34" charset="-122"/>
+                <a:cs typeface="Calibri" pitchFamily="34" charset="-120"/>
+              </a:rPr>
+              <a:t>28</a:t>
+            </a:r>
+            <a:endParaRPr lang="en-US" sz="1000" dirty="0"/>
+          </a:p>
+        </p:txBody>
+      </p:sp>
+      <p:sp>
+        <p:nvSpPr>
+          <p:cNvPr id="6" name="Shape 4"/>
+          <p:cNvSpPr/>
+          <p:nvPr/>
+        </p:nvSpPr>
+        <p:spPr>
+          <a:xfrm>
+            <a:off x="548640" y="1289304"/>
+            <a:ext cx="457200" cy="457200"/>
+          </a:xfrm>
+          <a:prstGeom prst="ellipse">
+            <a:avLst/>
+          </a:prstGeom>
+          <a:solidFill>
+            <a:srgbClr val="18707F"/>
+          </a:solidFill>
+          <a:ln/>
+        </p:spPr>
+      </p:sp>
+      <p:sp>
+        <p:nvSpPr>
+          <p:cNvPr id="7" name="Text 5"/>
+          <p:cNvSpPr/>
+          <p:nvPr/>
+        </p:nvSpPr>
+        <p:spPr>
+          <a:xfrm>
+            <a:off x="548640" y="1362456"/>
+            <a:ext cx="457200" cy="310896"/>
+          </a:xfrm>
+          <a:prstGeom prst="rect">
+            <a:avLst/>
+          </a:prstGeom>
+          <a:noFill/>
+          <a:ln/>
+        </p:spPr>
+        <p:txBody>
+          <a:bodyPr wrap="square" lIns="0" tIns="0" rIns="0" bIns="0" rtlCol="0" anchor="ctr"/>
+          <a:lstStyle/>
+          <a:p>
+            <a:pPr algn="ctr" indent="0" marL="0">
+              <a:buNone/>
+            </a:pPr>
+            <a:r>
+              <a:rPr lang="en-US" sz="1400" b="1" dirty="0">
+                <a:solidFill>
+                  <a:srgbClr val="FFFFFF"/>
+                </a:solidFill>
+                <a:latin typeface="Georgia" pitchFamily="34" charset="0"/>
+                <a:ea typeface="Georgia" pitchFamily="34" charset="-122"/>
+                <a:cs typeface="Georgia" pitchFamily="34" charset="-120"/>
+              </a:rPr>
+              <a:t>1</a:t>
+            </a:r>
+            <a:endParaRPr lang="en-US" sz="1400" dirty="0"/>
+          </a:p>
+        </p:txBody>
+      </p:sp>
+      <p:sp>
+        <p:nvSpPr>
+          <p:cNvPr id="8" name="Text 6"/>
+          <p:cNvSpPr/>
+          <p:nvPr/>
+        </p:nvSpPr>
+        <p:spPr>
+          <a:xfrm>
+            <a:off x="1188720" y="1252728"/>
+            <a:ext cx="10424160" cy="566928"/>
+          </a:xfrm>
+          <a:prstGeom prst="rect">
+            <a:avLst/>
+          </a:prstGeom>
+          <a:noFill/>
+          <a:ln/>
+        </p:spPr>
+        <p:txBody>
+          <a:bodyPr wrap="square" lIns="0" tIns="0" rIns="0" bIns="0" rtlCol="0" anchor="t"/>
+          <a:lstStyle/>
+          <a:p>
+            <a:pPr indent="0" marL="0">
+              <a:lnSpc>
+                <a:spcPct val="108000"/>
+              </a:lnSpc>
+              <a:buNone/>
+            </a:pPr>
+            <a:r>
+              <a:rPr lang="en-US" sz="1250" dirty="0">
+                <a:solidFill>
+                  <a:srgbClr val="16252C"/>
+                </a:solidFill>
+                <a:latin typeface="Calibri" pitchFamily="34" charset="0"/>
+                <a:ea typeface="Calibri" pitchFamily="34" charset="-122"/>
+                <a:cs typeface="Calibri" pitchFamily="34" charset="-120"/>
+              </a:rPr>
+              <a:t>Duck gut microbiota carry a real, reproducible signal for influenza infection status (permutation p = 0.0099).</a:t>
+            </a:r>
+            <a:endParaRPr lang="en-US" sz="1250" dirty="0"/>
+          </a:p>
+        </p:txBody>
+      </p:sp>
+      <p:sp>
+        <p:nvSpPr>
+          <p:cNvPr id="9" name="Shape 7"/>
+          <p:cNvSpPr/>
+          <p:nvPr/>
+        </p:nvSpPr>
+        <p:spPr>
+          <a:xfrm>
+            <a:off x="548640" y="2011680"/>
+            <a:ext cx="457200" cy="457200"/>
+          </a:xfrm>
+          <a:prstGeom prst="ellipse">
+            <a:avLst/>
+          </a:prstGeom>
+          <a:solidFill>
+            <a:srgbClr val="18707F"/>
+          </a:solidFill>
+          <a:ln/>
+        </p:spPr>
+      </p:sp>
+      <p:sp>
+        <p:nvSpPr>
+          <p:cNvPr id="10" name="Text 8"/>
+          <p:cNvSpPr/>
+          <p:nvPr/>
+        </p:nvSpPr>
+        <p:spPr>
+          <a:xfrm>
+            <a:off x="548640" y="2084832"/>
+            <a:ext cx="457200" cy="310896"/>
+          </a:xfrm>
+          <a:prstGeom prst="rect">
+            <a:avLst/>
+          </a:prstGeom>
+          <a:noFill/>
+          <a:ln/>
+        </p:spPr>
+        <p:txBody>
+          <a:bodyPr wrap="square" lIns="0" tIns="0" rIns="0" bIns="0" rtlCol="0" anchor="ctr"/>
+          <a:lstStyle/>
+          <a:p>
+            <a:pPr algn="ctr" indent="0" marL="0">
+              <a:buNone/>
+            </a:pPr>
+            <a:r>
+              <a:rPr lang="en-US" sz="1400" b="1" dirty="0">
+                <a:solidFill>
+                  <a:srgbClr val="FFFFFF"/>
+                </a:solidFill>
+                <a:latin typeface="Georgia" pitchFamily="34" charset="0"/>
+                <a:ea typeface="Georgia" pitchFamily="34" charset="-122"/>
+                <a:cs typeface="Georgia" pitchFamily="34" charset="-120"/>
+              </a:rPr>
+              <a:t>2</a:t>
+            </a:r>
+            <a:endParaRPr lang="en-US" sz="1400" dirty="0"/>
+          </a:p>
+        </p:txBody>
+      </p:sp>
+      <p:sp>
+        <p:nvSpPr>
+          <p:cNvPr id="11" name="Text 9"/>
+          <p:cNvSpPr/>
+          <p:nvPr/>
+        </p:nvSpPr>
+        <p:spPr>
+          <a:xfrm>
+            <a:off x="1188720" y="1975104"/>
+            <a:ext cx="10424160" cy="566928"/>
+          </a:xfrm>
+          <a:prstGeom prst="rect">
+            <a:avLst/>
+          </a:prstGeom>
+          <a:noFill/>
+          <a:ln/>
+        </p:spPr>
+        <p:txBody>
+          <a:bodyPr wrap="square" lIns="0" tIns="0" rIns="0" bIns="0" rtlCol="0" anchor="t"/>
+          <a:lstStyle/>
+          <a:p>
+            <a:pPr indent="0" marL="0">
+              <a:lnSpc>
+                <a:spcPct val="108000"/>
+              </a:lnSpc>
+              <a:buNone/>
+            </a:pPr>
+            <a:r>
+              <a:rPr lang="en-US" sz="1250" dirty="0">
+                <a:solidFill>
+                  <a:srgbClr val="16252C"/>
+                </a:solidFill>
+                <a:latin typeface="Calibri" pitchFamily="34" charset="0"/>
+                <a:ea typeface="Calibri" pitchFamily="34" charset="-122"/>
+                <a:cs typeface="Calibri" pitchFamily="34" charset="-120"/>
+              </a:rPr>
+              <a:t>SVM-RBF is the primary model — AUC 0.839, MCC 0.531 — significantly beating Random Forest (p = 0.021), XGBoost (p = 0.0016) and L1-LR (p &lt; 0.001) among 17 models compared.</a:t>
+            </a:r>
+            <a:endParaRPr lang="en-US" sz="1250" dirty="0"/>
+          </a:p>
+        </p:txBody>
+      </p:sp>
+      <p:sp>
+        <p:nvSpPr>
+          <p:cNvPr id="12" name="Shape 10"/>
+          <p:cNvSpPr/>
+          <p:nvPr/>
+        </p:nvSpPr>
+        <p:spPr>
+          <a:xfrm>
+            <a:off x="548640" y="2734056"/>
+            <a:ext cx="457200" cy="457200"/>
+          </a:xfrm>
+          <a:prstGeom prst="ellipse">
+            <a:avLst/>
+          </a:prstGeom>
+          <a:solidFill>
+            <a:srgbClr val="18707F"/>
+          </a:solidFill>
+          <a:ln/>
+        </p:spPr>
+      </p:sp>
+      <p:sp>
+        <p:nvSpPr>
+          <p:cNvPr id="13" name="Text 11"/>
+          <p:cNvSpPr/>
+          <p:nvPr/>
+        </p:nvSpPr>
+        <p:spPr>
+          <a:xfrm>
+            <a:off x="548640" y="2807208"/>
+            <a:ext cx="457200" cy="310896"/>
+          </a:xfrm>
+          <a:prstGeom prst="rect">
+            <a:avLst/>
+          </a:prstGeom>
+          <a:noFill/>
+          <a:ln/>
+        </p:spPr>
+        <p:txBody>
+          <a:bodyPr wrap="square" lIns="0" tIns="0" rIns="0" bIns="0" rtlCol="0" anchor="ctr"/>
+          <a:lstStyle/>
+          <a:p>
+            <a:pPr algn="ctr" indent="0" marL="0">
+              <a:buNone/>
+            </a:pPr>
+            <a:r>
+              <a:rPr lang="en-US" sz="1400" b="1" dirty="0">
+                <a:solidFill>
+                  <a:srgbClr val="FFFFFF"/>
+                </a:solidFill>
+                <a:latin typeface="Georgia" pitchFamily="34" charset="0"/>
+                <a:ea typeface="Georgia" pitchFamily="34" charset="-122"/>
+                <a:cs typeface="Georgia" pitchFamily="34" charset="-120"/>
+              </a:rPr>
+              <a:t>3</a:t>
+            </a:r>
+            <a:endParaRPr lang="en-US" sz="1400" dirty="0"/>
+          </a:p>
+        </p:txBody>
+      </p:sp>
+      <p:sp>
+        <p:nvSpPr>
+          <p:cNvPr id="14" name="Text 12"/>
+          <p:cNvSpPr/>
+          <p:nvPr/>
+        </p:nvSpPr>
+        <p:spPr>
+          <a:xfrm>
+            <a:off x="1188720" y="2697480"/>
+            <a:ext cx="10424160" cy="566928"/>
+          </a:xfrm>
+          <a:prstGeom prst="rect">
+            <a:avLst/>
+          </a:prstGeom>
+          <a:noFill/>
+          <a:ln/>
+        </p:spPr>
+        <p:txBody>
+          <a:bodyPr wrap="square" lIns="0" tIns="0" rIns="0" bIns="0" rtlCol="0" anchor="t"/>
+          <a:lstStyle/>
+          <a:p>
+            <a:pPr indent="0" marL="0">
+              <a:lnSpc>
+                <a:spcPct val="108000"/>
+              </a:lnSpc>
+              <a:buNone/>
+            </a:pPr>
+            <a:r>
+              <a:rPr lang="en-US" sz="1250" dirty="0">
+                <a:solidFill>
+                  <a:srgbClr val="16252C"/>
+                </a:solidFill>
+                <a:latin typeface="Calibri" pitchFamily="34" charset="0"/>
+                <a:ea typeface="Calibri" pitchFamily="34" charset="-122"/>
+                <a:cs typeface="Calibri" pitchFamily="34" charset="-120"/>
+              </a:rPr>
+              <a:t>The signal is partly nonlinear: the RBF kernel gains 0.073 AUC over a linear one, and several taxa act only in combination.</a:t>
+            </a:r>
+            <a:endParaRPr lang="en-US" sz="1250" dirty="0"/>
+          </a:p>
+        </p:txBody>
+      </p:sp>
+      <p:sp>
+        <p:nvSpPr>
+          <p:cNvPr id="15" name="Shape 13"/>
+          <p:cNvSpPr/>
+          <p:nvPr/>
+        </p:nvSpPr>
+        <p:spPr>
+          <a:xfrm>
+            <a:off x="548640" y="3456432"/>
+            <a:ext cx="457200" cy="457200"/>
+          </a:xfrm>
+          <a:prstGeom prst="ellipse">
+            <a:avLst/>
+          </a:prstGeom>
+          <a:solidFill>
+            <a:srgbClr val="18707F"/>
+          </a:solidFill>
+          <a:ln/>
+        </p:spPr>
+      </p:sp>
+      <p:sp>
+        <p:nvSpPr>
+          <p:cNvPr id="16" name="Text 14"/>
+          <p:cNvSpPr/>
+          <p:nvPr/>
+        </p:nvSpPr>
+        <p:spPr>
+          <a:xfrm>
+            <a:off x="548640" y="3529584"/>
+            <a:ext cx="457200" cy="310896"/>
+          </a:xfrm>
+          <a:prstGeom prst="rect">
+            <a:avLst/>
+          </a:prstGeom>
+          <a:noFill/>
+          <a:ln/>
+        </p:spPr>
+        <p:txBody>
+          <a:bodyPr wrap="square" lIns="0" tIns="0" rIns="0" bIns="0" rtlCol="0" anchor="ctr"/>
+          <a:lstStyle/>
+          <a:p>
+            <a:pPr algn="ctr" indent="0" marL="0">
+              <a:buNone/>
+            </a:pPr>
+            <a:r>
+              <a:rPr lang="en-US" sz="1400" b="1" dirty="0">
+                <a:solidFill>
+                  <a:srgbClr val="FFFFFF"/>
+                </a:solidFill>
+                <a:latin typeface="Georgia" pitchFamily="34" charset="0"/>
+                <a:ea typeface="Georgia" pitchFamily="34" charset="-122"/>
+                <a:cs typeface="Georgia" pitchFamily="34" charset="-120"/>
+              </a:rPr>
+              <a:t>4</a:t>
+            </a:r>
+            <a:endParaRPr lang="en-US" sz="1400" dirty="0"/>
+          </a:p>
+        </p:txBody>
+      </p:sp>
+      <p:sp>
+        <p:nvSpPr>
+          <p:cNvPr id="17" name="Text 15"/>
+          <p:cNvSpPr/>
+          <p:nvPr/>
+        </p:nvSpPr>
+        <p:spPr>
+          <a:xfrm>
+            <a:off x="1188720" y="3419856"/>
+            <a:ext cx="10424160" cy="566928"/>
+          </a:xfrm>
+          <a:prstGeom prst="rect">
+            <a:avLst/>
+          </a:prstGeom>
+          <a:noFill/>
+          <a:ln/>
+        </p:spPr>
+        <p:txBody>
+          <a:bodyPr wrap="square" lIns="0" tIns="0" rIns="0" bIns="0" rtlCol="0" anchor="t"/>
+          <a:lstStyle/>
+          <a:p>
+            <a:pPr indent="0" marL="0">
+              <a:lnSpc>
+                <a:spcPct val="108000"/>
+              </a:lnSpc>
+              <a:buNone/>
+            </a:pPr>
+            <a:r>
+              <a:rPr lang="en-US" sz="1250" dirty="0">
+                <a:solidFill>
+                  <a:srgbClr val="16252C"/>
+                </a:solidFill>
+                <a:latin typeface="Calibri" pitchFamily="34" charset="0"/>
+                <a:ea typeface="Calibri" pitchFamily="34" charset="-122"/>
+                <a:cs typeface="Calibri" pitchFamily="34" charset="-120"/>
+              </a:rPr>
+              <a:t>Nine taxa survive three independent selection methods; Candidatus Arthromitus (SFB) has independent immunological support.</a:t>
+            </a:r>
+            <a:endParaRPr lang="en-US" sz="1250" dirty="0"/>
+          </a:p>
+        </p:txBody>
+      </p:sp>
+      <p:sp>
+        <p:nvSpPr>
+          <p:cNvPr id="18" name="Shape 16"/>
+          <p:cNvSpPr/>
+          <p:nvPr/>
+        </p:nvSpPr>
+        <p:spPr>
+          <a:xfrm>
+            <a:off x="548640" y="4178808"/>
+            <a:ext cx="457200" cy="457200"/>
+          </a:xfrm>
+          <a:prstGeom prst="ellipse">
+            <a:avLst/>
+          </a:prstGeom>
+          <a:solidFill>
+            <a:srgbClr val="18707F"/>
+          </a:solidFill>
+          <a:ln/>
+        </p:spPr>
+      </p:sp>
+      <p:sp>
+        <p:nvSpPr>
+          <p:cNvPr id="19" name="Text 17"/>
+          <p:cNvSpPr/>
+          <p:nvPr/>
+        </p:nvSpPr>
+        <p:spPr>
+          <a:xfrm>
+            <a:off x="548640" y="4251960"/>
+            <a:ext cx="457200" cy="310896"/>
+          </a:xfrm>
+          <a:prstGeom prst="rect">
+            <a:avLst/>
+          </a:prstGeom>
+          <a:noFill/>
+          <a:ln/>
+        </p:spPr>
+        <p:txBody>
+          <a:bodyPr wrap="square" lIns="0" tIns="0" rIns="0" bIns="0" rtlCol="0" anchor="ctr"/>
+          <a:lstStyle/>
+          <a:p>
+            <a:pPr algn="ctr" indent="0" marL="0">
+              <a:buNone/>
+            </a:pPr>
+            <a:r>
+              <a:rPr lang="en-US" sz="1400" b="1" dirty="0">
+                <a:solidFill>
+                  <a:srgbClr val="FFFFFF"/>
+                </a:solidFill>
+                <a:latin typeface="Georgia" pitchFamily="34" charset="0"/>
+                <a:ea typeface="Georgia" pitchFamily="34" charset="-122"/>
+                <a:cs typeface="Georgia" pitchFamily="34" charset="-120"/>
+              </a:rPr>
+              <a:t>5</a:t>
+            </a:r>
+            <a:endParaRPr lang="en-US" sz="1400" dirty="0"/>
+          </a:p>
+        </p:txBody>
+      </p:sp>
+      <p:sp>
+        <p:nvSpPr>
+          <p:cNvPr id="20" name="Text 18"/>
+          <p:cNvSpPr/>
+          <p:nvPr/>
+        </p:nvSpPr>
+        <p:spPr>
+          <a:xfrm>
+            <a:off x="1188720" y="4142232"/>
+            <a:ext cx="10424160" cy="566928"/>
+          </a:xfrm>
+          <a:prstGeom prst="rect">
+            <a:avLst/>
+          </a:prstGeom>
+          <a:noFill/>
+          <a:ln/>
+        </p:spPr>
+        <p:txBody>
+          <a:bodyPr wrap="square" lIns="0" tIns="0" rIns="0" bIns="0" rtlCol="0" anchor="t"/>
+          <a:lstStyle/>
+          <a:p>
+            <a:pPr indent="0" marL="0">
+              <a:lnSpc>
+                <a:spcPct val="108000"/>
+              </a:lnSpc>
+              <a:buNone/>
+            </a:pPr>
+            <a:r>
+              <a:rPr lang="en-US" sz="1250" dirty="0">
+                <a:solidFill>
+                  <a:srgbClr val="16252C"/>
+                </a:solidFill>
+                <a:latin typeface="Calibri" pitchFamily="34" charset="0"/>
+                <a:ea typeface="Calibri" pitchFamily="34" charset="-122"/>
+                <a:cs typeface="Calibri" pitchFamily="34" charset="-120"/>
+              </a:rPr>
+              <a:t>Sampling season is a serious confounder (covariates alone: AUC 0.881). Stratification and a deconfounded subset both leave signal: the microbiome's independent contribution brackets between +0.043 and +0.177.</a:t>
+            </a:r>
+            <a:endParaRPr lang="en-US" sz="1250" dirty="0"/>
+          </a:p>
+        </p:txBody>
+      </p:sp>
+      <p:sp>
+        <p:nvSpPr>
+          <p:cNvPr id="21" name="Shape 19"/>
+          <p:cNvSpPr/>
+          <p:nvPr/>
+        </p:nvSpPr>
+        <p:spPr>
+          <a:xfrm>
+            <a:off x="548640" y="4901184"/>
+            <a:ext cx="457200" cy="457200"/>
+          </a:xfrm>
+          <a:prstGeom prst="ellipse">
+            <a:avLst/>
+          </a:prstGeom>
+          <a:solidFill>
+            <a:srgbClr val="D2603A"/>
+          </a:solidFill>
+          <a:ln/>
+        </p:spPr>
+      </p:sp>
+      <p:sp>
+        <p:nvSpPr>
+          <p:cNvPr id="22" name="Text 20"/>
+          <p:cNvSpPr/>
+          <p:nvPr/>
+        </p:nvSpPr>
+        <p:spPr>
+          <a:xfrm>
+            <a:off x="548640" y="4974336"/>
+            <a:ext cx="457200" cy="310896"/>
+          </a:xfrm>
+          <a:prstGeom prst="rect">
+            <a:avLst/>
+          </a:prstGeom>
+          <a:noFill/>
+          <a:ln/>
+        </p:spPr>
+        <p:txBody>
+          <a:bodyPr wrap="square" lIns="0" tIns="0" rIns="0" bIns="0" rtlCol="0" anchor="ctr"/>
+          <a:lstStyle/>
+          <a:p>
+            <a:pPr algn="ctr" indent="0" marL="0">
+              <a:buNone/>
+            </a:pPr>
+            <a:r>
+              <a:rPr lang="en-US" sz="1400" b="1" dirty="0">
+                <a:solidFill>
+                  <a:srgbClr val="FFFFFF"/>
+                </a:solidFill>
+                <a:latin typeface="Georgia" pitchFamily="34" charset="0"/>
+                <a:ea typeface="Georgia" pitchFamily="34" charset="-122"/>
+                <a:cs typeface="Georgia" pitchFamily="34" charset="-120"/>
+              </a:rPr>
+              <a:t>6</a:t>
+            </a:r>
+            <a:endParaRPr lang="en-US" sz="1400" dirty="0"/>
+          </a:p>
+        </p:txBody>
+      </p:sp>
+      <p:sp>
+        <p:nvSpPr>
+          <p:cNvPr id="23" name="Text 21"/>
+          <p:cNvSpPr/>
+          <p:nvPr/>
+        </p:nvSpPr>
+        <p:spPr>
+          <a:xfrm>
+            <a:off x="1188720" y="4864608"/>
+            <a:ext cx="10424160" cy="566928"/>
+          </a:xfrm>
+          <a:prstGeom prst="rect">
+            <a:avLst/>
+          </a:prstGeom>
+          <a:noFill/>
+          <a:ln/>
+        </p:spPr>
+        <p:txBody>
+          <a:bodyPr wrap="square" lIns="0" tIns="0" rIns="0" bIns="0" rtlCol="0" anchor="t"/>
+          <a:lstStyle/>
+          <a:p>
+            <a:pPr indent="0" marL="0">
+              <a:lnSpc>
+                <a:spcPct val="108000"/>
+              </a:lnSpc>
+              <a:buNone/>
+            </a:pPr>
+            <a:r>
+              <a:rPr lang="en-US" sz="1250" dirty="0">
+                <a:solidFill>
+                  <a:srgbClr val="16252C"/>
+                </a:solidFill>
+                <a:latin typeface="Calibri" pitchFamily="34" charset="0"/>
+                <a:ea typeface="Calibri" pitchFamily="34" charset="-122"/>
+                <a:cs typeface="Calibri" pitchFamily="34" charset="-120"/>
+              </a:rPr>
+              <a:t>ExtraTrees scores higher (AUC 0.859) but is worse on the weakest stratum (0.715 vs 0.774); its lead comes only from strata that were already easy.</a:t>
+            </a:r>
+            <a:endParaRPr lang="en-US" sz="1250" dirty="0"/>
+          </a:p>
+        </p:txBody>
+      </p:sp>
+      <p:sp>
+        <p:nvSpPr>
+          <p:cNvPr id="24" name="Shape 22"/>
+          <p:cNvSpPr/>
+          <p:nvPr/>
+        </p:nvSpPr>
+        <p:spPr>
+          <a:xfrm>
+            <a:off x="548640" y="5623560"/>
+            <a:ext cx="457200" cy="457200"/>
+          </a:xfrm>
+          <a:prstGeom prst="ellipse">
+            <a:avLst/>
+          </a:prstGeom>
+          <a:solidFill>
+            <a:srgbClr val="D2603A"/>
+          </a:solidFill>
+          <a:ln/>
+        </p:spPr>
+      </p:sp>
+      <p:sp>
+        <p:nvSpPr>
+          <p:cNvPr id="25" name="Text 23"/>
+          <p:cNvSpPr/>
+          <p:nvPr/>
+        </p:nvSpPr>
+        <p:spPr>
+          <a:xfrm>
+            <a:off x="548640" y="5696712"/>
+            <a:ext cx="457200" cy="310896"/>
+          </a:xfrm>
+          <a:prstGeom prst="rect">
+            <a:avLst/>
+          </a:prstGeom>
+          <a:noFill/>
+          <a:ln/>
+        </p:spPr>
+        <p:txBody>
+          <a:bodyPr wrap="square" lIns="0" tIns="0" rIns="0" bIns="0" rtlCol="0" anchor="ctr"/>
+          <a:lstStyle/>
+          <a:p>
+            <a:pPr algn="ctr" indent="0" marL="0">
+              <a:buNone/>
+            </a:pPr>
+            <a:r>
+              <a:rPr lang="en-US" sz="1400" b="1" dirty="0">
+                <a:solidFill>
+                  <a:srgbClr val="FFFFFF"/>
+                </a:solidFill>
+                <a:latin typeface="Georgia" pitchFamily="34" charset="0"/>
+                <a:ea typeface="Georgia" pitchFamily="34" charset="-122"/>
+                <a:cs typeface="Georgia" pitchFamily="34" charset="-120"/>
+              </a:rPr>
+              <a:t>7</a:t>
+            </a:r>
+            <a:endParaRPr lang="en-US" sz="1400" dirty="0"/>
+          </a:p>
+        </p:txBody>
+      </p:sp>
+      <p:sp>
+        <p:nvSpPr>
+          <p:cNvPr id="26" name="Text 24"/>
+          <p:cNvSpPr/>
+          <p:nvPr/>
+        </p:nvSpPr>
+        <p:spPr>
+          <a:xfrm>
+            <a:off x="1188720" y="5586984"/>
+            <a:ext cx="10424160" cy="566928"/>
+          </a:xfrm>
+          <a:prstGeom prst="rect">
+            <a:avLst/>
+          </a:prstGeom>
+          <a:noFill/>
+          <a:ln/>
+        </p:spPr>
+        <p:txBody>
+          <a:bodyPr wrap="square" lIns="0" tIns="0" rIns="0" bIns="0" rtlCol="0" anchor="t"/>
+          <a:lstStyle/>
+          <a:p>
+            <a:pPr indent="0" marL="0">
+              <a:lnSpc>
+                <a:spcPct val="108000"/>
+              </a:lnSpc>
+              <a:buNone/>
+            </a:pPr>
+            <a:r>
+              <a:rPr lang="en-US" sz="1250" dirty="0">
+                <a:solidFill>
+                  <a:srgbClr val="16252C"/>
+                </a:solidFill>
+                <a:latin typeface="Calibri" pitchFamily="34" charset="0"/>
+                <a:ea typeface="Calibri" pitchFamily="34" charset="-122"/>
+                <a:cs typeface="Calibri" pitchFamily="34" charset="-120"/>
+              </a:rPr>
+              <a:t>Conclusions apply to the UC Davis wild-duck cohort only; they do not transfer across hosts or studies.</a:t>
+            </a:r>
+            <a:endParaRPr lang="en-US" sz="1250" dirty="0"/>
+          </a:p>
+        </p:txBody>
+      </p:sp>
+    </p:spTree>
+  </p:cSld>
+  <p:clrMapOvr>
+    <a:masterClrMapping/>
+  </p:clrMapOvr>
+</p:sld>
+</file>
+
+<file path=ppt/slides/slide29.xml><?xml version="1.0" encoding="utf-8"?>
+<p:sld xmlns:a="http://schemas.openxmlformats.org/drawingml/2006/main" xmlns:r="http://schemas.openxmlformats.org/officeDocument/2006/relationships" xmlns:p="http://schemas.openxmlformats.org/presentationml/2006/main">
+  <p:cSld name="Slide 29">
+    <p:bg>
+      <p:bgPr>
+        <a:solidFill>
+          <a:srgbClr val="FCFAF6"/>
+        </a:solidFill>
+      </p:bgPr>
+    </p:bg>
+    <p:spTree>
+      <p:nvGrpSpPr>
+        <p:cNvPr id="1" name=""/>
+        <p:cNvGrpSpPr/>
+        <p:nvPr/>
+      </p:nvGrpSpPr>
+      <p:grpSpPr>
+        <a:xfrm>
+          <a:off x="0" y="0"/>
+          <a:ext cx="0" cy="0"/>
+          <a:chOff x="0" y="0"/>
+          <a:chExt cx="0" cy="0"/>
+        </a:xfrm>
+      </p:grpSpPr>
+      <p:sp>
+        <p:nvSpPr>
+          <p:cNvPr id="2" name="Shape 0"/>
+          <p:cNvSpPr/>
+          <p:nvPr/>
+        </p:nvSpPr>
+        <p:spPr>
+          <a:xfrm>
+            <a:off x="0" y="0"/>
+            <a:ext cx="12191695" cy="54864"/>
+          </a:xfrm>
+          <a:prstGeom prst="rect">
+            <a:avLst/>
+          </a:prstGeom>
+          <a:solidFill>
+            <a:srgbClr val="18707F"/>
+          </a:solidFill>
+          <a:ln/>
+        </p:spPr>
+      </p:sp>
+      <p:sp>
+        <p:nvSpPr>
+          <p:cNvPr id="3" name="Text 1"/>
+          <p:cNvSpPr/>
+          <p:nvPr/>
+        </p:nvSpPr>
+        <p:spPr>
+          <a:xfrm>
+            <a:off x="548640" y="310896"/>
+            <a:ext cx="7315200" cy="256032"/>
+          </a:xfrm>
+          <a:prstGeom prst="rect">
+            <a:avLst/>
+          </a:prstGeom>
+          <a:noFill/>
+          <a:ln/>
+        </p:spPr>
+        <p:txBody>
+          <a:bodyPr wrap="square" lIns="0" tIns="0" rIns="0" bIns="0" rtlCol="0" anchor="ctr"/>
+          <a:lstStyle/>
+          <a:p>
+            <a:pPr indent="0" marL="0">
+              <a:buNone/>
+            </a:pPr>
+            <a:r>
+              <a:rPr lang="en-US" sz="1100" b="1" spc="200" kern="0" dirty="0">
+                <a:solidFill>
+                  <a:srgbClr val="18707F"/>
+                </a:solidFill>
+                <a:latin typeface="Calibri" pitchFamily="34" charset="0"/>
+                <a:ea typeface="Calibri" pitchFamily="34" charset="-122"/>
+                <a:cs typeface="Calibri" pitchFamily="34" charset="-120"/>
+              </a:rPr>
               <a:t>REPRODUCIBILITY</a:t>
             </a:r>
             <a:endParaRPr lang="en-US" sz="1100" dirty="0"/>
@@ -34943,7 +37276,7 @@
                 <a:ea typeface="Calibri" pitchFamily="34" charset="-122"/>
                 <a:cs typeface="Calibri" pitchFamily="34" charset="-120"/>
               </a:rPr>
-              <a:t>28</a:t>
+              <a:t>29</a:t>
             </a:r>
             <a:endParaRPr lang="en-US" sz="1000" dirty="0"/>
           </a:p>
@@ -34951,7 +37284,7 @@
       </p:sp>
       <p:graphicFrame>
         <p:nvGraphicFramePr>
-          <p:cNvPr id="29" name="Table 0"/>
+          <p:cNvPr id="30" name="Table 0"/>
           <p:cNvGraphicFramePr>
             <a:graphicFrameLocks noGrp="1"/>
           </p:cNvGraphicFramePr>
@@ -35972,490 +38305,6 @@
 </p:sld>
 </file>
 
-<file path=ppt/slides/slide29.xml><?xml version="1.0" encoding="utf-8"?>
-<p:sld xmlns:a="http://schemas.openxmlformats.org/drawingml/2006/main" xmlns:r="http://schemas.openxmlformats.org/officeDocument/2006/relationships" xmlns:p="http://schemas.openxmlformats.org/presentationml/2006/main">
-  <p:cSld name="Slide 29">
-    <p:bg>
-      <p:bgPr>
-        <a:solidFill>
-          <a:srgbClr val="0B3C49"/>
-        </a:solidFill>
-      </p:bgPr>
-    </p:bg>
-    <p:spTree>
-      <p:nvGrpSpPr>
-        <p:cNvPr id="1" name=""/>
-        <p:cNvGrpSpPr/>
-        <p:nvPr/>
-      </p:nvGrpSpPr>
-      <p:grpSpPr>
-        <a:xfrm>
-          <a:off x="0" y="0"/>
-          <a:ext cx="0" cy="0"/>
-          <a:chOff x="0" y="0"/>
-          <a:chExt cx="0" cy="0"/>
-        </a:xfrm>
-      </p:grpSpPr>
-      <p:sp>
-        <p:nvSpPr>
-          <p:cNvPr id="2" name="Shape 0"/>
-          <p:cNvSpPr/>
-          <p:nvPr/>
-        </p:nvSpPr>
-        <p:spPr>
-          <a:xfrm>
-            <a:off x="0" y="0"/>
-            <a:ext cx="12191695" cy="292608"/>
-          </a:xfrm>
-          <a:prstGeom prst="rect">
-            <a:avLst/>
-          </a:prstGeom>
-          <a:solidFill>
-            <a:srgbClr val="8FB996"/>
-          </a:solidFill>
-          <a:ln/>
-        </p:spPr>
-      </p:sp>
-      <p:sp>
-        <p:nvSpPr>
-          <p:cNvPr id="3" name="Text 1"/>
-          <p:cNvSpPr/>
-          <p:nvPr/>
-        </p:nvSpPr>
-        <p:spPr>
-          <a:xfrm>
-            <a:off x="914400" y="1234440"/>
-            <a:ext cx="10332720" cy="731520"/>
-          </a:xfrm>
-          <a:prstGeom prst="rect">
-            <a:avLst/>
-          </a:prstGeom>
-          <a:noFill/>
-          <a:ln/>
-        </p:spPr>
-        <p:txBody>
-          <a:bodyPr wrap="square" lIns="0" tIns="0" rIns="0" bIns="0" rtlCol="0" anchor="ctr"/>
-          <a:lstStyle/>
-          <a:p>
-            <a:pPr indent="0" marL="0">
-              <a:buNone/>
-            </a:pPr>
-            <a:r>
-              <a:rPr lang="en-US" sz="4000" b="1" dirty="0">
-                <a:solidFill>
-                  <a:srgbClr val="FFFFFF"/>
-                </a:solidFill>
-                <a:latin typeface="Georgia" pitchFamily="34" charset="0"/>
-                <a:ea typeface="Georgia" pitchFamily="34" charset="-122"/>
-                <a:cs typeface="Georgia" pitchFamily="34" charset="-120"/>
-              </a:rPr>
-              <a:t>Next Steps</a:t>
-            </a:r>
-            <a:endParaRPr lang="en-US" sz="4000" dirty="0"/>
-          </a:p>
-        </p:txBody>
-      </p:sp>
-      <p:sp>
-        <p:nvSpPr>
-          <p:cNvPr id="4" name="Shape 2"/>
-          <p:cNvSpPr/>
-          <p:nvPr/>
-        </p:nvSpPr>
-        <p:spPr>
-          <a:xfrm>
-            <a:off x="914400" y="2331720"/>
-            <a:ext cx="10332720" cy="960120"/>
-          </a:xfrm>
-          <a:prstGeom prst="rect">
-            <a:avLst/>
-          </a:prstGeom>
-          <a:solidFill>
-            <a:srgbClr val="12505F"/>
-          </a:solidFill>
-          <a:ln/>
-        </p:spPr>
-      </p:sp>
-      <p:sp>
-        <p:nvSpPr>
-          <p:cNvPr id="5" name="Shape 3"/>
-          <p:cNvSpPr/>
-          <p:nvPr/>
-        </p:nvSpPr>
-        <p:spPr>
-          <a:xfrm>
-            <a:off x="914400" y="2331720"/>
-            <a:ext cx="68580" cy="960120"/>
-          </a:xfrm>
-          <a:prstGeom prst="rect">
-            <a:avLst/>
-          </a:prstGeom>
-          <a:solidFill>
-            <a:srgbClr val="8FB996"/>
-          </a:solidFill>
-          <a:ln/>
-        </p:spPr>
-      </p:sp>
-      <p:sp>
-        <p:nvSpPr>
-          <p:cNvPr id="6" name="Text 4"/>
-          <p:cNvSpPr/>
-          <p:nvPr/>
-        </p:nvSpPr>
-        <p:spPr>
-          <a:xfrm>
-            <a:off x="1234440" y="2459736"/>
-            <a:ext cx="9692640" cy="320040"/>
-          </a:xfrm>
-          <a:prstGeom prst="rect">
-            <a:avLst/>
-          </a:prstGeom>
-          <a:noFill/>
-          <a:ln/>
-        </p:spPr>
-        <p:txBody>
-          <a:bodyPr wrap="square" lIns="0" tIns="0" rIns="0" bIns="0" rtlCol="0" anchor="ctr"/>
-          <a:lstStyle/>
-          <a:p>
-            <a:pPr indent="0" marL="0">
-              <a:buNone/>
-            </a:pPr>
-            <a:r>
-              <a:rPr lang="en-US" sz="1600" b="1" dirty="0">
-                <a:solidFill>
-                  <a:srgbClr val="FFFFFF"/>
-                </a:solidFill>
-                <a:latin typeface="Georgia" pitchFamily="34" charset="0"/>
-                <a:ea typeface="Georgia" pitchFamily="34" charset="-122"/>
-                <a:cs typeface="Georgia" pitchFamily="34" charset="-120"/>
-              </a:rPr>
-              <a:t>Confirm the upstream filtering rule</a:t>
-            </a:r>
-            <a:endParaRPr lang="en-US" sz="1600" dirty="0"/>
-          </a:p>
-        </p:txBody>
-      </p:sp>
-      <p:sp>
-        <p:nvSpPr>
-          <p:cNvPr id="7" name="Text 5"/>
-          <p:cNvSpPr/>
-          <p:nvPr/>
-        </p:nvSpPr>
-        <p:spPr>
-          <a:xfrm>
-            <a:off x="1234440" y="2807208"/>
-            <a:ext cx="9692640" cy="365760"/>
-          </a:xfrm>
-          <a:prstGeom prst="rect">
-            <a:avLst/>
-          </a:prstGeom>
-          <a:noFill/>
-          <a:ln/>
-        </p:spPr>
-        <p:txBody>
-          <a:bodyPr wrap="square" lIns="0" tIns="0" rIns="0" bIns="0" rtlCol="0" anchor="ctr"/>
-          <a:lstStyle/>
-          <a:p>
-            <a:pPr indent="0" marL="0">
-              <a:buNone/>
-            </a:pPr>
-            <a:r>
-              <a:rPr lang="en-US" sz="1200" dirty="0">
-                <a:solidFill>
-                  <a:srgbClr val="8FB996"/>
-                </a:solidFill>
-                <a:latin typeface="Calibri" pitchFamily="34" charset="0"/>
-                <a:ea typeface="Calibri" pitchFamily="34" charset="-122"/>
-                <a:cs typeface="Calibri" pitchFamily="34" charset="-120"/>
-              </a:rPr>
-              <a:t>The single change that could invalidate the performance figures. Needs the data provider.</a:t>
-            </a:r>
-            <a:endParaRPr lang="en-US" sz="1200" dirty="0"/>
-          </a:p>
-        </p:txBody>
-      </p:sp>
-      <p:sp>
-        <p:nvSpPr>
-          <p:cNvPr id="8" name="Shape 6"/>
-          <p:cNvSpPr/>
-          <p:nvPr/>
-        </p:nvSpPr>
-        <p:spPr>
-          <a:xfrm>
-            <a:off x="914400" y="3474720"/>
-            <a:ext cx="10332720" cy="960120"/>
-          </a:xfrm>
-          <a:prstGeom prst="rect">
-            <a:avLst/>
-          </a:prstGeom>
-          <a:solidFill>
-            <a:srgbClr val="12505F"/>
-          </a:solidFill>
-          <a:ln/>
-        </p:spPr>
-      </p:sp>
-      <p:sp>
-        <p:nvSpPr>
-          <p:cNvPr id="9" name="Shape 7"/>
-          <p:cNvSpPr/>
-          <p:nvPr/>
-        </p:nvSpPr>
-        <p:spPr>
-          <a:xfrm>
-            <a:off x="914400" y="3474720"/>
-            <a:ext cx="68580" cy="960120"/>
-          </a:xfrm>
-          <a:prstGeom prst="rect">
-            <a:avLst/>
-          </a:prstGeom>
-          <a:solidFill>
-            <a:srgbClr val="8FB996"/>
-          </a:solidFill>
-          <a:ln/>
-        </p:spPr>
-      </p:sp>
-      <p:sp>
-        <p:nvSpPr>
-          <p:cNvPr id="10" name="Text 8"/>
-          <p:cNvSpPr/>
-          <p:nvPr/>
-        </p:nvSpPr>
-        <p:spPr>
-          <a:xfrm>
-            <a:off x="1234440" y="3602736"/>
-            <a:ext cx="9692640" cy="320040"/>
-          </a:xfrm>
-          <a:prstGeom prst="rect">
-            <a:avLst/>
-          </a:prstGeom>
-          <a:noFill/>
-          <a:ln/>
-        </p:spPr>
-        <p:txBody>
-          <a:bodyPr wrap="square" lIns="0" tIns="0" rIns="0" bIns="0" rtlCol="0" anchor="ctr"/>
-          <a:lstStyle/>
-          <a:p>
-            <a:pPr indent="0" marL="0">
-              <a:buNone/>
-            </a:pPr>
-            <a:r>
-              <a:rPr lang="en-US" sz="1600" b="1" dirty="0">
-                <a:solidFill>
-                  <a:srgbClr val="FFFFFF"/>
-                </a:solidFill>
-                <a:latin typeface="Georgia" pitchFamily="34" charset="0"/>
-                <a:ea typeface="Georgia" pitchFamily="34" charset="-122"/>
-                <a:cs typeface="Georgia" pitchFamily="34" charset="-120"/>
-              </a:rPr>
-              <a:t>Nest the decision threshold</a:t>
-            </a:r>
-            <a:endParaRPr lang="en-US" sz="1600" dirty="0"/>
-          </a:p>
-        </p:txBody>
-      </p:sp>
-      <p:sp>
-        <p:nvSpPr>
-          <p:cNvPr id="11" name="Text 9"/>
-          <p:cNvSpPr/>
-          <p:nvPr/>
-        </p:nvSpPr>
-        <p:spPr>
-          <a:xfrm>
-            <a:off x="1234440" y="3950208"/>
-            <a:ext cx="9692640" cy="365760"/>
-          </a:xfrm>
-          <a:prstGeom prst="rect">
-            <a:avLst/>
-          </a:prstGeom>
-          <a:noFill/>
-          <a:ln/>
-        </p:spPr>
-        <p:txBody>
-          <a:bodyPr wrap="square" lIns="0" tIns="0" rIns="0" bIns="0" rtlCol="0" anchor="ctr"/>
-          <a:lstStyle/>
-          <a:p>
-            <a:pPr indent="0" marL="0">
-              <a:buNone/>
-            </a:pPr>
-            <a:r>
-              <a:rPr lang="en-US" sz="1200" dirty="0">
-                <a:solidFill>
-                  <a:srgbClr val="8FB996"/>
-                </a:solidFill>
-                <a:latin typeface="Calibri" pitchFamily="34" charset="0"/>
-                <a:ea typeface="Calibri" pitchFamily="34" charset="-122"/>
-                <a:cs typeface="Calibri" pitchFamily="34" charset="-120"/>
-              </a:rPr>
-              <a:t>Fold threshold selection into the inner CV loop to get an unbiased accuracy.</a:t>
-            </a:r>
-            <a:endParaRPr lang="en-US" sz="1200" dirty="0"/>
-          </a:p>
-        </p:txBody>
-      </p:sp>
-      <p:sp>
-        <p:nvSpPr>
-          <p:cNvPr id="12" name="Shape 10"/>
-          <p:cNvSpPr/>
-          <p:nvPr/>
-        </p:nvSpPr>
-        <p:spPr>
-          <a:xfrm>
-            <a:off x="914400" y="4617720"/>
-            <a:ext cx="10332720" cy="960120"/>
-          </a:xfrm>
-          <a:prstGeom prst="rect">
-            <a:avLst/>
-          </a:prstGeom>
-          <a:solidFill>
-            <a:srgbClr val="12505F"/>
-          </a:solidFill>
-          <a:ln/>
-        </p:spPr>
-      </p:sp>
-      <p:sp>
-        <p:nvSpPr>
-          <p:cNvPr id="13" name="Shape 11"/>
-          <p:cNvSpPr/>
-          <p:nvPr/>
-        </p:nvSpPr>
-        <p:spPr>
-          <a:xfrm>
-            <a:off x="914400" y="4617720"/>
-            <a:ext cx="68580" cy="960120"/>
-          </a:xfrm>
-          <a:prstGeom prst="rect">
-            <a:avLst/>
-          </a:prstGeom>
-          <a:solidFill>
-            <a:srgbClr val="8FB996"/>
-          </a:solidFill>
-          <a:ln/>
-        </p:spPr>
-      </p:sp>
-      <p:sp>
-        <p:nvSpPr>
-          <p:cNvPr id="14" name="Text 12"/>
-          <p:cNvSpPr/>
-          <p:nvPr/>
-        </p:nvSpPr>
-        <p:spPr>
-          <a:xfrm>
-            <a:off x="1234440" y="4745736"/>
-            <a:ext cx="9692640" cy="320040"/>
-          </a:xfrm>
-          <a:prstGeom prst="rect">
-            <a:avLst/>
-          </a:prstGeom>
-          <a:noFill/>
-          <a:ln/>
-        </p:spPr>
-        <p:txBody>
-          <a:bodyPr wrap="square" lIns="0" tIns="0" rIns="0" bIns="0" rtlCol="0" anchor="ctr"/>
-          <a:lstStyle/>
-          <a:p>
-            <a:pPr indent="0" marL="0">
-              <a:buNone/>
-            </a:pPr>
-            <a:r>
-              <a:rPr lang="en-US" sz="1600" b="1" dirty="0">
-                <a:solidFill>
-                  <a:srgbClr val="FFFFFF"/>
-                </a:solidFill>
-                <a:latin typeface="Georgia" pitchFamily="34" charset="0"/>
-                <a:ea typeface="Georgia" pitchFamily="34" charset="-122"/>
-                <a:cs typeface="Georgia" pitchFamily="34" charset="-120"/>
-              </a:rPr>
-              <a:t>Expand the cohort</a:t>
-            </a:r>
-            <a:endParaRPr lang="en-US" sz="1600" dirty="0"/>
-          </a:p>
-        </p:txBody>
-      </p:sp>
-      <p:sp>
-        <p:nvSpPr>
-          <p:cNvPr id="15" name="Text 13"/>
-          <p:cNvSpPr/>
-          <p:nvPr/>
-        </p:nvSpPr>
-        <p:spPr>
-          <a:xfrm>
-            <a:off x="1234440" y="5093208"/>
-            <a:ext cx="9692640" cy="365760"/>
-          </a:xfrm>
-          <a:prstGeom prst="rect">
-            <a:avLst/>
-          </a:prstGeom>
-          <a:noFill/>
-          <a:ln/>
-        </p:spPr>
-        <p:txBody>
-          <a:bodyPr wrap="square" lIns="0" tIns="0" rIns="0" bIns="0" rtlCol="0" anchor="ctr"/>
-          <a:lstStyle/>
-          <a:p>
-            <a:pPr indent="0" marL="0">
-              <a:buNone/>
-            </a:pPr>
-            <a:r>
-              <a:rPr lang="en-US" sz="1200" dirty="0">
-                <a:solidFill>
-                  <a:srgbClr val="8FB996"/>
-                </a:solidFill>
-                <a:latin typeface="Calibri" pitchFamily="34" charset="0"/>
-                <a:ea typeface="Calibri" pitchFamily="34" charset="-122"/>
-                <a:cs typeface="Calibri" pitchFamily="34" charset="-120"/>
-              </a:rPr>
-              <a:t>Cross-study generalization needs more birds of the same host, not more studies of different ones.</a:t>
-            </a:r>
-            <a:endParaRPr lang="en-US" sz="1200" dirty="0"/>
-          </a:p>
-        </p:txBody>
-      </p:sp>
-      <p:sp>
-        <p:nvSpPr>
-          <p:cNvPr id="16" name="Text 14"/>
-          <p:cNvSpPr/>
-          <p:nvPr/>
-        </p:nvSpPr>
-        <p:spPr>
-          <a:xfrm>
-            <a:off x="914400" y="6172200"/>
-            <a:ext cx="10332720" cy="365760"/>
-          </a:xfrm>
-          <a:prstGeom prst="rect">
-            <a:avLst/>
-          </a:prstGeom>
-          <a:noFill/>
-          <a:ln/>
-        </p:spPr>
-        <p:txBody>
-          <a:bodyPr wrap="square" lIns="0" tIns="0" rIns="0" bIns="0" rtlCol="0" anchor="ctr"/>
-          <a:lstStyle/>
-          <a:p>
-            <a:pPr indent="0" marL="0">
-              <a:buNone/>
-            </a:pPr>
-            <a:r>
-              <a:rPr lang="en-US" sz="1200" dirty="0">
-                <a:solidFill>
-                  <a:srgbClr val="4E9FAD"/>
-                </a:solidFill>
-                <a:latin typeface="Calibri" pitchFamily="34" charset="0"/>
-                <a:ea typeface="Calibri" pitchFamily="34" charset="-122"/>
-                <a:cs typeface="Calibri" pitchFamily="34" charset="-120"/>
-              </a:rPr>
-              <a:t>Sihua Peng  ·  University of Georgia, College of Public Health  ·  pengsihua99@gmail.com</a:t>
-            </a:r>
-            <a:endParaRPr lang="en-US" sz="1200" dirty="0"/>
-          </a:p>
-        </p:txBody>
-      </p:sp>
-    </p:spTree>
-  </p:cSld>
-  <p:clrMapOvr>
-    <a:masterClrMapping/>
-  </p:clrMapOvr>
-</p:sld>
-</file>
-
 <file path=ppt/slides/slide3.xml><?xml version="1.0" encoding="utf-8"?>
 <p:sld xmlns:a="http://schemas.openxmlformats.org/drawingml/2006/main" xmlns:r="http://schemas.openxmlformats.org/officeDocument/2006/relationships" xmlns:p="http://schemas.openxmlformats.org/presentationml/2006/main">
   <p:cSld name="Slide 3">
@@ -37123,7 +38972,7 @@
                 <a:ea typeface="Calibri" pitchFamily="34" charset="-122"/>
                 <a:cs typeface="Calibri" pitchFamily="34" charset="-120"/>
               </a:rPr>
-              <a:t>Permutation testing, confounders, and stratified re-analysis</a:t>
+              <a:t>Permutation testing, confounders, stratification, and a deconfounded subset</a:t>
             </a:r>
             <a:endParaRPr lang="en-US" sz="1200" dirty="0"/>
           </a:p>
@@ -37380,6 +39229,490 @@
                 <a:cs typeface="Calibri" pitchFamily="34" charset="-120"/>
               </a:rPr>
               <a:t>Seven known limitations, stated plainly</a:t>
+            </a:r>
+            <a:endParaRPr lang="en-US" sz="1200" dirty="0"/>
+          </a:p>
+        </p:txBody>
+      </p:sp>
+    </p:spTree>
+  </p:cSld>
+  <p:clrMapOvr>
+    <a:masterClrMapping/>
+  </p:clrMapOvr>
+</p:sld>
+</file>
+
+<file path=ppt/slides/slide30.xml><?xml version="1.0" encoding="utf-8"?>
+<p:sld xmlns:a="http://schemas.openxmlformats.org/drawingml/2006/main" xmlns:r="http://schemas.openxmlformats.org/officeDocument/2006/relationships" xmlns:p="http://schemas.openxmlformats.org/presentationml/2006/main">
+  <p:cSld name="Slide 30">
+    <p:bg>
+      <p:bgPr>
+        <a:solidFill>
+          <a:srgbClr val="0B3C49"/>
+        </a:solidFill>
+      </p:bgPr>
+    </p:bg>
+    <p:spTree>
+      <p:nvGrpSpPr>
+        <p:cNvPr id="1" name=""/>
+        <p:cNvGrpSpPr/>
+        <p:nvPr/>
+      </p:nvGrpSpPr>
+      <p:grpSpPr>
+        <a:xfrm>
+          <a:off x="0" y="0"/>
+          <a:ext cx="0" cy="0"/>
+          <a:chOff x="0" y="0"/>
+          <a:chExt cx="0" cy="0"/>
+        </a:xfrm>
+      </p:grpSpPr>
+      <p:sp>
+        <p:nvSpPr>
+          <p:cNvPr id="2" name="Shape 0"/>
+          <p:cNvSpPr/>
+          <p:nvPr/>
+        </p:nvSpPr>
+        <p:spPr>
+          <a:xfrm>
+            <a:off x="0" y="0"/>
+            <a:ext cx="12191695" cy="292608"/>
+          </a:xfrm>
+          <a:prstGeom prst="rect">
+            <a:avLst/>
+          </a:prstGeom>
+          <a:solidFill>
+            <a:srgbClr val="8FB996"/>
+          </a:solidFill>
+          <a:ln/>
+        </p:spPr>
+      </p:sp>
+      <p:sp>
+        <p:nvSpPr>
+          <p:cNvPr id="3" name="Text 1"/>
+          <p:cNvSpPr/>
+          <p:nvPr/>
+        </p:nvSpPr>
+        <p:spPr>
+          <a:xfrm>
+            <a:off x="914400" y="1234440"/>
+            <a:ext cx="10332720" cy="731520"/>
+          </a:xfrm>
+          <a:prstGeom prst="rect">
+            <a:avLst/>
+          </a:prstGeom>
+          <a:noFill/>
+          <a:ln/>
+        </p:spPr>
+        <p:txBody>
+          <a:bodyPr wrap="square" lIns="0" tIns="0" rIns="0" bIns="0" rtlCol="0" anchor="ctr"/>
+          <a:lstStyle/>
+          <a:p>
+            <a:pPr indent="0" marL="0">
+              <a:buNone/>
+            </a:pPr>
+            <a:r>
+              <a:rPr lang="en-US" sz="4000" b="1" dirty="0">
+                <a:solidFill>
+                  <a:srgbClr val="FFFFFF"/>
+                </a:solidFill>
+                <a:latin typeface="Georgia" pitchFamily="34" charset="0"/>
+                <a:ea typeface="Georgia" pitchFamily="34" charset="-122"/>
+                <a:cs typeface="Georgia" pitchFamily="34" charset="-120"/>
+              </a:rPr>
+              <a:t>Next Steps</a:t>
+            </a:r>
+            <a:endParaRPr lang="en-US" sz="4000" dirty="0"/>
+          </a:p>
+        </p:txBody>
+      </p:sp>
+      <p:sp>
+        <p:nvSpPr>
+          <p:cNvPr id="4" name="Shape 2"/>
+          <p:cNvSpPr/>
+          <p:nvPr/>
+        </p:nvSpPr>
+        <p:spPr>
+          <a:xfrm>
+            <a:off x="914400" y="2331720"/>
+            <a:ext cx="10332720" cy="960120"/>
+          </a:xfrm>
+          <a:prstGeom prst="rect">
+            <a:avLst/>
+          </a:prstGeom>
+          <a:solidFill>
+            <a:srgbClr val="12505F"/>
+          </a:solidFill>
+          <a:ln/>
+        </p:spPr>
+      </p:sp>
+      <p:sp>
+        <p:nvSpPr>
+          <p:cNvPr id="5" name="Shape 3"/>
+          <p:cNvSpPr/>
+          <p:nvPr/>
+        </p:nvSpPr>
+        <p:spPr>
+          <a:xfrm>
+            <a:off x="914400" y="2331720"/>
+            <a:ext cx="68580" cy="960120"/>
+          </a:xfrm>
+          <a:prstGeom prst="rect">
+            <a:avLst/>
+          </a:prstGeom>
+          <a:solidFill>
+            <a:srgbClr val="8FB996"/>
+          </a:solidFill>
+          <a:ln/>
+        </p:spPr>
+      </p:sp>
+      <p:sp>
+        <p:nvSpPr>
+          <p:cNvPr id="6" name="Text 4"/>
+          <p:cNvSpPr/>
+          <p:nvPr/>
+        </p:nvSpPr>
+        <p:spPr>
+          <a:xfrm>
+            <a:off x="1234440" y="2459736"/>
+            <a:ext cx="9692640" cy="320040"/>
+          </a:xfrm>
+          <a:prstGeom prst="rect">
+            <a:avLst/>
+          </a:prstGeom>
+          <a:noFill/>
+          <a:ln/>
+        </p:spPr>
+        <p:txBody>
+          <a:bodyPr wrap="square" lIns="0" tIns="0" rIns="0" bIns="0" rtlCol="0" anchor="ctr"/>
+          <a:lstStyle/>
+          <a:p>
+            <a:pPr indent="0" marL="0">
+              <a:buNone/>
+            </a:pPr>
+            <a:r>
+              <a:rPr lang="en-US" sz="1600" b="1" dirty="0">
+                <a:solidFill>
+                  <a:srgbClr val="FFFFFF"/>
+                </a:solidFill>
+                <a:latin typeface="Georgia" pitchFamily="34" charset="0"/>
+                <a:ea typeface="Georgia" pitchFamily="34" charset="-122"/>
+                <a:cs typeface="Georgia" pitchFamily="34" charset="-120"/>
+              </a:rPr>
+              <a:t>Confirm the upstream filtering rule</a:t>
+            </a:r>
+            <a:endParaRPr lang="en-US" sz="1600" dirty="0"/>
+          </a:p>
+        </p:txBody>
+      </p:sp>
+      <p:sp>
+        <p:nvSpPr>
+          <p:cNvPr id="7" name="Text 5"/>
+          <p:cNvSpPr/>
+          <p:nvPr/>
+        </p:nvSpPr>
+        <p:spPr>
+          <a:xfrm>
+            <a:off x="1234440" y="2807208"/>
+            <a:ext cx="9692640" cy="365760"/>
+          </a:xfrm>
+          <a:prstGeom prst="rect">
+            <a:avLst/>
+          </a:prstGeom>
+          <a:noFill/>
+          <a:ln/>
+        </p:spPr>
+        <p:txBody>
+          <a:bodyPr wrap="square" lIns="0" tIns="0" rIns="0" bIns="0" rtlCol="0" anchor="ctr"/>
+          <a:lstStyle/>
+          <a:p>
+            <a:pPr indent="0" marL="0">
+              <a:buNone/>
+            </a:pPr>
+            <a:r>
+              <a:rPr lang="en-US" sz="1200" dirty="0">
+                <a:solidFill>
+                  <a:srgbClr val="8FB996"/>
+                </a:solidFill>
+                <a:latin typeface="Calibri" pitchFamily="34" charset="0"/>
+                <a:ea typeface="Calibri" pitchFamily="34" charset="-122"/>
+                <a:cs typeface="Calibri" pitchFamily="34" charset="-120"/>
+              </a:rPr>
+              <a:t>The single change that could invalidate the performance figures. Needs the data provider.</a:t>
+            </a:r>
+            <a:endParaRPr lang="en-US" sz="1200" dirty="0"/>
+          </a:p>
+        </p:txBody>
+      </p:sp>
+      <p:sp>
+        <p:nvSpPr>
+          <p:cNvPr id="8" name="Shape 6"/>
+          <p:cNvSpPr/>
+          <p:nvPr/>
+        </p:nvSpPr>
+        <p:spPr>
+          <a:xfrm>
+            <a:off x="914400" y="3474720"/>
+            <a:ext cx="10332720" cy="960120"/>
+          </a:xfrm>
+          <a:prstGeom prst="rect">
+            <a:avLst/>
+          </a:prstGeom>
+          <a:solidFill>
+            <a:srgbClr val="12505F"/>
+          </a:solidFill>
+          <a:ln/>
+        </p:spPr>
+      </p:sp>
+      <p:sp>
+        <p:nvSpPr>
+          <p:cNvPr id="9" name="Shape 7"/>
+          <p:cNvSpPr/>
+          <p:nvPr/>
+        </p:nvSpPr>
+        <p:spPr>
+          <a:xfrm>
+            <a:off x="914400" y="3474720"/>
+            <a:ext cx="68580" cy="960120"/>
+          </a:xfrm>
+          <a:prstGeom prst="rect">
+            <a:avLst/>
+          </a:prstGeom>
+          <a:solidFill>
+            <a:srgbClr val="8FB996"/>
+          </a:solidFill>
+          <a:ln/>
+        </p:spPr>
+      </p:sp>
+      <p:sp>
+        <p:nvSpPr>
+          <p:cNvPr id="10" name="Text 8"/>
+          <p:cNvSpPr/>
+          <p:nvPr/>
+        </p:nvSpPr>
+        <p:spPr>
+          <a:xfrm>
+            <a:off x="1234440" y="3602736"/>
+            <a:ext cx="9692640" cy="320040"/>
+          </a:xfrm>
+          <a:prstGeom prst="rect">
+            <a:avLst/>
+          </a:prstGeom>
+          <a:noFill/>
+          <a:ln/>
+        </p:spPr>
+        <p:txBody>
+          <a:bodyPr wrap="square" lIns="0" tIns="0" rIns="0" bIns="0" rtlCol="0" anchor="ctr"/>
+          <a:lstStyle/>
+          <a:p>
+            <a:pPr indent="0" marL="0">
+              <a:buNone/>
+            </a:pPr>
+            <a:r>
+              <a:rPr lang="en-US" sz="1600" b="1" dirty="0">
+                <a:solidFill>
+                  <a:srgbClr val="FFFFFF"/>
+                </a:solidFill>
+                <a:latin typeface="Georgia" pitchFamily="34" charset="0"/>
+                <a:ea typeface="Georgia" pitchFamily="34" charset="-122"/>
+                <a:cs typeface="Georgia" pitchFamily="34" charset="-120"/>
+              </a:rPr>
+              <a:t>Nest the decision threshold</a:t>
+            </a:r>
+            <a:endParaRPr lang="en-US" sz="1600" dirty="0"/>
+          </a:p>
+        </p:txBody>
+      </p:sp>
+      <p:sp>
+        <p:nvSpPr>
+          <p:cNvPr id="11" name="Text 9"/>
+          <p:cNvSpPr/>
+          <p:nvPr/>
+        </p:nvSpPr>
+        <p:spPr>
+          <a:xfrm>
+            <a:off x="1234440" y="3950208"/>
+            <a:ext cx="9692640" cy="365760"/>
+          </a:xfrm>
+          <a:prstGeom prst="rect">
+            <a:avLst/>
+          </a:prstGeom>
+          <a:noFill/>
+          <a:ln/>
+        </p:spPr>
+        <p:txBody>
+          <a:bodyPr wrap="square" lIns="0" tIns="0" rIns="0" bIns="0" rtlCol="0" anchor="ctr"/>
+          <a:lstStyle/>
+          <a:p>
+            <a:pPr indent="0" marL="0">
+              <a:buNone/>
+            </a:pPr>
+            <a:r>
+              <a:rPr lang="en-US" sz="1200" dirty="0">
+                <a:solidFill>
+                  <a:srgbClr val="8FB996"/>
+                </a:solidFill>
+                <a:latin typeface="Calibri" pitchFamily="34" charset="0"/>
+                <a:ea typeface="Calibri" pitchFamily="34" charset="-122"/>
+                <a:cs typeface="Calibri" pitchFamily="34" charset="-120"/>
+              </a:rPr>
+              <a:t>Fold threshold selection into the inner CV loop to get an unbiased accuracy.</a:t>
+            </a:r>
+            <a:endParaRPr lang="en-US" sz="1200" dirty="0"/>
+          </a:p>
+        </p:txBody>
+      </p:sp>
+      <p:sp>
+        <p:nvSpPr>
+          <p:cNvPr id="12" name="Shape 10"/>
+          <p:cNvSpPr/>
+          <p:nvPr/>
+        </p:nvSpPr>
+        <p:spPr>
+          <a:xfrm>
+            <a:off x="914400" y="4617720"/>
+            <a:ext cx="10332720" cy="960120"/>
+          </a:xfrm>
+          <a:prstGeom prst="rect">
+            <a:avLst/>
+          </a:prstGeom>
+          <a:solidFill>
+            <a:srgbClr val="12505F"/>
+          </a:solidFill>
+          <a:ln/>
+        </p:spPr>
+      </p:sp>
+      <p:sp>
+        <p:nvSpPr>
+          <p:cNvPr id="13" name="Shape 11"/>
+          <p:cNvSpPr/>
+          <p:nvPr/>
+        </p:nvSpPr>
+        <p:spPr>
+          <a:xfrm>
+            <a:off x="914400" y="4617720"/>
+            <a:ext cx="68580" cy="960120"/>
+          </a:xfrm>
+          <a:prstGeom prst="rect">
+            <a:avLst/>
+          </a:prstGeom>
+          <a:solidFill>
+            <a:srgbClr val="8FB996"/>
+          </a:solidFill>
+          <a:ln/>
+        </p:spPr>
+      </p:sp>
+      <p:sp>
+        <p:nvSpPr>
+          <p:cNvPr id="14" name="Text 12"/>
+          <p:cNvSpPr/>
+          <p:nvPr/>
+        </p:nvSpPr>
+        <p:spPr>
+          <a:xfrm>
+            <a:off x="1234440" y="4745736"/>
+            <a:ext cx="9692640" cy="320040"/>
+          </a:xfrm>
+          <a:prstGeom prst="rect">
+            <a:avLst/>
+          </a:prstGeom>
+          <a:noFill/>
+          <a:ln/>
+        </p:spPr>
+        <p:txBody>
+          <a:bodyPr wrap="square" lIns="0" tIns="0" rIns="0" bIns="0" rtlCol="0" anchor="ctr"/>
+          <a:lstStyle/>
+          <a:p>
+            <a:pPr indent="0" marL="0">
+              <a:buNone/>
+            </a:pPr>
+            <a:r>
+              <a:rPr lang="en-US" sz="1600" b="1" dirty="0">
+                <a:solidFill>
+                  <a:srgbClr val="FFFFFF"/>
+                </a:solidFill>
+                <a:latin typeface="Georgia" pitchFamily="34" charset="0"/>
+                <a:ea typeface="Georgia" pitchFamily="34" charset="-122"/>
+                <a:cs typeface="Georgia" pitchFamily="34" charset="-120"/>
+              </a:rPr>
+              <a:t>Expand the cohort</a:t>
+            </a:r>
+            <a:endParaRPr lang="en-US" sz="1600" dirty="0"/>
+          </a:p>
+        </p:txBody>
+      </p:sp>
+      <p:sp>
+        <p:nvSpPr>
+          <p:cNvPr id="15" name="Text 13"/>
+          <p:cNvSpPr/>
+          <p:nvPr/>
+        </p:nvSpPr>
+        <p:spPr>
+          <a:xfrm>
+            <a:off x="1234440" y="5093208"/>
+            <a:ext cx="9692640" cy="365760"/>
+          </a:xfrm>
+          <a:prstGeom prst="rect">
+            <a:avLst/>
+          </a:prstGeom>
+          <a:noFill/>
+          <a:ln/>
+        </p:spPr>
+        <p:txBody>
+          <a:bodyPr wrap="square" lIns="0" tIns="0" rIns="0" bIns="0" rtlCol="0" anchor="ctr"/>
+          <a:lstStyle/>
+          <a:p>
+            <a:pPr indent="0" marL="0">
+              <a:buNone/>
+            </a:pPr>
+            <a:r>
+              <a:rPr lang="en-US" sz="1200" dirty="0">
+                <a:solidFill>
+                  <a:srgbClr val="8FB996"/>
+                </a:solidFill>
+                <a:latin typeface="Calibri" pitchFamily="34" charset="0"/>
+                <a:ea typeface="Calibri" pitchFamily="34" charset="-122"/>
+                <a:cs typeface="Calibri" pitchFamily="34" charset="-120"/>
+              </a:rPr>
+              <a:t>Cross-study generalization needs more birds of the same host, not more studies of different ones.</a:t>
+            </a:r>
+            <a:endParaRPr lang="en-US" sz="1200" dirty="0"/>
+          </a:p>
+        </p:txBody>
+      </p:sp>
+      <p:sp>
+        <p:nvSpPr>
+          <p:cNvPr id="16" name="Text 14"/>
+          <p:cNvSpPr/>
+          <p:nvPr/>
+        </p:nvSpPr>
+        <p:spPr>
+          <a:xfrm>
+            <a:off x="914400" y="6172200"/>
+            <a:ext cx="10332720" cy="365760"/>
+          </a:xfrm>
+          <a:prstGeom prst="rect">
+            <a:avLst/>
+          </a:prstGeom>
+          <a:noFill/>
+          <a:ln/>
+        </p:spPr>
+        <p:txBody>
+          <a:bodyPr wrap="square" lIns="0" tIns="0" rIns="0" bIns="0" rtlCol="0" anchor="ctr"/>
+          <a:lstStyle/>
+          <a:p>
+            <a:pPr indent="0" marL="0">
+              <a:buNone/>
+            </a:pPr>
+            <a:r>
+              <a:rPr lang="en-US" sz="1200" dirty="0">
+                <a:solidFill>
+                  <a:srgbClr val="4E9FAD"/>
+                </a:solidFill>
+                <a:latin typeface="Calibri" pitchFamily="34" charset="0"/>
+                <a:ea typeface="Calibri" pitchFamily="34" charset="-122"/>
+                <a:cs typeface="Calibri" pitchFamily="34" charset="-120"/>
+              </a:rPr>
+              <a:t>Sihua Peng  ·  University of Georgia, College of Public Health  ·  pengsihua99@gmail.com</a:t>
             </a:r>
             <a:endParaRPr lang="en-US" sz="1200" dirty="0"/>
           </a:p>

--- a/slides/Influenza_Microbiome_ML_Overview.pptx
+++ b/slides/Influenza_Microbiome_ML_Overview.pptx
@@ -35,9 +35,10 @@
     <p:sldId id="283" r:id="rId29"/>
     <p:sldId id="284" r:id="rId30"/>
     <p:sldId id="285" r:id="rId31"/>
+    <p:sldId id="286" r:id="rId32"/>
   </p:sldIdLst>
   <p:notesMasterIdLst>
-    <p:notesMasterId r:id="rId32"/>
+    <p:notesMasterId r:id="rId33"/>
   </p:notesMasterIdLst>
   <p:sldSz cx="12192000" cy="6858000"/>
   <p:notesSz cx="6858000" cy="12192000"/>
@@ -2579,6 +2580,94 @@
             <a:fld id="{F7021451-1387-4CA6-816F-3879F97B5CBC}" type="slidenum">
               <a:rPr lang="en-US"/>
               <a:t>30</a:t>
+            </a:fld>
+            <a:endParaRPr lang="en-US"/>
+          </a:p>
+        </p:txBody>
+      </p:sp>
+    </p:spTree>
+    <p:extLst>
+      <p:ext uri="{BB962C8B-B14F-4D97-AF65-F5344CB8AC3E}">
+        <p14:creationId xmlns:p14="http://schemas.microsoft.com/office/powerpoint/2010/main" val="1024086991"/>
+      </p:ext>
+    </p:extLst>
+  </p:cSld>
+  <p:clrMapOvr>
+    <a:masterClrMapping/>
+  </p:clrMapOvr>
+</p:notes>
+</file>
+
+<file path=ppt/notesSlides/notesSlide31.xml><?xml version="1.0" encoding="utf-8"?>
+<p:notes xmlns:a="http://schemas.openxmlformats.org/drawingml/2006/main" xmlns:r="http://schemas.openxmlformats.org/officeDocument/2006/relationships" xmlns:p="http://schemas.openxmlformats.org/presentationml/2006/main">
+  <p:cSld>
+    <p:spTree>
+      <p:nvGrpSpPr>
+        <p:cNvPr id="1" name=""/>
+        <p:cNvGrpSpPr/>
+        <p:nvPr/>
+      </p:nvGrpSpPr>
+      <p:grpSpPr>
+        <a:xfrm>
+          <a:off x="0" y="0"/>
+          <a:ext cx="0" cy="0"/>
+          <a:chOff x="0" y="0"/>
+          <a:chExt cx="0" cy="0"/>
+        </a:xfrm>
+      </p:grpSpPr>
+      <p:sp>
+        <p:nvSpPr>
+          <p:cNvPr id="2" name="Slide Image Placeholder 1"/>
+          <p:cNvSpPr>
+            <a:spLocks noGrp="1" noRot="1" noChangeAspect="1"/>
+          </p:cNvSpPr>
+          <p:nvPr>
+            <p:ph type="sldImg"/>
+          </p:nvPr>
+        </p:nvSpPr>
+        <p:spPr/>
+      </p:sp>
+      <p:sp>
+        <p:nvSpPr>
+          <p:cNvPr id="3" name="Notes Placeholder 2"/>
+          <p:cNvSpPr>
+            <a:spLocks noGrp="1"/>
+          </p:cNvSpPr>
+          <p:nvPr>
+            <p:ph type="body" idx="1"/>
+          </p:nvPr>
+        </p:nvSpPr>
+        <p:spPr/>
+        <p:txBody>
+          <a:bodyPr/>
+          <a:lstStyle/>
+          <a:p>
+            <a:r>
+              <a:rPr lang="en-US" dirty="0"/>
+              <a:t/>
+            </a:r>
+            <a:endParaRPr lang="en-US" dirty="0"/>
+          </a:p>
+        </p:txBody>
+      </p:sp>
+      <p:sp>
+        <p:nvSpPr>
+          <p:cNvPr id="4" name="Slide Number Placeholder 3"/>
+          <p:cNvSpPr>
+            <a:spLocks noGrp="1"/>
+          </p:cNvSpPr>
+          <p:nvPr>
+            <p:ph type="sldNum" sz="quarter" idx="10"/>
+          </p:nvPr>
+        </p:nvSpPr>
+        <p:spPr/>
+        <p:txBody>
+          <a:bodyPr/>
+          <a:lstStyle/>
+          <a:p>
+            <a:fld id="{F7021451-1387-4CA6-816F-3879F97B5CBC}" type="slidenum">
+              <a:rPr lang="en-US"/>
+              <a:t>31</a:t>
             </a:fld>
             <a:endParaRPr lang="en-US"/>
           </a:p>
@@ -29421,6 +29510,3003 @@
     <p:bg>
       <p:bgPr>
         <a:solidFill>
+          <a:srgbClr val="FCFAF6"/>
+        </a:solidFill>
+      </p:bgPr>
+    </p:bg>
+    <p:spTree>
+      <p:nvGrpSpPr>
+        <p:cNvPr id="1" name=""/>
+        <p:cNvGrpSpPr/>
+        <p:nvPr/>
+      </p:nvGrpSpPr>
+      <p:grpSpPr>
+        <a:xfrm>
+          <a:off x="0" y="0"/>
+          <a:ext cx="0" cy="0"/>
+          <a:chOff x="0" y="0"/>
+          <a:chExt cx="0" cy="0"/>
+        </a:xfrm>
+      </p:grpSpPr>
+      <p:sp>
+        <p:nvSpPr>
+          <p:cNvPr id="2" name="Shape 0"/>
+          <p:cNvSpPr/>
+          <p:nvPr/>
+        </p:nvSpPr>
+        <p:spPr>
+          <a:xfrm>
+            <a:off x="0" y="0"/>
+            <a:ext cx="12191695" cy="54864"/>
+          </a:xfrm>
+          <a:prstGeom prst="rect">
+            <a:avLst/>
+          </a:prstGeom>
+          <a:solidFill>
+            <a:srgbClr val="18707F"/>
+          </a:solidFill>
+          <a:ln/>
+        </p:spPr>
+      </p:sp>
+      <p:sp>
+        <p:nvSpPr>
+          <p:cNvPr id="3" name="Text 1"/>
+          <p:cNvSpPr/>
+          <p:nvPr/>
+        </p:nvSpPr>
+        <p:spPr>
+          <a:xfrm>
+            <a:off x="548640" y="310896"/>
+            <a:ext cx="7315200" cy="256032"/>
+          </a:xfrm>
+          <a:prstGeom prst="rect">
+            <a:avLst/>
+          </a:prstGeom>
+          <a:noFill/>
+          <a:ln/>
+        </p:spPr>
+        <p:txBody>
+          <a:bodyPr wrap="square" lIns="0" tIns="0" rIns="0" bIns="0" rtlCol="0" anchor="ctr"/>
+          <a:lstStyle/>
+          <a:p>
+            <a:pPr indent="0" marL="0">
+              <a:buNone/>
+            </a:pPr>
+            <a:r>
+              <a:rPr lang="en-US" sz="1100" b="1" spc="200" kern="0" dirty="0">
+                <a:solidFill>
+                  <a:srgbClr val="18707F"/>
+                </a:solidFill>
+                <a:latin typeface="Calibri" pitchFamily="34" charset="0"/>
+                <a:ea typeface="Calibri" pitchFamily="34" charset="-122"/>
+                <a:cs typeface="Calibri" pitchFamily="34" charset="-120"/>
+              </a:rPr>
+              <a:t>VALIDITY · GENERALIZATION</a:t>
+            </a:r>
+            <a:endParaRPr lang="en-US" sz="1100" dirty="0"/>
+          </a:p>
+        </p:txBody>
+      </p:sp>
+      <p:sp>
+        <p:nvSpPr>
+          <p:cNvPr id="4" name="Text 2"/>
+          <p:cNvSpPr/>
+          <p:nvPr/>
+        </p:nvSpPr>
+        <p:spPr>
+          <a:xfrm>
+            <a:off x="548640" y="566928"/>
+            <a:ext cx="11064240" cy="685800"/>
+          </a:xfrm>
+          <a:prstGeom prst="rect">
+            <a:avLst/>
+          </a:prstGeom>
+          <a:noFill/>
+          <a:ln/>
+        </p:spPr>
+        <p:txBody>
+          <a:bodyPr wrap="square" lIns="0" tIns="0" rIns="0" bIns="0" rtlCol="0" anchor="ctr"/>
+          <a:lstStyle/>
+          <a:p>
+            <a:pPr indent="0" marL="0">
+              <a:buNone/>
+            </a:pPr>
+            <a:r>
+              <a:rPr lang="en-US" sz="3000" b="1" dirty="0">
+                <a:solidFill>
+                  <a:srgbClr val="16252C"/>
+                </a:solidFill>
+                <a:latin typeface="Georgia" pitchFamily="34" charset="0"/>
+                <a:ea typeface="Georgia" pitchFamily="34" charset="-122"/>
+                <a:cs typeface="Georgia" pitchFamily="34" charset="-120"/>
+              </a:rPr>
+              <a:t>Would It Work at a New Wetland?</a:t>
+            </a:r>
+            <a:endParaRPr lang="en-US" sz="3000" dirty="0"/>
+          </a:p>
+        </p:txBody>
+      </p:sp>
+      <p:sp>
+        <p:nvSpPr>
+          <p:cNvPr id="5" name="Text 3"/>
+          <p:cNvSpPr/>
+          <p:nvPr/>
+        </p:nvSpPr>
+        <p:spPr>
+          <a:xfrm>
+            <a:off x="11430000" y="6355080"/>
+            <a:ext cx="411480" cy="274320"/>
+          </a:xfrm>
+          <a:prstGeom prst="rect">
+            <a:avLst/>
+          </a:prstGeom>
+          <a:noFill/>
+          <a:ln/>
+        </p:spPr>
+        <p:txBody>
+          <a:bodyPr wrap="square" lIns="0" tIns="0" rIns="0" bIns="0" rtlCol="0" anchor="ctr"/>
+          <a:lstStyle/>
+          <a:p>
+            <a:pPr algn="r" indent="0" marL="0">
+              <a:buNone/>
+            </a:pPr>
+            <a:r>
+              <a:rPr lang="en-US" sz="1000" dirty="0">
+                <a:solidFill>
+                  <a:srgbClr val="5F7580"/>
+                </a:solidFill>
+                <a:latin typeface="Calibri" pitchFamily="34" charset="0"/>
+                <a:ea typeface="Calibri" pitchFamily="34" charset="-122"/>
+                <a:cs typeface="Calibri" pitchFamily="34" charset="-120"/>
+              </a:rPr>
+              <a:t>23</a:t>
+            </a:r>
+            <a:endParaRPr lang="en-US" sz="1000" dirty="0"/>
+          </a:p>
+        </p:txBody>
+      </p:sp>
+      <p:sp>
+        <p:nvSpPr>
+          <p:cNvPr id="6" name="Text 4"/>
+          <p:cNvSpPr/>
+          <p:nvPr/>
+        </p:nvSpPr>
+        <p:spPr>
+          <a:xfrm>
+            <a:off x="548640" y="1298448"/>
+            <a:ext cx="11064240" cy="457200"/>
+          </a:xfrm>
+          <a:prstGeom prst="rect">
+            <a:avLst/>
+          </a:prstGeom>
+          <a:noFill/>
+          <a:ln/>
+        </p:spPr>
+        <p:txBody>
+          <a:bodyPr wrap="square" lIns="0" tIns="0" rIns="0" bIns="0" rtlCol="0" anchor="t"/>
+          <a:lstStyle/>
+          <a:p>
+            <a:pPr indent="0" marL="0">
+              <a:buNone/>
+            </a:pPr>
+            <a:r>
+              <a:rPr lang="en-US" sz="1250" dirty="0">
+                <a:solidFill>
+                  <a:srgbClr val="5F7580"/>
+                </a:solidFill>
+                <a:latin typeface="Calibri" pitchFamily="34" charset="0"/>
+                <a:ea typeface="Calibri" pitchFamily="34" charset="-122"/>
+                <a:cs typeface="Calibri" pitchFamily="34" charset="-120"/>
+              </a:rPr>
+              <a:t>Random cross-validation lets a model score by recognising the site. Grouping by site removes that shortcut. The naive result looks catastrophic — and is misleading.</a:t>
+            </a:r>
+            <a:endParaRPr lang="en-US" sz="1250" dirty="0"/>
+          </a:p>
+        </p:txBody>
+      </p:sp>
+      <p:graphicFrame>
+        <p:nvGraphicFramePr>
+          <p:cNvPr id="24" name="Table 0"/>
+          <p:cNvGraphicFramePr>
+            <a:graphicFrameLocks noGrp="1"/>
+          </p:cNvGraphicFramePr>
+          <p:nvPr>
+            <p:extLst>
+              <p:ext uri="{D42A27DB-BD31-4B8C-83A1-F6EECF244321}">
+                <p14:modId xmlns:p14="http://schemas.microsoft.com/office/powerpoint/2010/main" val="1579011935"/>
+              </p:ext>
+            </p:extLst>
+          </p:nvPr>
+        </p:nvGraphicFramePr>
+        <p:xfrm>
+          <a:off x="548640" y="1828800"/>
+          <a:ext cx="5486400" cy="914400"/>
+        </p:xfrm>
+        <a:graphic>
+          <a:graphicData uri="http://schemas.openxmlformats.org/drawingml/2006/table">
+            <a:tbl>
+              <a:tblPr/>
+              <a:tblGrid>
+                <a:gridCol w="1920240"/>
+                <a:gridCol w="1234440"/>
+                <a:gridCol w="1234440"/>
+                <a:gridCol w="1097280"/>
+              </a:tblGrid>
+              <a:tr h="402336">
+                <a:tc>
+                  <a:txBody>
+                    <a:bodyPr/>
+                    <a:lstStyle/>
+                    <a:p>
+                      <a:pPr algn="ctr" indent="0" marL="0">
+                        <a:buNone/>
+                      </a:pPr>
+                      <a:r>
+                        <a:rPr lang="en-US" sz="1100" b="1" dirty="0">
+                          <a:solidFill>
+                            <a:srgbClr val="FFFFFF"/>
+                          </a:solidFill>
+                          <a:latin typeface="Calibri" pitchFamily="34" charset="0"/>
+                          <a:ea typeface="Calibri" pitchFamily="34" charset="-122"/>
+                          <a:cs typeface="Calibri" pitchFamily="34" charset="-120"/>
+                        </a:rPr>
+                        <a:t>Leave-one-site-out</a:t>
+                      </a:r>
+                      <a:endParaRPr lang="en-US" sz="1100" dirty="0">
+                        <a:latin typeface="Calibri" charset="0"/>
+                        <a:ea typeface="Calibri" charset="0"/>
+                        <a:cs typeface="Calibri" charset="0"/>
+                      </a:endParaRPr>
+                    </a:p>
+                  </a:txBody>
+                  <a:tcPr marL="91440" marR="91440" marT="45720" marB="45720" anchor="ctr">
+                    <a:lnL w="6350" cap="flat" cmpd="sng" algn="ctr">
+                      <a:solidFill>
+                        <a:srgbClr val="DDE5E8"/>
+                      </a:solidFill>
+                      <a:prstDash val="solid"/>
+                      <a:round/>
+                      <a:headEnd type="none" w="med" len="med"/>
+                      <a:tailEnd type="none" w="med" len="med"/>
+                    </a:lnL>
+                    <a:lnR w="6350" cap="flat" cmpd="sng" algn="ctr">
+                      <a:solidFill>
+                        <a:srgbClr val="DDE5E8"/>
+                      </a:solidFill>
+                      <a:prstDash val="solid"/>
+                      <a:round/>
+                      <a:headEnd type="none" w="med" len="med"/>
+                      <a:tailEnd type="none" w="med" len="med"/>
+                    </a:lnR>
+                    <a:lnT w="6350" cap="flat" cmpd="sng" algn="ctr">
+                      <a:solidFill>
+                        <a:srgbClr val="DDE5E8"/>
+                      </a:solidFill>
+                      <a:prstDash val="solid"/>
+                      <a:round/>
+                      <a:headEnd type="none" w="med" len="med"/>
+                      <a:tailEnd type="none" w="med" len="med"/>
+                    </a:lnT>
+                    <a:lnB w="6350" cap="flat" cmpd="sng" algn="ctr">
+                      <a:solidFill>
+                        <a:srgbClr val="DDE5E8"/>
+                      </a:solidFill>
+                      <a:prstDash val="solid"/>
+                      <a:round/>
+                      <a:headEnd type="none" w="med" len="med"/>
+                      <a:tailEnd type="none" w="med" len="med"/>
+                    </a:lnB>
+                    <a:solidFill>
+                      <a:srgbClr val="0B3C49"/>
+                    </a:solidFill>
+                  </a:tcPr>
+                </a:tc>
+                <a:tc>
+                  <a:txBody>
+                    <a:bodyPr/>
+                    <a:lstStyle/>
+                    <a:p>
+                      <a:pPr algn="ctr" indent="0" marL="0">
+                        <a:buNone/>
+                      </a:pPr>
+                      <a:r>
+                        <a:rPr lang="en-US" sz="1100" b="1" dirty="0">
+                          <a:solidFill>
+                            <a:srgbClr val="FFFFFF"/>
+                          </a:solidFill>
+                          <a:latin typeface="Calibri" pitchFamily="34" charset="0"/>
+                          <a:ea typeface="Calibri" pitchFamily="34" charset="-122"/>
+                          <a:cs typeface="Calibri" pitchFamily="34" charset="-120"/>
+                        </a:rPr>
+                        <a:t>LOLO AUC</a:t>
+                      </a:r>
+                      <a:endParaRPr lang="en-US" sz="1100" dirty="0">
+                        <a:latin typeface="Calibri" charset="0"/>
+                        <a:ea typeface="Calibri" charset="0"/>
+                        <a:cs typeface="Calibri" charset="0"/>
+                      </a:endParaRPr>
+                    </a:p>
+                  </a:txBody>
+                  <a:tcPr marL="91440" marR="91440" marT="45720" marB="45720" anchor="ctr">
+                    <a:lnL w="6350" cap="flat" cmpd="sng" algn="ctr">
+                      <a:solidFill>
+                        <a:srgbClr val="DDE5E8"/>
+                      </a:solidFill>
+                      <a:prstDash val="solid"/>
+                      <a:round/>
+                      <a:headEnd type="none" w="med" len="med"/>
+                      <a:tailEnd type="none" w="med" len="med"/>
+                    </a:lnL>
+                    <a:lnR w="6350" cap="flat" cmpd="sng" algn="ctr">
+                      <a:solidFill>
+                        <a:srgbClr val="DDE5E8"/>
+                      </a:solidFill>
+                      <a:prstDash val="solid"/>
+                      <a:round/>
+                      <a:headEnd type="none" w="med" len="med"/>
+                      <a:tailEnd type="none" w="med" len="med"/>
+                    </a:lnR>
+                    <a:lnT w="6350" cap="flat" cmpd="sng" algn="ctr">
+                      <a:solidFill>
+                        <a:srgbClr val="DDE5E8"/>
+                      </a:solidFill>
+                      <a:prstDash val="solid"/>
+                      <a:round/>
+                      <a:headEnd type="none" w="med" len="med"/>
+                      <a:tailEnd type="none" w="med" len="med"/>
+                    </a:lnT>
+                    <a:lnB w="6350" cap="flat" cmpd="sng" algn="ctr">
+                      <a:solidFill>
+                        <a:srgbClr val="DDE5E8"/>
+                      </a:solidFill>
+                      <a:prstDash val="solid"/>
+                      <a:round/>
+                      <a:headEnd type="none" w="med" len="med"/>
+                      <a:tailEnd type="none" w="med" len="med"/>
+                    </a:lnB>
+                    <a:solidFill>
+                      <a:srgbClr val="0B3C49"/>
+                    </a:solidFill>
+                  </a:tcPr>
+                </a:tc>
+                <a:tc>
+                  <a:txBody>
+                    <a:bodyPr/>
+                    <a:lstStyle/>
+                    <a:p>
+                      <a:pPr algn="ctr" indent="0" marL="0">
+                        <a:buNone/>
+                      </a:pPr>
+                      <a:r>
+                        <a:rPr lang="en-US" sz="1100" b="1" dirty="0">
+                          <a:solidFill>
+                            <a:srgbClr val="FFFFFF"/>
+                          </a:solidFill>
+                          <a:latin typeface="Calibri" pitchFamily="34" charset="0"/>
+                          <a:ea typeface="Calibri" pitchFamily="34" charset="-122"/>
+                          <a:cs typeface="Calibri" pitchFamily="34" charset="-120"/>
+                        </a:rPr>
+                        <a:t>Random CV</a:t>
+                      </a:r>
+                      <a:endParaRPr lang="en-US" sz="1100" dirty="0">
+                        <a:latin typeface="Calibri" charset="0"/>
+                        <a:ea typeface="Calibri" charset="0"/>
+                        <a:cs typeface="Calibri" charset="0"/>
+                      </a:endParaRPr>
+                    </a:p>
+                  </a:txBody>
+                  <a:tcPr marL="91440" marR="91440" marT="45720" marB="45720" anchor="ctr">
+                    <a:lnL w="6350" cap="flat" cmpd="sng" algn="ctr">
+                      <a:solidFill>
+                        <a:srgbClr val="DDE5E8"/>
+                      </a:solidFill>
+                      <a:prstDash val="solid"/>
+                      <a:round/>
+                      <a:headEnd type="none" w="med" len="med"/>
+                      <a:tailEnd type="none" w="med" len="med"/>
+                    </a:lnL>
+                    <a:lnR w="6350" cap="flat" cmpd="sng" algn="ctr">
+                      <a:solidFill>
+                        <a:srgbClr val="DDE5E8"/>
+                      </a:solidFill>
+                      <a:prstDash val="solid"/>
+                      <a:round/>
+                      <a:headEnd type="none" w="med" len="med"/>
+                      <a:tailEnd type="none" w="med" len="med"/>
+                    </a:lnR>
+                    <a:lnT w="6350" cap="flat" cmpd="sng" algn="ctr">
+                      <a:solidFill>
+                        <a:srgbClr val="DDE5E8"/>
+                      </a:solidFill>
+                      <a:prstDash val="solid"/>
+                      <a:round/>
+                      <a:headEnd type="none" w="med" len="med"/>
+                      <a:tailEnd type="none" w="med" len="med"/>
+                    </a:lnT>
+                    <a:lnB w="6350" cap="flat" cmpd="sng" algn="ctr">
+                      <a:solidFill>
+                        <a:srgbClr val="DDE5E8"/>
+                      </a:solidFill>
+                      <a:prstDash val="solid"/>
+                      <a:round/>
+                      <a:headEnd type="none" w="med" len="med"/>
+                      <a:tailEnd type="none" w="med" len="med"/>
+                    </a:lnB>
+                    <a:solidFill>
+                      <a:srgbClr val="0B3C49"/>
+                    </a:solidFill>
+                  </a:tcPr>
+                </a:tc>
+                <a:tc>
+                  <a:txBody>
+                    <a:bodyPr/>
+                    <a:lstStyle/>
+                    <a:p>
+                      <a:pPr algn="ctr" indent="0" marL="0">
+                        <a:buNone/>
+                      </a:pPr>
+                      <a:r>
+                        <a:rPr lang="en-US" sz="1100" b="1" dirty="0">
+                          <a:solidFill>
+                            <a:srgbClr val="FFFFFF"/>
+                          </a:solidFill>
+                          <a:latin typeface="Calibri" pitchFamily="34" charset="0"/>
+                          <a:ea typeface="Calibri" pitchFamily="34" charset="-122"/>
+                          <a:cs typeface="Calibri" pitchFamily="34" charset="-120"/>
+                        </a:rPr>
+                        <a:t>Drop</a:t>
+                      </a:r>
+                      <a:endParaRPr lang="en-US" sz="1100" dirty="0">
+                        <a:latin typeface="Calibri" charset="0"/>
+                        <a:ea typeface="Calibri" charset="0"/>
+                        <a:cs typeface="Calibri" charset="0"/>
+                      </a:endParaRPr>
+                    </a:p>
+                  </a:txBody>
+                  <a:tcPr marL="91440" marR="91440" marT="45720" marB="45720" anchor="ctr">
+                    <a:lnL w="6350" cap="flat" cmpd="sng" algn="ctr">
+                      <a:solidFill>
+                        <a:srgbClr val="DDE5E8"/>
+                      </a:solidFill>
+                      <a:prstDash val="solid"/>
+                      <a:round/>
+                      <a:headEnd type="none" w="med" len="med"/>
+                      <a:tailEnd type="none" w="med" len="med"/>
+                    </a:lnL>
+                    <a:lnR w="6350" cap="flat" cmpd="sng" algn="ctr">
+                      <a:solidFill>
+                        <a:srgbClr val="DDE5E8"/>
+                      </a:solidFill>
+                      <a:prstDash val="solid"/>
+                      <a:round/>
+                      <a:headEnd type="none" w="med" len="med"/>
+                      <a:tailEnd type="none" w="med" len="med"/>
+                    </a:lnR>
+                    <a:lnT w="6350" cap="flat" cmpd="sng" algn="ctr">
+                      <a:solidFill>
+                        <a:srgbClr val="DDE5E8"/>
+                      </a:solidFill>
+                      <a:prstDash val="solid"/>
+                      <a:round/>
+                      <a:headEnd type="none" w="med" len="med"/>
+                      <a:tailEnd type="none" w="med" len="med"/>
+                    </a:lnT>
+                    <a:lnB w="6350" cap="flat" cmpd="sng" algn="ctr">
+                      <a:solidFill>
+                        <a:srgbClr val="DDE5E8"/>
+                      </a:solidFill>
+                      <a:prstDash val="solid"/>
+                      <a:round/>
+                      <a:headEnd type="none" w="med" len="med"/>
+                      <a:tailEnd type="none" w="med" len="med"/>
+                    </a:lnB>
+                    <a:solidFill>
+                      <a:srgbClr val="0B3C49"/>
+                    </a:solidFill>
+                  </a:tcPr>
+                </a:tc>
+              </a:tr>
+              <a:tr h="402336">
+                <a:tc>
+                  <a:txBody>
+                    <a:bodyPr/>
+                    <a:lstStyle/>
+                    <a:p>
+                      <a:pPr algn="ctr" indent="0" marL="0">
+                        <a:buNone/>
+                      </a:pPr>
+                      <a:r>
+                        <a:rPr lang="en-US" sz="1100" dirty="0">
+                          <a:solidFill>
+                            <a:srgbClr val="16252C"/>
+                          </a:solidFill>
+                          <a:latin typeface="Calibri" pitchFamily="34" charset="0"/>
+                          <a:ea typeface="Calibri" pitchFamily="34" charset="-122"/>
+                          <a:cs typeface="Calibri" pitchFamily="34" charset="-120"/>
+                        </a:rPr>
+                        <a:t>SVM-RBF</a:t>
+                      </a:r>
+                      <a:endParaRPr lang="en-US" sz="1100" dirty="0">
+                        <a:latin typeface="Calibri" charset="0"/>
+                        <a:ea typeface="Calibri" charset="0"/>
+                        <a:cs typeface="Calibri" charset="0"/>
+                      </a:endParaRPr>
+                    </a:p>
+                  </a:txBody>
+                  <a:tcPr marL="91440" marR="91440" marT="45720" marB="45720" anchor="ctr">
+                    <a:lnL w="6350" cap="flat" cmpd="sng" algn="ctr">
+                      <a:solidFill>
+                        <a:srgbClr val="DDE5E8"/>
+                      </a:solidFill>
+                      <a:prstDash val="solid"/>
+                      <a:round/>
+                      <a:headEnd type="none" w="med" len="med"/>
+                      <a:tailEnd type="none" w="med" len="med"/>
+                    </a:lnL>
+                    <a:lnR w="6350" cap="flat" cmpd="sng" algn="ctr">
+                      <a:solidFill>
+                        <a:srgbClr val="DDE5E8"/>
+                      </a:solidFill>
+                      <a:prstDash val="solid"/>
+                      <a:round/>
+                      <a:headEnd type="none" w="med" len="med"/>
+                      <a:tailEnd type="none" w="med" len="med"/>
+                    </a:lnR>
+                    <a:lnT w="6350" cap="flat" cmpd="sng" algn="ctr">
+                      <a:solidFill>
+                        <a:srgbClr val="DDE5E8"/>
+                      </a:solidFill>
+                      <a:prstDash val="solid"/>
+                      <a:round/>
+                      <a:headEnd type="none" w="med" len="med"/>
+                      <a:tailEnd type="none" w="med" len="med"/>
+                    </a:lnT>
+                    <a:lnB w="6350" cap="flat" cmpd="sng" algn="ctr">
+                      <a:solidFill>
+                        <a:srgbClr val="DDE5E8"/>
+                      </a:solidFill>
+                      <a:prstDash val="solid"/>
+                      <a:round/>
+                      <a:headEnd type="none" w="med" len="med"/>
+                      <a:tailEnd type="none" w="med" len="med"/>
+                    </a:lnB>
+                  </a:tcPr>
+                </a:tc>
+                <a:tc>
+                  <a:txBody>
+                    <a:bodyPr/>
+                    <a:lstStyle/>
+                    <a:p>
+                      <a:pPr algn="ctr" indent="0" marL="0">
+                        <a:buNone/>
+                      </a:pPr>
+                      <a:r>
+                        <a:rPr lang="en-US" sz="1100" b="1" dirty="0">
+                          <a:solidFill>
+                            <a:srgbClr val="D2603A"/>
+                          </a:solidFill>
+                          <a:latin typeface="Calibri" pitchFamily="34" charset="0"/>
+                          <a:ea typeface="Calibri" pitchFamily="34" charset="-122"/>
+                          <a:cs typeface="Calibri" pitchFamily="34" charset="-120"/>
+                        </a:rPr>
+                        <a:t>0.443</a:t>
+                      </a:r>
+                      <a:endParaRPr lang="en-US" sz="1100" dirty="0">
+                        <a:latin typeface="Calibri" charset="0"/>
+                        <a:ea typeface="Calibri" charset="0"/>
+                        <a:cs typeface="Calibri" charset="0"/>
+                      </a:endParaRPr>
+                    </a:p>
+                  </a:txBody>
+                  <a:tcPr marL="91440" marR="91440" marT="45720" marB="45720" anchor="ctr">
+                    <a:lnL w="6350" cap="flat" cmpd="sng" algn="ctr">
+                      <a:solidFill>
+                        <a:srgbClr val="DDE5E8"/>
+                      </a:solidFill>
+                      <a:prstDash val="solid"/>
+                      <a:round/>
+                      <a:headEnd type="none" w="med" len="med"/>
+                      <a:tailEnd type="none" w="med" len="med"/>
+                    </a:lnL>
+                    <a:lnR w="6350" cap="flat" cmpd="sng" algn="ctr">
+                      <a:solidFill>
+                        <a:srgbClr val="DDE5E8"/>
+                      </a:solidFill>
+                      <a:prstDash val="solid"/>
+                      <a:round/>
+                      <a:headEnd type="none" w="med" len="med"/>
+                      <a:tailEnd type="none" w="med" len="med"/>
+                    </a:lnR>
+                    <a:lnT w="6350" cap="flat" cmpd="sng" algn="ctr">
+                      <a:solidFill>
+                        <a:srgbClr val="DDE5E8"/>
+                      </a:solidFill>
+                      <a:prstDash val="solid"/>
+                      <a:round/>
+                      <a:headEnd type="none" w="med" len="med"/>
+                      <a:tailEnd type="none" w="med" len="med"/>
+                    </a:lnT>
+                    <a:lnB w="6350" cap="flat" cmpd="sng" algn="ctr">
+                      <a:solidFill>
+                        <a:srgbClr val="DDE5E8"/>
+                      </a:solidFill>
+                      <a:prstDash val="solid"/>
+                      <a:round/>
+                      <a:headEnd type="none" w="med" len="med"/>
+                      <a:tailEnd type="none" w="med" len="med"/>
+                    </a:lnB>
+                  </a:tcPr>
+                </a:tc>
+                <a:tc>
+                  <a:txBody>
+                    <a:bodyPr/>
+                    <a:lstStyle/>
+                    <a:p>
+                      <a:pPr algn="ctr" indent="0" marL="0">
+                        <a:buNone/>
+                      </a:pPr>
+                      <a:r>
+                        <a:rPr lang="en-US" sz="1100" dirty="0">
+                          <a:solidFill>
+                            <a:srgbClr val="16252C"/>
+                          </a:solidFill>
+                          <a:latin typeface="Calibri" pitchFamily="34" charset="0"/>
+                          <a:ea typeface="Calibri" pitchFamily="34" charset="-122"/>
+                          <a:cs typeface="Calibri" pitchFamily="34" charset="-120"/>
+                        </a:rPr>
+                        <a:t>0.853</a:t>
+                      </a:r>
+                      <a:endParaRPr lang="en-US" sz="1100" dirty="0">
+                        <a:latin typeface="Calibri" charset="0"/>
+                        <a:ea typeface="Calibri" charset="0"/>
+                        <a:cs typeface="Calibri" charset="0"/>
+                      </a:endParaRPr>
+                    </a:p>
+                  </a:txBody>
+                  <a:tcPr marL="91440" marR="91440" marT="45720" marB="45720" anchor="ctr">
+                    <a:lnL w="6350" cap="flat" cmpd="sng" algn="ctr">
+                      <a:solidFill>
+                        <a:srgbClr val="DDE5E8"/>
+                      </a:solidFill>
+                      <a:prstDash val="solid"/>
+                      <a:round/>
+                      <a:headEnd type="none" w="med" len="med"/>
+                      <a:tailEnd type="none" w="med" len="med"/>
+                    </a:lnL>
+                    <a:lnR w="6350" cap="flat" cmpd="sng" algn="ctr">
+                      <a:solidFill>
+                        <a:srgbClr val="DDE5E8"/>
+                      </a:solidFill>
+                      <a:prstDash val="solid"/>
+                      <a:round/>
+                      <a:headEnd type="none" w="med" len="med"/>
+                      <a:tailEnd type="none" w="med" len="med"/>
+                    </a:lnR>
+                    <a:lnT w="6350" cap="flat" cmpd="sng" algn="ctr">
+                      <a:solidFill>
+                        <a:srgbClr val="DDE5E8"/>
+                      </a:solidFill>
+                      <a:prstDash val="solid"/>
+                      <a:round/>
+                      <a:headEnd type="none" w="med" len="med"/>
+                      <a:tailEnd type="none" w="med" len="med"/>
+                    </a:lnT>
+                    <a:lnB w="6350" cap="flat" cmpd="sng" algn="ctr">
+                      <a:solidFill>
+                        <a:srgbClr val="DDE5E8"/>
+                      </a:solidFill>
+                      <a:prstDash val="solid"/>
+                      <a:round/>
+                      <a:headEnd type="none" w="med" len="med"/>
+                      <a:tailEnd type="none" w="med" len="med"/>
+                    </a:lnB>
+                  </a:tcPr>
+                </a:tc>
+                <a:tc>
+                  <a:txBody>
+                    <a:bodyPr/>
+                    <a:lstStyle/>
+                    <a:p>
+                      <a:pPr algn="ctr" indent="0" marL="0">
+                        <a:buNone/>
+                      </a:pPr>
+                      <a:r>
+                        <a:rPr lang="en-US" sz="1100" dirty="0">
+                          <a:solidFill>
+                            <a:srgbClr val="D2603A"/>
+                          </a:solidFill>
+                          <a:latin typeface="Calibri" pitchFamily="34" charset="0"/>
+                          <a:ea typeface="Calibri" pitchFamily="34" charset="-122"/>
+                          <a:cs typeface="Calibri" pitchFamily="34" charset="-120"/>
+                        </a:rPr>
+                        <a:t>−0.409</a:t>
+                      </a:r>
+                      <a:endParaRPr lang="en-US" sz="1100" dirty="0">
+                        <a:latin typeface="Calibri" charset="0"/>
+                        <a:ea typeface="Calibri" charset="0"/>
+                        <a:cs typeface="Calibri" charset="0"/>
+                      </a:endParaRPr>
+                    </a:p>
+                  </a:txBody>
+                  <a:tcPr marL="91440" marR="91440" marT="45720" marB="45720" anchor="ctr">
+                    <a:lnL w="6350" cap="flat" cmpd="sng" algn="ctr">
+                      <a:solidFill>
+                        <a:srgbClr val="DDE5E8"/>
+                      </a:solidFill>
+                      <a:prstDash val="solid"/>
+                      <a:round/>
+                      <a:headEnd type="none" w="med" len="med"/>
+                      <a:tailEnd type="none" w="med" len="med"/>
+                    </a:lnL>
+                    <a:lnR w="6350" cap="flat" cmpd="sng" algn="ctr">
+                      <a:solidFill>
+                        <a:srgbClr val="DDE5E8"/>
+                      </a:solidFill>
+                      <a:prstDash val="solid"/>
+                      <a:round/>
+                      <a:headEnd type="none" w="med" len="med"/>
+                      <a:tailEnd type="none" w="med" len="med"/>
+                    </a:lnR>
+                    <a:lnT w="6350" cap="flat" cmpd="sng" algn="ctr">
+                      <a:solidFill>
+                        <a:srgbClr val="DDE5E8"/>
+                      </a:solidFill>
+                      <a:prstDash val="solid"/>
+                      <a:round/>
+                      <a:headEnd type="none" w="med" len="med"/>
+                      <a:tailEnd type="none" w="med" len="med"/>
+                    </a:lnT>
+                    <a:lnB w="6350" cap="flat" cmpd="sng" algn="ctr">
+                      <a:solidFill>
+                        <a:srgbClr val="DDE5E8"/>
+                      </a:solidFill>
+                      <a:prstDash val="solid"/>
+                      <a:round/>
+                      <a:headEnd type="none" w="med" len="med"/>
+                      <a:tailEnd type="none" w="med" len="med"/>
+                    </a:lnB>
+                  </a:tcPr>
+                </a:tc>
+              </a:tr>
+              <a:tr h="402336">
+                <a:tc>
+                  <a:txBody>
+                    <a:bodyPr/>
+                    <a:lstStyle/>
+                    <a:p>
+                      <a:pPr algn="ctr" indent="0" marL="0">
+                        <a:buNone/>
+                      </a:pPr>
+                      <a:r>
+                        <a:rPr lang="en-US" sz="1100" dirty="0">
+                          <a:solidFill>
+                            <a:srgbClr val="16252C"/>
+                          </a:solidFill>
+                          <a:latin typeface="Calibri" pitchFamily="34" charset="0"/>
+                          <a:ea typeface="Calibri" pitchFamily="34" charset="-122"/>
+                          <a:cs typeface="Calibri" pitchFamily="34" charset="-120"/>
+                        </a:rPr>
+                        <a:t>ExtraTrees</a:t>
+                      </a:r>
+                      <a:endParaRPr lang="en-US" sz="1100" dirty="0">
+                        <a:latin typeface="Calibri" charset="0"/>
+                        <a:ea typeface="Calibri" charset="0"/>
+                        <a:cs typeface="Calibri" charset="0"/>
+                      </a:endParaRPr>
+                    </a:p>
+                  </a:txBody>
+                  <a:tcPr marL="91440" marR="91440" marT="45720" marB="45720" anchor="ctr">
+                    <a:lnL w="6350" cap="flat" cmpd="sng" algn="ctr">
+                      <a:solidFill>
+                        <a:srgbClr val="DDE5E8"/>
+                      </a:solidFill>
+                      <a:prstDash val="solid"/>
+                      <a:round/>
+                      <a:headEnd type="none" w="med" len="med"/>
+                      <a:tailEnd type="none" w="med" len="med"/>
+                    </a:lnL>
+                    <a:lnR w="6350" cap="flat" cmpd="sng" algn="ctr">
+                      <a:solidFill>
+                        <a:srgbClr val="DDE5E8"/>
+                      </a:solidFill>
+                      <a:prstDash val="solid"/>
+                      <a:round/>
+                      <a:headEnd type="none" w="med" len="med"/>
+                      <a:tailEnd type="none" w="med" len="med"/>
+                    </a:lnR>
+                    <a:lnT w="6350" cap="flat" cmpd="sng" algn="ctr">
+                      <a:solidFill>
+                        <a:srgbClr val="DDE5E8"/>
+                      </a:solidFill>
+                      <a:prstDash val="solid"/>
+                      <a:round/>
+                      <a:headEnd type="none" w="med" len="med"/>
+                      <a:tailEnd type="none" w="med" len="med"/>
+                    </a:lnT>
+                    <a:lnB w="6350" cap="flat" cmpd="sng" algn="ctr">
+                      <a:solidFill>
+                        <a:srgbClr val="DDE5E8"/>
+                      </a:solidFill>
+                      <a:prstDash val="solid"/>
+                      <a:round/>
+                      <a:headEnd type="none" w="med" len="med"/>
+                      <a:tailEnd type="none" w="med" len="med"/>
+                    </a:lnB>
+                  </a:tcPr>
+                </a:tc>
+                <a:tc>
+                  <a:txBody>
+                    <a:bodyPr/>
+                    <a:lstStyle/>
+                    <a:p>
+                      <a:pPr algn="ctr" indent="0" marL="0">
+                        <a:buNone/>
+                      </a:pPr>
+                      <a:r>
+                        <a:rPr lang="en-US" sz="1100" b="1" dirty="0">
+                          <a:solidFill>
+                            <a:srgbClr val="D2603A"/>
+                          </a:solidFill>
+                          <a:latin typeface="Calibri" pitchFamily="34" charset="0"/>
+                          <a:ea typeface="Calibri" pitchFamily="34" charset="-122"/>
+                          <a:cs typeface="Calibri" pitchFamily="34" charset="-120"/>
+                        </a:rPr>
+                        <a:t>0.443</a:t>
+                      </a:r>
+                      <a:endParaRPr lang="en-US" sz="1100" dirty="0">
+                        <a:latin typeface="Calibri" charset="0"/>
+                        <a:ea typeface="Calibri" charset="0"/>
+                        <a:cs typeface="Calibri" charset="0"/>
+                      </a:endParaRPr>
+                    </a:p>
+                  </a:txBody>
+                  <a:tcPr marL="91440" marR="91440" marT="45720" marB="45720" anchor="ctr">
+                    <a:lnL w="6350" cap="flat" cmpd="sng" algn="ctr">
+                      <a:solidFill>
+                        <a:srgbClr val="DDE5E8"/>
+                      </a:solidFill>
+                      <a:prstDash val="solid"/>
+                      <a:round/>
+                      <a:headEnd type="none" w="med" len="med"/>
+                      <a:tailEnd type="none" w="med" len="med"/>
+                    </a:lnL>
+                    <a:lnR w="6350" cap="flat" cmpd="sng" algn="ctr">
+                      <a:solidFill>
+                        <a:srgbClr val="DDE5E8"/>
+                      </a:solidFill>
+                      <a:prstDash val="solid"/>
+                      <a:round/>
+                      <a:headEnd type="none" w="med" len="med"/>
+                      <a:tailEnd type="none" w="med" len="med"/>
+                    </a:lnR>
+                    <a:lnT w="6350" cap="flat" cmpd="sng" algn="ctr">
+                      <a:solidFill>
+                        <a:srgbClr val="DDE5E8"/>
+                      </a:solidFill>
+                      <a:prstDash val="solid"/>
+                      <a:round/>
+                      <a:headEnd type="none" w="med" len="med"/>
+                      <a:tailEnd type="none" w="med" len="med"/>
+                    </a:lnT>
+                    <a:lnB w="6350" cap="flat" cmpd="sng" algn="ctr">
+                      <a:solidFill>
+                        <a:srgbClr val="DDE5E8"/>
+                      </a:solidFill>
+                      <a:prstDash val="solid"/>
+                      <a:round/>
+                      <a:headEnd type="none" w="med" len="med"/>
+                      <a:tailEnd type="none" w="med" len="med"/>
+                    </a:lnB>
+                  </a:tcPr>
+                </a:tc>
+                <a:tc>
+                  <a:txBody>
+                    <a:bodyPr/>
+                    <a:lstStyle/>
+                    <a:p>
+                      <a:pPr algn="ctr" indent="0" marL="0">
+                        <a:buNone/>
+                      </a:pPr>
+                      <a:r>
+                        <a:rPr lang="en-US" sz="1100" dirty="0">
+                          <a:solidFill>
+                            <a:srgbClr val="16252C"/>
+                          </a:solidFill>
+                          <a:latin typeface="Calibri" pitchFamily="34" charset="0"/>
+                          <a:ea typeface="Calibri" pitchFamily="34" charset="-122"/>
+                          <a:cs typeface="Calibri" pitchFamily="34" charset="-120"/>
+                        </a:rPr>
+                        <a:t>0.842</a:t>
+                      </a:r>
+                      <a:endParaRPr lang="en-US" sz="1100" dirty="0">
+                        <a:latin typeface="Calibri" charset="0"/>
+                        <a:ea typeface="Calibri" charset="0"/>
+                        <a:cs typeface="Calibri" charset="0"/>
+                      </a:endParaRPr>
+                    </a:p>
+                  </a:txBody>
+                  <a:tcPr marL="91440" marR="91440" marT="45720" marB="45720" anchor="ctr">
+                    <a:lnL w="6350" cap="flat" cmpd="sng" algn="ctr">
+                      <a:solidFill>
+                        <a:srgbClr val="DDE5E8"/>
+                      </a:solidFill>
+                      <a:prstDash val="solid"/>
+                      <a:round/>
+                      <a:headEnd type="none" w="med" len="med"/>
+                      <a:tailEnd type="none" w="med" len="med"/>
+                    </a:lnL>
+                    <a:lnR w="6350" cap="flat" cmpd="sng" algn="ctr">
+                      <a:solidFill>
+                        <a:srgbClr val="DDE5E8"/>
+                      </a:solidFill>
+                      <a:prstDash val="solid"/>
+                      <a:round/>
+                      <a:headEnd type="none" w="med" len="med"/>
+                      <a:tailEnd type="none" w="med" len="med"/>
+                    </a:lnR>
+                    <a:lnT w="6350" cap="flat" cmpd="sng" algn="ctr">
+                      <a:solidFill>
+                        <a:srgbClr val="DDE5E8"/>
+                      </a:solidFill>
+                      <a:prstDash val="solid"/>
+                      <a:round/>
+                      <a:headEnd type="none" w="med" len="med"/>
+                      <a:tailEnd type="none" w="med" len="med"/>
+                    </a:lnT>
+                    <a:lnB w="6350" cap="flat" cmpd="sng" algn="ctr">
+                      <a:solidFill>
+                        <a:srgbClr val="DDE5E8"/>
+                      </a:solidFill>
+                      <a:prstDash val="solid"/>
+                      <a:round/>
+                      <a:headEnd type="none" w="med" len="med"/>
+                      <a:tailEnd type="none" w="med" len="med"/>
+                    </a:lnB>
+                  </a:tcPr>
+                </a:tc>
+                <a:tc>
+                  <a:txBody>
+                    <a:bodyPr/>
+                    <a:lstStyle/>
+                    <a:p>
+                      <a:pPr algn="ctr" indent="0" marL="0">
+                        <a:buNone/>
+                      </a:pPr>
+                      <a:r>
+                        <a:rPr lang="en-US" sz="1100" dirty="0">
+                          <a:solidFill>
+                            <a:srgbClr val="D2603A"/>
+                          </a:solidFill>
+                          <a:latin typeface="Calibri" pitchFamily="34" charset="0"/>
+                          <a:ea typeface="Calibri" pitchFamily="34" charset="-122"/>
+                          <a:cs typeface="Calibri" pitchFamily="34" charset="-120"/>
+                        </a:rPr>
+                        <a:t>−0.399</a:t>
+                      </a:r>
+                      <a:endParaRPr lang="en-US" sz="1100" dirty="0">
+                        <a:latin typeface="Calibri" charset="0"/>
+                        <a:ea typeface="Calibri" charset="0"/>
+                        <a:cs typeface="Calibri" charset="0"/>
+                      </a:endParaRPr>
+                    </a:p>
+                  </a:txBody>
+                  <a:tcPr marL="91440" marR="91440" marT="45720" marB="45720" anchor="ctr">
+                    <a:lnL w="6350" cap="flat" cmpd="sng" algn="ctr">
+                      <a:solidFill>
+                        <a:srgbClr val="DDE5E8"/>
+                      </a:solidFill>
+                      <a:prstDash val="solid"/>
+                      <a:round/>
+                      <a:headEnd type="none" w="med" len="med"/>
+                      <a:tailEnd type="none" w="med" len="med"/>
+                    </a:lnL>
+                    <a:lnR w="6350" cap="flat" cmpd="sng" algn="ctr">
+                      <a:solidFill>
+                        <a:srgbClr val="DDE5E8"/>
+                      </a:solidFill>
+                      <a:prstDash val="solid"/>
+                      <a:round/>
+                      <a:headEnd type="none" w="med" len="med"/>
+                      <a:tailEnd type="none" w="med" len="med"/>
+                    </a:lnR>
+                    <a:lnT w="6350" cap="flat" cmpd="sng" algn="ctr">
+                      <a:solidFill>
+                        <a:srgbClr val="DDE5E8"/>
+                      </a:solidFill>
+                      <a:prstDash val="solid"/>
+                      <a:round/>
+                      <a:headEnd type="none" w="med" len="med"/>
+                      <a:tailEnd type="none" w="med" len="med"/>
+                    </a:lnT>
+                    <a:lnB w="6350" cap="flat" cmpd="sng" algn="ctr">
+                      <a:solidFill>
+                        <a:srgbClr val="DDE5E8"/>
+                      </a:solidFill>
+                      <a:prstDash val="solid"/>
+                      <a:round/>
+                      <a:headEnd type="none" w="med" len="med"/>
+                      <a:tailEnd type="none" w="med" len="med"/>
+                    </a:lnB>
+                  </a:tcPr>
+                </a:tc>
+              </a:tr>
+              <a:tr h="402336">
+                <a:tc>
+                  <a:txBody>
+                    <a:bodyPr/>
+                    <a:lstStyle/>
+                    <a:p>
+                      <a:pPr algn="ctr" indent="0" marL="0">
+                        <a:buNone/>
+                      </a:pPr>
+                      <a:r>
+                        <a:rPr lang="en-US" sz="1100" dirty="0">
+                          <a:solidFill>
+                            <a:srgbClr val="16252C"/>
+                          </a:solidFill>
+                          <a:latin typeface="Calibri" pitchFamily="34" charset="0"/>
+                          <a:ea typeface="Calibri" pitchFamily="34" charset="-122"/>
+                          <a:cs typeface="Calibri" pitchFamily="34" charset="-120"/>
+                        </a:rPr>
+                        <a:t>L1-LR</a:t>
+                      </a:r>
+                      <a:endParaRPr lang="en-US" sz="1100" dirty="0">
+                        <a:latin typeface="Calibri" charset="0"/>
+                        <a:ea typeface="Calibri" charset="0"/>
+                        <a:cs typeface="Calibri" charset="0"/>
+                      </a:endParaRPr>
+                    </a:p>
+                  </a:txBody>
+                  <a:tcPr marL="91440" marR="91440" marT="45720" marB="45720" anchor="ctr">
+                    <a:lnL w="6350" cap="flat" cmpd="sng" algn="ctr">
+                      <a:solidFill>
+                        <a:srgbClr val="DDE5E8"/>
+                      </a:solidFill>
+                      <a:prstDash val="solid"/>
+                      <a:round/>
+                      <a:headEnd type="none" w="med" len="med"/>
+                      <a:tailEnd type="none" w="med" len="med"/>
+                    </a:lnL>
+                    <a:lnR w="6350" cap="flat" cmpd="sng" algn="ctr">
+                      <a:solidFill>
+                        <a:srgbClr val="DDE5E8"/>
+                      </a:solidFill>
+                      <a:prstDash val="solid"/>
+                      <a:round/>
+                      <a:headEnd type="none" w="med" len="med"/>
+                      <a:tailEnd type="none" w="med" len="med"/>
+                    </a:lnR>
+                    <a:lnT w="6350" cap="flat" cmpd="sng" algn="ctr">
+                      <a:solidFill>
+                        <a:srgbClr val="DDE5E8"/>
+                      </a:solidFill>
+                      <a:prstDash val="solid"/>
+                      <a:round/>
+                      <a:headEnd type="none" w="med" len="med"/>
+                      <a:tailEnd type="none" w="med" len="med"/>
+                    </a:lnT>
+                    <a:lnB w="6350" cap="flat" cmpd="sng" algn="ctr">
+                      <a:solidFill>
+                        <a:srgbClr val="DDE5E8"/>
+                      </a:solidFill>
+                      <a:prstDash val="solid"/>
+                      <a:round/>
+                      <a:headEnd type="none" w="med" len="med"/>
+                      <a:tailEnd type="none" w="med" len="med"/>
+                    </a:lnB>
+                  </a:tcPr>
+                </a:tc>
+                <a:tc>
+                  <a:txBody>
+                    <a:bodyPr/>
+                    <a:lstStyle/>
+                    <a:p>
+                      <a:pPr algn="ctr" indent="0" marL="0">
+                        <a:buNone/>
+                      </a:pPr>
+                      <a:r>
+                        <a:rPr lang="en-US" sz="1100" b="1" dirty="0">
+                          <a:solidFill>
+                            <a:srgbClr val="D2603A"/>
+                          </a:solidFill>
+                          <a:latin typeface="Calibri" pitchFamily="34" charset="0"/>
+                          <a:ea typeface="Calibri" pitchFamily="34" charset="-122"/>
+                          <a:cs typeface="Calibri" pitchFamily="34" charset="-120"/>
+                        </a:rPr>
+                        <a:t>0.469</a:t>
+                      </a:r>
+                      <a:endParaRPr lang="en-US" sz="1100" dirty="0">
+                        <a:latin typeface="Calibri" charset="0"/>
+                        <a:ea typeface="Calibri" charset="0"/>
+                        <a:cs typeface="Calibri" charset="0"/>
+                      </a:endParaRPr>
+                    </a:p>
+                  </a:txBody>
+                  <a:tcPr marL="91440" marR="91440" marT="45720" marB="45720" anchor="ctr">
+                    <a:lnL w="6350" cap="flat" cmpd="sng" algn="ctr">
+                      <a:solidFill>
+                        <a:srgbClr val="DDE5E8"/>
+                      </a:solidFill>
+                      <a:prstDash val="solid"/>
+                      <a:round/>
+                      <a:headEnd type="none" w="med" len="med"/>
+                      <a:tailEnd type="none" w="med" len="med"/>
+                    </a:lnL>
+                    <a:lnR w="6350" cap="flat" cmpd="sng" algn="ctr">
+                      <a:solidFill>
+                        <a:srgbClr val="DDE5E8"/>
+                      </a:solidFill>
+                      <a:prstDash val="solid"/>
+                      <a:round/>
+                      <a:headEnd type="none" w="med" len="med"/>
+                      <a:tailEnd type="none" w="med" len="med"/>
+                    </a:lnR>
+                    <a:lnT w="6350" cap="flat" cmpd="sng" algn="ctr">
+                      <a:solidFill>
+                        <a:srgbClr val="DDE5E8"/>
+                      </a:solidFill>
+                      <a:prstDash val="solid"/>
+                      <a:round/>
+                      <a:headEnd type="none" w="med" len="med"/>
+                      <a:tailEnd type="none" w="med" len="med"/>
+                    </a:lnT>
+                    <a:lnB w="6350" cap="flat" cmpd="sng" algn="ctr">
+                      <a:solidFill>
+                        <a:srgbClr val="DDE5E8"/>
+                      </a:solidFill>
+                      <a:prstDash val="solid"/>
+                      <a:round/>
+                      <a:headEnd type="none" w="med" len="med"/>
+                      <a:tailEnd type="none" w="med" len="med"/>
+                    </a:lnB>
+                  </a:tcPr>
+                </a:tc>
+                <a:tc>
+                  <a:txBody>
+                    <a:bodyPr/>
+                    <a:lstStyle/>
+                    <a:p>
+                      <a:pPr algn="ctr" indent="0" marL="0">
+                        <a:buNone/>
+                      </a:pPr>
+                      <a:r>
+                        <a:rPr lang="en-US" sz="1100" dirty="0">
+                          <a:solidFill>
+                            <a:srgbClr val="16252C"/>
+                          </a:solidFill>
+                          <a:latin typeface="Calibri" pitchFamily="34" charset="0"/>
+                          <a:ea typeface="Calibri" pitchFamily="34" charset="-122"/>
+                          <a:cs typeface="Calibri" pitchFamily="34" charset="-120"/>
+                        </a:rPr>
+                        <a:t>0.777</a:t>
+                      </a:r>
+                      <a:endParaRPr lang="en-US" sz="1100" dirty="0">
+                        <a:latin typeface="Calibri" charset="0"/>
+                        <a:ea typeface="Calibri" charset="0"/>
+                        <a:cs typeface="Calibri" charset="0"/>
+                      </a:endParaRPr>
+                    </a:p>
+                  </a:txBody>
+                  <a:tcPr marL="91440" marR="91440" marT="45720" marB="45720" anchor="ctr">
+                    <a:lnL w="6350" cap="flat" cmpd="sng" algn="ctr">
+                      <a:solidFill>
+                        <a:srgbClr val="DDE5E8"/>
+                      </a:solidFill>
+                      <a:prstDash val="solid"/>
+                      <a:round/>
+                      <a:headEnd type="none" w="med" len="med"/>
+                      <a:tailEnd type="none" w="med" len="med"/>
+                    </a:lnL>
+                    <a:lnR w="6350" cap="flat" cmpd="sng" algn="ctr">
+                      <a:solidFill>
+                        <a:srgbClr val="DDE5E8"/>
+                      </a:solidFill>
+                      <a:prstDash val="solid"/>
+                      <a:round/>
+                      <a:headEnd type="none" w="med" len="med"/>
+                      <a:tailEnd type="none" w="med" len="med"/>
+                    </a:lnR>
+                    <a:lnT w="6350" cap="flat" cmpd="sng" algn="ctr">
+                      <a:solidFill>
+                        <a:srgbClr val="DDE5E8"/>
+                      </a:solidFill>
+                      <a:prstDash val="solid"/>
+                      <a:round/>
+                      <a:headEnd type="none" w="med" len="med"/>
+                      <a:tailEnd type="none" w="med" len="med"/>
+                    </a:lnT>
+                    <a:lnB w="6350" cap="flat" cmpd="sng" algn="ctr">
+                      <a:solidFill>
+                        <a:srgbClr val="DDE5E8"/>
+                      </a:solidFill>
+                      <a:prstDash val="solid"/>
+                      <a:round/>
+                      <a:headEnd type="none" w="med" len="med"/>
+                      <a:tailEnd type="none" w="med" len="med"/>
+                    </a:lnB>
+                  </a:tcPr>
+                </a:tc>
+                <a:tc>
+                  <a:txBody>
+                    <a:bodyPr/>
+                    <a:lstStyle/>
+                    <a:p>
+                      <a:pPr algn="ctr" indent="0" marL="0">
+                        <a:buNone/>
+                      </a:pPr>
+                      <a:r>
+                        <a:rPr lang="en-US" sz="1100" dirty="0">
+                          <a:solidFill>
+                            <a:srgbClr val="D2603A"/>
+                          </a:solidFill>
+                          <a:latin typeface="Calibri" pitchFamily="34" charset="0"/>
+                          <a:ea typeface="Calibri" pitchFamily="34" charset="-122"/>
+                          <a:cs typeface="Calibri" pitchFamily="34" charset="-120"/>
+                        </a:rPr>
+                        <a:t>−0.308</a:t>
+                      </a:r>
+                      <a:endParaRPr lang="en-US" sz="1100" dirty="0">
+                        <a:latin typeface="Calibri" charset="0"/>
+                        <a:ea typeface="Calibri" charset="0"/>
+                        <a:cs typeface="Calibri" charset="0"/>
+                      </a:endParaRPr>
+                    </a:p>
+                  </a:txBody>
+                  <a:tcPr marL="91440" marR="91440" marT="45720" marB="45720" anchor="ctr">
+                    <a:lnL w="6350" cap="flat" cmpd="sng" algn="ctr">
+                      <a:solidFill>
+                        <a:srgbClr val="DDE5E8"/>
+                      </a:solidFill>
+                      <a:prstDash val="solid"/>
+                      <a:round/>
+                      <a:headEnd type="none" w="med" len="med"/>
+                      <a:tailEnd type="none" w="med" len="med"/>
+                    </a:lnL>
+                    <a:lnR w="6350" cap="flat" cmpd="sng" algn="ctr">
+                      <a:solidFill>
+                        <a:srgbClr val="DDE5E8"/>
+                      </a:solidFill>
+                      <a:prstDash val="solid"/>
+                      <a:round/>
+                      <a:headEnd type="none" w="med" len="med"/>
+                      <a:tailEnd type="none" w="med" len="med"/>
+                    </a:lnR>
+                    <a:lnT w="6350" cap="flat" cmpd="sng" algn="ctr">
+                      <a:solidFill>
+                        <a:srgbClr val="DDE5E8"/>
+                      </a:solidFill>
+                      <a:prstDash val="solid"/>
+                      <a:round/>
+                      <a:headEnd type="none" w="med" len="med"/>
+                      <a:tailEnd type="none" w="med" len="med"/>
+                    </a:lnT>
+                    <a:lnB w="6350" cap="flat" cmpd="sng" algn="ctr">
+                      <a:solidFill>
+                        <a:srgbClr val="DDE5E8"/>
+                      </a:solidFill>
+                      <a:prstDash val="solid"/>
+                      <a:round/>
+                      <a:headEnd type="none" w="med" len="med"/>
+                      <a:tailEnd type="none" w="med" len="med"/>
+                    </a:lnB>
+                  </a:tcPr>
+                </a:tc>
+              </a:tr>
+            </a:tbl>
+          </a:graphicData>
+        </a:graphic>
+      </p:graphicFrame>
+      <p:sp>
+        <p:nvSpPr>
+          <p:cNvPr id="8" name="Shape 5"/>
+          <p:cNvSpPr/>
+          <p:nvPr/>
+        </p:nvSpPr>
+        <p:spPr>
+          <a:xfrm>
+            <a:off x="6309360" y="1828800"/>
+            <a:ext cx="5303520" cy="1773936"/>
+          </a:xfrm>
+          <a:prstGeom prst="rect">
+            <a:avLst/>
+          </a:prstGeom>
+          <a:solidFill>
+            <a:srgbClr val="FBEDE7"/>
+          </a:solidFill>
+          <a:ln/>
+          <a:effectLst>
+            <a:outerShdw sx="100000" sy="100000" kx="0" ky="0" algn="bl" rotWithShape="0" blurRad="101600" dist="25400" dir="8100000">
+              <a:srgbClr val="000000">
+                <a:alpha val="10000"/>
+              </a:srgbClr>
+            </a:outerShdw>
+          </a:effectLst>
+        </p:spPr>
+      </p:sp>
+      <p:sp>
+        <p:nvSpPr>
+          <p:cNvPr id="9" name="Shape 6"/>
+          <p:cNvSpPr/>
+          <p:nvPr/>
+        </p:nvSpPr>
+        <p:spPr>
+          <a:xfrm>
+            <a:off x="6309360" y="1828800"/>
+            <a:ext cx="68580" cy="1773936"/>
+          </a:xfrm>
+          <a:prstGeom prst="rect">
+            <a:avLst/>
+          </a:prstGeom>
+          <a:solidFill>
+            <a:srgbClr val="D2603A"/>
+          </a:solidFill>
+          <a:ln/>
+        </p:spPr>
+      </p:sp>
+      <p:sp>
+        <p:nvSpPr>
+          <p:cNvPr id="10" name="Text 7"/>
+          <p:cNvSpPr/>
+          <p:nvPr/>
+        </p:nvSpPr>
+        <p:spPr>
+          <a:xfrm>
+            <a:off x="6565392" y="1975104"/>
+            <a:ext cx="4846320" cy="329184"/>
+          </a:xfrm>
+          <a:prstGeom prst="rect">
+            <a:avLst/>
+          </a:prstGeom>
+          <a:noFill/>
+          <a:ln/>
+        </p:spPr>
+        <p:txBody>
+          <a:bodyPr wrap="square" lIns="0" tIns="0" rIns="0" bIns="0" rtlCol="0" anchor="t"/>
+          <a:lstStyle/>
+          <a:p>
+            <a:pPr indent="0" marL="0">
+              <a:buNone/>
+            </a:pPr>
+            <a:r>
+              <a:rPr lang="en-US" sz="1400" b="1" dirty="0">
+                <a:solidFill>
+                  <a:srgbClr val="16252C"/>
+                </a:solidFill>
+                <a:latin typeface="Georgia" pitchFamily="34" charset="0"/>
+                <a:ea typeface="Georgia" pitchFamily="34" charset="-122"/>
+                <a:cs typeface="Georgia" pitchFamily="34" charset="-120"/>
+              </a:rPr>
+              <a:t>Why it is misleading</a:t>
+            </a:r>
+            <a:endParaRPr lang="en-US" sz="1400" dirty="0"/>
+          </a:p>
+        </p:txBody>
+      </p:sp>
+      <p:sp>
+        <p:nvSpPr>
+          <p:cNvPr id="11" name="Text 8"/>
+          <p:cNvSpPr/>
+          <p:nvPr/>
+        </p:nvSpPr>
+        <p:spPr>
+          <a:xfrm>
+            <a:off x="6565392" y="2359152"/>
+            <a:ext cx="4846320" cy="1115568"/>
+          </a:xfrm>
+          <a:prstGeom prst="rect">
+            <a:avLst/>
+          </a:prstGeom>
+          <a:noFill/>
+          <a:ln/>
+        </p:spPr>
+        <p:txBody>
+          <a:bodyPr wrap="square" lIns="0" tIns="0" rIns="0" bIns="0" rtlCol="0" anchor="t"/>
+          <a:lstStyle/>
+          <a:p>
+            <a:pPr indent="0" marL="0">
+              <a:lnSpc>
+                <a:spcPct val="112000"/>
+              </a:lnSpc>
+              <a:buNone/>
+            </a:pPr>
+            <a:r>
+              <a:rPr lang="en-US" sz="1100" dirty="0">
+                <a:solidFill>
+                  <a:srgbClr val="7A2E14"/>
+                </a:solidFill>
+                <a:latin typeface="Calibri" pitchFamily="34" charset="0"/>
+                <a:ea typeface="Calibri" pitchFamily="34" charset="-122"/>
+                <a:cs typeface="Calibri" pitchFamily="34" charset="-120"/>
+              </a:rPr>
+              <a:t>Site and month are nearly interchangeable here: Sacramento is 46/80 January, GIWA 82/96 July–August, ConawayRanch autumn only.</a:t>
+            </a:r>
+            <a:endParaRPr lang="en-US" sz="1100" dirty="0"/>
+          </a:p>
+          <a:p>
+            <a:pPr indent="0" marL="0">
+              <a:lnSpc>
+                <a:spcPct val="112000"/>
+              </a:lnSpc>
+              <a:buNone/>
+            </a:pPr>
+            <a:endParaRPr lang="en-US" sz="1100" dirty="0"/>
+          </a:p>
+          <a:p>
+            <a:pPr indent="0" marL="0">
+              <a:lnSpc>
+                <a:spcPct val="112000"/>
+              </a:lnSpc>
+              <a:buNone/>
+            </a:pPr>
+            <a:r>
+              <a:rPr lang="en-US" sz="1100" dirty="0">
+                <a:solidFill>
+                  <a:srgbClr val="7A2E14"/>
+                </a:solidFill>
+                <a:latin typeface="Calibri" pitchFamily="34" charset="0"/>
+                <a:ea typeface="Calibri" pitchFamily="34" charset="-122"/>
+                <a:cs typeface="Calibri" pitchFamily="34" charset="-120"/>
+              </a:rPr>
+              <a:t>So leave-one-site-out is also leave-one-season-out.</a:t>
+            </a:r>
+            <a:endParaRPr lang="en-US" sz="1100" dirty="0"/>
+          </a:p>
+        </p:txBody>
+      </p:sp>
+      <p:sp>
+        <p:nvSpPr>
+          <p:cNvPr id="12" name="Text 9"/>
+          <p:cNvSpPr/>
+          <p:nvPr/>
+        </p:nvSpPr>
+        <p:spPr>
+          <a:xfrm>
+            <a:off x="548640" y="3840480"/>
+            <a:ext cx="11064240" cy="274320"/>
+          </a:xfrm>
+          <a:prstGeom prst="rect">
+            <a:avLst/>
+          </a:prstGeom>
+          <a:noFill/>
+          <a:ln/>
+        </p:spPr>
+        <p:txBody>
+          <a:bodyPr wrap="square" lIns="0" tIns="0" rIns="0" bIns="0" rtlCol="0" anchor="ctr"/>
+          <a:lstStyle/>
+          <a:p>
+            <a:pPr indent="0" marL="0">
+              <a:buNone/>
+            </a:pPr>
+            <a:r>
+              <a:rPr lang="en-US" sz="1500" b="1" dirty="0">
+                <a:solidFill>
+                  <a:srgbClr val="16252C"/>
+                </a:solidFill>
+                <a:latin typeface="Georgia" pitchFamily="34" charset="0"/>
+                <a:ea typeface="Georgia" pitchFamily="34" charset="-122"/>
+                <a:cs typeface="Georgia" pitchFamily="34" charset="-120"/>
+              </a:rPr>
+              <a:t>Hold season fixed (July–August only) and repeat leave-one-site-out:</a:t>
+            </a:r>
+            <a:endParaRPr lang="en-US" sz="1500" dirty="0"/>
+          </a:p>
+        </p:txBody>
+      </p:sp>
+      <p:graphicFrame>
+        <p:nvGraphicFramePr>
+          <p:cNvPr id="47" name="Table 1"/>
+          <p:cNvGraphicFramePr>
+            <a:graphicFrameLocks noGrp="1"/>
+          </p:cNvGraphicFramePr>
+          <p:nvPr>
+            <p:extLst>
+              <p:ext uri="{D42A27DB-BD31-4B8C-83A1-F6EECF244321}">
+                <p14:modId xmlns:p14="http://schemas.microsoft.com/office/powerpoint/2010/main" val="1579011935"/>
+              </p:ext>
+            </p:extLst>
+          </p:nvPr>
+        </p:nvGraphicFramePr>
+        <p:xfrm>
+          <a:off x="548640" y="4206240"/>
+          <a:ext cx="5486400" cy="914400"/>
+        </p:xfrm>
+        <a:graphic>
+          <a:graphicData uri="http://schemas.openxmlformats.org/drawingml/2006/table">
+            <a:tbl>
+              <a:tblPr/>
+              <a:tblGrid>
+                <a:gridCol w="2331720"/>
+                <a:gridCol w="960120"/>
+                <a:gridCol w="960120"/>
+                <a:gridCol w="1234440"/>
+              </a:tblGrid>
+              <a:tr h="384048">
+                <a:tc>
+                  <a:txBody>
+                    <a:bodyPr/>
+                    <a:lstStyle/>
+                    <a:p>
+                      <a:pPr algn="ctr" indent="0" marL="0">
+                        <a:buNone/>
+                      </a:pPr>
+                      <a:r>
+                        <a:rPr lang="en-US" sz="1100" b="1" dirty="0">
+                          <a:solidFill>
+                            <a:srgbClr val="FFFFFF"/>
+                          </a:solidFill>
+                          <a:latin typeface="Calibri" pitchFamily="34" charset="0"/>
+                          <a:ea typeface="Calibri" pitchFamily="34" charset="-122"/>
+                          <a:cs typeface="Calibri" pitchFamily="34" charset="-120"/>
+                        </a:rPr>
+                        <a:t>Held-out site</a:t>
+                      </a:r>
+                      <a:endParaRPr lang="en-US" sz="1100" dirty="0">
+                        <a:latin typeface="Calibri" charset="0"/>
+                        <a:ea typeface="Calibri" charset="0"/>
+                        <a:cs typeface="Calibri" charset="0"/>
+                      </a:endParaRPr>
+                    </a:p>
+                  </a:txBody>
+                  <a:tcPr marL="91440" marR="91440" marT="45720" marB="45720" anchor="ctr">
+                    <a:lnL w="6350" cap="flat" cmpd="sng" algn="ctr">
+                      <a:solidFill>
+                        <a:srgbClr val="DDE5E8"/>
+                      </a:solidFill>
+                      <a:prstDash val="solid"/>
+                      <a:round/>
+                      <a:headEnd type="none" w="med" len="med"/>
+                      <a:tailEnd type="none" w="med" len="med"/>
+                    </a:lnL>
+                    <a:lnR w="6350" cap="flat" cmpd="sng" algn="ctr">
+                      <a:solidFill>
+                        <a:srgbClr val="DDE5E8"/>
+                      </a:solidFill>
+                      <a:prstDash val="solid"/>
+                      <a:round/>
+                      <a:headEnd type="none" w="med" len="med"/>
+                      <a:tailEnd type="none" w="med" len="med"/>
+                    </a:lnR>
+                    <a:lnT w="6350" cap="flat" cmpd="sng" algn="ctr">
+                      <a:solidFill>
+                        <a:srgbClr val="DDE5E8"/>
+                      </a:solidFill>
+                      <a:prstDash val="solid"/>
+                      <a:round/>
+                      <a:headEnd type="none" w="med" len="med"/>
+                      <a:tailEnd type="none" w="med" len="med"/>
+                    </a:lnT>
+                    <a:lnB w="6350" cap="flat" cmpd="sng" algn="ctr">
+                      <a:solidFill>
+                        <a:srgbClr val="DDE5E8"/>
+                      </a:solidFill>
+                      <a:prstDash val="solid"/>
+                      <a:round/>
+                      <a:headEnd type="none" w="med" len="med"/>
+                      <a:tailEnd type="none" w="med" len="med"/>
+                    </a:lnB>
+                    <a:solidFill>
+                      <a:srgbClr val="0B3C49"/>
+                    </a:solidFill>
+                  </a:tcPr>
+                </a:tc>
+                <a:tc>
+                  <a:txBody>
+                    <a:bodyPr/>
+                    <a:lstStyle/>
+                    <a:p>
+                      <a:pPr algn="ctr" indent="0" marL="0">
+                        <a:buNone/>
+                      </a:pPr>
+                      <a:r>
+                        <a:rPr lang="en-US" sz="1100" b="1" dirty="0">
+                          <a:solidFill>
+                            <a:srgbClr val="FFFFFF"/>
+                          </a:solidFill>
+                          <a:latin typeface="Calibri" pitchFamily="34" charset="0"/>
+                          <a:ea typeface="Calibri" pitchFamily="34" charset="-122"/>
+                          <a:cs typeface="Calibri" pitchFamily="34" charset="-120"/>
+                        </a:rPr>
+                        <a:t>n</a:t>
+                      </a:r>
+                      <a:endParaRPr lang="en-US" sz="1100" dirty="0">
+                        <a:latin typeface="Calibri" charset="0"/>
+                        <a:ea typeface="Calibri" charset="0"/>
+                        <a:cs typeface="Calibri" charset="0"/>
+                      </a:endParaRPr>
+                    </a:p>
+                  </a:txBody>
+                  <a:tcPr marL="91440" marR="91440" marT="45720" marB="45720" anchor="ctr">
+                    <a:lnL w="6350" cap="flat" cmpd="sng" algn="ctr">
+                      <a:solidFill>
+                        <a:srgbClr val="DDE5E8"/>
+                      </a:solidFill>
+                      <a:prstDash val="solid"/>
+                      <a:round/>
+                      <a:headEnd type="none" w="med" len="med"/>
+                      <a:tailEnd type="none" w="med" len="med"/>
+                    </a:lnL>
+                    <a:lnR w="6350" cap="flat" cmpd="sng" algn="ctr">
+                      <a:solidFill>
+                        <a:srgbClr val="DDE5E8"/>
+                      </a:solidFill>
+                      <a:prstDash val="solid"/>
+                      <a:round/>
+                      <a:headEnd type="none" w="med" len="med"/>
+                      <a:tailEnd type="none" w="med" len="med"/>
+                    </a:lnR>
+                    <a:lnT w="6350" cap="flat" cmpd="sng" algn="ctr">
+                      <a:solidFill>
+                        <a:srgbClr val="DDE5E8"/>
+                      </a:solidFill>
+                      <a:prstDash val="solid"/>
+                      <a:round/>
+                      <a:headEnd type="none" w="med" len="med"/>
+                      <a:tailEnd type="none" w="med" len="med"/>
+                    </a:lnT>
+                    <a:lnB w="6350" cap="flat" cmpd="sng" algn="ctr">
+                      <a:solidFill>
+                        <a:srgbClr val="DDE5E8"/>
+                      </a:solidFill>
+                      <a:prstDash val="solid"/>
+                      <a:round/>
+                      <a:headEnd type="none" w="med" len="med"/>
+                      <a:tailEnd type="none" w="med" len="med"/>
+                    </a:lnB>
+                    <a:solidFill>
+                      <a:srgbClr val="0B3C49"/>
+                    </a:solidFill>
+                  </a:tcPr>
+                </a:tc>
+                <a:tc>
+                  <a:txBody>
+                    <a:bodyPr/>
+                    <a:lstStyle/>
+                    <a:p>
+                      <a:pPr algn="ctr" indent="0" marL="0">
+                        <a:buNone/>
+                      </a:pPr>
+                      <a:r>
+                        <a:rPr lang="en-US" sz="1100" b="1" dirty="0">
+                          <a:solidFill>
+                            <a:srgbClr val="FFFFFF"/>
+                          </a:solidFill>
+                          <a:latin typeface="Calibri" pitchFamily="34" charset="0"/>
+                          <a:ea typeface="Calibri" pitchFamily="34" charset="-122"/>
+                          <a:cs typeface="Calibri" pitchFamily="34" charset="-120"/>
+                        </a:rPr>
+                        <a:t>Pos</a:t>
+                      </a:r>
+                      <a:endParaRPr lang="en-US" sz="1100" dirty="0">
+                        <a:latin typeface="Calibri" charset="0"/>
+                        <a:ea typeface="Calibri" charset="0"/>
+                        <a:cs typeface="Calibri" charset="0"/>
+                      </a:endParaRPr>
+                    </a:p>
+                  </a:txBody>
+                  <a:tcPr marL="91440" marR="91440" marT="45720" marB="45720" anchor="ctr">
+                    <a:lnL w="6350" cap="flat" cmpd="sng" algn="ctr">
+                      <a:solidFill>
+                        <a:srgbClr val="DDE5E8"/>
+                      </a:solidFill>
+                      <a:prstDash val="solid"/>
+                      <a:round/>
+                      <a:headEnd type="none" w="med" len="med"/>
+                      <a:tailEnd type="none" w="med" len="med"/>
+                    </a:lnL>
+                    <a:lnR w="6350" cap="flat" cmpd="sng" algn="ctr">
+                      <a:solidFill>
+                        <a:srgbClr val="DDE5E8"/>
+                      </a:solidFill>
+                      <a:prstDash val="solid"/>
+                      <a:round/>
+                      <a:headEnd type="none" w="med" len="med"/>
+                      <a:tailEnd type="none" w="med" len="med"/>
+                    </a:lnR>
+                    <a:lnT w="6350" cap="flat" cmpd="sng" algn="ctr">
+                      <a:solidFill>
+                        <a:srgbClr val="DDE5E8"/>
+                      </a:solidFill>
+                      <a:prstDash val="solid"/>
+                      <a:round/>
+                      <a:headEnd type="none" w="med" len="med"/>
+                      <a:tailEnd type="none" w="med" len="med"/>
+                    </a:lnT>
+                    <a:lnB w="6350" cap="flat" cmpd="sng" algn="ctr">
+                      <a:solidFill>
+                        <a:srgbClr val="DDE5E8"/>
+                      </a:solidFill>
+                      <a:prstDash val="solid"/>
+                      <a:round/>
+                      <a:headEnd type="none" w="med" len="med"/>
+                      <a:tailEnd type="none" w="med" len="med"/>
+                    </a:lnB>
+                    <a:solidFill>
+                      <a:srgbClr val="0B3C49"/>
+                    </a:solidFill>
+                  </a:tcPr>
+                </a:tc>
+                <a:tc>
+                  <a:txBody>
+                    <a:bodyPr/>
+                    <a:lstStyle/>
+                    <a:p>
+                      <a:pPr algn="ctr" indent="0" marL="0">
+                        <a:buNone/>
+                      </a:pPr>
+                      <a:r>
+                        <a:rPr lang="en-US" sz="1100" b="1" dirty="0">
+                          <a:solidFill>
+                            <a:srgbClr val="FFFFFF"/>
+                          </a:solidFill>
+                          <a:latin typeface="Calibri" pitchFamily="34" charset="0"/>
+                          <a:ea typeface="Calibri" pitchFamily="34" charset="-122"/>
+                          <a:cs typeface="Calibri" pitchFamily="34" charset="-120"/>
+                        </a:rPr>
+                        <a:t>AUC</a:t>
+                      </a:r>
+                      <a:endParaRPr lang="en-US" sz="1100" dirty="0">
+                        <a:latin typeface="Calibri" charset="0"/>
+                        <a:ea typeface="Calibri" charset="0"/>
+                        <a:cs typeface="Calibri" charset="0"/>
+                      </a:endParaRPr>
+                    </a:p>
+                  </a:txBody>
+                  <a:tcPr marL="91440" marR="91440" marT="45720" marB="45720" anchor="ctr">
+                    <a:lnL w="6350" cap="flat" cmpd="sng" algn="ctr">
+                      <a:solidFill>
+                        <a:srgbClr val="DDE5E8"/>
+                      </a:solidFill>
+                      <a:prstDash val="solid"/>
+                      <a:round/>
+                      <a:headEnd type="none" w="med" len="med"/>
+                      <a:tailEnd type="none" w="med" len="med"/>
+                    </a:lnL>
+                    <a:lnR w="6350" cap="flat" cmpd="sng" algn="ctr">
+                      <a:solidFill>
+                        <a:srgbClr val="DDE5E8"/>
+                      </a:solidFill>
+                      <a:prstDash val="solid"/>
+                      <a:round/>
+                      <a:headEnd type="none" w="med" len="med"/>
+                      <a:tailEnd type="none" w="med" len="med"/>
+                    </a:lnR>
+                    <a:lnT w="6350" cap="flat" cmpd="sng" algn="ctr">
+                      <a:solidFill>
+                        <a:srgbClr val="DDE5E8"/>
+                      </a:solidFill>
+                      <a:prstDash val="solid"/>
+                      <a:round/>
+                      <a:headEnd type="none" w="med" len="med"/>
+                      <a:tailEnd type="none" w="med" len="med"/>
+                    </a:lnT>
+                    <a:lnB w="6350" cap="flat" cmpd="sng" algn="ctr">
+                      <a:solidFill>
+                        <a:srgbClr val="DDE5E8"/>
+                      </a:solidFill>
+                      <a:prstDash val="solid"/>
+                      <a:round/>
+                      <a:headEnd type="none" w="med" len="med"/>
+                      <a:tailEnd type="none" w="med" len="med"/>
+                    </a:lnB>
+                    <a:solidFill>
+                      <a:srgbClr val="0B3C49"/>
+                    </a:solidFill>
+                  </a:tcPr>
+                </a:tc>
+              </a:tr>
+              <a:tr h="384048">
+                <a:tc>
+                  <a:txBody>
+                    <a:bodyPr/>
+                    <a:lstStyle/>
+                    <a:p>
+                      <a:pPr algn="ctr" indent="0" marL="0">
+                        <a:buNone/>
+                      </a:pPr>
+                      <a:r>
+                        <a:rPr lang="en-US" sz="1100" dirty="0">
+                          <a:solidFill>
+                            <a:srgbClr val="16252C"/>
+                          </a:solidFill>
+                          <a:latin typeface="Calibri" pitchFamily="34" charset="0"/>
+                          <a:ea typeface="Calibri" pitchFamily="34" charset="-122"/>
+                          <a:cs typeface="Calibri" pitchFamily="34" charset="-120"/>
+                        </a:rPr>
+                        <a:t>GIWA</a:t>
+                      </a:r>
+                      <a:endParaRPr lang="en-US" sz="1100" dirty="0">
+                        <a:latin typeface="Calibri" charset="0"/>
+                        <a:ea typeface="Calibri" charset="0"/>
+                        <a:cs typeface="Calibri" charset="0"/>
+                      </a:endParaRPr>
+                    </a:p>
+                  </a:txBody>
+                  <a:tcPr marL="91440" marR="91440" marT="45720" marB="45720" anchor="ctr">
+                    <a:lnL w="6350" cap="flat" cmpd="sng" algn="ctr">
+                      <a:solidFill>
+                        <a:srgbClr val="DDE5E8"/>
+                      </a:solidFill>
+                      <a:prstDash val="solid"/>
+                      <a:round/>
+                      <a:headEnd type="none" w="med" len="med"/>
+                      <a:tailEnd type="none" w="med" len="med"/>
+                    </a:lnL>
+                    <a:lnR w="6350" cap="flat" cmpd="sng" algn="ctr">
+                      <a:solidFill>
+                        <a:srgbClr val="DDE5E8"/>
+                      </a:solidFill>
+                      <a:prstDash val="solid"/>
+                      <a:round/>
+                      <a:headEnd type="none" w="med" len="med"/>
+                      <a:tailEnd type="none" w="med" len="med"/>
+                    </a:lnR>
+                    <a:lnT w="6350" cap="flat" cmpd="sng" algn="ctr">
+                      <a:solidFill>
+                        <a:srgbClr val="DDE5E8"/>
+                      </a:solidFill>
+                      <a:prstDash val="solid"/>
+                      <a:round/>
+                      <a:headEnd type="none" w="med" len="med"/>
+                      <a:tailEnd type="none" w="med" len="med"/>
+                    </a:lnT>
+                    <a:lnB w="6350" cap="flat" cmpd="sng" algn="ctr">
+                      <a:solidFill>
+                        <a:srgbClr val="DDE5E8"/>
+                      </a:solidFill>
+                      <a:prstDash val="solid"/>
+                      <a:round/>
+                      <a:headEnd type="none" w="med" len="med"/>
+                      <a:tailEnd type="none" w="med" len="med"/>
+                    </a:lnB>
+                  </a:tcPr>
+                </a:tc>
+                <a:tc>
+                  <a:txBody>
+                    <a:bodyPr/>
+                    <a:lstStyle/>
+                    <a:p>
+                      <a:pPr algn="ctr" indent="0" marL="0">
+                        <a:buNone/>
+                      </a:pPr>
+                      <a:r>
+                        <a:rPr lang="en-US" sz="1100" dirty="0">
+                          <a:solidFill>
+                            <a:srgbClr val="16252C"/>
+                          </a:solidFill>
+                          <a:latin typeface="Calibri" pitchFamily="34" charset="0"/>
+                          <a:ea typeface="Calibri" pitchFamily="34" charset="-122"/>
+                          <a:cs typeface="Calibri" pitchFamily="34" charset="-120"/>
+                        </a:rPr>
+                        <a:t>82</a:t>
+                      </a:r>
+                      <a:endParaRPr lang="en-US" sz="1100" dirty="0">
+                        <a:latin typeface="Calibri" charset="0"/>
+                        <a:ea typeface="Calibri" charset="0"/>
+                        <a:cs typeface="Calibri" charset="0"/>
+                      </a:endParaRPr>
+                    </a:p>
+                  </a:txBody>
+                  <a:tcPr marL="91440" marR="91440" marT="45720" marB="45720" anchor="ctr">
+                    <a:lnL w="6350" cap="flat" cmpd="sng" algn="ctr">
+                      <a:solidFill>
+                        <a:srgbClr val="DDE5E8"/>
+                      </a:solidFill>
+                      <a:prstDash val="solid"/>
+                      <a:round/>
+                      <a:headEnd type="none" w="med" len="med"/>
+                      <a:tailEnd type="none" w="med" len="med"/>
+                    </a:lnL>
+                    <a:lnR w="6350" cap="flat" cmpd="sng" algn="ctr">
+                      <a:solidFill>
+                        <a:srgbClr val="DDE5E8"/>
+                      </a:solidFill>
+                      <a:prstDash val="solid"/>
+                      <a:round/>
+                      <a:headEnd type="none" w="med" len="med"/>
+                      <a:tailEnd type="none" w="med" len="med"/>
+                    </a:lnR>
+                    <a:lnT w="6350" cap="flat" cmpd="sng" algn="ctr">
+                      <a:solidFill>
+                        <a:srgbClr val="DDE5E8"/>
+                      </a:solidFill>
+                      <a:prstDash val="solid"/>
+                      <a:round/>
+                      <a:headEnd type="none" w="med" len="med"/>
+                      <a:tailEnd type="none" w="med" len="med"/>
+                    </a:lnT>
+                    <a:lnB w="6350" cap="flat" cmpd="sng" algn="ctr">
+                      <a:solidFill>
+                        <a:srgbClr val="DDE5E8"/>
+                      </a:solidFill>
+                      <a:prstDash val="solid"/>
+                      <a:round/>
+                      <a:headEnd type="none" w="med" len="med"/>
+                      <a:tailEnd type="none" w="med" len="med"/>
+                    </a:lnB>
+                  </a:tcPr>
+                </a:tc>
+                <a:tc>
+                  <a:txBody>
+                    <a:bodyPr/>
+                    <a:lstStyle/>
+                    <a:p>
+                      <a:pPr algn="ctr" indent="0" marL="0">
+                        <a:buNone/>
+                      </a:pPr>
+                      <a:r>
+                        <a:rPr lang="en-US" sz="1100" dirty="0">
+                          <a:solidFill>
+                            <a:srgbClr val="16252C"/>
+                          </a:solidFill>
+                          <a:latin typeface="Calibri" pitchFamily="34" charset="0"/>
+                          <a:ea typeface="Calibri" pitchFamily="34" charset="-122"/>
+                          <a:cs typeface="Calibri" pitchFamily="34" charset="-120"/>
+                        </a:rPr>
+                        <a:t>51</a:t>
+                      </a:r>
+                      <a:endParaRPr lang="en-US" sz="1100" dirty="0">
+                        <a:latin typeface="Calibri" charset="0"/>
+                        <a:ea typeface="Calibri" charset="0"/>
+                        <a:cs typeface="Calibri" charset="0"/>
+                      </a:endParaRPr>
+                    </a:p>
+                  </a:txBody>
+                  <a:tcPr marL="91440" marR="91440" marT="45720" marB="45720" anchor="ctr">
+                    <a:lnL w="6350" cap="flat" cmpd="sng" algn="ctr">
+                      <a:solidFill>
+                        <a:srgbClr val="DDE5E8"/>
+                      </a:solidFill>
+                      <a:prstDash val="solid"/>
+                      <a:round/>
+                      <a:headEnd type="none" w="med" len="med"/>
+                      <a:tailEnd type="none" w="med" len="med"/>
+                    </a:lnL>
+                    <a:lnR w="6350" cap="flat" cmpd="sng" algn="ctr">
+                      <a:solidFill>
+                        <a:srgbClr val="DDE5E8"/>
+                      </a:solidFill>
+                      <a:prstDash val="solid"/>
+                      <a:round/>
+                      <a:headEnd type="none" w="med" len="med"/>
+                      <a:tailEnd type="none" w="med" len="med"/>
+                    </a:lnR>
+                    <a:lnT w="6350" cap="flat" cmpd="sng" algn="ctr">
+                      <a:solidFill>
+                        <a:srgbClr val="DDE5E8"/>
+                      </a:solidFill>
+                      <a:prstDash val="solid"/>
+                      <a:round/>
+                      <a:headEnd type="none" w="med" len="med"/>
+                      <a:tailEnd type="none" w="med" len="med"/>
+                    </a:lnT>
+                    <a:lnB w="6350" cap="flat" cmpd="sng" algn="ctr">
+                      <a:solidFill>
+                        <a:srgbClr val="DDE5E8"/>
+                      </a:solidFill>
+                      <a:prstDash val="solid"/>
+                      <a:round/>
+                      <a:headEnd type="none" w="med" len="med"/>
+                      <a:tailEnd type="none" w="med" len="med"/>
+                    </a:lnB>
+                  </a:tcPr>
+                </a:tc>
+                <a:tc>
+                  <a:txBody>
+                    <a:bodyPr/>
+                    <a:lstStyle/>
+                    <a:p>
+                      <a:pPr algn="ctr" indent="0" marL="0">
+                        <a:buNone/>
+                      </a:pPr>
+                      <a:r>
+                        <a:rPr lang="en-US" sz="1100" b="1" dirty="0">
+                          <a:solidFill>
+                            <a:srgbClr val="2E6B3A"/>
+                          </a:solidFill>
+                          <a:latin typeface="Calibri" pitchFamily="34" charset="0"/>
+                          <a:ea typeface="Calibri" pitchFamily="34" charset="-122"/>
+                          <a:cs typeface="Calibri" pitchFamily="34" charset="-120"/>
+                        </a:rPr>
+                        <a:t>0.919</a:t>
+                      </a:r>
+                      <a:endParaRPr lang="en-US" sz="1100" dirty="0">
+                        <a:latin typeface="Calibri" charset="0"/>
+                        <a:ea typeface="Calibri" charset="0"/>
+                        <a:cs typeface="Calibri" charset="0"/>
+                      </a:endParaRPr>
+                    </a:p>
+                  </a:txBody>
+                  <a:tcPr marL="91440" marR="91440" marT="45720" marB="45720" anchor="ctr">
+                    <a:lnL w="6350" cap="flat" cmpd="sng" algn="ctr">
+                      <a:solidFill>
+                        <a:srgbClr val="DDE5E8"/>
+                      </a:solidFill>
+                      <a:prstDash val="solid"/>
+                      <a:round/>
+                      <a:headEnd type="none" w="med" len="med"/>
+                      <a:tailEnd type="none" w="med" len="med"/>
+                    </a:lnL>
+                    <a:lnR w="6350" cap="flat" cmpd="sng" algn="ctr">
+                      <a:solidFill>
+                        <a:srgbClr val="DDE5E8"/>
+                      </a:solidFill>
+                      <a:prstDash val="solid"/>
+                      <a:round/>
+                      <a:headEnd type="none" w="med" len="med"/>
+                      <a:tailEnd type="none" w="med" len="med"/>
+                    </a:lnR>
+                    <a:lnT w="6350" cap="flat" cmpd="sng" algn="ctr">
+                      <a:solidFill>
+                        <a:srgbClr val="DDE5E8"/>
+                      </a:solidFill>
+                      <a:prstDash val="solid"/>
+                      <a:round/>
+                      <a:headEnd type="none" w="med" len="med"/>
+                      <a:tailEnd type="none" w="med" len="med"/>
+                    </a:lnT>
+                    <a:lnB w="6350" cap="flat" cmpd="sng" algn="ctr">
+                      <a:solidFill>
+                        <a:srgbClr val="DDE5E8"/>
+                      </a:solidFill>
+                      <a:prstDash val="solid"/>
+                      <a:round/>
+                      <a:headEnd type="none" w="med" len="med"/>
+                      <a:tailEnd type="none" w="med" len="med"/>
+                    </a:lnB>
+                  </a:tcPr>
+                </a:tc>
+              </a:tr>
+              <a:tr h="384048">
+                <a:tc>
+                  <a:txBody>
+                    <a:bodyPr/>
+                    <a:lstStyle/>
+                    <a:p>
+                      <a:pPr algn="ctr" indent="0" marL="0">
+                        <a:buNone/>
+                      </a:pPr>
+                      <a:r>
+                        <a:rPr lang="en-US" sz="1100" dirty="0">
+                          <a:solidFill>
+                            <a:srgbClr val="16252C"/>
+                          </a:solidFill>
+                          <a:latin typeface="Calibri" pitchFamily="34" charset="0"/>
+                          <a:ea typeface="Calibri" pitchFamily="34" charset="-122"/>
+                          <a:cs typeface="Calibri" pitchFamily="34" charset="-120"/>
+                        </a:rPr>
+                        <a:t>MandevilleIsland</a:t>
+                      </a:r>
+                      <a:endParaRPr lang="en-US" sz="1100" dirty="0">
+                        <a:latin typeface="Calibri" charset="0"/>
+                        <a:ea typeface="Calibri" charset="0"/>
+                        <a:cs typeface="Calibri" charset="0"/>
+                      </a:endParaRPr>
+                    </a:p>
+                  </a:txBody>
+                  <a:tcPr marL="91440" marR="91440" marT="45720" marB="45720" anchor="ctr">
+                    <a:lnL w="6350" cap="flat" cmpd="sng" algn="ctr">
+                      <a:solidFill>
+                        <a:srgbClr val="DDE5E8"/>
+                      </a:solidFill>
+                      <a:prstDash val="solid"/>
+                      <a:round/>
+                      <a:headEnd type="none" w="med" len="med"/>
+                      <a:tailEnd type="none" w="med" len="med"/>
+                    </a:lnL>
+                    <a:lnR w="6350" cap="flat" cmpd="sng" algn="ctr">
+                      <a:solidFill>
+                        <a:srgbClr val="DDE5E8"/>
+                      </a:solidFill>
+                      <a:prstDash val="solid"/>
+                      <a:round/>
+                      <a:headEnd type="none" w="med" len="med"/>
+                      <a:tailEnd type="none" w="med" len="med"/>
+                    </a:lnR>
+                    <a:lnT w="6350" cap="flat" cmpd="sng" algn="ctr">
+                      <a:solidFill>
+                        <a:srgbClr val="DDE5E8"/>
+                      </a:solidFill>
+                      <a:prstDash val="solid"/>
+                      <a:round/>
+                      <a:headEnd type="none" w="med" len="med"/>
+                      <a:tailEnd type="none" w="med" len="med"/>
+                    </a:lnT>
+                    <a:lnB w="6350" cap="flat" cmpd="sng" algn="ctr">
+                      <a:solidFill>
+                        <a:srgbClr val="DDE5E8"/>
+                      </a:solidFill>
+                      <a:prstDash val="solid"/>
+                      <a:round/>
+                      <a:headEnd type="none" w="med" len="med"/>
+                      <a:tailEnd type="none" w="med" len="med"/>
+                    </a:lnB>
+                  </a:tcPr>
+                </a:tc>
+                <a:tc>
+                  <a:txBody>
+                    <a:bodyPr/>
+                    <a:lstStyle/>
+                    <a:p>
+                      <a:pPr algn="ctr" indent="0" marL="0">
+                        <a:buNone/>
+                      </a:pPr>
+                      <a:r>
+                        <a:rPr lang="en-US" sz="1100" dirty="0">
+                          <a:solidFill>
+                            <a:srgbClr val="16252C"/>
+                          </a:solidFill>
+                          <a:latin typeface="Calibri" pitchFamily="34" charset="0"/>
+                          <a:ea typeface="Calibri" pitchFamily="34" charset="-122"/>
+                          <a:cs typeface="Calibri" pitchFamily="34" charset="-120"/>
+                        </a:rPr>
+                        <a:t>14</a:t>
+                      </a:r>
+                      <a:endParaRPr lang="en-US" sz="1100" dirty="0">
+                        <a:latin typeface="Calibri" charset="0"/>
+                        <a:ea typeface="Calibri" charset="0"/>
+                        <a:cs typeface="Calibri" charset="0"/>
+                      </a:endParaRPr>
+                    </a:p>
+                  </a:txBody>
+                  <a:tcPr marL="91440" marR="91440" marT="45720" marB="45720" anchor="ctr">
+                    <a:lnL w="6350" cap="flat" cmpd="sng" algn="ctr">
+                      <a:solidFill>
+                        <a:srgbClr val="DDE5E8"/>
+                      </a:solidFill>
+                      <a:prstDash val="solid"/>
+                      <a:round/>
+                      <a:headEnd type="none" w="med" len="med"/>
+                      <a:tailEnd type="none" w="med" len="med"/>
+                    </a:lnL>
+                    <a:lnR w="6350" cap="flat" cmpd="sng" algn="ctr">
+                      <a:solidFill>
+                        <a:srgbClr val="DDE5E8"/>
+                      </a:solidFill>
+                      <a:prstDash val="solid"/>
+                      <a:round/>
+                      <a:headEnd type="none" w="med" len="med"/>
+                      <a:tailEnd type="none" w="med" len="med"/>
+                    </a:lnR>
+                    <a:lnT w="6350" cap="flat" cmpd="sng" algn="ctr">
+                      <a:solidFill>
+                        <a:srgbClr val="DDE5E8"/>
+                      </a:solidFill>
+                      <a:prstDash val="solid"/>
+                      <a:round/>
+                      <a:headEnd type="none" w="med" len="med"/>
+                      <a:tailEnd type="none" w="med" len="med"/>
+                    </a:lnT>
+                    <a:lnB w="6350" cap="flat" cmpd="sng" algn="ctr">
+                      <a:solidFill>
+                        <a:srgbClr val="DDE5E8"/>
+                      </a:solidFill>
+                      <a:prstDash val="solid"/>
+                      <a:round/>
+                      <a:headEnd type="none" w="med" len="med"/>
+                      <a:tailEnd type="none" w="med" len="med"/>
+                    </a:lnB>
+                  </a:tcPr>
+                </a:tc>
+                <a:tc>
+                  <a:txBody>
+                    <a:bodyPr/>
+                    <a:lstStyle/>
+                    <a:p>
+                      <a:pPr algn="ctr" indent="0" marL="0">
+                        <a:buNone/>
+                      </a:pPr>
+                      <a:r>
+                        <a:rPr lang="en-US" sz="1100" dirty="0">
+                          <a:solidFill>
+                            <a:srgbClr val="16252C"/>
+                          </a:solidFill>
+                          <a:latin typeface="Calibri" pitchFamily="34" charset="0"/>
+                          <a:ea typeface="Calibri" pitchFamily="34" charset="-122"/>
+                          <a:cs typeface="Calibri" pitchFamily="34" charset="-120"/>
+                        </a:rPr>
+                        <a:t>9</a:t>
+                      </a:r>
+                      <a:endParaRPr lang="en-US" sz="1100" dirty="0">
+                        <a:latin typeface="Calibri" charset="0"/>
+                        <a:ea typeface="Calibri" charset="0"/>
+                        <a:cs typeface="Calibri" charset="0"/>
+                      </a:endParaRPr>
+                    </a:p>
+                  </a:txBody>
+                  <a:tcPr marL="91440" marR="91440" marT="45720" marB="45720" anchor="ctr">
+                    <a:lnL w="6350" cap="flat" cmpd="sng" algn="ctr">
+                      <a:solidFill>
+                        <a:srgbClr val="DDE5E8"/>
+                      </a:solidFill>
+                      <a:prstDash val="solid"/>
+                      <a:round/>
+                      <a:headEnd type="none" w="med" len="med"/>
+                      <a:tailEnd type="none" w="med" len="med"/>
+                    </a:lnL>
+                    <a:lnR w="6350" cap="flat" cmpd="sng" algn="ctr">
+                      <a:solidFill>
+                        <a:srgbClr val="DDE5E8"/>
+                      </a:solidFill>
+                      <a:prstDash val="solid"/>
+                      <a:round/>
+                      <a:headEnd type="none" w="med" len="med"/>
+                      <a:tailEnd type="none" w="med" len="med"/>
+                    </a:lnR>
+                    <a:lnT w="6350" cap="flat" cmpd="sng" algn="ctr">
+                      <a:solidFill>
+                        <a:srgbClr val="DDE5E8"/>
+                      </a:solidFill>
+                      <a:prstDash val="solid"/>
+                      <a:round/>
+                      <a:headEnd type="none" w="med" len="med"/>
+                      <a:tailEnd type="none" w="med" len="med"/>
+                    </a:lnT>
+                    <a:lnB w="6350" cap="flat" cmpd="sng" algn="ctr">
+                      <a:solidFill>
+                        <a:srgbClr val="DDE5E8"/>
+                      </a:solidFill>
+                      <a:prstDash val="solid"/>
+                      <a:round/>
+                      <a:headEnd type="none" w="med" len="med"/>
+                      <a:tailEnd type="none" w="med" len="med"/>
+                    </a:lnB>
+                  </a:tcPr>
+                </a:tc>
+                <a:tc>
+                  <a:txBody>
+                    <a:bodyPr/>
+                    <a:lstStyle/>
+                    <a:p>
+                      <a:pPr algn="ctr" indent="0" marL="0">
+                        <a:buNone/>
+                      </a:pPr>
+                      <a:r>
+                        <a:rPr lang="en-US" sz="1100" b="1" dirty="0">
+                          <a:solidFill>
+                            <a:srgbClr val="2E6B3A"/>
+                          </a:solidFill>
+                          <a:latin typeface="Calibri" pitchFamily="34" charset="0"/>
+                          <a:ea typeface="Calibri" pitchFamily="34" charset="-122"/>
+                          <a:cs typeface="Calibri" pitchFamily="34" charset="-120"/>
+                        </a:rPr>
+                        <a:t>0.844</a:t>
+                      </a:r>
+                      <a:endParaRPr lang="en-US" sz="1100" dirty="0">
+                        <a:latin typeface="Calibri" charset="0"/>
+                        <a:ea typeface="Calibri" charset="0"/>
+                        <a:cs typeface="Calibri" charset="0"/>
+                      </a:endParaRPr>
+                    </a:p>
+                  </a:txBody>
+                  <a:tcPr marL="91440" marR="91440" marT="45720" marB="45720" anchor="ctr">
+                    <a:lnL w="6350" cap="flat" cmpd="sng" algn="ctr">
+                      <a:solidFill>
+                        <a:srgbClr val="DDE5E8"/>
+                      </a:solidFill>
+                      <a:prstDash val="solid"/>
+                      <a:round/>
+                      <a:headEnd type="none" w="med" len="med"/>
+                      <a:tailEnd type="none" w="med" len="med"/>
+                    </a:lnL>
+                    <a:lnR w="6350" cap="flat" cmpd="sng" algn="ctr">
+                      <a:solidFill>
+                        <a:srgbClr val="DDE5E8"/>
+                      </a:solidFill>
+                      <a:prstDash val="solid"/>
+                      <a:round/>
+                      <a:headEnd type="none" w="med" len="med"/>
+                      <a:tailEnd type="none" w="med" len="med"/>
+                    </a:lnR>
+                    <a:lnT w="6350" cap="flat" cmpd="sng" algn="ctr">
+                      <a:solidFill>
+                        <a:srgbClr val="DDE5E8"/>
+                      </a:solidFill>
+                      <a:prstDash val="solid"/>
+                      <a:round/>
+                      <a:headEnd type="none" w="med" len="med"/>
+                      <a:tailEnd type="none" w="med" len="med"/>
+                    </a:lnT>
+                    <a:lnB w="6350" cap="flat" cmpd="sng" algn="ctr">
+                      <a:solidFill>
+                        <a:srgbClr val="DDE5E8"/>
+                      </a:solidFill>
+                      <a:prstDash val="solid"/>
+                      <a:round/>
+                      <a:headEnd type="none" w="med" len="med"/>
+                      <a:tailEnd type="none" w="med" len="med"/>
+                    </a:lnB>
+                  </a:tcPr>
+                </a:tc>
+              </a:tr>
+              <a:tr h="384048">
+                <a:tc>
+                  <a:txBody>
+                    <a:bodyPr/>
+                    <a:lstStyle/>
+                    <a:p>
+                      <a:pPr algn="ctr" indent="0" marL="0">
+                        <a:buNone/>
+                      </a:pPr>
+                      <a:r>
+                        <a:rPr lang="en-US" sz="1100" dirty="0">
+                          <a:solidFill>
+                            <a:srgbClr val="16252C"/>
+                          </a:solidFill>
+                          <a:latin typeface="Calibri" pitchFamily="34" charset="0"/>
+                          <a:ea typeface="Calibri" pitchFamily="34" charset="-122"/>
+                          <a:cs typeface="Calibri" pitchFamily="34" charset="-120"/>
+                        </a:rPr>
+                        <a:t>SuisunMarsh/Balboa</a:t>
+                      </a:r>
+                      <a:endParaRPr lang="en-US" sz="1100" dirty="0">
+                        <a:latin typeface="Calibri" charset="0"/>
+                        <a:ea typeface="Calibri" charset="0"/>
+                        <a:cs typeface="Calibri" charset="0"/>
+                      </a:endParaRPr>
+                    </a:p>
+                  </a:txBody>
+                  <a:tcPr marL="91440" marR="91440" marT="45720" marB="45720" anchor="ctr">
+                    <a:lnL w="6350" cap="flat" cmpd="sng" algn="ctr">
+                      <a:solidFill>
+                        <a:srgbClr val="DDE5E8"/>
+                      </a:solidFill>
+                      <a:prstDash val="solid"/>
+                      <a:round/>
+                      <a:headEnd type="none" w="med" len="med"/>
+                      <a:tailEnd type="none" w="med" len="med"/>
+                    </a:lnL>
+                    <a:lnR w="6350" cap="flat" cmpd="sng" algn="ctr">
+                      <a:solidFill>
+                        <a:srgbClr val="DDE5E8"/>
+                      </a:solidFill>
+                      <a:prstDash val="solid"/>
+                      <a:round/>
+                      <a:headEnd type="none" w="med" len="med"/>
+                      <a:tailEnd type="none" w="med" len="med"/>
+                    </a:lnR>
+                    <a:lnT w="6350" cap="flat" cmpd="sng" algn="ctr">
+                      <a:solidFill>
+                        <a:srgbClr val="DDE5E8"/>
+                      </a:solidFill>
+                      <a:prstDash val="solid"/>
+                      <a:round/>
+                      <a:headEnd type="none" w="med" len="med"/>
+                      <a:tailEnd type="none" w="med" len="med"/>
+                    </a:lnT>
+                    <a:lnB w="6350" cap="flat" cmpd="sng" algn="ctr">
+                      <a:solidFill>
+                        <a:srgbClr val="DDE5E8"/>
+                      </a:solidFill>
+                      <a:prstDash val="solid"/>
+                      <a:round/>
+                      <a:headEnd type="none" w="med" len="med"/>
+                      <a:tailEnd type="none" w="med" len="med"/>
+                    </a:lnB>
+                  </a:tcPr>
+                </a:tc>
+                <a:tc>
+                  <a:txBody>
+                    <a:bodyPr/>
+                    <a:lstStyle/>
+                    <a:p>
+                      <a:pPr algn="ctr" indent="0" marL="0">
+                        <a:buNone/>
+                      </a:pPr>
+                      <a:r>
+                        <a:rPr lang="en-US" sz="1100" dirty="0">
+                          <a:solidFill>
+                            <a:srgbClr val="16252C"/>
+                          </a:solidFill>
+                          <a:latin typeface="Calibri" pitchFamily="34" charset="0"/>
+                          <a:ea typeface="Calibri" pitchFamily="34" charset="-122"/>
+                          <a:cs typeface="Calibri" pitchFamily="34" charset="-120"/>
+                        </a:rPr>
+                        <a:t>11</a:t>
+                      </a:r>
+                      <a:endParaRPr lang="en-US" sz="1100" dirty="0">
+                        <a:latin typeface="Calibri" charset="0"/>
+                        <a:ea typeface="Calibri" charset="0"/>
+                        <a:cs typeface="Calibri" charset="0"/>
+                      </a:endParaRPr>
+                    </a:p>
+                  </a:txBody>
+                  <a:tcPr marL="91440" marR="91440" marT="45720" marB="45720" anchor="ctr">
+                    <a:lnL w="6350" cap="flat" cmpd="sng" algn="ctr">
+                      <a:solidFill>
+                        <a:srgbClr val="DDE5E8"/>
+                      </a:solidFill>
+                      <a:prstDash val="solid"/>
+                      <a:round/>
+                      <a:headEnd type="none" w="med" len="med"/>
+                      <a:tailEnd type="none" w="med" len="med"/>
+                    </a:lnL>
+                    <a:lnR w="6350" cap="flat" cmpd="sng" algn="ctr">
+                      <a:solidFill>
+                        <a:srgbClr val="DDE5E8"/>
+                      </a:solidFill>
+                      <a:prstDash val="solid"/>
+                      <a:round/>
+                      <a:headEnd type="none" w="med" len="med"/>
+                      <a:tailEnd type="none" w="med" len="med"/>
+                    </a:lnR>
+                    <a:lnT w="6350" cap="flat" cmpd="sng" algn="ctr">
+                      <a:solidFill>
+                        <a:srgbClr val="DDE5E8"/>
+                      </a:solidFill>
+                      <a:prstDash val="solid"/>
+                      <a:round/>
+                      <a:headEnd type="none" w="med" len="med"/>
+                      <a:tailEnd type="none" w="med" len="med"/>
+                    </a:lnT>
+                    <a:lnB w="6350" cap="flat" cmpd="sng" algn="ctr">
+                      <a:solidFill>
+                        <a:srgbClr val="DDE5E8"/>
+                      </a:solidFill>
+                      <a:prstDash val="solid"/>
+                      <a:round/>
+                      <a:headEnd type="none" w="med" len="med"/>
+                      <a:tailEnd type="none" w="med" len="med"/>
+                    </a:lnB>
+                  </a:tcPr>
+                </a:tc>
+                <a:tc>
+                  <a:txBody>
+                    <a:bodyPr/>
+                    <a:lstStyle/>
+                    <a:p>
+                      <a:pPr algn="ctr" indent="0" marL="0">
+                        <a:buNone/>
+                      </a:pPr>
+                      <a:r>
+                        <a:rPr lang="en-US" sz="1100" dirty="0">
+                          <a:solidFill>
+                            <a:srgbClr val="16252C"/>
+                          </a:solidFill>
+                          <a:latin typeface="Calibri" pitchFamily="34" charset="0"/>
+                          <a:ea typeface="Calibri" pitchFamily="34" charset="-122"/>
+                          <a:cs typeface="Calibri" pitchFamily="34" charset="-120"/>
+                        </a:rPr>
+                        <a:t>1</a:t>
+                      </a:r>
+                      <a:endParaRPr lang="en-US" sz="1100" dirty="0">
+                        <a:latin typeface="Calibri" charset="0"/>
+                        <a:ea typeface="Calibri" charset="0"/>
+                        <a:cs typeface="Calibri" charset="0"/>
+                      </a:endParaRPr>
+                    </a:p>
+                  </a:txBody>
+                  <a:tcPr marL="91440" marR="91440" marT="45720" marB="45720" anchor="ctr">
+                    <a:lnL w="6350" cap="flat" cmpd="sng" algn="ctr">
+                      <a:solidFill>
+                        <a:srgbClr val="DDE5E8"/>
+                      </a:solidFill>
+                      <a:prstDash val="solid"/>
+                      <a:round/>
+                      <a:headEnd type="none" w="med" len="med"/>
+                      <a:tailEnd type="none" w="med" len="med"/>
+                    </a:lnL>
+                    <a:lnR w="6350" cap="flat" cmpd="sng" algn="ctr">
+                      <a:solidFill>
+                        <a:srgbClr val="DDE5E8"/>
+                      </a:solidFill>
+                      <a:prstDash val="solid"/>
+                      <a:round/>
+                      <a:headEnd type="none" w="med" len="med"/>
+                      <a:tailEnd type="none" w="med" len="med"/>
+                    </a:lnR>
+                    <a:lnT w="6350" cap="flat" cmpd="sng" algn="ctr">
+                      <a:solidFill>
+                        <a:srgbClr val="DDE5E8"/>
+                      </a:solidFill>
+                      <a:prstDash val="solid"/>
+                      <a:round/>
+                      <a:headEnd type="none" w="med" len="med"/>
+                      <a:tailEnd type="none" w="med" len="med"/>
+                    </a:lnT>
+                    <a:lnB w="6350" cap="flat" cmpd="sng" algn="ctr">
+                      <a:solidFill>
+                        <a:srgbClr val="DDE5E8"/>
+                      </a:solidFill>
+                      <a:prstDash val="solid"/>
+                      <a:round/>
+                      <a:headEnd type="none" w="med" len="med"/>
+                      <a:tailEnd type="none" w="med" len="med"/>
+                    </a:lnB>
+                  </a:tcPr>
+                </a:tc>
+                <a:tc>
+                  <a:txBody>
+                    <a:bodyPr/>
+                    <a:lstStyle/>
+                    <a:p>
+                      <a:pPr algn="ctr" indent="0" marL="0">
+                        <a:buNone/>
+                      </a:pPr>
+                      <a:r>
+                        <a:rPr lang="en-US" sz="1100" dirty="0">
+                          <a:solidFill>
+                            <a:srgbClr val="16252C"/>
+                          </a:solidFill>
+                          <a:latin typeface="Calibri" pitchFamily="34" charset="0"/>
+                          <a:ea typeface="Calibri" pitchFamily="34" charset="-122"/>
+                          <a:cs typeface="Calibri" pitchFamily="34" charset="-120"/>
+                        </a:rPr>
+                        <a:t>1.000</a:t>
+                      </a:r>
+                      <a:endParaRPr lang="en-US" sz="1100" dirty="0">
+                        <a:latin typeface="Calibri" charset="0"/>
+                        <a:ea typeface="Calibri" charset="0"/>
+                        <a:cs typeface="Calibri" charset="0"/>
+                      </a:endParaRPr>
+                    </a:p>
+                  </a:txBody>
+                  <a:tcPr marL="91440" marR="91440" marT="45720" marB="45720" anchor="ctr">
+                    <a:lnL w="6350" cap="flat" cmpd="sng" algn="ctr">
+                      <a:solidFill>
+                        <a:srgbClr val="DDE5E8"/>
+                      </a:solidFill>
+                      <a:prstDash val="solid"/>
+                      <a:round/>
+                      <a:headEnd type="none" w="med" len="med"/>
+                      <a:tailEnd type="none" w="med" len="med"/>
+                    </a:lnL>
+                    <a:lnR w="6350" cap="flat" cmpd="sng" algn="ctr">
+                      <a:solidFill>
+                        <a:srgbClr val="DDE5E8"/>
+                      </a:solidFill>
+                      <a:prstDash val="solid"/>
+                      <a:round/>
+                      <a:headEnd type="none" w="med" len="med"/>
+                      <a:tailEnd type="none" w="med" len="med"/>
+                    </a:lnR>
+                    <a:lnT w="6350" cap="flat" cmpd="sng" algn="ctr">
+                      <a:solidFill>
+                        <a:srgbClr val="DDE5E8"/>
+                      </a:solidFill>
+                      <a:prstDash val="solid"/>
+                      <a:round/>
+                      <a:headEnd type="none" w="med" len="med"/>
+                      <a:tailEnd type="none" w="med" len="med"/>
+                    </a:lnT>
+                    <a:lnB w="6350" cap="flat" cmpd="sng" algn="ctr">
+                      <a:solidFill>
+                        <a:srgbClr val="DDE5E8"/>
+                      </a:solidFill>
+                      <a:prstDash val="solid"/>
+                      <a:round/>
+                      <a:headEnd type="none" w="med" len="med"/>
+                      <a:tailEnd type="none" w="med" len="med"/>
+                    </a:lnB>
+                  </a:tcPr>
+                </a:tc>
+              </a:tr>
+              <a:tr h="384048">
+                <a:tc>
+                  <a:txBody>
+                    <a:bodyPr/>
+                    <a:lstStyle/>
+                    <a:p>
+                      <a:pPr algn="ctr" indent="0" marL="0">
+                        <a:buNone/>
+                      </a:pPr>
+                      <a:r>
+                        <a:rPr lang="en-US" sz="1150" b="1" dirty="0">
+                          <a:solidFill>
+                            <a:srgbClr val="16252C"/>
+                          </a:solidFill>
+                          <a:latin typeface="Calibri" pitchFamily="34" charset="0"/>
+                          <a:ea typeface="Calibri" pitchFamily="34" charset="-122"/>
+                          <a:cs typeface="Calibri" pitchFamily="34" charset="-120"/>
+                        </a:rPr>
+                        <a:t>mean</a:t>
+                      </a:r>
+                      <a:endParaRPr lang="en-US" sz="1150" dirty="0">
+                        <a:latin typeface="Calibri" charset="0"/>
+                        <a:ea typeface="Calibri" charset="0"/>
+                        <a:cs typeface="Calibri" charset="0"/>
+                      </a:endParaRPr>
+                    </a:p>
+                  </a:txBody>
+                  <a:tcPr marL="91440" marR="91440" marT="45720" marB="45720" anchor="ctr">
+                    <a:lnL w="6350" cap="flat" cmpd="sng" algn="ctr">
+                      <a:solidFill>
+                        <a:srgbClr val="DDE5E8"/>
+                      </a:solidFill>
+                      <a:prstDash val="solid"/>
+                      <a:round/>
+                      <a:headEnd type="none" w="med" len="med"/>
+                      <a:tailEnd type="none" w="med" len="med"/>
+                    </a:lnL>
+                    <a:lnR w="6350" cap="flat" cmpd="sng" algn="ctr">
+                      <a:solidFill>
+                        <a:srgbClr val="DDE5E8"/>
+                      </a:solidFill>
+                      <a:prstDash val="solid"/>
+                      <a:round/>
+                      <a:headEnd type="none" w="med" len="med"/>
+                      <a:tailEnd type="none" w="med" len="med"/>
+                    </a:lnR>
+                    <a:lnT w="6350" cap="flat" cmpd="sng" algn="ctr">
+                      <a:solidFill>
+                        <a:srgbClr val="DDE5E8"/>
+                      </a:solidFill>
+                      <a:prstDash val="solid"/>
+                      <a:round/>
+                      <a:headEnd type="none" w="med" len="med"/>
+                      <a:tailEnd type="none" w="med" len="med"/>
+                    </a:lnT>
+                    <a:lnB w="6350" cap="flat" cmpd="sng" algn="ctr">
+                      <a:solidFill>
+                        <a:srgbClr val="DDE5E8"/>
+                      </a:solidFill>
+                      <a:prstDash val="solid"/>
+                      <a:round/>
+                      <a:headEnd type="none" w="med" len="med"/>
+                      <a:tailEnd type="none" w="med" len="med"/>
+                    </a:lnB>
+                    <a:solidFill>
+                      <a:srgbClr val="E4F0F0"/>
+                    </a:solidFill>
+                  </a:tcPr>
+                </a:tc>
+                <a:tc>
+                  <a:txBody>
+                    <a:bodyPr/>
+                    <a:lstStyle/>
+                    <a:p>
+                      <a:pPr algn="ctr" indent="0" marL="0">
+                        <a:buNone/>
+                      </a:pPr>
+                      <a:endParaRPr lang="en-US" sz="1150" dirty="0">
+                        <a:latin typeface="Calibri" charset="0"/>
+                        <a:ea typeface="Calibri" charset="0"/>
+                        <a:cs typeface="Calibri" charset="0"/>
+                      </a:endParaRPr>
+                    </a:p>
+                  </a:txBody>
+                  <a:tcPr marL="91440" marR="91440" marT="45720" marB="45720" anchor="ctr">
+                    <a:lnL w="6350" cap="flat" cmpd="sng" algn="ctr">
+                      <a:solidFill>
+                        <a:srgbClr val="DDE5E8"/>
+                      </a:solidFill>
+                      <a:prstDash val="solid"/>
+                      <a:round/>
+                      <a:headEnd type="none" w="med" len="med"/>
+                      <a:tailEnd type="none" w="med" len="med"/>
+                    </a:lnL>
+                    <a:lnR w="6350" cap="flat" cmpd="sng" algn="ctr">
+                      <a:solidFill>
+                        <a:srgbClr val="DDE5E8"/>
+                      </a:solidFill>
+                      <a:prstDash val="solid"/>
+                      <a:round/>
+                      <a:headEnd type="none" w="med" len="med"/>
+                      <a:tailEnd type="none" w="med" len="med"/>
+                    </a:lnR>
+                    <a:lnT w="6350" cap="flat" cmpd="sng" algn="ctr">
+                      <a:solidFill>
+                        <a:srgbClr val="DDE5E8"/>
+                      </a:solidFill>
+                      <a:prstDash val="solid"/>
+                      <a:round/>
+                      <a:headEnd type="none" w="med" len="med"/>
+                      <a:tailEnd type="none" w="med" len="med"/>
+                    </a:lnT>
+                    <a:lnB w="6350" cap="flat" cmpd="sng" algn="ctr">
+                      <a:solidFill>
+                        <a:srgbClr val="DDE5E8"/>
+                      </a:solidFill>
+                      <a:prstDash val="solid"/>
+                      <a:round/>
+                      <a:headEnd type="none" w="med" len="med"/>
+                      <a:tailEnd type="none" w="med" len="med"/>
+                    </a:lnB>
+                    <a:solidFill>
+                      <a:srgbClr val="E4F0F0"/>
+                    </a:solidFill>
+                  </a:tcPr>
+                </a:tc>
+                <a:tc>
+                  <a:txBody>
+                    <a:bodyPr/>
+                    <a:lstStyle/>
+                    <a:p>
+                      <a:pPr algn="ctr" indent="0" marL="0">
+                        <a:buNone/>
+                      </a:pPr>
+                      <a:endParaRPr lang="en-US" sz="1150" dirty="0">
+                        <a:latin typeface="Calibri" charset="0"/>
+                        <a:ea typeface="Calibri" charset="0"/>
+                        <a:cs typeface="Calibri" charset="0"/>
+                      </a:endParaRPr>
+                    </a:p>
+                  </a:txBody>
+                  <a:tcPr marL="91440" marR="91440" marT="45720" marB="45720" anchor="ctr">
+                    <a:lnL w="6350" cap="flat" cmpd="sng" algn="ctr">
+                      <a:solidFill>
+                        <a:srgbClr val="DDE5E8"/>
+                      </a:solidFill>
+                      <a:prstDash val="solid"/>
+                      <a:round/>
+                      <a:headEnd type="none" w="med" len="med"/>
+                      <a:tailEnd type="none" w="med" len="med"/>
+                    </a:lnL>
+                    <a:lnR w="6350" cap="flat" cmpd="sng" algn="ctr">
+                      <a:solidFill>
+                        <a:srgbClr val="DDE5E8"/>
+                      </a:solidFill>
+                      <a:prstDash val="solid"/>
+                      <a:round/>
+                      <a:headEnd type="none" w="med" len="med"/>
+                      <a:tailEnd type="none" w="med" len="med"/>
+                    </a:lnR>
+                    <a:lnT w="6350" cap="flat" cmpd="sng" algn="ctr">
+                      <a:solidFill>
+                        <a:srgbClr val="DDE5E8"/>
+                      </a:solidFill>
+                      <a:prstDash val="solid"/>
+                      <a:round/>
+                      <a:headEnd type="none" w="med" len="med"/>
+                      <a:tailEnd type="none" w="med" len="med"/>
+                    </a:lnT>
+                    <a:lnB w="6350" cap="flat" cmpd="sng" algn="ctr">
+                      <a:solidFill>
+                        <a:srgbClr val="DDE5E8"/>
+                      </a:solidFill>
+                      <a:prstDash val="solid"/>
+                      <a:round/>
+                      <a:headEnd type="none" w="med" len="med"/>
+                      <a:tailEnd type="none" w="med" len="med"/>
+                    </a:lnB>
+                    <a:solidFill>
+                      <a:srgbClr val="E4F0F0"/>
+                    </a:solidFill>
+                  </a:tcPr>
+                </a:tc>
+                <a:tc>
+                  <a:txBody>
+                    <a:bodyPr/>
+                    <a:lstStyle/>
+                    <a:p>
+                      <a:pPr algn="ctr" indent="0" marL="0">
+                        <a:buNone/>
+                      </a:pPr>
+                      <a:r>
+                        <a:rPr lang="en-US" sz="1150" b="1" dirty="0">
+                          <a:solidFill>
+                            <a:srgbClr val="16252C"/>
+                          </a:solidFill>
+                          <a:latin typeface="Calibri" pitchFamily="34" charset="0"/>
+                          <a:ea typeface="Calibri" pitchFamily="34" charset="-122"/>
+                          <a:cs typeface="Calibri" pitchFamily="34" charset="-120"/>
+                        </a:rPr>
+                        <a:t>0.921</a:t>
+                      </a:r>
+                      <a:endParaRPr lang="en-US" sz="1150" dirty="0">
+                        <a:latin typeface="Calibri" charset="0"/>
+                        <a:ea typeface="Calibri" charset="0"/>
+                        <a:cs typeface="Calibri" charset="0"/>
+                      </a:endParaRPr>
+                    </a:p>
+                  </a:txBody>
+                  <a:tcPr marL="91440" marR="91440" marT="45720" marB="45720" anchor="ctr">
+                    <a:lnL w="6350" cap="flat" cmpd="sng" algn="ctr">
+                      <a:solidFill>
+                        <a:srgbClr val="DDE5E8"/>
+                      </a:solidFill>
+                      <a:prstDash val="solid"/>
+                      <a:round/>
+                      <a:headEnd type="none" w="med" len="med"/>
+                      <a:tailEnd type="none" w="med" len="med"/>
+                    </a:lnL>
+                    <a:lnR w="6350" cap="flat" cmpd="sng" algn="ctr">
+                      <a:solidFill>
+                        <a:srgbClr val="DDE5E8"/>
+                      </a:solidFill>
+                      <a:prstDash val="solid"/>
+                      <a:round/>
+                      <a:headEnd type="none" w="med" len="med"/>
+                      <a:tailEnd type="none" w="med" len="med"/>
+                    </a:lnR>
+                    <a:lnT w="6350" cap="flat" cmpd="sng" algn="ctr">
+                      <a:solidFill>
+                        <a:srgbClr val="DDE5E8"/>
+                      </a:solidFill>
+                      <a:prstDash val="solid"/>
+                      <a:round/>
+                      <a:headEnd type="none" w="med" len="med"/>
+                      <a:tailEnd type="none" w="med" len="med"/>
+                    </a:lnT>
+                    <a:lnB w="6350" cap="flat" cmpd="sng" algn="ctr">
+                      <a:solidFill>
+                        <a:srgbClr val="DDE5E8"/>
+                      </a:solidFill>
+                      <a:prstDash val="solid"/>
+                      <a:round/>
+                      <a:headEnd type="none" w="med" len="med"/>
+                      <a:tailEnd type="none" w="med" len="med"/>
+                    </a:lnB>
+                    <a:solidFill>
+                      <a:srgbClr val="E4F0F0"/>
+                    </a:solidFill>
+                  </a:tcPr>
+                </a:tc>
+              </a:tr>
+            </a:tbl>
+          </a:graphicData>
+        </a:graphic>
+      </p:graphicFrame>
+      <p:sp>
+        <p:nvSpPr>
+          <p:cNvPr id="14" name="Shape 10"/>
+          <p:cNvSpPr/>
+          <p:nvPr/>
+        </p:nvSpPr>
+        <p:spPr>
+          <a:xfrm>
+            <a:off x="6309360" y="4206240"/>
+            <a:ext cx="5303520" cy="1536192"/>
+          </a:xfrm>
+          <a:prstGeom prst="rect">
+            <a:avLst/>
+          </a:prstGeom>
+          <a:solidFill>
+            <a:srgbClr val="FFFFFF"/>
+          </a:solidFill>
+          <a:ln/>
+          <a:effectLst>
+            <a:outerShdw sx="100000" sy="100000" kx="0" ky="0" algn="bl" rotWithShape="0" blurRad="101600" dist="25400" dir="8100000">
+              <a:srgbClr val="000000">
+                <a:alpha val="10000"/>
+              </a:srgbClr>
+            </a:outerShdw>
+          </a:effectLst>
+        </p:spPr>
+      </p:sp>
+      <p:sp>
+        <p:nvSpPr>
+          <p:cNvPr id="15" name="Shape 11"/>
+          <p:cNvSpPr/>
+          <p:nvPr/>
+        </p:nvSpPr>
+        <p:spPr>
+          <a:xfrm>
+            <a:off x="6309360" y="4206240"/>
+            <a:ext cx="68580" cy="1536192"/>
+          </a:xfrm>
+          <a:prstGeom prst="rect">
+            <a:avLst/>
+          </a:prstGeom>
+          <a:solidFill>
+            <a:srgbClr val="8FB996"/>
+          </a:solidFill>
+          <a:ln/>
+        </p:spPr>
+      </p:sp>
+      <p:sp>
+        <p:nvSpPr>
+          <p:cNvPr id="16" name="Text 12"/>
+          <p:cNvSpPr/>
+          <p:nvPr/>
+        </p:nvSpPr>
+        <p:spPr>
+          <a:xfrm>
+            <a:off x="6565392" y="4352544"/>
+            <a:ext cx="4846320" cy="329184"/>
+          </a:xfrm>
+          <a:prstGeom prst="rect">
+            <a:avLst/>
+          </a:prstGeom>
+          <a:noFill/>
+          <a:ln/>
+        </p:spPr>
+        <p:txBody>
+          <a:bodyPr wrap="square" lIns="0" tIns="0" rIns="0" bIns="0" rtlCol="0" anchor="t"/>
+          <a:lstStyle/>
+          <a:p>
+            <a:pPr indent="0" marL="0">
+              <a:buNone/>
+            </a:pPr>
+            <a:r>
+              <a:rPr lang="en-US" sz="1400" b="1" dirty="0">
+                <a:solidFill>
+                  <a:srgbClr val="16252C"/>
+                </a:solidFill>
+                <a:latin typeface="Georgia" pitchFamily="34" charset="0"/>
+                <a:ea typeface="Georgia" pitchFamily="34" charset="-122"/>
+                <a:cs typeface="Georgia" pitchFamily="34" charset="-120"/>
+              </a:rPr>
+              <a:t>Spatial generalization is not the bottleneck</a:t>
+            </a:r>
+            <a:endParaRPr lang="en-US" sz="1400" dirty="0"/>
+          </a:p>
+        </p:txBody>
+      </p:sp>
+      <p:sp>
+        <p:nvSpPr>
+          <p:cNvPr id="17" name="Text 13"/>
+          <p:cNvSpPr/>
+          <p:nvPr/>
+        </p:nvSpPr>
+        <p:spPr>
+          <a:xfrm>
+            <a:off x="6565392" y="4736592"/>
+            <a:ext cx="4846320" cy="877824"/>
+          </a:xfrm>
+          <a:prstGeom prst="rect">
+            <a:avLst/>
+          </a:prstGeom>
+          <a:noFill/>
+          <a:ln/>
+        </p:spPr>
+        <p:txBody>
+          <a:bodyPr wrap="square" lIns="0" tIns="0" rIns="0" bIns="0" rtlCol="0" anchor="t"/>
+          <a:lstStyle/>
+          <a:p>
+            <a:pPr indent="0" marL="0">
+              <a:lnSpc>
+                <a:spcPct val="112000"/>
+              </a:lnSpc>
+              <a:buNone/>
+            </a:pPr>
+            <a:r>
+              <a:rPr lang="en-US" sz="1100" dirty="0">
+                <a:solidFill>
+                  <a:srgbClr val="5F7580"/>
+                </a:solidFill>
+                <a:latin typeface="Calibri" pitchFamily="34" charset="0"/>
+                <a:ea typeface="Calibri" pitchFamily="34" charset="-122"/>
+                <a:cs typeface="Calibri" pitchFamily="34" charset="-120"/>
+              </a:rPr>
+              <a:t>With season comparable, the model transfers across wetlands at AUC 0.84–0.92.</a:t>
+            </a:r>
+            <a:endParaRPr lang="en-US" sz="1100" dirty="0"/>
+          </a:p>
+          <a:p>
+            <a:pPr indent="0" marL="0">
+              <a:lnSpc>
+                <a:spcPct val="112000"/>
+              </a:lnSpc>
+              <a:buNone/>
+            </a:pPr>
+            <a:endParaRPr lang="en-US" sz="1100" dirty="0"/>
+          </a:p>
+          <a:p>
+            <a:pPr indent="0" marL="0">
+              <a:lnSpc>
+                <a:spcPct val="112000"/>
+              </a:lnSpc>
+              <a:buNone/>
+            </a:pPr>
+            <a:r>
+              <a:rPr lang="en-US" sz="1100" dirty="0">
+                <a:solidFill>
+                  <a:srgbClr val="5F7580"/>
+                </a:solidFill>
+                <a:latin typeface="Calibri" pitchFamily="34" charset="0"/>
+                <a:ea typeface="Calibri" pitchFamily="34" charset="-122"/>
+                <a:cs typeface="Calibri" pitchFamily="34" charset="-120"/>
+              </a:rPr>
+              <a:t>The Sacramento fold that dragged the naive average down had 46 January samples with a single positive — that AUC is one bird's percentile rank, not an estimate.</a:t>
+            </a:r>
+            <a:endParaRPr lang="en-US" sz="1100" dirty="0"/>
+          </a:p>
+        </p:txBody>
+      </p:sp>
+    </p:spTree>
+  </p:cSld>
+  <p:clrMapOvr>
+    <a:masterClrMapping/>
+  </p:clrMapOvr>
+</p:sld>
+</file>
+
+<file path=ppt/slides/slide24.xml><?xml version="1.0" encoding="utf-8"?>
+<p:sld xmlns:a="http://schemas.openxmlformats.org/drawingml/2006/main" xmlns:r="http://schemas.openxmlformats.org/officeDocument/2006/relationships" xmlns:p="http://schemas.openxmlformats.org/presentationml/2006/main">
+  <p:cSld name="Slide 24">
+    <p:bg>
+      <p:bgPr>
+        <a:solidFill>
           <a:srgbClr val="0B3C49"/>
         </a:solidFill>
       </p:bgPr>
@@ -29584,9 +32670,9 @@
 </p:sld>
 </file>
 
-<file path=ppt/slides/slide24.xml><?xml version="1.0" encoding="utf-8"?>
+<file path=ppt/slides/slide25.xml><?xml version="1.0" encoding="utf-8"?>
 <p:sld xmlns:a="http://schemas.openxmlformats.org/drawingml/2006/main" xmlns:r="http://schemas.openxmlformats.org/officeDocument/2006/relationships" xmlns:p="http://schemas.openxmlformats.org/presentationml/2006/main">
-  <p:cSld name="Slide 24">
+  <p:cSld name="Slide 25">
     <p:bg>
       <p:bgPr>
         <a:solidFill>
@@ -29739,7 +32825,7 @@
                 <a:ea typeface="Calibri" pitchFamily="34" charset="-122"/>
                 <a:cs typeface="Calibri" pitchFamily="34" charset="-120"/>
               </a:rPr>
-              <a:t>24</a:t>
+              <a:t>25</a:t>
             </a:r>
             <a:endParaRPr lang="en-US" sz="1000" dirty="0"/>
           </a:p>
@@ -29786,7 +32872,7 @@
       </p:sp>
       <p:graphicFrame>
         <p:nvGraphicFramePr>
-          <p:cNvPr id="25" name="Table 0"/>
+          <p:cNvPr id="26" name="Table 0"/>
           <p:cNvGraphicFramePr>
             <a:graphicFrameLocks noGrp="1"/>
           </p:cNvGraphicFramePr>
@@ -33518,9 +36604,9 @@
 </p:sld>
 </file>
 
-<file path=ppt/slides/slide25.xml><?xml version="1.0" encoding="utf-8"?>
+<file path=ppt/slides/slide26.xml><?xml version="1.0" encoding="utf-8"?>
 <p:sld xmlns:a="http://schemas.openxmlformats.org/drawingml/2006/main" xmlns:r="http://schemas.openxmlformats.org/officeDocument/2006/relationships" xmlns:p="http://schemas.openxmlformats.org/presentationml/2006/main">
-  <p:cSld name="Slide 25">
+  <p:cSld name="Slide 26">
     <p:bg>
       <p:bgPr>
         <a:solidFill>
@@ -33673,7 +36759,7 @@
                 <a:ea typeface="Calibri" pitchFamily="34" charset="-122"/>
                 <a:cs typeface="Calibri" pitchFamily="34" charset="-120"/>
               </a:rPr>
-              <a:t>25</a:t>
+              <a:t>26</a:t>
             </a:r>
             <a:endParaRPr lang="en-US" sz="1000" dirty="0"/>
           </a:p>
@@ -34226,9 +37312,9 @@
 </p:sld>
 </file>
 
-<file path=ppt/slides/slide26.xml><?xml version="1.0" encoding="utf-8"?>
+<file path=ppt/slides/slide27.xml><?xml version="1.0" encoding="utf-8"?>
 <p:sld xmlns:a="http://schemas.openxmlformats.org/drawingml/2006/main" xmlns:r="http://schemas.openxmlformats.org/officeDocument/2006/relationships" xmlns:p="http://schemas.openxmlformats.org/presentationml/2006/main">
-  <p:cSld name="Slide 26">
+  <p:cSld name="Slide 27">
     <p:bg>
       <p:bgPr>
         <a:solidFill>
@@ -34381,7 +37467,7 @@
                 <a:ea typeface="Calibri" pitchFamily="34" charset="-122"/>
                 <a:cs typeface="Calibri" pitchFamily="34" charset="-120"/>
               </a:rPr>
-              <a:t>26</a:t>
+              <a:t>27</a:t>
             </a:r>
             <a:endParaRPr lang="en-US" sz="1000" dirty="0"/>
           </a:p>
@@ -35013,9 +38099,9 @@
 </p:sld>
 </file>
 
-<file path=ppt/slides/slide27.xml><?xml version="1.0" encoding="utf-8"?>
+<file path=ppt/slides/slide28.xml><?xml version="1.0" encoding="utf-8"?>
 <p:sld xmlns:a="http://schemas.openxmlformats.org/drawingml/2006/main" xmlns:r="http://schemas.openxmlformats.org/officeDocument/2006/relationships" xmlns:p="http://schemas.openxmlformats.org/presentationml/2006/main">
-  <p:cSld name="Slide 27">
+  <p:cSld name="Slide 28">
     <p:bg>
       <p:bgPr>
         <a:solidFill>
@@ -35168,7 +38254,7 @@
                 <a:ea typeface="Calibri" pitchFamily="34" charset="-122"/>
                 <a:cs typeface="Calibri" pitchFamily="34" charset="-120"/>
               </a:rPr>
-              <a:t>27</a:t>
+              <a:t>28</a:t>
             </a:r>
             <a:endParaRPr lang="en-US" sz="1000" dirty="0"/>
           </a:p>
@@ -36150,7 +39236,7 @@
                 <a:ea typeface="Georgia" pitchFamily="34" charset="-122"/>
                 <a:cs typeface="Georgia" pitchFamily="34" charset="-120"/>
               </a:rPr>
-              <a:t>8.  Spatial confounding is unresolved</a:t>
+              <a:t>8.  Sampling design binds space to time</a:t>
             </a:r>
             <a:endParaRPr lang="en-US" sz="1250" dirty="0"/>
           </a:p>
@@ -36192,7 +39278,7 @@
                 <a:ea typeface="Calibri" pitchFamily="34" charset="-122"/>
                 <a:cs typeface="Calibri" pitchFamily="34" charset="-120"/>
               </a:rPr>
-              <a:t>Even after dropping the confounded months: site → label AUC 0.740, microbiome → site 0.753. Site-stratified reanalysis is underpowered here.</a:t>
+              <a:t>Site and month are nearly interchangeable, so cross-season deployment cannot be tested. Cross-site transfer itself is fine (0.84–0.92).</a:t>
             </a:r>
             <a:endParaRPr lang="en-US" sz="1050" dirty="0"/>
           </a:p>
@@ -36234,882 +39320,6 @@
               <a:t>Stated in the README as written here — not softened for presentation.</a:t>
             </a:r>
             <a:endParaRPr lang="en-US" sz="1100" dirty="0"/>
-          </a:p>
-        </p:txBody>
-      </p:sp>
-    </p:spTree>
-  </p:cSld>
-  <p:clrMapOvr>
-    <a:masterClrMapping/>
-  </p:clrMapOvr>
-</p:sld>
-</file>
-
-<file path=ppt/slides/slide28.xml><?xml version="1.0" encoding="utf-8"?>
-<p:sld xmlns:a="http://schemas.openxmlformats.org/drawingml/2006/main" xmlns:r="http://schemas.openxmlformats.org/officeDocument/2006/relationships" xmlns:p="http://schemas.openxmlformats.org/presentationml/2006/main">
-  <p:cSld name="Slide 28">
-    <p:bg>
-      <p:bgPr>
-        <a:solidFill>
-          <a:srgbClr val="FCFAF6"/>
-        </a:solidFill>
-      </p:bgPr>
-    </p:bg>
-    <p:spTree>
-      <p:nvGrpSpPr>
-        <p:cNvPr id="1" name=""/>
-        <p:cNvGrpSpPr/>
-        <p:nvPr/>
-      </p:nvGrpSpPr>
-      <p:grpSpPr>
-        <a:xfrm>
-          <a:off x="0" y="0"/>
-          <a:ext cx="0" cy="0"/>
-          <a:chOff x="0" y="0"/>
-          <a:chExt cx="0" cy="0"/>
-        </a:xfrm>
-      </p:grpSpPr>
-      <p:sp>
-        <p:nvSpPr>
-          <p:cNvPr id="2" name="Shape 0"/>
-          <p:cNvSpPr/>
-          <p:nvPr/>
-        </p:nvSpPr>
-        <p:spPr>
-          <a:xfrm>
-            <a:off x="0" y="0"/>
-            <a:ext cx="12191695" cy="54864"/>
-          </a:xfrm>
-          <a:prstGeom prst="rect">
-            <a:avLst/>
-          </a:prstGeom>
-          <a:solidFill>
-            <a:srgbClr val="18707F"/>
-          </a:solidFill>
-          <a:ln/>
-        </p:spPr>
-      </p:sp>
-      <p:sp>
-        <p:nvSpPr>
-          <p:cNvPr id="3" name="Text 1"/>
-          <p:cNvSpPr/>
-          <p:nvPr/>
-        </p:nvSpPr>
-        <p:spPr>
-          <a:xfrm>
-            <a:off x="548640" y="310896"/>
-            <a:ext cx="7315200" cy="256032"/>
-          </a:xfrm>
-          <a:prstGeom prst="rect">
-            <a:avLst/>
-          </a:prstGeom>
-          <a:noFill/>
-          <a:ln/>
-        </p:spPr>
-        <p:txBody>
-          <a:bodyPr wrap="square" lIns="0" tIns="0" rIns="0" bIns="0" rtlCol="0" anchor="ctr"/>
-          <a:lstStyle/>
-          <a:p>
-            <a:pPr indent="0" marL="0">
-              <a:buNone/>
-            </a:pPr>
-            <a:r>
-              <a:rPr lang="en-US" sz="1100" b="1" spc="200" kern="0" dirty="0">
-                <a:solidFill>
-                  <a:srgbClr val="18707F"/>
-                </a:solidFill>
-                <a:latin typeface="Calibri" pitchFamily="34" charset="0"/>
-                <a:ea typeface="Calibri" pitchFamily="34" charset="-122"/>
-                <a:cs typeface="Calibri" pitchFamily="34" charset="-120"/>
-              </a:rPr>
-              <a:t>SUMMARY</a:t>
-            </a:r>
-            <a:endParaRPr lang="en-US" sz="1100" dirty="0"/>
-          </a:p>
-        </p:txBody>
-      </p:sp>
-      <p:sp>
-        <p:nvSpPr>
-          <p:cNvPr id="4" name="Text 2"/>
-          <p:cNvSpPr/>
-          <p:nvPr/>
-        </p:nvSpPr>
-        <p:spPr>
-          <a:xfrm>
-            <a:off x="548640" y="566928"/>
-            <a:ext cx="11064240" cy="685800"/>
-          </a:xfrm>
-          <a:prstGeom prst="rect">
-            <a:avLst/>
-          </a:prstGeom>
-          <a:noFill/>
-          <a:ln/>
-        </p:spPr>
-        <p:txBody>
-          <a:bodyPr wrap="square" lIns="0" tIns="0" rIns="0" bIns="0" rtlCol="0" anchor="ctr"/>
-          <a:lstStyle/>
-          <a:p>
-            <a:pPr indent="0" marL="0">
-              <a:buNone/>
-            </a:pPr>
-            <a:r>
-              <a:rPr lang="en-US" sz="3000" b="1" dirty="0">
-                <a:solidFill>
-                  <a:srgbClr val="16252C"/>
-                </a:solidFill>
-                <a:latin typeface="Georgia" pitchFamily="34" charset="0"/>
-                <a:ea typeface="Georgia" pitchFamily="34" charset="-122"/>
-                <a:cs typeface="Georgia" pitchFamily="34" charset="-120"/>
-              </a:rPr>
-              <a:t>Conclusions</a:t>
-            </a:r>
-            <a:endParaRPr lang="en-US" sz="3000" dirty="0"/>
-          </a:p>
-        </p:txBody>
-      </p:sp>
-      <p:sp>
-        <p:nvSpPr>
-          <p:cNvPr id="5" name="Text 3"/>
-          <p:cNvSpPr/>
-          <p:nvPr/>
-        </p:nvSpPr>
-        <p:spPr>
-          <a:xfrm>
-            <a:off x="11430000" y="6355080"/>
-            <a:ext cx="411480" cy="274320"/>
-          </a:xfrm>
-          <a:prstGeom prst="rect">
-            <a:avLst/>
-          </a:prstGeom>
-          <a:noFill/>
-          <a:ln/>
-        </p:spPr>
-        <p:txBody>
-          <a:bodyPr wrap="square" lIns="0" tIns="0" rIns="0" bIns="0" rtlCol="0" anchor="ctr"/>
-          <a:lstStyle/>
-          <a:p>
-            <a:pPr algn="r" indent="0" marL="0">
-              <a:buNone/>
-            </a:pPr>
-            <a:r>
-              <a:rPr lang="en-US" sz="1000" dirty="0">
-                <a:solidFill>
-                  <a:srgbClr val="5F7580"/>
-                </a:solidFill>
-                <a:latin typeface="Calibri" pitchFamily="34" charset="0"/>
-                <a:ea typeface="Calibri" pitchFamily="34" charset="-122"/>
-                <a:cs typeface="Calibri" pitchFamily="34" charset="-120"/>
-              </a:rPr>
-              <a:t>28</a:t>
-            </a:r>
-            <a:endParaRPr lang="en-US" sz="1000" dirty="0"/>
-          </a:p>
-        </p:txBody>
-      </p:sp>
-      <p:sp>
-        <p:nvSpPr>
-          <p:cNvPr id="6" name="Shape 4"/>
-          <p:cNvSpPr/>
-          <p:nvPr/>
-        </p:nvSpPr>
-        <p:spPr>
-          <a:xfrm>
-            <a:off x="548640" y="1289304"/>
-            <a:ext cx="457200" cy="457200"/>
-          </a:xfrm>
-          <a:prstGeom prst="ellipse">
-            <a:avLst/>
-          </a:prstGeom>
-          <a:solidFill>
-            <a:srgbClr val="18707F"/>
-          </a:solidFill>
-          <a:ln/>
-        </p:spPr>
-      </p:sp>
-      <p:sp>
-        <p:nvSpPr>
-          <p:cNvPr id="7" name="Text 5"/>
-          <p:cNvSpPr/>
-          <p:nvPr/>
-        </p:nvSpPr>
-        <p:spPr>
-          <a:xfrm>
-            <a:off x="548640" y="1362456"/>
-            <a:ext cx="457200" cy="310896"/>
-          </a:xfrm>
-          <a:prstGeom prst="rect">
-            <a:avLst/>
-          </a:prstGeom>
-          <a:noFill/>
-          <a:ln/>
-        </p:spPr>
-        <p:txBody>
-          <a:bodyPr wrap="square" lIns="0" tIns="0" rIns="0" bIns="0" rtlCol="0" anchor="ctr"/>
-          <a:lstStyle/>
-          <a:p>
-            <a:pPr algn="ctr" indent="0" marL="0">
-              <a:buNone/>
-            </a:pPr>
-            <a:r>
-              <a:rPr lang="en-US" sz="1400" b="1" dirty="0">
-                <a:solidFill>
-                  <a:srgbClr val="FFFFFF"/>
-                </a:solidFill>
-                <a:latin typeface="Georgia" pitchFamily="34" charset="0"/>
-                <a:ea typeface="Georgia" pitchFamily="34" charset="-122"/>
-                <a:cs typeface="Georgia" pitchFamily="34" charset="-120"/>
-              </a:rPr>
-              <a:t>1</a:t>
-            </a:r>
-            <a:endParaRPr lang="en-US" sz="1400" dirty="0"/>
-          </a:p>
-        </p:txBody>
-      </p:sp>
-      <p:sp>
-        <p:nvSpPr>
-          <p:cNvPr id="8" name="Text 6"/>
-          <p:cNvSpPr/>
-          <p:nvPr/>
-        </p:nvSpPr>
-        <p:spPr>
-          <a:xfrm>
-            <a:off x="1188720" y="1252728"/>
-            <a:ext cx="10424160" cy="566928"/>
-          </a:xfrm>
-          <a:prstGeom prst="rect">
-            <a:avLst/>
-          </a:prstGeom>
-          <a:noFill/>
-          <a:ln/>
-        </p:spPr>
-        <p:txBody>
-          <a:bodyPr wrap="square" lIns="0" tIns="0" rIns="0" bIns="0" rtlCol="0" anchor="t"/>
-          <a:lstStyle/>
-          <a:p>
-            <a:pPr indent="0" marL="0">
-              <a:lnSpc>
-                <a:spcPct val="108000"/>
-              </a:lnSpc>
-              <a:buNone/>
-            </a:pPr>
-            <a:r>
-              <a:rPr lang="en-US" sz="1250" dirty="0">
-                <a:solidFill>
-                  <a:srgbClr val="16252C"/>
-                </a:solidFill>
-                <a:latin typeface="Calibri" pitchFamily="34" charset="0"/>
-                <a:ea typeface="Calibri" pitchFamily="34" charset="-122"/>
-                <a:cs typeface="Calibri" pitchFamily="34" charset="-120"/>
-              </a:rPr>
-              <a:t>Duck gut microbiota carry a real, reproducible signal for influenza infection status (permutation p = 0.0099).</a:t>
-            </a:r>
-            <a:endParaRPr lang="en-US" sz="1250" dirty="0"/>
-          </a:p>
-        </p:txBody>
-      </p:sp>
-      <p:sp>
-        <p:nvSpPr>
-          <p:cNvPr id="9" name="Shape 7"/>
-          <p:cNvSpPr/>
-          <p:nvPr/>
-        </p:nvSpPr>
-        <p:spPr>
-          <a:xfrm>
-            <a:off x="548640" y="2011680"/>
-            <a:ext cx="457200" cy="457200"/>
-          </a:xfrm>
-          <a:prstGeom prst="ellipse">
-            <a:avLst/>
-          </a:prstGeom>
-          <a:solidFill>
-            <a:srgbClr val="18707F"/>
-          </a:solidFill>
-          <a:ln/>
-        </p:spPr>
-      </p:sp>
-      <p:sp>
-        <p:nvSpPr>
-          <p:cNvPr id="10" name="Text 8"/>
-          <p:cNvSpPr/>
-          <p:nvPr/>
-        </p:nvSpPr>
-        <p:spPr>
-          <a:xfrm>
-            <a:off x="548640" y="2084832"/>
-            <a:ext cx="457200" cy="310896"/>
-          </a:xfrm>
-          <a:prstGeom prst="rect">
-            <a:avLst/>
-          </a:prstGeom>
-          <a:noFill/>
-          <a:ln/>
-        </p:spPr>
-        <p:txBody>
-          <a:bodyPr wrap="square" lIns="0" tIns="0" rIns="0" bIns="0" rtlCol="0" anchor="ctr"/>
-          <a:lstStyle/>
-          <a:p>
-            <a:pPr algn="ctr" indent="0" marL="0">
-              <a:buNone/>
-            </a:pPr>
-            <a:r>
-              <a:rPr lang="en-US" sz="1400" b="1" dirty="0">
-                <a:solidFill>
-                  <a:srgbClr val="FFFFFF"/>
-                </a:solidFill>
-                <a:latin typeface="Georgia" pitchFamily="34" charset="0"/>
-                <a:ea typeface="Georgia" pitchFamily="34" charset="-122"/>
-                <a:cs typeface="Georgia" pitchFamily="34" charset="-120"/>
-              </a:rPr>
-              <a:t>2</a:t>
-            </a:r>
-            <a:endParaRPr lang="en-US" sz="1400" dirty="0"/>
-          </a:p>
-        </p:txBody>
-      </p:sp>
-      <p:sp>
-        <p:nvSpPr>
-          <p:cNvPr id="11" name="Text 9"/>
-          <p:cNvSpPr/>
-          <p:nvPr/>
-        </p:nvSpPr>
-        <p:spPr>
-          <a:xfrm>
-            <a:off x="1188720" y="1975104"/>
-            <a:ext cx="10424160" cy="566928"/>
-          </a:xfrm>
-          <a:prstGeom prst="rect">
-            <a:avLst/>
-          </a:prstGeom>
-          <a:noFill/>
-          <a:ln/>
-        </p:spPr>
-        <p:txBody>
-          <a:bodyPr wrap="square" lIns="0" tIns="0" rIns="0" bIns="0" rtlCol="0" anchor="t"/>
-          <a:lstStyle/>
-          <a:p>
-            <a:pPr indent="0" marL="0">
-              <a:lnSpc>
-                <a:spcPct val="108000"/>
-              </a:lnSpc>
-              <a:buNone/>
-            </a:pPr>
-            <a:r>
-              <a:rPr lang="en-US" sz="1250" dirty="0">
-                <a:solidFill>
-                  <a:srgbClr val="16252C"/>
-                </a:solidFill>
-                <a:latin typeface="Calibri" pitchFamily="34" charset="0"/>
-                <a:ea typeface="Calibri" pitchFamily="34" charset="-122"/>
-                <a:cs typeface="Calibri" pitchFamily="34" charset="-120"/>
-              </a:rPr>
-              <a:t>SVM-RBF is the primary model — AUC 0.839, MCC 0.531 — significantly beating Random Forest (p = 0.021), XGBoost (p = 0.0016) and L1-LR (p &lt; 0.001) among 17 models compared.</a:t>
-            </a:r>
-            <a:endParaRPr lang="en-US" sz="1250" dirty="0"/>
-          </a:p>
-        </p:txBody>
-      </p:sp>
-      <p:sp>
-        <p:nvSpPr>
-          <p:cNvPr id="12" name="Shape 10"/>
-          <p:cNvSpPr/>
-          <p:nvPr/>
-        </p:nvSpPr>
-        <p:spPr>
-          <a:xfrm>
-            <a:off x="548640" y="2734056"/>
-            <a:ext cx="457200" cy="457200"/>
-          </a:xfrm>
-          <a:prstGeom prst="ellipse">
-            <a:avLst/>
-          </a:prstGeom>
-          <a:solidFill>
-            <a:srgbClr val="18707F"/>
-          </a:solidFill>
-          <a:ln/>
-        </p:spPr>
-      </p:sp>
-      <p:sp>
-        <p:nvSpPr>
-          <p:cNvPr id="13" name="Text 11"/>
-          <p:cNvSpPr/>
-          <p:nvPr/>
-        </p:nvSpPr>
-        <p:spPr>
-          <a:xfrm>
-            <a:off x="548640" y="2807208"/>
-            <a:ext cx="457200" cy="310896"/>
-          </a:xfrm>
-          <a:prstGeom prst="rect">
-            <a:avLst/>
-          </a:prstGeom>
-          <a:noFill/>
-          <a:ln/>
-        </p:spPr>
-        <p:txBody>
-          <a:bodyPr wrap="square" lIns="0" tIns="0" rIns="0" bIns="0" rtlCol="0" anchor="ctr"/>
-          <a:lstStyle/>
-          <a:p>
-            <a:pPr algn="ctr" indent="0" marL="0">
-              <a:buNone/>
-            </a:pPr>
-            <a:r>
-              <a:rPr lang="en-US" sz="1400" b="1" dirty="0">
-                <a:solidFill>
-                  <a:srgbClr val="FFFFFF"/>
-                </a:solidFill>
-                <a:latin typeface="Georgia" pitchFamily="34" charset="0"/>
-                <a:ea typeface="Georgia" pitchFamily="34" charset="-122"/>
-                <a:cs typeface="Georgia" pitchFamily="34" charset="-120"/>
-              </a:rPr>
-              <a:t>3</a:t>
-            </a:r>
-            <a:endParaRPr lang="en-US" sz="1400" dirty="0"/>
-          </a:p>
-        </p:txBody>
-      </p:sp>
-      <p:sp>
-        <p:nvSpPr>
-          <p:cNvPr id="14" name="Text 12"/>
-          <p:cNvSpPr/>
-          <p:nvPr/>
-        </p:nvSpPr>
-        <p:spPr>
-          <a:xfrm>
-            <a:off x="1188720" y="2697480"/>
-            <a:ext cx="10424160" cy="566928"/>
-          </a:xfrm>
-          <a:prstGeom prst="rect">
-            <a:avLst/>
-          </a:prstGeom>
-          <a:noFill/>
-          <a:ln/>
-        </p:spPr>
-        <p:txBody>
-          <a:bodyPr wrap="square" lIns="0" tIns="0" rIns="0" bIns="0" rtlCol="0" anchor="t"/>
-          <a:lstStyle/>
-          <a:p>
-            <a:pPr indent="0" marL="0">
-              <a:lnSpc>
-                <a:spcPct val="108000"/>
-              </a:lnSpc>
-              <a:buNone/>
-            </a:pPr>
-            <a:r>
-              <a:rPr lang="en-US" sz="1250" dirty="0">
-                <a:solidFill>
-                  <a:srgbClr val="16252C"/>
-                </a:solidFill>
-                <a:latin typeface="Calibri" pitchFamily="34" charset="0"/>
-                <a:ea typeface="Calibri" pitchFamily="34" charset="-122"/>
-                <a:cs typeface="Calibri" pitchFamily="34" charset="-120"/>
-              </a:rPr>
-              <a:t>The signal is partly nonlinear: the RBF kernel gains 0.073 AUC over a linear one, and several taxa act only in combination.</a:t>
-            </a:r>
-            <a:endParaRPr lang="en-US" sz="1250" dirty="0"/>
-          </a:p>
-        </p:txBody>
-      </p:sp>
-      <p:sp>
-        <p:nvSpPr>
-          <p:cNvPr id="15" name="Shape 13"/>
-          <p:cNvSpPr/>
-          <p:nvPr/>
-        </p:nvSpPr>
-        <p:spPr>
-          <a:xfrm>
-            <a:off x="548640" y="3456432"/>
-            <a:ext cx="457200" cy="457200"/>
-          </a:xfrm>
-          <a:prstGeom prst="ellipse">
-            <a:avLst/>
-          </a:prstGeom>
-          <a:solidFill>
-            <a:srgbClr val="18707F"/>
-          </a:solidFill>
-          <a:ln/>
-        </p:spPr>
-      </p:sp>
-      <p:sp>
-        <p:nvSpPr>
-          <p:cNvPr id="16" name="Text 14"/>
-          <p:cNvSpPr/>
-          <p:nvPr/>
-        </p:nvSpPr>
-        <p:spPr>
-          <a:xfrm>
-            <a:off x="548640" y="3529584"/>
-            <a:ext cx="457200" cy="310896"/>
-          </a:xfrm>
-          <a:prstGeom prst="rect">
-            <a:avLst/>
-          </a:prstGeom>
-          <a:noFill/>
-          <a:ln/>
-        </p:spPr>
-        <p:txBody>
-          <a:bodyPr wrap="square" lIns="0" tIns="0" rIns="0" bIns="0" rtlCol="0" anchor="ctr"/>
-          <a:lstStyle/>
-          <a:p>
-            <a:pPr algn="ctr" indent="0" marL="0">
-              <a:buNone/>
-            </a:pPr>
-            <a:r>
-              <a:rPr lang="en-US" sz="1400" b="1" dirty="0">
-                <a:solidFill>
-                  <a:srgbClr val="FFFFFF"/>
-                </a:solidFill>
-                <a:latin typeface="Georgia" pitchFamily="34" charset="0"/>
-                <a:ea typeface="Georgia" pitchFamily="34" charset="-122"/>
-                <a:cs typeface="Georgia" pitchFamily="34" charset="-120"/>
-              </a:rPr>
-              <a:t>4</a:t>
-            </a:r>
-            <a:endParaRPr lang="en-US" sz="1400" dirty="0"/>
-          </a:p>
-        </p:txBody>
-      </p:sp>
-      <p:sp>
-        <p:nvSpPr>
-          <p:cNvPr id="17" name="Text 15"/>
-          <p:cNvSpPr/>
-          <p:nvPr/>
-        </p:nvSpPr>
-        <p:spPr>
-          <a:xfrm>
-            <a:off x="1188720" y="3419856"/>
-            <a:ext cx="10424160" cy="566928"/>
-          </a:xfrm>
-          <a:prstGeom prst="rect">
-            <a:avLst/>
-          </a:prstGeom>
-          <a:noFill/>
-          <a:ln/>
-        </p:spPr>
-        <p:txBody>
-          <a:bodyPr wrap="square" lIns="0" tIns="0" rIns="0" bIns="0" rtlCol="0" anchor="t"/>
-          <a:lstStyle/>
-          <a:p>
-            <a:pPr indent="0" marL="0">
-              <a:lnSpc>
-                <a:spcPct val="108000"/>
-              </a:lnSpc>
-              <a:buNone/>
-            </a:pPr>
-            <a:r>
-              <a:rPr lang="en-US" sz="1250" dirty="0">
-                <a:solidFill>
-                  <a:srgbClr val="16252C"/>
-                </a:solidFill>
-                <a:latin typeface="Calibri" pitchFamily="34" charset="0"/>
-                <a:ea typeface="Calibri" pitchFamily="34" charset="-122"/>
-                <a:cs typeface="Calibri" pitchFamily="34" charset="-120"/>
-              </a:rPr>
-              <a:t>Nine taxa survive three independent selection methods; Candidatus Arthromitus (SFB) has independent immunological support.</a:t>
-            </a:r>
-            <a:endParaRPr lang="en-US" sz="1250" dirty="0"/>
-          </a:p>
-        </p:txBody>
-      </p:sp>
-      <p:sp>
-        <p:nvSpPr>
-          <p:cNvPr id="18" name="Shape 16"/>
-          <p:cNvSpPr/>
-          <p:nvPr/>
-        </p:nvSpPr>
-        <p:spPr>
-          <a:xfrm>
-            <a:off x="548640" y="4178808"/>
-            <a:ext cx="457200" cy="457200"/>
-          </a:xfrm>
-          <a:prstGeom prst="ellipse">
-            <a:avLst/>
-          </a:prstGeom>
-          <a:solidFill>
-            <a:srgbClr val="18707F"/>
-          </a:solidFill>
-          <a:ln/>
-        </p:spPr>
-      </p:sp>
-      <p:sp>
-        <p:nvSpPr>
-          <p:cNvPr id="19" name="Text 17"/>
-          <p:cNvSpPr/>
-          <p:nvPr/>
-        </p:nvSpPr>
-        <p:spPr>
-          <a:xfrm>
-            <a:off x="548640" y="4251960"/>
-            <a:ext cx="457200" cy="310896"/>
-          </a:xfrm>
-          <a:prstGeom prst="rect">
-            <a:avLst/>
-          </a:prstGeom>
-          <a:noFill/>
-          <a:ln/>
-        </p:spPr>
-        <p:txBody>
-          <a:bodyPr wrap="square" lIns="0" tIns="0" rIns="0" bIns="0" rtlCol="0" anchor="ctr"/>
-          <a:lstStyle/>
-          <a:p>
-            <a:pPr algn="ctr" indent="0" marL="0">
-              <a:buNone/>
-            </a:pPr>
-            <a:r>
-              <a:rPr lang="en-US" sz="1400" b="1" dirty="0">
-                <a:solidFill>
-                  <a:srgbClr val="FFFFFF"/>
-                </a:solidFill>
-                <a:latin typeface="Georgia" pitchFamily="34" charset="0"/>
-                <a:ea typeface="Georgia" pitchFamily="34" charset="-122"/>
-                <a:cs typeface="Georgia" pitchFamily="34" charset="-120"/>
-              </a:rPr>
-              <a:t>5</a:t>
-            </a:r>
-            <a:endParaRPr lang="en-US" sz="1400" dirty="0"/>
-          </a:p>
-        </p:txBody>
-      </p:sp>
-      <p:sp>
-        <p:nvSpPr>
-          <p:cNvPr id="20" name="Text 18"/>
-          <p:cNvSpPr/>
-          <p:nvPr/>
-        </p:nvSpPr>
-        <p:spPr>
-          <a:xfrm>
-            <a:off x="1188720" y="4142232"/>
-            <a:ext cx="10424160" cy="566928"/>
-          </a:xfrm>
-          <a:prstGeom prst="rect">
-            <a:avLst/>
-          </a:prstGeom>
-          <a:noFill/>
-          <a:ln/>
-        </p:spPr>
-        <p:txBody>
-          <a:bodyPr wrap="square" lIns="0" tIns="0" rIns="0" bIns="0" rtlCol="0" anchor="t"/>
-          <a:lstStyle/>
-          <a:p>
-            <a:pPr indent="0" marL="0">
-              <a:lnSpc>
-                <a:spcPct val="108000"/>
-              </a:lnSpc>
-              <a:buNone/>
-            </a:pPr>
-            <a:r>
-              <a:rPr lang="en-US" sz="1250" dirty="0">
-                <a:solidFill>
-                  <a:srgbClr val="16252C"/>
-                </a:solidFill>
-                <a:latin typeface="Calibri" pitchFamily="34" charset="0"/>
-                <a:ea typeface="Calibri" pitchFamily="34" charset="-122"/>
-                <a:cs typeface="Calibri" pitchFamily="34" charset="-120"/>
-              </a:rPr>
-              <a:t>Sampling season is a serious confounder (covariates alone: AUC 0.881). Stratification and a deconfounded subset both leave signal: the microbiome's independent contribution brackets between +0.043 and +0.177.</a:t>
-            </a:r>
-            <a:endParaRPr lang="en-US" sz="1250" dirty="0"/>
-          </a:p>
-        </p:txBody>
-      </p:sp>
-      <p:sp>
-        <p:nvSpPr>
-          <p:cNvPr id="21" name="Shape 19"/>
-          <p:cNvSpPr/>
-          <p:nvPr/>
-        </p:nvSpPr>
-        <p:spPr>
-          <a:xfrm>
-            <a:off x="548640" y="4901184"/>
-            <a:ext cx="457200" cy="457200"/>
-          </a:xfrm>
-          <a:prstGeom prst="ellipse">
-            <a:avLst/>
-          </a:prstGeom>
-          <a:solidFill>
-            <a:srgbClr val="D2603A"/>
-          </a:solidFill>
-          <a:ln/>
-        </p:spPr>
-      </p:sp>
-      <p:sp>
-        <p:nvSpPr>
-          <p:cNvPr id="22" name="Text 20"/>
-          <p:cNvSpPr/>
-          <p:nvPr/>
-        </p:nvSpPr>
-        <p:spPr>
-          <a:xfrm>
-            <a:off x="548640" y="4974336"/>
-            <a:ext cx="457200" cy="310896"/>
-          </a:xfrm>
-          <a:prstGeom prst="rect">
-            <a:avLst/>
-          </a:prstGeom>
-          <a:noFill/>
-          <a:ln/>
-        </p:spPr>
-        <p:txBody>
-          <a:bodyPr wrap="square" lIns="0" tIns="0" rIns="0" bIns="0" rtlCol="0" anchor="ctr"/>
-          <a:lstStyle/>
-          <a:p>
-            <a:pPr algn="ctr" indent="0" marL="0">
-              <a:buNone/>
-            </a:pPr>
-            <a:r>
-              <a:rPr lang="en-US" sz="1400" b="1" dirty="0">
-                <a:solidFill>
-                  <a:srgbClr val="FFFFFF"/>
-                </a:solidFill>
-                <a:latin typeface="Georgia" pitchFamily="34" charset="0"/>
-                <a:ea typeface="Georgia" pitchFamily="34" charset="-122"/>
-                <a:cs typeface="Georgia" pitchFamily="34" charset="-120"/>
-              </a:rPr>
-              <a:t>6</a:t>
-            </a:r>
-            <a:endParaRPr lang="en-US" sz="1400" dirty="0"/>
-          </a:p>
-        </p:txBody>
-      </p:sp>
-      <p:sp>
-        <p:nvSpPr>
-          <p:cNvPr id="23" name="Text 21"/>
-          <p:cNvSpPr/>
-          <p:nvPr/>
-        </p:nvSpPr>
-        <p:spPr>
-          <a:xfrm>
-            <a:off x="1188720" y="4864608"/>
-            <a:ext cx="10424160" cy="566928"/>
-          </a:xfrm>
-          <a:prstGeom prst="rect">
-            <a:avLst/>
-          </a:prstGeom>
-          <a:noFill/>
-          <a:ln/>
-        </p:spPr>
-        <p:txBody>
-          <a:bodyPr wrap="square" lIns="0" tIns="0" rIns="0" bIns="0" rtlCol="0" anchor="t"/>
-          <a:lstStyle/>
-          <a:p>
-            <a:pPr indent="0" marL="0">
-              <a:lnSpc>
-                <a:spcPct val="108000"/>
-              </a:lnSpc>
-              <a:buNone/>
-            </a:pPr>
-            <a:r>
-              <a:rPr lang="en-US" sz="1250" dirty="0">
-                <a:solidFill>
-                  <a:srgbClr val="16252C"/>
-                </a:solidFill>
-                <a:latin typeface="Calibri" pitchFamily="34" charset="0"/>
-                <a:ea typeface="Calibri" pitchFamily="34" charset="-122"/>
-                <a:cs typeface="Calibri" pitchFamily="34" charset="-120"/>
-              </a:rPr>
-              <a:t>ExtraTrees scores higher (AUC 0.859) but is worse on the weakest stratum (0.715 vs 0.774); its lead comes only from strata that were already easy.</a:t>
-            </a:r>
-            <a:endParaRPr lang="en-US" sz="1250" dirty="0"/>
-          </a:p>
-        </p:txBody>
-      </p:sp>
-      <p:sp>
-        <p:nvSpPr>
-          <p:cNvPr id="24" name="Shape 22"/>
-          <p:cNvSpPr/>
-          <p:nvPr/>
-        </p:nvSpPr>
-        <p:spPr>
-          <a:xfrm>
-            <a:off x="548640" y="5623560"/>
-            <a:ext cx="457200" cy="457200"/>
-          </a:xfrm>
-          <a:prstGeom prst="ellipse">
-            <a:avLst/>
-          </a:prstGeom>
-          <a:solidFill>
-            <a:srgbClr val="D2603A"/>
-          </a:solidFill>
-          <a:ln/>
-        </p:spPr>
-      </p:sp>
-      <p:sp>
-        <p:nvSpPr>
-          <p:cNvPr id="25" name="Text 23"/>
-          <p:cNvSpPr/>
-          <p:nvPr/>
-        </p:nvSpPr>
-        <p:spPr>
-          <a:xfrm>
-            <a:off x="548640" y="5696712"/>
-            <a:ext cx="457200" cy="310896"/>
-          </a:xfrm>
-          <a:prstGeom prst="rect">
-            <a:avLst/>
-          </a:prstGeom>
-          <a:noFill/>
-          <a:ln/>
-        </p:spPr>
-        <p:txBody>
-          <a:bodyPr wrap="square" lIns="0" tIns="0" rIns="0" bIns="0" rtlCol="0" anchor="ctr"/>
-          <a:lstStyle/>
-          <a:p>
-            <a:pPr algn="ctr" indent="0" marL="0">
-              <a:buNone/>
-            </a:pPr>
-            <a:r>
-              <a:rPr lang="en-US" sz="1400" b="1" dirty="0">
-                <a:solidFill>
-                  <a:srgbClr val="FFFFFF"/>
-                </a:solidFill>
-                <a:latin typeface="Georgia" pitchFamily="34" charset="0"/>
-                <a:ea typeface="Georgia" pitchFamily="34" charset="-122"/>
-                <a:cs typeface="Georgia" pitchFamily="34" charset="-120"/>
-              </a:rPr>
-              <a:t>7</a:t>
-            </a:r>
-            <a:endParaRPr lang="en-US" sz="1400" dirty="0"/>
-          </a:p>
-        </p:txBody>
-      </p:sp>
-      <p:sp>
-        <p:nvSpPr>
-          <p:cNvPr id="26" name="Text 24"/>
-          <p:cNvSpPr/>
-          <p:nvPr/>
-        </p:nvSpPr>
-        <p:spPr>
-          <a:xfrm>
-            <a:off x="1188720" y="5586984"/>
-            <a:ext cx="10424160" cy="566928"/>
-          </a:xfrm>
-          <a:prstGeom prst="rect">
-            <a:avLst/>
-          </a:prstGeom>
-          <a:noFill/>
-          <a:ln/>
-        </p:spPr>
-        <p:txBody>
-          <a:bodyPr wrap="square" lIns="0" tIns="0" rIns="0" bIns="0" rtlCol="0" anchor="t"/>
-          <a:lstStyle/>
-          <a:p>
-            <a:pPr indent="0" marL="0">
-              <a:lnSpc>
-                <a:spcPct val="108000"/>
-              </a:lnSpc>
-              <a:buNone/>
-            </a:pPr>
-            <a:r>
-              <a:rPr lang="en-US" sz="1250" dirty="0">
-                <a:solidFill>
-                  <a:srgbClr val="16252C"/>
-                </a:solidFill>
-                <a:latin typeface="Calibri" pitchFamily="34" charset="0"/>
-                <a:ea typeface="Calibri" pitchFamily="34" charset="-122"/>
-                <a:cs typeface="Calibri" pitchFamily="34" charset="-120"/>
-              </a:rPr>
-              <a:t>Conclusions apply to the UC Davis wild-duck cohort only; they do not transfer across hosts or studies.</a:t>
-            </a:r>
-            <a:endParaRPr lang="en-US" sz="1250" dirty="0"/>
           </a:p>
         </p:txBody>
       </p:sp>
@@ -37198,6 +39408,1819 @@
                 <a:ea typeface="Calibri" pitchFamily="34" charset="-122"/>
                 <a:cs typeface="Calibri" pitchFamily="34" charset="-120"/>
               </a:rPr>
+              <a:t>SUMMARY</a:t>
+            </a:r>
+            <a:endParaRPr lang="en-US" sz="1100" dirty="0"/>
+          </a:p>
+        </p:txBody>
+      </p:sp>
+      <p:sp>
+        <p:nvSpPr>
+          <p:cNvPr id="4" name="Text 2"/>
+          <p:cNvSpPr/>
+          <p:nvPr/>
+        </p:nvSpPr>
+        <p:spPr>
+          <a:xfrm>
+            <a:off x="548640" y="566928"/>
+            <a:ext cx="11064240" cy="685800"/>
+          </a:xfrm>
+          <a:prstGeom prst="rect">
+            <a:avLst/>
+          </a:prstGeom>
+          <a:noFill/>
+          <a:ln/>
+        </p:spPr>
+        <p:txBody>
+          <a:bodyPr wrap="square" lIns="0" tIns="0" rIns="0" bIns="0" rtlCol="0" anchor="ctr"/>
+          <a:lstStyle/>
+          <a:p>
+            <a:pPr indent="0" marL="0">
+              <a:buNone/>
+            </a:pPr>
+            <a:r>
+              <a:rPr lang="en-US" sz="3000" b="1" dirty="0">
+                <a:solidFill>
+                  <a:srgbClr val="16252C"/>
+                </a:solidFill>
+                <a:latin typeface="Georgia" pitchFamily="34" charset="0"/>
+                <a:ea typeface="Georgia" pitchFamily="34" charset="-122"/>
+                <a:cs typeface="Georgia" pitchFamily="34" charset="-120"/>
+              </a:rPr>
+              <a:t>Conclusions</a:t>
+            </a:r>
+            <a:endParaRPr lang="en-US" sz="3000" dirty="0"/>
+          </a:p>
+        </p:txBody>
+      </p:sp>
+      <p:sp>
+        <p:nvSpPr>
+          <p:cNvPr id="5" name="Text 3"/>
+          <p:cNvSpPr/>
+          <p:nvPr/>
+        </p:nvSpPr>
+        <p:spPr>
+          <a:xfrm>
+            <a:off x="11430000" y="6355080"/>
+            <a:ext cx="411480" cy="274320"/>
+          </a:xfrm>
+          <a:prstGeom prst="rect">
+            <a:avLst/>
+          </a:prstGeom>
+          <a:noFill/>
+          <a:ln/>
+        </p:spPr>
+        <p:txBody>
+          <a:bodyPr wrap="square" lIns="0" tIns="0" rIns="0" bIns="0" rtlCol="0" anchor="ctr"/>
+          <a:lstStyle/>
+          <a:p>
+            <a:pPr algn="r" indent="0" marL="0">
+              <a:buNone/>
+            </a:pPr>
+            <a:r>
+              <a:rPr lang="en-US" sz="1000" dirty="0">
+                <a:solidFill>
+                  <a:srgbClr val="5F7580"/>
+                </a:solidFill>
+                <a:latin typeface="Calibri" pitchFamily="34" charset="0"/>
+                <a:ea typeface="Calibri" pitchFamily="34" charset="-122"/>
+                <a:cs typeface="Calibri" pitchFamily="34" charset="-120"/>
+              </a:rPr>
+              <a:t>29</a:t>
+            </a:r>
+            <a:endParaRPr lang="en-US" sz="1000" dirty="0"/>
+          </a:p>
+        </p:txBody>
+      </p:sp>
+      <p:sp>
+        <p:nvSpPr>
+          <p:cNvPr id="6" name="Shape 4"/>
+          <p:cNvSpPr/>
+          <p:nvPr/>
+        </p:nvSpPr>
+        <p:spPr>
+          <a:xfrm>
+            <a:off x="548640" y="1289304"/>
+            <a:ext cx="457200" cy="457200"/>
+          </a:xfrm>
+          <a:prstGeom prst="ellipse">
+            <a:avLst/>
+          </a:prstGeom>
+          <a:solidFill>
+            <a:srgbClr val="18707F"/>
+          </a:solidFill>
+          <a:ln/>
+        </p:spPr>
+      </p:sp>
+      <p:sp>
+        <p:nvSpPr>
+          <p:cNvPr id="7" name="Text 5"/>
+          <p:cNvSpPr/>
+          <p:nvPr/>
+        </p:nvSpPr>
+        <p:spPr>
+          <a:xfrm>
+            <a:off x="548640" y="1362456"/>
+            <a:ext cx="457200" cy="310896"/>
+          </a:xfrm>
+          <a:prstGeom prst="rect">
+            <a:avLst/>
+          </a:prstGeom>
+          <a:noFill/>
+          <a:ln/>
+        </p:spPr>
+        <p:txBody>
+          <a:bodyPr wrap="square" lIns="0" tIns="0" rIns="0" bIns="0" rtlCol="0" anchor="ctr"/>
+          <a:lstStyle/>
+          <a:p>
+            <a:pPr algn="ctr" indent="0" marL="0">
+              <a:buNone/>
+            </a:pPr>
+            <a:r>
+              <a:rPr lang="en-US" sz="1400" b="1" dirty="0">
+                <a:solidFill>
+                  <a:srgbClr val="FFFFFF"/>
+                </a:solidFill>
+                <a:latin typeface="Georgia" pitchFamily="34" charset="0"/>
+                <a:ea typeface="Georgia" pitchFamily="34" charset="-122"/>
+                <a:cs typeface="Georgia" pitchFamily="34" charset="-120"/>
+              </a:rPr>
+              <a:t>1</a:t>
+            </a:r>
+            <a:endParaRPr lang="en-US" sz="1400" dirty="0"/>
+          </a:p>
+        </p:txBody>
+      </p:sp>
+      <p:sp>
+        <p:nvSpPr>
+          <p:cNvPr id="8" name="Text 6"/>
+          <p:cNvSpPr/>
+          <p:nvPr/>
+        </p:nvSpPr>
+        <p:spPr>
+          <a:xfrm>
+            <a:off x="1188720" y="1252728"/>
+            <a:ext cx="10424160" cy="566928"/>
+          </a:xfrm>
+          <a:prstGeom prst="rect">
+            <a:avLst/>
+          </a:prstGeom>
+          <a:noFill/>
+          <a:ln/>
+        </p:spPr>
+        <p:txBody>
+          <a:bodyPr wrap="square" lIns="0" tIns="0" rIns="0" bIns="0" rtlCol="0" anchor="t"/>
+          <a:lstStyle/>
+          <a:p>
+            <a:pPr indent="0" marL="0">
+              <a:lnSpc>
+                <a:spcPct val="108000"/>
+              </a:lnSpc>
+              <a:buNone/>
+            </a:pPr>
+            <a:r>
+              <a:rPr lang="en-US" sz="1250" dirty="0">
+                <a:solidFill>
+                  <a:srgbClr val="16252C"/>
+                </a:solidFill>
+                <a:latin typeface="Calibri" pitchFamily="34" charset="0"/>
+                <a:ea typeface="Calibri" pitchFamily="34" charset="-122"/>
+                <a:cs typeface="Calibri" pitchFamily="34" charset="-120"/>
+              </a:rPr>
+              <a:t>Duck gut microbiota carry a real, reproducible signal for influenza infection status (permutation p = 0.0099).</a:t>
+            </a:r>
+            <a:endParaRPr lang="en-US" sz="1250" dirty="0"/>
+          </a:p>
+        </p:txBody>
+      </p:sp>
+      <p:sp>
+        <p:nvSpPr>
+          <p:cNvPr id="9" name="Shape 7"/>
+          <p:cNvSpPr/>
+          <p:nvPr/>
+        </p:nvSpPr>
+        <p:spPr>
+          <a:xfrm>
+            <a:off x="548640" y="2011680"/>
+            <a:ext cx="457200" cy="457200"/>
+          </a:xfrm>
+          <a:prstGeom prst="ellipse">
+            <a:avLst/>
+          </a:prstGeom>
+          <a:solidFill>
+            <a:srgbClr val="18707F"/>
+          </a:solidFill>
+          <a:ln/>
+        </p:spPr>
+      </p:sp>
+      <p:sp>
+        <p:nvSpPr>
+          <p:cNvPr id="10" name="Text 8"/>
+          <p:cNvSpPr/>
+          <p:nvPr/>
+        </p:nvSpPr>
+        <p:spPr>
+          <a:xfrm>
+            <a:off x="548640" y="2084832"/>
+            <a:ext cx="457200" cy="310896"/>
+          </a:xfrm>
+          <a:prstGeom prst="rect">
+            <a:avLst/>
+          </a:prstGeom>
+          <a:noFill/>
+          <a:ln/>
+        </p:spPr>
+        <p:txBody>
+          <a:bodyPr wrap="square" lIns="0" tIns="0" rIns="0" bIns="0" rtlCol="0" anchor="ctr"/>
+          <a:lstStyle/>
+          <a:p>
+            <a:pPr algn="ctr" indent="0" marL="0">
+              <a:buNone/>
+            </a:pPr>
+            <a:r>
+              <a:rPr lang="en-US" sz="1400" b="1" dirty="0">
+                <a:solidFill>
+                  <a:srgbClr val="FFFFFF"/>
+                </a:solidFill>
+                <a:latin typeface="Georgia" pitchFamily="34" charset="0"/>
+                <a:ea typeface="Georgia" pitchFamily="34" charset="-122"/>
+                <a:cs typeface="Georgia" pitchFamily="34" charset="-120"/>
+              </a:rPr>
+              <a:t>2</a:t>
+            </a:r>
+            <a:endParaRPr lang="en-US" sz="1400" dirty="0"/>
+          </a:p>
+        </p:txBody>
+      </p:sp>
+      <p:sp>
+        <p:nvSpPr>
+          <p:cNvPr id="11" name="Text 9"/>
+          <p:cNvSpPr/>
+          <p:nvPr/>
+        </p:nvSpPr>
+        <p:spPr>
+          <a:xfrm>
+            <a:off x="1188720" y="1975104"/>
+            <a:ext cx="10424160" cy="566928"/>
+          </a:xfrm>
+          <a:prstGeom prst="rect">
+            <a:avLst/>
+          </a:prstGeom>
+          <a:noFill/>
+          <a:ln/>
+        </p:spPr>
+        <p:txBody>
+          <a:bodyPr wrap="square" lIns="0" tIns="0" rIns="0" bIns="0" rtlCol="0" anchor="t"/>
+          <a:lstStyle/>
+          <a:p>
+            <a:pPr indent="0" marL="0">
+              <a:lnSpc>
+                <a:spcPct val="108000"/>
+              </a:lnSpc>
+              <a:buNone/>
+            </a:pPr>
+            <a:r>
+              <a:rPr lang="en-US" sz="1250" dirty="0">
+                <a:solidFill>
+                  <a:srgbClr val="16252C"/>
+                </a:solidFill>
+                <a:latin typeface="Calibri" pitchFamily="34" charset="0"/>
+                <a:ea typeface="Calibri" pitchFamily="34" charset="-122"/>
+                <a:cs typeface="Calibri" pitchFamily="34" charset="-120"/>
+              </a:rPr>
+              <a:t>SVM-RBF is the primary model — AUC 0.839, MCC 0.531 — significantly beating Random Forest (p = 0.021), XGBoost (p = 0.0016) and L1-LR (p &lt; 0.001) among 17 models compared.</a:t>
+            </a:r>
+            <a:endParaRPr lang="en-US" sz="1250" dirty="0"/>
+          </a:p>
+        </p:txBody>
+      </p:sp>
+      <p:sp>
+        <p:nvSpPr>
+          <p:cNvPr id="12" name="Shape 10"/>
+          <p:cNvSpPr/>
+          <p:nvPr/>
+        </p:nvSpPr>
+        <p:spPr>
+          <a:xfrm>
+            <a:off x="548640" y="2734056"/>
+            <a:ext cx="457200" cy="457200"/>
+          </a:xfrm>
+          <a:prstGeom prst="ellipse">
+            <a:avLst/>
+          </a:prstGeom>
+          <a:solidFill>
+            <a:srgbClr val="18707F"/>
+          </a:solidFill>
+          <a:ln/>
+        </p:spPr>
+      </p:sp>
+      <p:sp>
+        <p:nvSpPr>
+          <p:cNvPr id="13" name="Text 11"/>
+          <p:cNvSpPr/>
+          <p:nvPr/>
+        </p:nvSpPr>
+        <p:spPr>
+          <a:xfrm>
+            <a:off x="548640" y="2807208"/>
+            <a:ext cx="457200" cy="310896"/>
+          </a:xfrm>
+          <a:prstGeom prst="rect">
+            <a:avLst/>
+          </a:prstGeom>
+          <a:noFill/>
+          <a:ln/>
+        </p:spPr>
+        <p:txBody>
+          <a:bodyPr wrap="square" lIns="0" tIns="0" rIns="0" bIns="0" rtlCol="0" anchor="ctr"/>
+          <a:lstStyle/>
+          <a:p>
+            <a:pPr algn="ctr" indent="0" marL="0">
+              <a:buNone/>
+            </a:pPr>
+            <a:r>
+              <a:rPr lang="en-US" sz="1400" b="1" dirty="0">
+                <a:solidFill>
+                  <a:srgbClr val="FFFFFF"/>
+                </a:solidFill>
+                <a:latin typeface="Georgia" pitchFamily="34" charset="0"/>
+                <a:ea typeface="Georgia" pitchFamily="34" charset="-122"/>
+                <a:cs typeface="Georgia" pitchFamily="34" charset="-120"/>
+              </a:rPr>
+              <a:t>3</a:t>
+            </a:r>
+            <a:endParaRPr lang="en-US" sz="1400" dirty="0"/>
+          </a:p>
+        </p:txBody>
+      </p:sp>
+      <p:sp>
+        <p:nvSpPr>
+          <p:cNvPr id="14" name="Text 12"/>
+          <p:cNvSpPr/>
+          <p:nvPr/>
+        </p:nvSpPr>
+        <p:spPr>
+          <a:xfrm>
+            <a:off x="1188720" y="2697480"/>
+            <a:ext cx="10424160" cy="566928"/>
+          </a:xfrm>
+          <a:prstGeom prst="rect">
+            <a:avLst/>
+          </a:prstGeom>
+          <a:noFill/>
+          <a:ln/>
+        </p:spPr>
+        <p:txBody>
+          <a:bodyPr wrap="square" lIns="0" tIns="0" rIns="0" bIns="0" rtlCol="0" anchor="t"/>
+          <a:lstStyle/>
+          <a:p>
+            <a:pPr indent="0" marL="0">
+              <a:lnSpc>
+                <a:spcPct val="108000"/>
+              </a:lnSpc>
+              <a:buNone/>
+            </a:pPr>
+            <a:r>
+              <a:rPr lang="en-US" sz="1250" dirty="0">
+                <a:solidFill>
+                  <a:srgbClr val="16252C"/>
+                </a:solidFill>
+                <a:latin typeface="Calibri" pitchFamily="34" charset="0"/>
+                <a:ea typeface="Calibri" pitchFamily="34" charset="-122"/>
+                <a:cs typeface="Calibri" pitchFamily="34" charset="-120"/>
+              </a:rPr>
+              <a:t>The signal is partly nonlinear: the RBF kernel gains 0.073 AUC over a linear one, and several taxa act only in combination.</a:t>
+            </a:r>
+            <a:endParaRPr lang="en-US" sz="1250" dirty="0"/>
+          </a:p>
+        </p:txBody>
+      </p:sp>
+      <p:sp>
+        <p:nvSpPr>
+          <p:cNvPr id="15" name="Shape 13"/>
+          <p:cNvSpPr/>
+          <p:nvPr/>
+        </p:nvSpPr>
+        <p:spPr>
+          <a:xfrm>
+            <a:off x="548640" y="3456432"/>
+            <a:ext cx="457200" cy="457200"/>
+          </a:xfrm>
+          <a:prstGeom prst="ellipse">
+            <a:avLst/>
+          </a:prstGeom>
+          <a:solidFill>
+            <a:srgbClr val="18707F"/>
+          </a:solidFill>
+          <a:ln/>
+        </p:spPr>
+      </p:sp>
+      <p:sp>
+        <p:nvSpPr>
+          <p:cNvPr id="16" name="Text 14"/>
+          <p:cNvSpPr/>
+          <p:nvPr/>
+        </p:nvSpPr>
+        <p:spPr>
+          <a:xfrm>
+            <a:off x="548640" y="3529584"/>
+            <a:ext cx="457200" cy="310896"/>
+          </a:xfrm>
+          <a:prstGeom prst="rect">
+            <a:avLst/>
+          </a:prstGeom>
+          <a:noFill/>
+          <a:ln/>
+        </p:spPr>
+        <p:txBody>
+          <a:bodyPr wrap="square" lIns="0" tIns="0" rIns="0" bIns="0" rtlCol="0" anchor="ctr"/>
+          <a:lstStyle/>
+          <a:p>
+            <a:pPr algn="ctr" indent="0" marL="0">
+              <a:buNone/>
+            </a:pPr>
+            <a:r>
+              <a:rPr lang="en-US" sz="1400" b="1" dirty="0">
+                <a:solidFill>
+                  <a:srgbClr val="FFFFFF"/>
+                </a:solidFill>
+                <a:latin typeface="Georgia" pitchFamily="34" charset="0"/>
+                <a:ea typeface="Georgia" pitchFamily="34" charset="-122"/>
+                <a:cs typeface="Georgia" pitchFamily="34" charset="-120"/>
+              </a:rPr>
+              <a:t>4</a:t>
+            </a:r>
+            <a:endParaRPr lang="en-US" sz="1400" dirty="0"/>
+          </a:p>
+        </p:txBody>
+      </p:sp>
+      <p:sp>
+        <p:nvSpPr>
+          <p:cNvPr id="17" name="Text 15"/>
+          <p:cNvSpPr/>
+          <p:nvPr/>
+        </p:nvSpPr>
+        <p:spPr>
+          <a:xfrm>
+            <a:off x="1188720" y="3419856"/>
+            <a:ext cx="10424160" cy="566928"/>
+          </a:xfrm>
+          <a:prstGeom prst="rect">
+            <a:avLst/>
+          </a:prstGeom>
+          <a:noFill/>
+          <a:ln/>
+        </p:spPr>
+        <p:txBody>
+          <a:bodyPr wrap="square" lIns="0" tIns="0" rIns="0" bIns="0" rtlCol="0" anchor="t"/>
+          <a:lstStyle/>
+          <a:p>
+            <a:pPr indent="0" marL="0">
+              <a:lnSpc>
+                <a:spcPct val="108000"/>
+              </a:lnSpc>
+              <a:buNone/>
+            </a:pPr>
+            <a:r>
+              <a:rPr lang="en-US" sz="1250" dirty="0">
+                <a:solidFill>
+                  <a:srgbClr val="16252C"/>
+                </a:solidFill>
+                <a:latin typeface="Calibri" pitchFamily="34" charset="0"/>
+                <a:ea typeface="Calibri" pitchFamily="34" charset="-122"/>
+                <a:cs typeface="Calibri" pitchFamily="34" charset="-120"/>
+              </a:rPr>
+              <a:t>Nine taxa survive three independent selection methods; Candidatus Arthromitus (SFB) has independent immunological support.</a:t>
+            </a:r>
+            <a:endParaRPr lang="en-US" sz="1250" dirty="0"/>
+          </a:p>
+        </p:txBody>
+      </p:sp>
+      <p:sp>
+        <p:nvSpPr>
+          <p:cNvPr id="18" name="Shape 16"/>
+          <p:cNvSpPr/>
+          <p:nvPr/>
+        </p:nvSpPr>
+        <p:spPr>
+          <a:xfrm>
+            <a:off x="548640" y="4178808"/>
+            <a:ext cx="457200" cy="457200"/>
+          </a:xfrm>
+          <a:prstGeom prst="ellipse">
+            <a:avLst/>
+          </a:prstGeom>
+          <a:solidFill>
+            <a:srgbClr val="18707F"/>
+          </a:solidFill>
+          <a:ln/>
+        </p:spPr>
+      </p:sp>
+      <p:sp>
+        <p:nvSpPr>
+          <p:cNvPr id="19" name="Text 17"/>
+          <p:cNvSpPr/>
+          <p:nvPr/>
+        </p:nvSpPr>
+        <p:spPr>
+          <a:xfrm>
+            <a:off x="548640" y="4251960"/>
+            <a:ext cx="457200" cy="310896"/>
+          </a:xfrm>
+          <a:prstGeom prst="rect">
+            <a:avLst/>
+          </a:prstGeom>
+          <a:noFill/>
+          <a:ln/>
+        </p:spPr>
+        <p:txBody>
+          <a:bodyPr wrap="square" lIns="0" tIns="0" rIns="0" bIns="0" rtlCol="0" anchor="ctr"/>
+          <a:lstStyle/>
+          <a:p>
+            <a:pPr algn="ctr" indent="0" marL="0">
+              <a:buNone/>
+            </a:pPr>
+            <a:r>
+              <a:rPr lang="en-US" sz="1400" b="1" dirty="0">
+                <a:solidFill>
+                  <a:srgbClr val="FFFFFF"/>
+                </a:solidFill>
+                <a:latin typeface="Georgia" pitchFamily="34" charset="0"/>
+                <a:ea typeface="Georgia" pitchFamily="34" charset="-122"/>
+                <a:cs typeface="Georgia" pitchFamily="34" charset="-120"/>
+              </a:rPr>
+              <a:t>5</a:t>
+            </a:r>
+            <a:endParaRPr lang="en-US" sz="1400" dirty="0"/>
+          </a:p>
+        </p:txBody>
+      </p:sp>
+      <p:sp>
+        <p:nvSpPr>
+          <p:cNvPr id="20" name="Text 18"/>
+          <p:cNvSpPr/>
+          <p:nvPr/>
+        </p:nvSpPr>
+        <p:spPr>
+          <a:xfrm>
+            <a:off x="1188720" y="4142232"/>
+            <a:ext cx="10424160" cy="566928"/>
+          </a:xfrm>
+          <a:prstGeom prst="rect">
+            <a:avLst/>
+          </a:prstGeom>
+          <a:noFill/>
+          <a:ln/>
+        </p:spPr>
+        <p:txBody>
+          <a:bodyPr wrap="square" lIns="0" tIns="0" rIns="0" bIns="0" rtlCol="0" anchor="t"/>
+          <a:lstStyle/>
+          <a:p>
+            <a:pPr indent="0" marL="0">
+              <a:lnSpc>
+                <a:spcPct val="108000"/>
+              </a:lnSpc>
+              <a:buNone/>
+            </a:pPr>
+            <a:r>
+              <a:rPr lang="en-US" sz="1250" dirty="0">
+                <a:solidFill>
+                  <a:srgbClr val="16252C"/>
+                </a:solidFill>
+                <a:latin typeface="Calibri" pitchFamily="34" charset="0"/>
+                <a:ea typeface="Calibri" pitchFamily="34" charset="-122"/>
+                <a:cs typeface="Calibri" pitchFamily="34" charset="-120"/>
+              </a:rPr>
+              <a:t>Sampling season is a serious confounder (covariates alone: AUC 0.881). Stratification and a deconfounded subset both leave signal: the microbiome's independent contribution brackets between +0.043 and +0.177.</a:t>
+            </a:r>
+            <a:endParaRPr lang="en-US" sz="1250" dirty="0"/>
+          </a:p>
+        </p:txBody>
+      </p:sp>
+      <p:sp>
+        <p:nvSpPr>
+          <p:cNvPr id="21" name="Shape 19"/>
+          <p:cNvSpPr/>
+          <p:nvPr/>
+        </p:nvSpPr>
+        <p:spPr>
+          <a:xfrm>
+            <a:off x="548640" y="4901184"/>
+            <a:ext cx="457200" cy="457200"/>
+          </a:xfrm>
+          <a:prstGeom prst="ellipse">
+            <a:avLst/>
+          </a:prstGeom>
+          <a:solidFill>
+            <a:srgbClr val="D2603A"/>
+          </a:solidFill>
+          <a:ln/>
+        </p:spPr>
+      </p:sp>
+      <p:sp>
+        <p:nvSpPr>
+          <p:cNvPr id="22" name="Text 20"/>
+          <p:cNvSpPr/>
+          <p:nvPr/>
+        </p:nvSpPr>
+        <p:spPr>
+          <a:xfrm>
+            <a:off x="548640" y="4974336"/>
+            <a:ext cx="457200" cy="310896"/>
+          </a:xfrm>
+          <a:prstGeom prst="rect">
+            <a:avLst/>
+          </a:prstGeom>
+          <a:noFill/>
+          <a:ln/>
+        </p:spPr>
+        <p:txBody>
+          <a:bodyPr wrap="square" lIns="0" tIns="0" rIns="0" bIns="0" rtlCol="0" anchor="ctr"/>
+          <a:lstStyle/>
+          <a:p>
+            <a:pPr algn="ctr" indent="0" marL="0">
+              <a:buNone/>
+            </a:pPr>
+            <a:r>
+              <a:rPr lang="en-US" sz="1400" b="1" dirty="0">
+                <a:solidFill>
+                  <a:srgbClr val="FFFFFF"/>
+                </a:solidFill>
+                <a:latin typeface="Georgia" pitchFamily="34" charset="0"/>
+                <a:ea typeface="Georgia" pitchFamily="34" charset="-122"/>
+                <a:cs typeface="Georgia" pitchFamily="34" charset="-120"/>
+              </a:rPr>
+              <a:t>6</a:t>
+            </a:r>
+            <a:endParaRPr lang="en-US" sz="1400" dirty="0"/>
+          </a:p>
+        </p:txBody>
+      </p:sp>
+      <p:sp>
+        <p:nvSpPr>
+          <p:cNvPr id="23" name="Text 21"/>
+          <p:cNvSpPr/>
+          <p:nvPr/>
+        </p:nvSpPr>
+        <p:spPr>
+          <a:xfrm>
+            <a:off x="1188720" y="4864608"/>
+            <a:ext cx="10424160" cy="566928"/>
+          </a:xfrm>
+          <a:prstGeom prst="rect">
+            <a:avLst/>
+          </a:prstGeom>
+          <a:noFill/>
+          <a:ln/>
+        </p:spPr>
+        <p:txBody>
+          <a:bodyPr wrap="square" lIns="0" tIns="0" rIns="0" bIns="0" rtlCol="0" anchor="t"/>
+          <a:lstStyle/>
+          <a:p>
+            <a:pPr indent="0" marL="0">
+              <a:lnSpc>
+                <a:spcPct val="108000"/>
+              </a:lnSpc>
+              <a:buNone/>
+            </a:pPr>
+            <a:r>
+              <a:rPr lang="en-US" sz="1250" dirty="0">
+                <a:solidFill>
+                  <a:srgbClr val="16252C"/>
+                </a:solidFill>
+                <a:latin typeface="Calibri" pitchFamily="34" charset="0"/>
+                <a:ea typeface="Calibri" pitchFamily="34" charset="-122"/>
+                <a:cs typeface="Calibri" pitchFamily="34" charset="-120"/>
+              </a:rPr>
+              <a:t>ExtraTrees scores higher (AUC 0.859) but is worse on the weakest stratum (0.715 vs 0.774); its lead comes only from strata that were already easy.</a:t>
+            </a:r>
+            <a:endParaRPr lang="en-US" sz="1250" dirty="0"/>
+          </a:p>
+        </p:txBody>
+      </p:sp>
+      <p:sp>
+        <p:nvSpPr>
+          <p:cNvPr id="24" name="Shape 22"/>
+          <p:cNvSpPr/>
+          <p:nvPr/>
+        </p:nvSpPr>
+        <p:spPr>
+          <a:xfrm>
+            <a:off x="548640" y="5623560"/>
+            <a:ext cx="457200" cy="457200"/>
+          </a:xfrm>
+          <a:prstGeom prst="ellipse">
+            <a:avLst/>
+          </a:prstGeom>
+          <a:solidFill>
+            <a:srgbClr val="D2603A"/>
+          </a:solidFill>
+          <a:ln/>
+        </p:spPr>
+      </p:sp>
+      <p:sp>
+        <p:nvSpPr>
+          <p:cNvPr id="25" name="Text 23"/>
+          <p:cNvSpPr/>
+          <p:nvPr/>
+        </p:nvSpPr>
+        <p:spPr>
+          <a:xfrm>
+            <a:off x="548640" y="5696712"/>
+            <a:ext cx="457200" cy="310896"/>
+          </a:xfrm>
+          <a:prstGeom prst="rect">
+            <a:avLst/>
+          </a:prstGeom>
+          <a:noFill/>
+          <a:ln/>
+        </p:spPr>
+        <p:txBody>
+          <a:bodyPr wrap="square" lIns="0" tIns="0" rIns="0" bIns="0" rtlCol="0" anchor="ctr"/>
+          <a:lstStyle/>
+          <a:p>
+            <a:pPr algn="ctr" indent="0" marL="0">
+              <a:buNone/>
+            </a:pPr>
+            <a:r>
+              <a:rPr lang="en-US" sz="1400" b="1" dirty="0">
+                <a:solidFill>
+                  <a:srgbClr val="FFFFFF"/>
+                </a:solidFill>
+                <a:latin typeface="Georgia" pitchFamily="34" charset="0"/>
+                <a:ea typeface="Georgia" pitchFamily="34" charset="-122"/>
+                <a:cs typeface="Georgia" pitchFamily="34" charset="-120"/>
+              </a:rPr>
+              <a:t>7</a:t>
+            </a:r>
+            <a:endParaRPr lang="en-US" sz="1400" dirty="0"/>
+          </a:p>
+        </p:txBody>
+      </p:sp>
+      <p:sp>
+        <p:nvSpPr>
+          <p:cNvPr id="26" name="Text 24"/>
+          <p:cNvSpPr/>
+          <p:nvPr/>
+        </p:nvSpPr>
+        <p:spPr>
+          <a:xfrm>
+            <a:off x="1188720" y="5586984"/>
+            <a:ext cx="10424160" cy="566928"/>
+          </a:xfrm>
+          <a:prstGeom prst="rect">
+            <a:avLst/>
+          </a:prstGeom>
+          <a:noFill/>
+          <a:ln/>
+        </p:spPr>
+        <p:txBody>
+          <a:bodyPr wrap="square" lIns="0" tIns="0" rIns="0" bIns="0" rtlCol="0" anchor="t"/>
+          <a:lstStyle/>
+          <a:p>
+            <a:pPr indent="0" marL="0">
+              <a:lnSpc>
+                <a:spcPct val="108000"/>
+              </a:lnSpc>
+              <a:buNone/>
+            </a:pPr>
+            <a:r>
+              <a:rPr lang="en-US" sz="1250" dirty="0">
+                <a:solidFill>
+                  <a:srgbClr val="16252C"/>
+                </a:solidFill>
+                <a:latin typeface="Calibri" pitchFamily="34" charset="0"/>
+                <a:ea typeface="Calibri" pitchFamily="34" charset="-122"/>
+                <a:cs typeface="Calibri" pitchFamily="34" charset="-120"/>
+              </a:rPr>
+              <a:t>Conclusions apply to the UC Davis wild-duck cohort only; they do not transfer across hosts or studies.</a:t>
+            </a:r>
+            <a:endParaRPr lang="en-US" sz="1250" dirty="0"/>
+          </a:p>
+        </p:txBody>
+      </p:sp>
+    </p:spTree>
+  </p:cSld>
+  <p:clrMapOvr>
+    <a:masterClrMapping/>
+  </p:clrMapOvr>
+</p:sld>
+</file>
+
+<file path=ppt/slides/slide3.xml><?xml version="1.0" encoding="utf-8"?>
+<p:sld xmlns:a="http://schemas.openxmlformats.org/drawingml/2006/main" xmlns:r="http://schemas.openxmlformats.org/officeDocument/2006/relationships" xmlns:p="http://schemas.openxmlformats.org/presentationml/2006/main">
+  <p:cSld name="Slide 3">
+    <p:bg>
+      <p:bgPr>
+        <a:solidFill>
+          <a:srgbClr val="FCFAF6"/>
+        </a:solidFill>
+      </p:bgPr>
+    </p:bg>
+    <p:spTree>
+      <p:nvGrpSpPr>
+        <p:cNvPr id="1" name=""/>
+        <p:cNvGrpSpPr/>
+        <p:nvPr/>
+      </p:nvGrpSpPr>
+      <p:grpSpPr>
+        <a:xfrm>
+          <a:off x="0" y="0"/>
+          <a:ext cx="0" cy="0"/>
+          <a:chOff x="0" y="0"/>
+          <a:chExt cx="0" cy="0"/>
+        </a:xfrm>
+      </p:grpSpPr>
+      <p:sp>
+        <p:nvSpPr>
+          <p:cNvPr id="2" name="Shape 0"/>
+          <p:cNvSpPr/>
+          <p:nvPr/>
+        </p:nvSpPr>
+        <p:spPr>
+          <a:xfrm>
+            <a:off x="0" y="0"/>
+            <a:ext cx="12191695" cy="54864"/>
+          </a:xfrm>
+          <a:prstGeom prst="rect">
+            <a:avLst/>
+          </a:prstGeom>
+          <a:solidFill>
+            <a:srgbClr val="18707F"/>
+          </a:solidFill>
+          <a:ln/>
+        </p:spPr>
+      </p:sp>
+      <p:sp>
+        <p:nvSpPr>
+          <p:cNvPr id="3" name="Text 1"/>
+          <p:cNvSpPr/>
+          <p:nvPr/>
+        </p:nvSpPr>
+        <p:spPr>
+          <a:xfrm>
+            <a:off x="548640" y="310896"/>
+            <a:ext cx="7315200" cy="256032"/>
+          </a:xfrm>
+          <a:prstGeom prst="rect">
+            <a:avLst/>
+          </a:prstGeom>
+          <a:noFill/>
+          <a:ln/>
+        </p:spPr>
+        <p:txBody>
+          <a:bodyPr wrap="square" lIns="0" tIns="0" rIns="0" bIns="0" rtlCol="0" anchor="ctr"/>
+          <a:lstStyle/>
+          <a:p>
+            <a:pPr indent="0" marL="0">
+              <a:buNone/>
+            </a:pPr>
+            <a:r>
+              <a:rPr lang="en-US" sz="1100" b="1" spc="200" kern="0" dirty="0">
+                <a:solidFill>
+                  <a:srgbClr val="18707F"/>
+                </a:solidFill>
+                <a:latin typeface="Calibri" pitchFamily="34" charset="0"/>
+                <a:ea typeface="Calibri" pitchFamily="34" charset="-122"/>
+                <a:cs typeface="Calibri" pitchFamily="34" charset="-120"/>
+              </a:rPr>
+              <a:t>ROADMAP</a:t>
+            </a:r>
+            <a:endParaRPr lang="en-US" sz="1100" dirty="0"/>
+          </a:p>
+        </p:txBody>
+      </p:sp>
+      <p:sp>
+        <p:nvSpPr>
+          <p:cNvPr id="4" name="Text 2"/>
+          <p:cNvSpPr/>
+          <p:nvPr/>
+        </p:nvSpPr>
+        <p:spPr>
+          <a:xfrm>
+            <a:off x="548640" y="566928"/>
+            <a:ext cx="11064240" cy="685800"/>
+          </a:xfrm>
+          <a:prstGeom prst="rect">
+            <a:avLst/>
+          </a:prstGeom>
+          <a:noFill/>
+          <a:ln/>
+        </p:spPr>
+        <p:txBody>
+          <a:bodyPr wrap="square" lIns="0" tIns="0" rIns="0" bIns="0" rtlCol="0" anchor="ctr"/>
+          <a:lstStyle/>
+          <a:p>
+            <a:pPr indent="0" marL="0">
+              <a:buNone/>
+            </a:pPr>
+            <a:r>
+              <a:rPr lang="en-US" sz="3000" b="1" dirty="0">
+                <a:solidFill>
+                  <a:srgbClr val="16252C"/>
+                </a:solidFill>
+                <a:latin typeface="Georgia" pitchFamily="34" charset="0"/>
+                <a:ea typeface="Georgia" pitchFamily="34" charset="-122"/>
+                <a:cs typeface="Georgia" pitchFamily="34" charset="-120"/>
+              </a:rPr>
+              <a:t>What This Deck Covers</a:t>
+            </a:r>
+            <a:endParaRPr lang="en-US" sz="3000" dirty="0"/>
+          </a:p>
+        </p:txBody>
+      </p:sp>
+      <p:sp>
+        <p:nvSpPr>
+          <p:cNvPr id="5" name="Text 3"/>
+          <p:cNvSpPr/>
+          <p:nvPr/>
+        </p:nvSpPr>
+        <p:spPr>
+          <a:xfrm>
+            <a:off x="11430000" y="6355080"/>
+            <a:ext cx="411480" cy="274320"/>
+          </a:xfrm>
+          <a:prstGeom prst="rect">
+            <a:avLst/>
+          </a:prstGeom>
+          <a:noFill/>
+          <a:ln/>
+        </p:spPr>
+        <p:txBody>
+          <a:bodyPr wrap="square" lIns="0" tIns="0" rIns="0" bIns="0" rtlCol="0" anchor="ctr"/>
+          <a:lstStyle/>
+          <a:p>
+            <a:pPr algn="r" indent="0" marL="0">
+              <a:buNone/>
+            </a:pPr>
+            <a:r>
+              <a:rPr lang="en-US" sz="1000" dirty="0">
+                <a:solidFill>
+                  <a:srgbClr val="5F7580"/>
+                </a:solidFill>
+                <a:latin typeface="Calibri" pitchFamily="34" charset="0"/>
+                <a:ea typeface="Calibri" pitchFamily="34" charset="-122"/>
+                <a:cs typeface="Calibri" pitchFamily="34" charset="-120"/>
+              </a:rPr>
+              <a:t>3</a:t>
+            </a:r>
+            <a:endParaRPr lang="en-US" sz="1000" dirty="0"/>
+          </a:p>
+        </p:txBody>
+      </p:sp>
+      <p:sp>
+        <p:nvSpPr>
+          <p:cNvPr id="6" name="Shape 4"/>
+          <p:cNvSpPr/>
+          <p:nvPr/>
+        </p:nvSpPr>
+        <p:spPr>
+          <a:xfrm>
+            <a:off x="548640" y="1463040"/>
+            <a:ext cx="5394960" cy="1280160"/>
+          </a:xfrm>
+          <a:prstGeom prst="rect">
+            <a:avLst/>
+          </a:prstGeom>
+          <a:solidFill>
+            <a:srgbClr val="FFFFFF"/>
+          </a:solidFill>
+          <a:ln/>
+          <a:effectLst>
+            <a:outerShdw sx="100000" sy="100000" kx="0" ky="0" algn="bl" rotWithShape="0" blurRad="101600" dist="25400" dir="8100000">
+              <a:srgbClr val="000000">
+                <a:alpha val="10000"/>
+              </a:srgbClr>
+            </a:outerShdw>
+          </a:effectLst>
+        </p:spPr>
+      </p:sp>
+      <p:sp>
+        <p:nvSpPr>
+          <p:cNvPr id="7" name="Shape 5"/>
+          <p:cNvSpPr/>
+          <p:nvPr/>
+        </p:nvSpPr>
+        <p:spPr>
+          <a:xfrm>
+            <a:off x="548640" y="1463040"/>
+            <a:ext cx="68580" cy="1280160"/>
+          </a:xfrm>
+          <a:prstGeom prst="rect">
+            <a:avLst/>
+          </a:prstGeom>
+          <a:solidFill>
+            <a:srgbClr val="18707F"/>
+          </a:solidFill>
+          <a:ln/>
+        </p:spPr>
+      </p:sp>
+      <p:sp>
+        <p:nvSpPr>
+          <p:cNvPr id="8" name="Text 6"/>
+          <p:cNvSpPr/>
+          <p:nvPr/>
+        </p:nvSpPr>
+        <p:spPr>
+          <a:xfrm>
+            <a:off x="804672" y="1609344"/>
+            <a:ext cx="4937760" cy="329184"/>
+          </a:xfrm>
+          <a:prstGeom prst="rect">
+            <a:avLst/>
+          </a:prstGeom>
+          <a:noFill/>
+          <a:ln/>
+        </p:spPr>
+        <p:txBody>
+          <a:bodyPr wrap="square" lIns="0" tIns="0" rIns="0" bIns="0" rtlCol="0" anchor="t"/>
+          <a:lstStyle/>
+          <a:p>
+            <a:pPr indent="0" marL="0">
+              <a:buNone/>
+            </a:pPr>
+            <a:r>
+              <a:rPr lang="en-US" sz="1600" b="1" dirty="0">
+                <a:solidFill>
+                  <a:srgbClr val="16252C"/>
+                </a:solidFill>
+                <a:latin typeface="Georgia" pitchFamily="34" charset="0"/>
+                <a:ea typeface="Georgia" pitchFamily="34" charset="-122"/>
+                <a:cs typeface="Georgia" pitchFamily="34" charset="-120"/>
+              </a:rPr>
+              <a:t>01   Data</a:t>
+            </a:r>
+            <a:endParaRPr lang="en-US" sz="1600" dirty="0"/>
+          </a:p>
+        </p:txBody>
+      </p:sp>
+      <p:sp>
+        <p:nvSpPr>
+          <p:cNvPr id="9" name="Text 7"/>
+          <p:cNvSpPr/>
+          <p:nvPr/>
+        </p:nvSpPr>
+        <p:spPr>
+          <a:xfrm>
+            <a:off x="804672" y="1993392"/>
+            <a:ext cx="4937760" cy="621792"/>
+          </a:xfrm>
+          <a:prstGeom prst="rect">
+            <a:avLst/>
+          </a:prstGeom>
+          <a:noFill/>
+          <a:ln/>
+        </p:spPr>
+        <p:txBody>
+          <a:bodyPr wrap="square" lIns="0" tIns="0" rIns="0" bIns="0" rtlCol="0" anchor="t"/>
+          <a:lstStyle/>
+          <a:p>
+            <a:pPr indent="0" marL="0">
+              <a:lnSpc>
+                <a:spcPct val="112000"/>
+              </a:lnSpc>
+              <a:buNone/>
+            </a:pPr>
+            <a:r>
+              <a:rPr lang="en-US" sz="1200" dirty="0">
+                <a:solidFill>
+                  <a:srgbClr val="5F7580"/>
+                </a:solidFill>
+                <a:latin typeface="Calibri" pitchFamily="34" charset="0"/>
+                <a:ea typeface="Calibri" pitchFamily="34" charset="-122"/>
+                <a:cs typeface="Calibri" pitchFamily="34" charset="-120"/>
+              </a:rPr>
+              <a:t>Three input files, four studies, and why we model only one of them</a:t>
+            </a:r>
+            <a:endParaRPr lang="en-US" sz="1200" dirty="0"/>
+          </a:p>
+        </p:txBody>
+      </p:sp>
+      <p:sp>
+        <p:nvSpPr>
+          <p:cNvPr id="10" name="Shape 8"/>
+          <p:cNvSpPr/>
+          <p:nvPr/>
+        </p:nvSpPr>
+        <p:spPr>
+          <a:xfrm>
+            <a:off x="6263640" y="1463040"/>
+            <a:ext cx="5394960" cy="1280160"/>
+          </a:xfrm>
+          <a:prstGeom prst="rect">
+            <a:avLst/>
+          </a:prstGeom>
+          <a:solidFill>
+            <a:srgbClr val="FFFFFF"/>
+          </a:solidFill>
+          <a:ln/>
+          <a:effectLst>
+            <a:outerShdw sx="100000" sy="100000" kx="0" ky="0" algn="bl" rotWithShape="0" blurRad="101600" dist="25400" dir="8100000">
+              <a:srgbClr val="000000">
+                <a:alpha val="10000"/>
+              </a:srgbClr>
+            </a:outerShdw>
+          </a:effectLst>
+        </p:spPr>
+      </p:sp>
+      <p:sp>
+        <p:nvSpPr>
+          <p:cNvPr id="11" name="Shape 9"/>
+          <p:cNvSpPr/>
+          <p:nvPr/>
+        </p:nvSpPr>
+        <p:spPr>
+          <a:xfrm>
+            <a:off x="6263640" y="1463040"/>
+            <a:ext cx="68580" cy="1280160"/>
+          </a:xfrm>
+          <a:prstGeom prst="rect">
+            <a:avLst/>
+          </a:prstGeom>
+          <a:solidFill>
+            <a:srgbClr val="8FB996"/>
+          </a:solidFill>
+          <a:ln/>
+        </p:spPr>
+      </p:sp>
+      <p:sp>
+        <p:nvSpPr>
+          <p:cNvPr id="12" name="Text 10"/>
+          <p:cNvSpPr/>
+          <p:nvPr/>
+        </p:nvSpPr>
+        <p:spPr>
+          <a:xfrm>
+            <a:off x="6519672" y="1609344"/>
+            <a:ext cx="4937760" cy="329184"/>
+          </a:xfrm>
+          <a:prstGeom prst="rect">
+            <a:avLst/>
+          </a:prstGeom>
+          <a:noFill/>
+          <a:ln/>
+        </p:spPr>
+        <p:txBody>
+          <a:bodyPr wrap="square" lIns="0" tIns="0" rIns="0" bIns="0" rtlCol="0" anchor="t"/>
+          <a:lstStyle/>
+          <a:p>
+            <a:pPr indent="0" marL="0">
+              <a:buNone/>
+            </a:pPr>
+            <a:r>
+              <a:rPr lang="en-US" sz="1600" b="1" dirty="0">
+                <a:solidFill>
+                  <a:srgbClr val="16252C"/>
+                </a:solidFill>
+                <a:latin typeface="Georgia" pitchFamily="34" charset="0"/>
+                <a:ea typeface="Georgia" pitchFamily="34" charset="-122"/>
+                <a:cs typeface="Georgia" pitchFamily="34" charset="-120"/>
+              </a:rPr>
+              <a:t>02   Processing</a:t>
+            </a:r>
+            <a:endParaRPr lang="en-US" sz="1600" dirty="0"/>
+          </a:p>
+        </p:txBody>
+      </p:sp>
+      <p:sp>
+        <p:nvSpPr>
+          <p:cNvPr id="13" name="Text 11"/>
+          <p:cNvSpPr/>
+          <p:nvPr/>
+        </p:nvSpPr>
+        <p:spPr>
+          <a:xfrm>
+            <a:off x="6519672" y="1993392"/>
+            <a:ext cx="4937760" cy="621792"/>
+          </a:xfrm>
+          <a:prstGeom prst="rect">
+            <a:avLst/>
+          </a:prstGeom>
+          <a:noFill/>
+          <a:ln/>
+        </p:spPr>
+        <p:txBody>
+          <a:bodyPr wrap="square" lIns="0" tIns="0" rIns="0" bIns="0" rtlCol="0" anchor="t"/>
+          <a:lstStyle/>
+          <a:p>
+            <a:pPr indent="0" marL="0">
+              <a:lnSpc>
+                <a:spcPct val="112000"/>
+              </a:lnSpc>
+              <a:buNone/>
+            </a:pPr>
+            <a:r>
+              <a:rPr lang="en-US" sz="1200" dirty="0">
+                <a:solidFill>
+                  <a:srgbClr val="5F7580"/>
+                </a:solidFill>
+                <a:latin typeface="Calibri" pitchFamily="34" charset="0"/>
+                <a:ea typeface="Calibri" pitchFamily="34" charset="-122"/>
+                <a:cs typeface="Calibri" pitchFamily="34" charset="-120"/>
+              </a:rPr>
+              <a:t>Label leakage, compositional transformation, and leak-free pipelines</a:t>
+            </a:r>
+            <a:endParaRPr lang="en-US" sz="1200" dirty="0"/>
+          </a:p>
+        </p:txBody>
+      </p:sp>
+      <p:sp>
+        <p:nvSpPr>
+          <p:cNvPr id="14" name="Shape 12"/>
+          <p:cNvSpPr/>
+          <p:nvPr/>
+        </p:nvSpPr>
+        <p:spPr>
+          <a:xfrm>
+            <a:off x="548640" y="2944368"/>
+            <a:ext cx="5394960" cy="1280160"/>
+          </a:xfrm>
+          <a:prstGeom prst="rect">
+            <a:avLst/>
+          </a:prstGeom>
+          <a:solidFill>
+            <a:srgbClr val="FFFFFF"/>
+          </a:solidFill>
+          <a:ln/>
+          <a:effectLst>
+            <a:outerShdw sx="100000" sy="100000" kx="0" ky="0" algn="bl" rotWithShape="0" blurRad="101600" dist="25400" dir="8100000">
+              <a:srgbClr val="000000">
+                <a:alpha val="10000"/>
+              </a:srgbClr>
+            </a:outerShdw>
+          </a:effectLst>
+        </p:spPr>
+      </p:sp>
+      <p:sp>
+        <p:nvSpPr>
+          <p:cNvPr id="15" name="Shape 13"/>
+          <p:cNvSpPr/>
+          <p:nvPr/>
+        </p:nvSpPr>
+        <p:spPr>
+          <a:xfrm>
+            <a:off x="548640" y="2944368"/>
+            <a:ext cx="68580" cy="1280160"/>
+          </a:xfrm>
+          <a:prstGeom prst="rect">
+            <a:avLst/>
+          </a:prstGeom>
+          <a:solidFill>
+            <a:srgbClr val="18707F"/>
+          </a:solidFill>
+          <a:ln/>
+        </p:spPr>
+      </p:sp>
+      <p:sp>
+        <p:nvSpPr>
+          <p:cNvPr id="16" name="Text 14"/>
+          <p:cNvSpPr/>
+          <p:nvPr/>
+        </p:nvSpPr>
+        <p:spPr>
+          <a:xfrm>
+            <a:off x="804672" y="3090672"/>
+            <a:ext cx="4937760" cy="329184"/>
+          </a:xfrm>
+          <a:prstGeom prst="rect">
+            <a:avLst/>
+          </a:prstGeom>
+          <a:noFill/>
+          <a:ln/>
+        </p:spPr>
+        <p:txBody>
+          <a:bodyPr wrap="square" lIns="0" tIns="0" rIns="0" bIns="0" rtlCol="0" anchor="t"/>
+          <a:lstStyle/>
+          <a:p>
+            <a:pPr indent="0" marL="0">
+              <a:buNone/>
+            </a:pPr>
+            <a:r>
+              <a:rPr lang="en-US" sz="1600" b="1" dirty="0">
+                <a:solidFill>
+                  <a:srgbClr val="16252C"/>
+                </a:solidFill>
+                <a:latin typeface="Georgia" pitchFamily="34" charset="0"/>
+                <a:ea typeface="Georgia" pitchFamily="34" charset="-122"/>
+                <a:cs typeface="Georgia" pitchFamily="34" charset="-120"/>
+              </a:rPr>
+              <a:t>03   Modeling</a:t>
+            </a:r>
+            <a:endParaRPr lang="en-US" sz="1600" dirty="0"/>
+          </a:p>
+        </p:txBody>
+      </p:sp>
+      <p:sp>
+        <p:nvSpPr>
+          <p:cNvPr id="17" name="Text 15"/>
+          <p:cNvSpPr/>
+          <p:nvPr/>
+        </p:nvSpPr>
+        <p:spPr>
+          <a:xfrm>
+            <a:off x="804672" y="3474720"/>
+            <a:ext cx="4937760" cy="621792"/>
+          </a:xfrm>
+          <a:prstGeom prst="rect">
+            <a:avLst/>
+          </a:prstGeom>
+          <a:noFill/>
+          <a:ln/>
+        </p:spPr>
+        <p:txBody>
+          <a:bodyPr wrap="square" lIns="0" tIns="0" rIns="0" bIns="0" rtlCol="0" anchor="t"/>
+          <a:lstStyle/>
+          <a:p>
+            <a:pPr indent="0" marL="0">
+              <a:lnSpc>
+                <a:spcPct val="112000"/>
+              </a:lnSpc>
+              <a:buNone/>
+            </a:pPr>
+            <a:r>
+              <a:rPr lang="en-US" sz="1200" dirty="0">
+                <a:solidFill>
+                  <a:srgbClr val="5F7580"/>
+                </a:solidFill>
+                <a:latin typeface="Calibri" pitchFamily="34" charset="0"/>
+                <a:ea typeface="Calibri" pitchFamily="34" charset="-122"/>
+                <a:cs typeface="Calibri" pitchFamily="34" charset="-120"/>
+              </a:rPr>
+              <a:t>Nested CV protocol and a seventeen-model comparison</a:t>
+            </a:r>
+            <a:endParaRPr lang="en-US" sz="1200" dirty="0"/>
+          </a:p>
+        </p:txBody>
+      </p:sp>
+      <p:sp>
+        <p:nvSpPr>
+          <p:cNvPr id="18" name="Shape 16"/>
+          <p:cNvSpPr/>
+          <p:nvPr/>
+        </p:nvSpPr>
+        <p:spPr>
+          <a:xfrm>
+            <a:off x="6263640" y="2944368"/>
+            <a:ext cx="5394960" cy="1280160"/>
+          </a:xfrm>
+          <a:prstGeom prst="rect">
+            <a:avLst/>
+          </a:prstGeom>
+          <a:solidFill>
+            <a:srgbClr val="FFFFFF"/>
+          </a:solidFill>
+          <a:ln/>
+          <a:effectLst>
+            <a:outerShdw sx="100000" sy="100000" kx="0" ky="0" algn="bl" rotWithShape="0" blurRad="101600" dist="25400" dir="8100000">
+              <a:srgbClr val="000000">
+                <a:alpha val="10000"/>
+              </a:srgbClr>
+            </a:outerShdw>
+          </a:effectLst>
+        </p:spPr>
+      </p:sp>
+      <p:sp>
+        <p:nvSpPr>
+          <p:cNvPr id="19" name="Shape 17"/>
+          <p:cNvSpPr/>
+          <p:nvPr/>
+        </p:nvSpPr>
+        <p:spPr>
+          <a:xfrm>
+            <a:off x="6263640" y="2944368"/>
+            <a:ext cx="68580" cy="1280160"/>
+          </a:xfrm>
+          <a:prstGeom prst="rect">
+            <a:avLst/>
+          </a:prstGeom>
+          <a:solidFill>
+            <a:srgbClr val="8FB996"/>
+          </a:solidFill>
+          <a:ln/>
+        </p:spPr>
+      </p:sp>
+      <p:sp>
+        <p:nvSpPr>
+          <p:cNvPr id="20" name="Text 18"/>
+          <p:cNvSpPr/>
+          <p:nvPr/>
+        </p:nvSpPr>
+        <p:spPr>
+          <a:xfrm>
+            <a:off x="6519672" y="3090672"/>
+            <a:ext cx="4937760" cy="329184"/>
+          </a:xfrm>
+          <a:prstGeom prst="rect">
+            <a:avLst/>
+          </a:prstGeom>
+          <a:noFill/>
+          <a:ln/>
+        </p:spPr>
+        <p:txBody>
+          <a:bodyPr wrap="square" lIns="0" tIns="0" rIns="0" bIns="0" rtlCol="0" anchor="t"/>
+          <a:lstStyle/>
+          <a:p>
+            <a:pPr indent="0" marL="0">
+              <a:buNone/>
+            </a:pPr>
+            <a:r>
+              <a:rPr lang="en-US" sz="1600" b="1" dirty="0">
+                <a:solidFill>
+                  <a:srgbClr val="16252C"/>
+                </a:solidFill>
+                <a:latin typeface="Georgia" pitchFamily="34" charset="0"/>
+                <a:ea typeface="Georgia" pitchFamily="34" charset="-122"/>
+                <a:cs typeface="Georgia" pitchFamily="34" charset="-120"/>
+              </a:rPr>
+              <a:t>04   Validity</a:t>
+            </a:r>
+            <a:endParaRPr lang="en-US" sz="1600" dirty="0"/>
+          </a:p>
+        </p:txBody>
+      </p:sp>
+      <p:sp>
+        <p:nvSpPr>
+          <p:cNvPr id="21" name="Text 19"/>
+          <p:cNvSpPr/>
+          <p:nvPr/>
+        </p:nvSpPr>
+        <p:spPr>
+          <a:xfrm>
+            <a:off x="6519672" y="3474720"/>
+            <a:ext cx="4937760" cy="621792"/>
+          </a:xfrm>
+          <a:prstGeom prst="rect">
+            <a:avLst/>
+          </a:prstGeom>
+          <a:noFill/>
+          <a:ln/>
+        </p:spPr>
+        <p:txBody>
+          <a:bodyPr wrap="square" lIns="0" tIns="0" rIns="0" bIns="0" rtlCol="0" anchor="t"/>
+          <a:lstStyle/>
+          <a:p>
+            <a:pPr indent="0" marL="0">
+              <a:lnSpc>
+                <a:spcPct val="112000"/>
+              </a:lnSpc>
+              <a:buNone/>
+            </a:pPr>
+            <a:r>
+              <a:rPr lang="en-US" sz="1200" dirty="0">
+                <a:solidFill>
+                  <a:srgbClr val="5F7580"/>
+                </a:solidFill>
+                <a:latin typeface="Calibri" pitchFamily="34" charset="0"/>
+                <a:ea typeface="Calibri" pitchFamily="34" charset="-122"/>
+                <a:cs typeface="Calibri" pitchFamily="34" charset="-120"/>
+              </a:rPr>
+              <a:t>Permutation testing, confounders, stratification, and a deconfounded subset</a:t>
+            </a:r>
+            <a:endParaRPr lang="en-US" sz="1200" dirty="0"/>
+          </a:p>
+        </p:txBody>
+      </p:sp>
+      <p:sp>
+        <p:nvSpPr>
+          <p:cNvPr id="22" name="Shape 20"/>
+          <p:cNvSpPr/>
+          <p:nvPr/>
+        </p:nvSpPr>
+        <p:spPr>
+          <a:xfrm>
+            <a:off x="548640" y="4425696"/>
+            <a:ext cx="5394960" cy="1280160"/>
+          </a:xfrm>
+          <a:prstGeom prst="rect">
+            <a:avLst/>
+          </a:prstGeom>
+          <a:solidFill>
+            <a:srgbClr val="FFFFFF"/>
+          </a:solidFill>
+          <a:ln/>
+          <a:effectLst>
+            <a:outerShdw sx="100000" sy="100000" kx="0" ky="0" algn="bl" rotWithShape="0" blurRad="101600" dist="25400" dir="8100000">
+              <a:srgbClr val="000000">
+                <a:alpha val="10000"/>
+              </a:srgbClr>
+            </a:outerShdw>
+          </a:effectLst>
+        </p:spPr>
+      </p:sp>
+      <p:sp>
+        <p:nvSpPr>
+          <p:cNvPr id="23" name="Shape 21"/>
+          <p:cNvSpPr/>
+          <p:nvPr/>
+        </p:nvSpPr>
+        <p:spPr>
+          <a:xfrm>
+            <a:off x="548640" y="4425696"/>
+            <a:ext cx="68580" cy="1280160"/>
+          </a:xfrm>
+          <a:prstGeom prst="rect">
+            <a:avLst/>
+          </a:prstGeom>
+          <a:solidFill>
+            <a:srgbClr val="18707F"/>
+          </a:solidFill>
+          <a:ln/>
+        </p:spPr>
+      </p:sp>
+      <p:sp>
+        <p:nvSpPr>
+          <p:cNvPr id="24" name="Text 22"/>
+          <p:cNvSpPr/>
+          <p:nvPr/>
+        </p:nvSpPr>
+        <p:spPr>
+          <a:xfrm>
+            <a:off x="804672" y="4572000"/>
+            <a:ext cx="4937760" cy="329184"/>
+          </a:xfrm>
+          <a:prstGeom prst="rect">
+            <a:avLst/>
+          </a:prstGeom>
+          <a:noFill/>
+          <a:ln/>
+        </p:spPr>
+        <p:txBody>
+          <a:bodyPr wrap="square" lIns="0" tIns="0" rIns="0" bIns="0" rtlCol="0" anchor="t"/>
+          <a:lstStyle/>
+          <a:p>
+            <a:pPr indent="0" marL="0">
+              <a:buNone/>
+            </a:pPr>
+            <a:r>
+              <a:rPr lang="en-US" sz="1600" b="1" dirty="0">
+                <a:solidFill>
+                  <a:srgbClr val="16252C"/>
+                </a:solidFill>
+                <a:latin typeface="Georgia" pitchFamily="34" charset="0"/>
+                <a:ea typeface="Georgia" pitchFamily="34" charset="-122"/>
+                <a:cs typeface="Georgia" pitchFamily="34" charset="-120"/>
+              </a:rPr>
+              <a:t>05   Findings</a:t>
+            </a:r>
+            <a:endParaRPr lang="en-US" sz="1600" dirty="0"/>
+          </a:p>
+        </p:txBody>
+      </p:sp>
+      <p:sp>
+        <p:nvSpPr>
+          <p:cNvPr id="25" name="Text 23"/>
+          <p:cNvSpPr/>
+          <p:nvPr/>
+        </p:nvSpPr>
+        <p:spPr>
+          <a:xfrm>
+            <a:off x="804672" y="4956048"/>
+            <a:ext cx="4937760" cy="621792"/>
+          </a:xfrm>
+          <a:prstGeom prst="rect">
+            <a:avLst/>
+          </a:prstGeom>
+          <a:noFill/>
+          <a:ln/>
+        </p:spPr>
+        <p:txBody>
+          <a:bodyPr wrap="square" lIns="0" tIns="0" rIns="0" bIns="0" rtlCol="0" anchor="t"/>
+          <a:lstStyle/>
+          <a:p>
+            <a:pPr indent="0" marL="0">
+              <a:lnSpc>
+                <a:spcPct val="112000"/>
+              </a:lnSpc>
+              <a:buNone/>
+            </a:pPr>
+            <a:r>
+              <a:rPr lang="en-US" sz="1200" dirty="0">
+                <a:solidFill>
+                  <a:srgbClr val="5F7580"/>
+                </a:solidFill>
+                <a:latin typeface="Calibri" pitchFamily="34" charset="0"/>
+                <a:ea typeface="Calibri" pitchFamily="34" charset="-122"/>
+                <a:cs typeface="Calibri" pitchFamily="34" charset="-120"/>
+              </a:rPr>
+              <a:t>Biomarkers from three independent methods; evidence of nonlinearity</a:t>
+            </a:r>
+            <a:endParaRPr lang="en-US" sz="1200" dirty="0"/>
+          </a:p>
+        </p:txBody>
+      </p:sp>
+      <p:sp>
+        <p:nvSpPr>
+          <p:cNvPr id="26" name="Shape 24"/>
+          <p:cNvSpPr/>
+          <p:nvPr/>
+        </p:nvSpPr>
+        <p:spPr>
+          <a:xfrm>
+            <a:off x="6263640" y="4425696"/>
+            <a:ext cx="5394960" cy="1280160"/>
+          </a:xfrm>
+          <a:prstGeom prst="rect">
+            <a:avLst/>
+          </a:prstGeom>
+          <a:solidFill>
+            <a:srgbClr val="FFFFFF"/>
+          </a:solidFill>
+          <a:ln/>
+          <a:effectLst>
+            <a:outerShdw sx="100000" sy="100000" kx="0" ky="0" algn="bl" rotWithShape="0" blurRad="101600" dist="25400" dir="8100000">
+              <a:srgbClr val="000000">
+                <a:alpha val="10000"/>
+              </a:srgbClr>
+            </a:outerShdw>
+          </a:effectLst>
+        </p:spPr>
+      </p:sp>
+      <p:sp>
+        <p:nvSpPr>
+          <p:cNvPr id="27" name="Shape 25"/>
+          <p:cNvSpPr/>
+          <p:nvPr/>
+        </p:nvSpPr>
+        <p:spPr>
+          <a:xfrm>
+            <a:off x="6263640" y="4425696"/>
+            <a:ext cx="68580" cy="1280160"/>
+          </a:xfrm>
+          <a:prstGeom prst="rect">
+            <a:avLst/>
+          </a:prstGeom>
+          <a:solidFill>
+            <a:srgbClr val="8FB996"/>
+          </a:solidFill>
+          <a:ln/>
+        </p:spPr>
+      </p:sp>
+      <p:sp>
+        <p:nvSpPr>
+          <p:cNvPr id="28" name="Text 26"/>
+          <p:cNvSpPr/>
+          <p:nvPr/>
+        </p:nvSpPr>
+        <p:spPr>
+          <a:xfrm>
+            <a:off x="6519672" y="4572000"/>
+            <a:ext cx="4937760" cy="329184"/>
+          </a:xfrm>
+          <a:prstGeom prst="rect">
+            <a:avLst/>
+          </a:prstGeom>
+          <a:noFill/>
+          <a:ln/>
+        </p:spPr>
+        <p:txBody>
+          <a:bodyPr wrap="square" lIns="0" tIns="0" rIns="0" bIns="0" rtlCol="0" anchor="t"/>
+          <a:lstStyle/>
+          <a:p>
+            <a:pPr indent="0" marL="0">
+              <a:buNone/>
+            </a:pPr>
+            <a:r>
+              <a:rPr lang="en-US" sz="1600" b="1" dirty="0">
+                <a:solidFill>
+                  <a:srgbClr val="16252C"/>
+                </a:solidFill>
+                <a:latin typeface="Georgia" pitchFamily="34" charset="0"/>
+                <a:ea typeface="Georgia" pitchFamily="34" charset="-122"/>
+                <a:cs typeface="Georgia" pitchFamily="34" charset="-120"/>
+              </a:rPr>
+              <a:t>06   Limits</a:t>
+            </a:r>
+            <a:endParaRPr lang="en-US" sz="1600" dirty="0"/>
+          </a:p>
+        </p:txBody>
+      </p:sp>
+      <p:sp>
+        <p:nvSpPr>
+          <p:cNvPr id="29" name="Text 27"/>
+          <p:cNvSpPr/>
+          <p:nvPr/>
+        </p:nvSpPr>
+        <p:spPr>
+          <a:xfrm>
+            <a:off x="6519672" y="4956048"/>
+            <a:ext cx="4937760" cy="621792"/>
+          </a:xfrm>
+          <a:prstGeom prst="rect">
+            <a:avLst/>
+          </a:prstGeom>
+          <a:noFill/>
+          <a:ln/>
+        </p:spPr>
+        <p:txBody>
+          <a:bodyPr wrap="square" lIns="0" tIns="0" rIns="0" bIns="0" rtlCol="0" anchor="t"/>
+          <a:lstStyle/>
+          <a:p>
+            <a:pPr indent="0" marL="0">
+              <a:lnSpc>
+                <a:spcPct val="112000"/>
+              </a:lnSpc>
+              <a:buNone/>
+            </a:pPr>
+            <a:r>
+              <a:rPr lang="en-US" sz="1200" dirty="0">
+                <a:solidFill>
+                  <a:srgbClr val="5F7580"/>
+                </a:solidFill>
+                <a:latin typeface="Calibri" pitchFamily="34" charset="0"/>
+                <a:ea typeface="Calibri" pitchFamily="34" charset="-122"/>
+                <a:cs typeface="Calibri" pitchFamily="34" charset="-120"/>
+              </a:rPr>
+              <a:t>Seven known limitations, stated plainly</a:t>
+            </a:r>
+            <a:endParaRPr lang="en-US" sz="1200" dirty="0"/>
+          </a:p>
+        </p:txBody>
+      </p:sp>
+    </p:spTree>
+  </p:cSld>
+  <p:clrMapOvr>
+    <a:masterClrMapping/>
+  </p:clrMapOvr>
+</p:sld>
+</file>
+
+<file path=ppt/slides/slide30.xml><?xml version="1.0" encoding="utf-8"?>
+<p:sld xmlns:a="http://schemas.openxmlformats.org/drawingml/2006/main" xmlns:r="http://schemas.openxmlformats.org/officeDocument/2006/relationships" xmlns:p="http://schemas.openxmlformats.org/presentationml/2006/main">
+  <p:cSld name="Slide 30">
+    <p:bg>
+      <p:bgPr>
+        <a:solidFill>
+          <a:srgbClr val="FCFAF6"/>
+        </a:solidFill>
+      </p:bgPr>
+    </p:bg>
+    <p:spTree>
+      <p:nvGrpSpPr>
+        <p:cNvPr id="1" name=""/>
+        <p:cNvGrpSpPr/>
+        <p:nvPr/>
+      </p:nvGrpSpPr>
+      <p:grpSpPr>
+        <a:xfrm>
+          <a:off x="0" y="0"/>
+          <a:ext cx="0" cy="0"/>
+          <a:chOff x="0" y="0"/>
+          <a:chExt cx="0" cy="0"/>
+        </a:xfrm>
+      </p:grpSpPr>
+      <p:sp>
+        <p:nvSpPr>
+          <p:cNvPr id="2" name="Shape 0"/>
+          <p:cNvSpPr/>
+          <p:nvPr/>
+        </p:nvSpPr>
+        <p:spPr>
+          <a:xfrm>
+            <a:off x="0" y="0"/>
+            <a:ext cx="12191695" cy="54864"/>
+          </a:xfrm>
+          <a:prstGeom prst="rect">
+            <a:avLst/>
+          </a:prstGeom>
+          <a:solidFill>
+            <a:srgbClr val="18707F"/>
+          </a:solidFill>
+          <a:ln/>
+        </p:spPr>
+      </p:sp>
+      <p:sp>
+        <p:nvSpPr>
+          <p:cNvPr id="3" name="Text 1"/>
+          <p:cNvSpPr/>
+          <p:nvPr/>
+        </p:nvSpPr>
+        <p:spPr>
+          <a:xfrm>
+            <a:off x="548640" y="310896"/>
+            <a:ext cx="7315200" cy="256032"/>
+          </a:xfrm>
+          <a:prstGeom prst="rect">
+            <a:avLst/>
+          </a:prstGeom>
+          <a:noFill/>
+          <a:ln/>
+        </p:spPr>
+        <p:txBody>
+          <a:bodyPr wrap="square" lIns="0" tIns="0" rIns="0" bIns="0" rtlCol="0" anchor="ctr"/>
+          <a:lstStyle/>
+          <a:p>
+            <a:pPr indent="0" marL="0">
+              <a:buNone/>
+            </a:pPr>
+            <a:r>
+              <a:rPr lang="en-US" sz="1100" b="1" spc="200" kern="0" dirty="0">
+                <a:solidFill>
+                  <a:srgbClr val="18707F"/>
+                </a:solidFill>
+                <a:latin typeface="Calibri" pitchFamily="34" charset="0"/>
+                <a:ea typeface="Calibri" pitchFamily="34" charset="-122"/>
+                <a:cs typeface="Calibri" pitchFamily="34" charset="-120"/>
+              </a:rPr>
               <a:t>REPRODUCIBILITY</a:t>
             </a:r>
             <a:endParaRPr lang="en-US" sz="1100" dirty="0"/>
@@ -37276,7 +41299,7 @@
                 <a:ea typeface="Calibri" pitchFamily="34" charset="-122"/>
                 <a:cs typeface="Calibri" pitchFamily="34" charset="-120"/>
               </a:rPr>
-              <a:t>29</a:t>
+              <a:t>30</a:t>
             </a:r>
             <a:endParaRPr lang="en-US" sz="1000" dirty="0"/>
           </a:p>
@@ -37284,7 +41307,7 @@
       </p:sp>
       <p:graphicFrame>
         <p:nvGraphicFramePr>
-          <p:cNvPr id="30" name="Table 0"/>
+          <p:cNvPr id="31" name="Table 0"/>
           <p:cNvGraphicFramePr>
             <a:graphicFrameLocks noGrp="1"/>
           </p:cNvGraphicFramePr>
@@ -38305,946 +42328,9 @@
 </p:sld>
 </file>
 
-<file path=ppt/slides/slide3.xml><?xml version="1.0" encoding="utf-8"?>
+<file path=ppt/slides/slide31.xml><?xml version="1.0" encoding="utf-8"?>
 <p:sld xmlns:a="http://schemas.openxmlformats.org/drawingml/2006/main" xmlns:r="http://schemas.openxmlformats.org/officeDocument/2006/relationships" xmlns:p="http://schemas.openxmlformats.org/presentationml/2006/main">
-  <p:cSld name="Slide 3">
-    <p:bg>
-      <p:bgPr>
-        <a:solidFill>
-          <a:srgbClr val="FCFAF6"/>
-        </a:solidFill>
-      </p:bgPr>
-    </p:bg>
-    <p:spTree>
-      <p:nvGrpSpPr>
-        <p:cNvPr id="1" name=""/>
-        <p:cNvGrpSpPr/>
-        <p:nvPr/>
-      </p:nvGrpSpPr>
-      <p:grpSpPr>
-        <a:xfrm>
-          <a:off x="0" y="0"/>
-          <a:ext cx="0" cy="0"/>
-          <a:chOff x="0" y="0"/>
-          <a:chExt cx="0" cy="0"/>
-        </a:xfrm>
-      </p:grpSpPr>
-      <p:sp>
-        <p:nvSpPr>
-          <p:cNvPr id="2" name="Shape 0"/>
-          <p:cNvSpPr/>
-          <p:nvPr/>
-        </p:nvSpPr>
-        <p:spPr>
-          <a:xfrm>
-            <a:off x="0" y="0"/>
-            <a:ext cx="12191695" cy="54864"/>
-          </a:xfrm>
-          <a:prstGeom prst="rect">
-            <a:avLst/>
-          </a:prstGeom>
-          <a:solidFill>
-            <a:srgbClr val="18707F"/>
-          </a:solidFill>
-          <a:ln/>
-        </p:spPr>
-      </p:sp>
-      <p:sp>
-        <p:nvSpPr>
-          <p:cNvPr id="3" name="Text 1"/>
-          <p:cNvSpPr/>
-          <p:nvPr/>
-        </p:nvSpPr>
-        <p:spPr>
-          <a:xfrm>
-            <a:off x="548640" y="310896"/>
-            <a:ext cx="7315200" cy="256032"/>
-          </a:xfrm>
-          <a:prstGeom prst="rect">
-            <a:avLst/>
-          </a:prstGeom>
-          <a:noFill/>
-          <a:ln/>
-        </p:spPr>
-        <p:txBody>
-          <a:bodyPr wrap="square" lIns="0" tIns="0" rIns="0" bIns="0" rtlCol="0" anchor="ctr"/>
-          <a:lstStyle/>
-          <a:p>
-            <a:pPr indent="0" marL="0">
-              <a:buNone/>
-            </a:pPr>
-            <a:r>
-              <a:rPr lang="en-US" sz="1100" b="1" spc="200" kern="0" dirty="0">
-                <a:solidFill>
-                  <a:srgbClr val="18707F"/>
-                </a:solidFill>
-                <a:latin typeface="Calibri" pitchFamily="34" charset="0"/>
-                <a:ea typeface="Calibri" pitchFamily="34" charset="-122"/>
-                <a:cs typeface="Calibri" pitchFamily="34" charset="-120"/>
-              </a:rPr>
-              <a:t>ROADMAP</a:t>
-            </a:r>
-            <a:endParaRPr lang="en-US" sz="1100" dirty="0"/>
-          </a:p>
-        </p:txBody>
-      </p:sp>
-      <p:sp>
-        <p:nvSpPr>
-          <p:cNvPr id="4" name="Text 2"/>
-          <p:cNvSpPr/>
-          <p:nvPr/>
-        </p:nvSpPr>
-        <p:spPr>
-          <a:xfrm>
-            <a:off x="548640" y="566928"/>
-            <a:ext cx="11064240" cy="685800"/>
-          </a:xfrm>
-          <a:prstGeom prst="rect">
-            <a:avLst/>
-          </a:prstGeom>
-          <a:noFill/>
-          <a:ln/>
-        </p:spPr>
-        <p:txBody>
-          <a:bodyPr wrap="square" lIns="0" tIns="0" rIns="0" bIns="0" rtlCol="0" anchor="ctr"/>
-          <a:lstStyle/>
-          <a:p>
-            <a:pPr indent="0" marL="0">
-              <a:buNone/>
-            </a:pPr>
-            <a:r>
-              <a:rPr lang="en-US" sz="3000" b="1" dirty="0">
-                <a:solidFill>
-                  <a:srgbClr val="16252C"/>
-                </a:solidFill>
-                <a:latin typeface="Georgia" pitchFamily="34" charset="0"/>
-                <a:ea typeface="Georgia" pitchFamily="34" charset="-122"/>
-                <a:cs typeface="Georgia" pitchFamily="34" charset="-120"/>
-              </a:rPr>
-              <a:t>What This Deck Covers</a:t>
-            </a:r>
-            <a:endParaRPr lang="en-US" sz="3000" dirty="0"/>
-          </a:p>
-        </p:txBody>
-      </p:sp>
-      <p:sp>
-        <p:nvSpPr>
-          <p:cNvPr id="5" name="Text 3"/>
-          <p:cNvSpPr/>
-          <p:nvPr/>
-        </p:nvSpPr>
-        <p:spPr>
-          <a:xfrm>
-            <a:off x="11430000" y="6355080"/>
-            <a:ext cx="411480" cy="274320"/>
-          </a:xfrm>
-          <a:prstGeom prst="rect">
-            <a:avLst/>
-          </a:prstGeom>
-          <a:noFill/>
-          <a:ln/>
-        </p:spPr>
-        <p:txBody>
-          <a:bodyPr wrap="square" lIns="0" tIns="0" rIns="0" bIns="0" rtlCol="0" anchor="ctr"/>
-          <a:lstStyle/>
-          <a:p>
-            <a:pPr algn="r" indent="0" marL="0">
-              <a:buNone/>
-            </a:pPr>
-            <a:r>
-              <a:rPr lang="en-US" sz="1000" dirty="0">
-                <a:solidFill>
-                  <a:srgbClr val="5F7580"/>
-                </a:solidFill>
-                <a:latin typeface="Calibri" pitchFamily="34" charset="0"/>
-                <a:ea typeface="Calibri" pitchFamily="34" charset="-122"/>
-                <a:cs typeface="Calibri" pitchFamily="34" charset="-120"/>
-              </a:rPr>
-              <a:t>3</a:t>
-            </a:r>
-            <a:endParaRPr lang="en-US" sz="1000" dirty="0"/>
-          </a:p>
-        </p:txBody>
-      </p:sp>
-      <p:sp>
-        <p:nvSpPr>
-          <p:cNvPr id="6" name="Shape 4"/>
-          <p:cNvSpPr/>
-          <p:nvPr/>
-        </p:nvSpPr>
-        <p:spPr>
-          <a:xfrm>
-            <a:off x="548640" y="1463040"/>
-            <a:ext cx="5394960" cy="1280160"/>
-          </a:xfrm>
-          <a:prstGeom prst="rect">
-            <a:avLst/>
-          </a:prstGeom>
-          <a:solidFill>
-            <a:srgbClr val="FFFFFF"/>
-          </a:solidFill>
-          <a:ln/>
-          <a:effectLst>
-            <a:outerShdw sx="100000" sy="100000" kx="0" ky="0" algn="bl" rotWithShape="0" blurRad="101600" dist="25400" dir="8100000">
-              <a:srgbClr val="000000">
-                <a:alpha val="10000"/>
-              </a:srgbClr>
-            </a:outerShdw>
-          </a:effectLst>
-        </p:spPr>
-      </p:sp>
-      <p:sp>
-        <p:nvSpPr>
-          <p:cNvPr id="7" name="Shape 5"/>
-          <p:cNvSpPr/>
-          <p:nvPr/>
-        </p:nvSpPr>
-        <p:spPr>
-          <a:xfrm>
-            <a:off x="548640" y="1463040"/>
-            <a:ext cx="68580" cy="1280160"/>
-          </a:xfrm>
-          <a:prstGeom prst="rect">
-            <a:avLst/>
-          </a:prstGeom>
-          <a:solidFill>
-            <a:srgbClr val="18707F"/>
-          </a:solidFill>
-          <a:ln/>
-        </p:spPr>
-      </p:sp>
-      <p:sp>
-        <p:nvSpPr>
-          <p:cNvPr id="8" name="Text 6"/>
-          <p:cNvSpPr/>
-          <p:nvPr/>
-        </p:nvSpPr>
-        <p:spPr>
-          <a:xfrm>
-            <a:off x="804672" y="1609344"/>
-            <a:ext cx="4937760" cy="329184"/>
-          </a:xfrm>
-          <a:prstGeom prst="rect">
-            <a:avLst/>
-          </a:prstGeom>
-          <a:noFill/>
-          <a:ln/>
-        </p:spPr>
-        <p:txBody>
-          <a:bodyPr wrap="square" lIns="0" tIns="0" rIns="0" bIns="0" rtlCol="0" anchor="t"/>
-          <a:lstStyle/>
-          <a:p>
-            <a:pPr indent="0" marL="0">
-              <a:buNone/>
-            </a:pPr>
-            <a:r>
-              <a:rPr lang="en-US" sz="1600" b="1" dirty="0">
-                <a:solidFill>
-                  <a:srgbClr val="16252C"/>
-                </a:solidFill>
-                <a:latin typeface="Georgia" pitchFamily="34" charset="0"/>
-                <a:ea typeface="Georgia" pitchFamily="34" charset="-122"/>
-                <a:cs typeface="Georgia" pitchFamily="34" charset="-120"/>
-              </a:rPr>
-              <a:t>01   Data</a:t>
-            </a:r>
-            <a:endParaRPr lang="en-US" sz="1600" dirty="0"/>
-          </a:p>
-        </p:txBody>
-      </p:sp>
-      <p:sp>
-        <p:nvSpPr>
-          <p:cNvPr id="9" name="Text 7"/>
-          <p:cNvSpPr/>
-          <p:nvPr/>
-        </p:nvSpPr>
-        <p:spPr>
-          <a:xfrm>
-            <a:off x="804672" y="1993392"/>
-            <a:ext cx="4937760" cy="621792"/>
-          </a:xfrm>
-          <a:prstGeom prst="rect">
-            <a:avLst/>
-          </a:prstGeom>
-          <a:noFill/>
-          <a:ln/>
-        </p:spPr>
-        <p:txBody>
-          <a:bodyPr wrap="square" lIns="0" tIns="0" rIns="0" bIns="0" rtlCol="0" anchor="t"/>
-          <a:lstStyle/>
-          <a:p>
-            <a:pPr indent="0" marL="0">
-              <a:lnSpc>
-                <a:spcPct val="112000"/>
-              </a:lnSpc>
-              <a:buNone/>
-            </a:pPr>
-            <a:r>
-              <a:rPr lang="en-US" sz="1200" dirty="0">
-                <a:solidFill>
-                  <a:srgbClr val="5F7580"/>
-                </a:solidFill>
-                <a:latin typeface="Calibri" pitchFamily="34" charset="0"/>
-                <a:ea typeface="Calibri" pitchFamily="34" charset="-122"/>
-                <a:cs typeface="Calibri" pitchFamily="34" charset="-120"/>
-              </a:rPr>
-              <a:t>Three input files, four studies, and why we model only one of them</a:t>
-            </a:r>
-            <a:endParaRPr lang="en-US" sz="1200" dirty="0"/>
-          </a:p>
-        </p:txBody>
-      </p:sp>
-      <p:sp>
-        <p:nvSpPr>
-          <p:cNvPr id="10" name="Shape 8"/>
-          <p:cNvSpPr/>
-          <p:nvPr/>
-        </p:nvSpPr>
-        <p:spPr>
-          <a:xfrm>
-            <a:off x="6263640" y="1463040"/>
-            <a:ext cx="5394960" cy="1280160"/>
-          </a:xfrm>
-          <a:prstGeom prst="rect">
-            <a:avLst/>
-          </a:prstGeom>
-          <a:solidFill>
-            <a:srgbClr val="FFFFFF"/>
-          </a:solidFill>
-          <a:ln/>
-          <a:effectLst>
-            <a:outerShdw sx="100000" sy="100000" kx="0" ky="0" algn="bl" rotWithShape="0" blurRad="101600" dist="25400" dir="8100000">
-              <a:srgbClr val="000000">
-                <a:alpha val="10000"/>
-              </a:srgbClr>
-            </a:outerShdw>
-          </a:effectLst>
-        </p:spPr>
-      </p:sp>
-      <p:sp>
-        <p:nvSpPr>
-          <p:cNvPr id="11" name="Shape 9"/>
-          <p:cNvSpPr/>
-          <p:nvPr/>
-        </p:nvSpPr>
-        <p:spPr>
-          <a:xfrm>
-            <a:off x="6263640" y="1463040"/>
-            <a:ext cx="68580" cy="1280160"/>
-          </a:xfrm>
-          <a:prstGeom prst="rect">
-            <a:avLst/>
-          </a:prstGeom>
-          <a:solidFill>
-            <a:srgbClr val="8FB996"/>
-          </a:solidFill>
-          <a:ln/>
-        </p:spPr>
-      </p:sp>
-      <p:sp>
-        <p:nvSpPr>
-          <p:cNvPr id="12" name="Text 10"/>
-          <p:cNvSpPr/>
-          <p:nvPr/>
-        </p:nvSpPr>
-        <p:spPr>
-          <a:xfrm>
-            <a:off x="6519672" y="1609344"/>
-            <a:ext cx="4937760" cy="329184"/>
-          </a:xfrm>
-          <a:prstGeom prst="rect">
-            <a:avLst/>
-          </a:prstGeom>
-          <a:noFill/>
-          <a:ln/>
-        </p:spPr>
-        <p:txBody>
-          <a:bodyPr wrap="square" lIns="0" tIns="0" rIns="0" bIns="0" rtlCol="0" anchor="t"/>
-          <a:lstStyle/>
-          <a:p>
-            <a:pPr indent="0" marL="0">
-              <a:buNone/>
-            </a:pPr>
-            <a:r>
-              <a:rPr lang="en-US" sz="1600" b="1" dirty="0">
-                <a:solidFill>
-                  <a:srgbClr val="16252C"/>
-                </a:solidFill>
-                <a:latin typeface="Georgia" pitchFamily="34" charset="0"/>
-                <a:ea typeface="Georgia" pitchFamily="34" charset="-122"/>
-                <a:cs typeface="Georgia" pitchFamily="34" charset="-120"/>
-              </a:rPr>
-              <a:t>02   Processing</a:t>
-            </a:r>
-            <a:endParaRPr lang="en-US" sz="1600" dirty="0"/>
-          </a:p>
-        </p:txBody>
-      </p:sp>
-      <p:sp>
-        <p:nvSpPr>
-          <p:cNvPr id="13" name="Text 11"/>
-          <p:cNvSpPr/>
-          <p:nvPr/>
-        </p:nvSpPr>
-        <p:spPr>
-          <a:xfrm>
-            <a:off x="6519672" y="1993392"/>
-            <a:ext cx="4937760" cy="621792"/>
-          </a:xfrm>
-          <a:prstGeom prst="rect">
-            <a:avLst/>
-          </a:prstGeom>
-          <a:noFill/>
-          <a:ln/>
-        </p:spPr>
-        <p:txBody>
-          <a:bodyPr wrap="square" lIns="0" tIns="0" rIns="0" bIns="0" rtlCol="0" anchor="t"/>
-          <a:lstStyle/>
-          <a:p>
-            <a:pPr indent="0" marL="0">
-              <a:lnSpc>
-                <a:spcPct val="112000"/>
-              </a:lnSpc>
-              <a:buNone/>
-            </a:pPr>
-            <a:r>
-              <a:rPr lang="en-US" sz="1200" dirty="0">
-                <a:solidFill>
-                  <a:srgbClr val="5F7580"/>
-                </a:solidFill>
-                <a:latin typeface="Calibri" pitchFamily="34" charset="0"/>
-                <a:ea typeface="Calibri" pitchFamily="34" charset="-122"/>
-                <a:cs typeface="Calibri" pitchFamily="34" charset="-120"/>
-              </a:rPr>
-              <a:t>Label leakage, compositional transformation, and leak-free pipelines</a:t>
-            </a:r>
-            <a:endParaRPr lang="en-US" sz="1200" dirty="0"/>
-          </a:p>
-        </p:txBody>
-      </p:sp>
-      <p:sp>
-        <p:nvSpPr>
-          <p:cNvPr id="14" name="Shape 12"/>
-          <p:cNvSpPr/>
-          <p:nvPr/>
-        </p:nvSpPr>
-        <p:spPr>
-          <a:xfrm>
-            <a:off x="548640" y="2944368"/>
-            <a:ext cx="5394960" cy="1280160"/>
-          </a:xfrm>
-          <a:prstGeom prst="rect">
-            <a:avLst/>
-          </a:prstGeom>
-          <a:solidFill>
-            <a:srgbClr val="FFFFFF"/>
-          </a:solidFill>
-          <a:ln/>
-          <a:effectLst>
-            <a:outerShdw sx="100000" sy="100000" kx="0" ky="0" algn="bl" rotWithShape="0" blurRad="101600" dist="25400" dir="8100000">
-              <a:srgbClr val="000000">
-                <a:alpha val="10000"/>
-              </a:srgbClr>
-            </a:outerShdw>
-          </a:effectLst>
-        </p:spPr>
-      </p:sp>
-      <p:sp>
-        <p:nvSpPr>
-          <p:cNvPr id="15" name="Shape 13"/>
-          <p:cNvSpPr/>
-          <p:nvPr/>
-        </p:nvSpPr>
-        <p:spPr>
-          <a:xfrm>
-            <a:off x="548640" y="2944368"/>
-            <a:ext cx="68580" cy="1280160"/>
-          </a:xfrm>
-          <a:prstGeom prst="rect">
-            <a:avLst/>
-          </a:prstGeom>
-          <a:solidFill>
-            <a:srgbClr val="18707F"/>
-          </a:solidFill>
-          <a:ln/>
-        </p:spPr>
-      </p:sp>
-      <p:sp>
-        <p:nvSpPr>
-          <p:cNvPr id="16" name="Text 14"/>
-          <p:cNvSpPr/>
-          <p:nvPr/>
-        </p:nvSpPr>
-        <p:spPr>
-          <a:xfrm>
-            <a:off x="804672" y="3090672"/>
-            <a:ext cx="4937760" cy="329184"/>
-          </a:xfrm>
-          <a:prstGeom prst="rect">
-            <a:avLst/>
-          </a:prstGeom>
-          <a:noFill/>
-          <a:ln/>
-        </p:spPr>
-        <p:txBody>
-          <a:bodyPr wrap="square" lIns="0" tIns="0" rIns="0" bIns="0" rtlCol="0" anchor="t"/>
-          <a:lstStyle/>
-          <a:p>
-            <a:pPr indent="0" marL="0">
-              <a:buNone/>
-            </a:pPr>
-            <a:r>
-              <a:rPr lang="en-US" sz="1600" b="1" dirty="0">
-                <a:solidFill>
-                  <a:srgbClr val="16252C"/>
-                </a:solidFill>
-                <a:latin typeface="Georgia" pitchFamily="34" charset="0"/>
-                <a:ea typeface="Georgia" pitchFamily="34" charset="-122"/>
-                <a:cs typeface="Georgia" pitchFamily="34" charset="-120"/>
-              </a:rPr>
-              <a:t>03   Modeling</a:t>
-            </a:r>
-            <a:endParaRPr lang="en-US" sz="1600" dirty="0"/>
-          </a:p>
-        </p:txBody>
-      </p:sp>
-      <p:sp>
-        <p:nvSpPr>
-          <p:cNvPr id="17" name="Text 15"/>
-          <p:cNvSpPr/>
-          <p:nvPr/>
-        </p:nvSpPr>
-        <p:spPr>
-          <a:xfrm>
-            <a:off x="804672" y="3474720"/>
-            <a:ext cx="4937760" cy="621792"/>
-          </a:xfrm>
-          <a:prstGeom prst="rect">
-            <a:avLst/>
-          </a:prstGeom>
-          <a:noFill/>
-          <a:ln/>
-        </p:spPr>
-        <p:txBody>
-          <a:bodyPr wrap="square" lIns="0" tIns="0" rIns="0" bIns="0" rtlCol="0" anchor="t"/>
-          <a:lstStyle/>
-          <a:p>
-            <a:pPr indent="0" marL="0">
-              <a:lnSpc>
-                <a:spcPct val="112000"/>
-              </a:lnSpc>
-              <a:buNone/>
-            </a:pPr>
-            <a:r>
-              <a:rPr lang="en-US" sz="1200" dirty="0">
-                <a:solidFill>
-                  <a:srgbClr val="5F7580"/>
-                </a:solidFill>
-                <a:latin typeface="Calibri" pitchFamily="34" charset="0"/>
-                <a:ea typeface="Calibri" pitchFamily="34" charset="-122"/>
-                <a:cs typeface="Calibri" pitchFamily="34" charset="-120"/>
-              </a:rPr>
-              <a:t>Nested CV protocol and a seventeen-model comparison</a:t>
-            </a:r>
-            <a:endParaRPr lang="en-US" sz="1200" dirty="0"/>
-          </a:p>
-        </p:txBody>
-      </p:sp>
-      <p:sp>
-        <p:nvSpPr>
-          <p:cNvPr id="18" name="Shape 16"/>
-          <p:cNvSpPr/>
-          <p:nvPr/>
-        </p:nvSpPr>
-        <p:spPr>
-          <a:xfrm>
-            <a:off x="6263640" y="2944368"/>
-            <a:ext cx="5394960" cy="1280160"/>
-          </a:xfrm>
-          <a:prstGeom prst="rect">
-            <a:avLst/>
-          </a:prstGeom>
-          <a:solidFill>
-            <a:srgbClr val="FFFFFF"/>
-          </a:solidFill>
-          <a:ln/>
-          <a:effectLst>
-            <a:outerShdw sx="100000" sy="100000" kx="0" ky="0" algn="bl" rotWithShape="0" blurRad="101600" dist="25400" dir="8100000">
-              <a:srgbClr val="000000">
-                <a:alpha val="10000"/>
-              </a:srgbClr>
-            </a:outerShdw>
-          </a:effectLst>
-        </p:spPr>
-      </p:sp>
-      <p:sp>
-        <p:nvSpPr>
-          <p:cNvPr id="19" name="Shape 17"/>
-          <p:cNvSpPr/>
-          <p:nvPr/>
-        </p:nvSpPr>
-        <p:spPr>
-          <a:xfrm>
-            <a:off x="6263640" y="2944368"/>
-            <a:ext cx="68580" cy="1280160"/>
-          </a:xfrm>
-          <a:prstGeom prst="rect">
-            <a:avLst/>
-          </a:prstGeom>
-          <a:solidFill>
-            <a:srgbClr val="8FB996"/>
-          </a:solidFill>
-          <a:ln/>
-        </p:spPr>
-      </p:sp>
-      <p:sp>
-        <p:nvSpPr>
-          <p:cNvPr id="20" name="Text 18"/>
-          <p:cNvSpPr/>
-          <p:nvPr/>
-        </p:nvSpPr>
-        <p:spPr>
-          <a:xfrm>
-            <a:off x="6519672" y="3090672"/>
-            <a:ext cx="4937760" cy="329184"/>
-          </a:xfrm>
-          <a:prstGeom prst="rect">
-            <a:avLst/>
-          </a:prstGeom>
-          <a:noFill/>
-          <a:ln/>
-        </p:spPr>
-        <p:txBody>
-          <a:bodyPr wrap="square" lIns="0" tIns="0" rIns="0" bIns="0" rtlCol="0" anchor="t"/>
-          <a:lstStyle/>
-          <a:p>
-            <a:pPr indent="0" marL="0">
-              <a:buNone/>
-            </a:pPr>
-            <a:r>
-              <a:rPr lang="en-US" sz="1600" b="1" dirty="0">
-                <a:solidFill>
-                  <a:srgbClr val="16252C"/>
-                </a:solidFill>
-                <a:latin typeface="Georgia" pitchFamily="34" charset="0"/>
-                <a:ea typeface="Georgia" pitchFamily="34" charset="-122"/>
-                <a:cs typeface="Georgia" pitchFamily="34" charset="-120"/>
-              </a:rPr>
-              <a:t>04   Validity</a:t>
-            </a:r>
-            <a:endParaRPr lang="en-US" sz="1600" dirty="0"/>
-          </a:p>
-        </p:txBody>
-      </p:sp>
-      <p:sp>
-        <p:nvSpPr>
-          <p:cNvPr id="21" name="Text 19"/>
-          <p:cNvSpPr/>
-          <p:nvPr/>
-        </p:nvSpPr>
-        <p:spPr>
-          <a:xfrm>
-            <a:off x="6519672" y="3474720"/>
-            <a:ext cx="4937760" cy="621792"/>
-          </a:xfrm>
-          <a:prstGeom prst="rect">
-            <a:avLst/>
-          </a:prstGeom>
-          <a:noFill/>
-          <a:ln/>
-        </p:spPr>
-        <p:txBody>
-          <a:bodyPr wrap="square" lIns="0" tIns="0" rIns="0" bIns="0" rtlCol="0" anchor="t"/>
-          <a:lstStyle/>
-          <a:p>
-            <a:pPr indent="0" marL="0">
-              <a:lnSpc>
-                <a:spcPct val="112000"/>
-              </a:lnSpc>
-              <a:buNone/>
-            </a:pPr>
-            <a:r>
-              <a:rPr lang="en-US" sz="1200" dirty="0">
-                <a:solidFill>
-                  <a:srgbClr val="5F7580"/>
-                </a:solidFill>
-                <a:latin typeface="Calibri" pitchFamily="34" charset="0"/>
-                <a:ea typeface="Calibri" pitchFamily="34" charset="-122"/>
-                <a:cs typeface="Calibri" pitchFamily="34" charset="-120"/>
-              </a:rPr>
-              <a:t>Permutation testing, confounders, stratification, and a deconfounded subset</a:t>
-            </a:r>
-            <a:endParaRPr lang="en-US" sz="1200" dirty="0"/>
-          </a:p>
-        </p:txBody>
-      </p:sp>
-      <p:sp>
-        <p:nvSpPr>
-          <p:cNvPr id="22" name="Shape 20"/>
-          <p:cNvSpPr/>
-          <p:nvPr/>
-        </p:nvSpPr>
-        <p:spPr>
-          <a:xfrm>
-            <a:off x="548640" y="4425696"/>
-            <a:ext cx="5394960" cy="1280160"/>
-          </a:xfrm>
-          <a:prstGeom prst="rect">
-            <a:avLst/>
-          </a:prstGeom>
-          <a:solidFill>
-            <a:srgbClr val="FFFFFF"/>
-          </a:solidFill>
-          <a:ln/>
-          <a:effectLst>
-            <a:outerShdw sx="100000" sy="100000" kx="0" ky="0" algn="bl" rotWithShape="0" blurRad="101600" dist="25400" dir="8100000">
-              <a:srgbClr val="000000">
-                <a:alpha val="10000"/>
-              </a:srgbClr>
-            </a:outerShdw>
-          </a:effectLst>
-        </p:spPr>
-      </p:sp>
-      <p:sp>
-        <p:nvSpPr>
-          <p:cNvPr id="23" name="Shape 21"/>
-          <p:cNvSpPr/>
-          <p:nvPr/>
-        </p:nvSpPr>
-        <p:spPr>
-          <a:xfrm>
-            <a:off x="548640" y="4425696"/>
-            <a:ext cx="68580" cy="1280160"/>
-          </a:xfrm>
-          <a:prstGeom prst="rect">
-            <a:avLst/>
-          </a:prstGeom>
-          <a:solidFill>
-            <a:srgbClr val="18707F"/>
-          </a:solidFill>
-          <a:ln/>
-        </p:spPr>
-      </p:sp>
-      <p:sp>
-        <p:nvSpPr>
-          <p:cNvPr id="24" name="Text 22"/>
-          <p:cNvSpPr/>
-          <p:nvPr/>
-        </p:nvSpPr>
-        <p:spPr>
-          <a:xfrm>
-            <a:off x="804672" y="4572000"/>
-            <a:ext cx="4937760" cy="329184"/>
-          </a:xfrm>
-          <a:prstGeom prst="rect">
-            <a:avLst/>
-          </a:prstGeom>
-          <a:noFill/>
-          <a:ln/>
-        </p:spPr>
-        <p:txBody>
-          <a:bodyPr wrap="square" lIns="0" tIns="0" rIns="0" bIns="0" rtlCol="0" anchor="t"/>
-          <a:lstStyle/>
-          <a:p>
-            <a:pPr indent="0" marL="0">
-              <a:buNone/>
-            </a:pPr>
-            <a:r>
-              <a:rPr lang="en-US" sz="1600" b="1" dirty="0">
-                <a:solidFill>
-                  <a:srgbClr val="16252C"/>
-                </a:solidFill>
-                <a:latin typeface="Georgia" pitchFamily="34" charset="0"/>
-                <a:ea typeface="Georgia" pitchFamily="34" charset="-122"/>
-                <a:cs typeface="Georgia" pitchFamily="34" charset="-120"/>
-              </a:rPr>
-              <a:t>05   Findings</a:t>
-            </a:r>
-            <a:endParaRPr lang="en-US" sz="1600" dirty="0"/>
-          </a:p>
-        </p:txBody>
-      </p:sp>
-      <p:sp>
-        <p:nvSpPr>
-          <p:cNvPr id="25" name="Text 23"/>
-          <p:cNvSpPr/>
-          <p:nvPr/>
-        </p:nvSpPr>
-        <p:spPr>
-          <a:xfrm>
-            <a:off x="804672" y="4956048"/>
-            <a:ext cx="4937760" cy="621792"/>
-          </a:xfrm>
-          <a:prstGeom prst="rect">
-            <a:avLst/>
-          </a:prstGeom>
-          <a:noFill/>
-          <a:ln/>
-        </p:spPr>
-        <p:txBody>
-          <a:bodyPr wrap="square" lIns="0" tIns="0" rIns="0" bIns="0" rtlCol="0" anchor="t"/>
-          <a:lstStyle/>
-          <a:p>
-            <a:pPr indent="0" marL="0">
-              <a:lnSpc>
-                <a:spcPct val="112000"/>
-              </a:lnSpc>
-              <a:buNone/>
-            </a:pPr>
-            <a:r>
-              <a:rPr lang="en-US" sz="1200" dirty="0">
-                <a:solidFill>
-                  <a:srgbClr val="5F7580"/>
-                </a:solidFill>
-                <a:latin typeface="Calibri" pitchFamily="34" charset="0"/>
-                <a:ea typeface="Calibri" pitchFamily="34" charset="-122"/>
-                <a:cs typeface="Calibri" pitchFamily="34" charset="-120"/>
-              </a:rPr>
-              <a:t>Biomarkers from three independent methods; evidence of nonlinearity</a:t>
-            </a:r>
-            <a:endParaRPr lang="en-US" sz="1200" dirty="0"/>
-          </a:p>
-        </p:txBody>
-      </p:sp>
-      <p:sp>
-        <p:nvSpPr>
-          <p:cNvPr id="26" name="Shape 24"/>
-          <p:cNvSpPr/>
-          <p:nvPr/>
-        </p:nvSpPr>
-        <p:spPr>
-          <a:xfrm>
-            <a:off x="6263640" y="4425696"/>
-            <a:ext cx="5394960" cy="1280160"/>
-          </a:xfrm>
-          <a:prstGeom prst="rect">
-            <a:avLst/>
-          </a:prstGeom>
-          <a:solidFill>
-            <a:srgbClr val="FFFFFF"/>
-          </a:solidFill>
-          <a:ln/>
-          <a:effectLst>
-            <a:outerShdw sx="100000" sy="100000" kx="0" ky="0" algn="bl" rotWithShape="0" blurRad="101600" dist="25400" dir="8100000">
-              <a:srgbClr val="000000">
-                <a:alpha val="10000"/>
-              </a:srgbClr>
-            </a:outerShdw>
-          </a:effectLst>
-        </p:spPr>
-      </p:sp>
-      <p:sp>
-        <p:nvSpPr>
-          <p:cNvPr id="27" name="Shape 25"/>
-          <p:cNvSpPr/>
-          <p:nvPr/>
-        </p:nvSpPr>
-        <p:spPr>
-          <a:xfrm>
-            <a:off x="6263640" y="4425696"/>
-            <a:ext cx="68580" cy="1280160"/>
-          </a:xfrm>
-          <a:prstGeom prst="rect">
-            <a:avLst/>
-          </a:prstGeom>
-          <a:solidFill>
-            <a:srgbClr val="8FB996"/>
-          </a:solidFill>
-          <a:ln/>
-        </p:spPr>
-      </p:sp>
-      <p:sp>
-        <p:nvSpPr>
-          <p:cNvPr id="28" name="Text 26"/>
-          <p:cNvSpPr/>
-          <p:nvPr/>
-        </p:nvSpPr>
-        <p:spPr>
-          <a:xfrm>
-            <a:off x="6519672" y="4572000"/>
-            <a:ext cx="4937760" cy="329184"/>
-          </a:xfrm>
-          <a:prstGeom prst="rect">
-            <a:avLst/>
-          </a:prstGeom>
-          <a:noFill/>
-          <a:ln/>
-        </p:spPr>
-        <p:txBody>
-          <a:bodyPr wrap="square" lIns="0" tIns="0" rIns="0" bIns="0" rtlCol="0" anchor="t"/>
-          <a:lstStyle/>
-          <a:p>
-            <a:pPr indent="0" marL="0">
-              <a:buNone/>
-            </a:pPr>
-            <a:r>
-              <a:rPr lang="en-US" sz="1600" b="1" dirty="0">
-                <a:solidFill>
-                  <a:srgbClr val="16252C"/>
-                </a:solidFill>
-                <a:latin typeface="Georgia" pitchFamily="34" charset="0"/>
-                <a:ea typeface="Georgia" pitchFamily="34" charset="-122"/>
-                <a:cs typeface="Georgia" pitchFamily="34" charset="-120"/>
-              </a:rPr>
-              <a:t>06   Limits</a:t>
-            </a:r>
-            <a:endParaRPr lang="en-US" sz="1600" dirty="0"/>
-          </a:p>
-        </p:txBody>
-      </p:sp>
-      <p:sp>
-        <p:nvSpPr>
-          <p:cNvPr id="29" name="Text 27"/>
-          <p:cNvSpPr/>
-          <p:nvPr/>
-        </p:nvSpPr>
-        <p:spPr>
-          <a:xfrm>
-            <a:off x="6519672" y="4956048"/>
-            <a:ext cx="4937760" cy="621792"/>
-          </a:xfrm>
-          <a:prstGeom prst="rect">
-            <a:avLst/>
-          </a:prstGeom>
-          <a:noFill/>
-          <a:ln/>
-        </p:spPr>
-        <p:txBody>
-          <a:bodyPr wrap="square" lIns="0" tIns="0" rIns="0" bIns="0" rtlCol="0" anchor="t"/>
-          <a:lstStyle/>
-          <a:p>
-            <a:pPr indent="0" marL="0">
-              <a:lnSpc>
-                <a:spcPct val="112000"/>
-              </a:lnSpc>
-              <a:buNone/>
-            </a:pPr>
-            <a:r>
-              <a:rPr lang="en-US" sz="1200" dirty="0">
-                <a:solidFill>
-                  <a:srgbClr val="5F7580"/>
-                </a:solidFill>
-                <a:latin typeface="Calibri" pitchFamily="34" charset="0"/>
-                <a:ea typeface="Calibri" pitchFamily="34" charset="-122"/>
-                <a:cs typeface="Calibri" pitchFamily="34" charset="-120"/>
-              </a:rPr>
-              <a:t>Seven known limitations, stated plainly</a:t>
-            </a:r>
-            <a:endParaRPr lang="en-US" sz="1200" dirty="0"/>
-          </a:p>
-        </p:txBody>
-      </p:sp>
-    </p:spTree>
-  </p:cSld>
-  <p:clrMapOvr>
-    <a:masterClrMapping/>
-  </p:clrMapOvr>
-</p:sld>
-</file>
-
-<file path=ppt/slides/slide30.xml><?xml version="1.0" encoding="utf-8"?>
-<p:sld xmlns:a="http://schemas.openxmlformats.org/drawingml/2006/main" xmlns:r="http://schemas.openxmlformats.org/officeDocument/2006/relationships" xmlns:p="http://schemas.openxmlformats.org/presentationml/2006/main">
-  <p:cSld name="Slide 30">
+  <p:cSld name="Slide 31">
     <p:bg>
       <p:bgPr>
         <a:solidFill>
